--- a/template/Maicao_Template_Visual_v02.pptx
+++ b/template/Maicao_Template_Visual_v02.pptx
@@ -4,6 +4,9 @@
   <p:sldMasterIdLst>
     <p:sldMasterId id="2147483648" r:id="rId1"/>
   </p:sldMasterIdLst>
+  <p:notesMasterIdLst>
+    <p:notesMasterId r:id="rId14"/>
+  </p:notesMasterIdLst>
   <p:sldIdLst>
     <p:sldId id="256" r:id="rId2"/>
     <p:sldId id="257" r:id="rId3"/>
@@ -18,11 +21,8 @@
     <p:sldId id="266" r:id="rId12"/>
     <p:sldId id="267" r:id="rId13"/>
   </p:sldIdLst>
-  <p:notesMasterIdLst>
-    <p:notesMasterId r:id="rId14"/>
-  </p:notesMasterIdLst>
-  <p:sldSz cx="12191695" cy="6858000"/>
-  <p:notesSz cx="6858000" cy="12191695"/>
+  <p:sldSz cx="12192000" cy="6858000"/>
+  <p:notesSz cx="6858000" cy="12192000"/>
   <p:defaultTextStyle>
     <a:lvl1pPr marL="0" algn="l" defTabSz="914400" rtl="0" eaLnBrk="1" latinLnBrk="0" hangingPunct="1">
       <a:defRPr sz="1800" kern="1200">
@@ -115,6 +115,11 @@
       </a:defRPr>
     </a:lvl9pPr>
   </p:defaultTextStyle>
+  <p:extLst>
+    <p:ext uri="{EFAFB233-063F-42B5-8137-9DF3F51BA10A}">
+      <p15:sldGuideLst xmlns:p15="http://schemas.microsoft.com/office/powerpoint/2012/main"/>
+    </p:ext>
+  </p:extLst>
 </p:presentation>
 </file>
 
@@ -140,234 +145,10 @@
           <a:chExt cx="0" cy="0"/>
         </a:xfrm>
       </p:grpSpPr>
-      <p:sp>
-        <p:nvSpPr>
-          <p:cNvPr id="2" name="Header Placeholder 1"/>
-          <p:cNvSpPr>
-            <a:spLocks noGrp="1"/>
-          </p:cNvSpPr>
-          <p:nvPr>
-            <p:ph type="hdr" sz="quarter"/>
-          </p:nvPr>
-        </p:nvSpPr>
-        <p:spPr>
-          <a:xfrm>
-            <a:off x="0" y="0"/>
-            <a:ext cx="2971800" cy="458788"/>
-          </a:xfrm>
-          <a:prstGeom prst="rect">
-            <a:avLst/>
-          </a:prstGeom>
-        </p:spPr>
-        <p:txBody>
-          <a:bodyPr vert="horz" lIns="91440" tIns="45720" rIns="91440" bIns="45720" rtlCol="0"/>
-          <a:lstStyle>
-            <a:lvl1pPr algn="l">
-              <a:defRPr sz="1200"/>
-            </a:lvl1pPr>
-          </a:lstStyle>
-          <a:p>
-            <a:endParaRPr lang="en-US"/>
-          </a:p>
-        </p:txBody>
-      </p:sp>
-      <p:sp>
-        <p:nvSpPr>
-          <p:cNvPr id="3" name="Date Placeholder 2"/>
-          <p:cNvSpPr>
-            <a:spLocks noGrp="1"/>
-          </p:cNvSpPr>
-          <p:nvPr>
-            <p:ph type="dt" idx="1"/>
-          </p:nvPr>
-        </p:nvSpPr>
-        <p:spPr>
-          <a:xfrm>
-            <a:off x="3884613" y="0"/>
-            <a:ext cx="2971800" cy="458788"/>
-          </a:xfrm>
-          <a:prstGeom prst="rect">
-            <a:avLst/>
-          </a:prstGeom>
-        </p:spPr>
-        <p:txBody>
-          <a:bodyPr vert="horz" lIns="91440" tIns="45720" rIns="91440" bIns="45720" rtlCol="0"/>
-          <a:lstStyle>
-            <a:lvl1pPr algn="r">
-              <a:defRPr sz="1200"/>
-            </a:lvl1pPr>
-          </a:lstStyle>
-          <a:p>
-            <a:fld id="{5282F153-3F37-0F45-9E97-73ACFA13230C}" type="datetimeFigureOut">
-              <a:rPr lang="en-US"/>
-              <a:t>7/23/19</a:t>
-            </a:fld>
-            <a:endParaRPr lang="en-US"/>
-          </a:p>
-        </p:txBody>
-      </p:sp>
-      <p:sp>
-        <p:nvSpPr>
-          <p:cNvPr id="4" name="Slide Image Placeholder 3"/>
-          <p:cNvSpPr>
-            <a:spLocks noGrp="1" noRot="1" noChangeAspect="1"/>
-          </p:cNvSpPr>
-          <p:nvPr>
-            <p:ph type="sldImg" idx="2"/>
-          </p:nvPr>
-        </p:nvSpPr>
-        <p:spPr>
-          <a:xfrm>
-            <a:off x="685800" y="1143000"/>
-            <a:ext cx="5486400" cy="3086100"/>
-          </a:xfrm>
-          <a:prstGeom prst="rect">
-            <a:avLst/>
-          </a:prstGeom>
-          <a:noFill/>
-          <a:ln w="12700">
-            <a:solidFill>
-              <a:prstClr val="black"/>
-            </a:solidFill>
-          </a:ln>
-        </p:spPr>
-        <p:txBody>
-          <a:bodyPr vert="horz" lIns="91440" tIns="45720" rIns="91440" bIns="45720" rtlCol="0" anchor="ctr"/>
-          <a:lstStyle/>
-          <a:p>
-            <a:endParaRPr lang="en-US"/>
-          </a:p>
-        </p:txBody>
-      </p:sp>
-      <p:sp>
-        <p:nvSpPr>
-          <p:cNvPr id="5" name="Notes Placeholder 4"/>
-          <p:cNvSpPr>
-            <a:spLocks noGrp="1"/>
-          </p:cNvSpPr>
-          <p:nvPr>
-            <p:ph type="body" sz="quarter" idx="3"/>
-          </p:nvPr>
-        </p:nvSpPr>
-        <p:spPr>
-          <a:xfrm>
-            <a:off x="685800" y="4400550"/>
-            <a:ext cx="5486400" cy="3600450"/>
-          </a:xfrm>
-          <a:prstGeom prst="rect">
-            <a:avLst/>
-          </a:prstGeom>
-        </p:spPr>
-        <p:txBody>
-          <a:bodyPr vert="horz" lIns="91440" tIns="45720" rIns="91440" bIns="45720" rtlCol="0"/>
-          <a:lstStyle/>
-          <a:p>
-            <a:pPr lvl="0"/>
-            <a:r>
-              <a:rPr lang="en-US"/>
-              <a:t>Click to edit Master text styles</a:t>
-            </a:r>
-          </a:p>
-          <a:p>
-            <a:pPr lvl="1"/>
-            <a:r>
-              <a:rPr lang="en-US"/>
-              <a:t>Second level</a:t>
-            </a:r>
-          </a:p>
-          <a:p>
-            <a:pPr lvl="2"/>
-            <a:r>
-              <a:rPr lang="en-US"/>
-              <a:t>Third level</a:t>
-            </a:r>
-          </a:p>
-          <a:p>
-            <a:pPr lvl="3"/>
-            <a:r>
-              <a:rPr lang="en-US"/>
-              <a:t>Fourth level</a:t>
-            </a:r>
-          </a:p>
-          <a:p>
-            <a:pPr lvl="4"/>
-            <a:r>
-              <a:rPr lang="en-US"/>
-              <a:t>Fifth level</a:t>
-            </a:r>
-          </a:p>
-        </p:txBody>
-      </p:sp>
-      <p:sp>
-        <p:nvSpPr>
-          <p:cNvPr id="6" name="Footer Placeholder 5"/>
-          <p:cNvSpPr>
-            <a:spLocks noGrp="1"/>
-          </p:cNvSpPr>
-          <p:nvPr>
-            <p:ph type="ftr" sz="quarter" idx="4"/>
-          </p:nvPr>
-        </p:nvSpPr>
-        <p:spPr>
-          <a:xfrm>
-            <a:off x="0" y="8685213"/>
-            <a:ext cx="2971800" cy="458787"/>
-          </a:xfrm>
-          <a:prstGeom prst="rect">
-            <a:avLst/>
-          </a:prstGeom>
-        </p:spPr>
-        <p:txBody>
-          <a:bodyPr vert="horz" lIns="91440" tIns="45720" rIns="91440" bIns="45720" rtlCol="0" anchor="b"/>
-          <a:lstStyle>
-            <a:lvl1pPr algn="l">
-              <a:defRPr sz="1200"/>
-            </a:lvl1pPr>
-          </a:lstStyle>
-          <a:p>
-            <a:endParaRPr lang="en-US"/>
-          </a:p>
-        </p:txBody>
-      </p:sp>
-      <p:sp>
-        <p:nvSpPr>
-          <p:cNvPr id="7" name="Slide Number Placeholder 6"/>
-          <p:cNvSpPr>
-            <a:spLocks noGrp="1"/>
-          </p:cNvSpPr>
-          <p:nvPr>
-            <p:ph type="sldNum" sz="quarter" idx="5"/>
-          </p:nvPr>
-        </p:nvSpPr>
-        <p:spPr>
-          <a:xfrm>
-            <a:off x="3884613" y="8685213"/>
-            <a:ext cx="2971800" cy="458787"/>
-          </a:xfrm>
-          <a:prstGeom prst="rect">
-            <a:avLst/>
-          </a:prstGeom>
-        </p:spPr>
-        <p:txBody>
-          <a:bodyPr vert="horz" lIns="91440" tIns="45720" rIns="91440" bIns="45720" rtlCol="0" anchor="b"/>
-          <a:lstStyle>
-            <a:lvl1pPr algn="r">
-              <a:defRPr sz="1200"/>
-            </a:lvl1pPr>
-          </a:lstStyle>
-          <a:p>
-            <a:fld id="{CE5E9CC1-C706-0F49-92D6-E571CC5EEA8F}" type="slidenum">
-              <a:rPr lang="en-US"/>
-              <a:t>‹#›</a:t>
-            </a:fld>
-            <a:endParaRPr lang="en-US"/>
-          </a:p>
-        </p:txBody>
-      </p:sp>
     </p:spTree>
     <p:extLst>
       <p:ext uri="{BB962C8B-B14F-4D97-AF65-F5344CB8AC3E}">
-        <p14:creationId xmlns:p14="http://schemas.microsoft.com/office/powerpoint/2010/main" val="1024086991"/>
+        <p14:creationId xmlns:p14="http://schemas.microsoft.com/office/powerpoint/2010/main" val="3964711816"/>
       </p:ext>
     </p:extLst>
   </p:cSld>
@@ -511,10 +292,6 @@
           <a:bodyPr/>
           <a:lstStyle/>
           <a:p>
-            <a:r>
-              <a:rPr lang="en-US" dirty="0"/>
-              <a:t/>
-            </a:r>
             <a:endParaRPr lang="en-US" dirty="0"/>
           </a:p>
         </p:txBody>
@@ -599,10 +376,6 @@
           <a:bodyPr/>
           <a:lstStyle/>
           <a:p>
-            <a:r>
-              <a:rPr lang="en-US" dirty="0"/>
-              <a:t/>
-            </a:r>
             <a:endParaRPr lang="en-US" dirty="0"/>
           </a:p>
         </p:txBody>
@@ -687,10 +460,6 @@
           <a:bodyPr/>
           <a:lstStyle/>
           <a:p>
-            <a:r>
-              <a:rPr lang="en-US" dirty="0"/>
-              <a:t/>
-            </a:r>
             <a:endParaRPr lang="en-US" dirty="0"/>
           </a:p>
         </p:txBody>
@@ -775,10 +544,6 @@
           <a:bodyPr/>
           <a:lstStyle/>
           <a:p>
-            <a:r>
-              <a:rPr lang="en-US" dirty="0"/>
-              <a:t/>
-            </a:r>
             <a:endParaRPr lang="en-US" dirty="0"/>
           </a:p>
         </p:txBody>
@@ -863,10 +628,6 @@
           <a:bodyPr/>
           <a:lstStyle/>
           <a:p>
-            <a:r>
-              <a:rPr lang="en-US" dirty="0"/>
-              <a:t/>
-            </a:r>
             <a:endParaRPr lang="en-US" dirty="0"/>
           </a:p>
         </p:txBody>
@@ -951,10 +712,6 @@
           <a:bodyPr/>
           <a:lstStyle/>
           <a:p>
-            <a:r>
-              <a:rPr lang="en-US" dirty="0"/>
-              <a:t/>
-            </a:r>
             <a:endParaRPr lang="en-US" dirty="0"/>
           </a:p>
         </p:txBody>
@@ -1039,10 +796,6 @@
           <a:bodyPr/>
           <a:lstStyle/>
           <a:p>
-            <a:r>
-              <a:rPr lang="en-US" dirty="0"/>
-              <a:t/>
-            </a:r>
             <a:endParaRPr lang="en-US" dirty="0"/>
           </a:p>
         </p:txBody>
@@ -1127,10 +880,6 @@
           <a:bodyPr/>
           <a:lstStyle/>
           <a:p>
-            <a:r>
-              <a:rPr lang="en-US" dirty="0"/>
-              <a:t/>
-            </a:r>
             <a:endParaRPr lang="en-US" dirty="0"/>
           </a:p>
         </p:txBody>
@@ -1215,10 +964,6 @@
           <a:bodyPr/>
           <a:lstStyle/>
           <a:p>
-            <a:r>
-              <a:rPr lang="en-US" dirty="0"/>
-              <a:t/>
-            </a:r>
             <a:endParaRPr lang="en-US" dirty="0"/>
           </a:p>
         </p:txBody>
@@ -1303,10 +1048,6 @@
           <a:bodyPr/>
           <a:lstStyle/>
           <a:p>
-            <a:r>
-              <a:rPr lang="en-US" dirty="0"/>
-              <a:t/>
-            </a:r>
             <a:endParaRPr lang="en-US" dirty="0"/>
           </a:p>
         </p:txBody>
@@ -1391,10 +1132,6 @@
           <a:bodyPr/>
           <a:lstStyle/>
           <a:p>
-            <a:r>
-              <a:rPr lang="en-US" dirty="0"/>
-              <a:t/>
-            </a:r>
             <a:endParaRPr lang="en-US" dirty="0"/>
           </a:p>
         </p:txBody>
@@ -1479,10 +1216,6 @@
           <a:bodyPr/>
           <a:lstStyle/>
           <a:p>
-            <a:r>
-              <a:rPr lang="en-US" dirty="0"/>
-              <a:t/>
-            </a:r>
             <a:endParaRPr lang="en-US" dirty="0"/>
           </a:p>
         </p:txBody>
@@ -1556,6 +1289,11 @@
 <file path=ppt/slideMasters/slideMaster1.xml><?xml version="1.0" encoding="utf-8"?>
 <p:sldMaster xmlns:a="http://schemas.openxmlformats.org/drawingml/2006/main" xmlns:r="http://schemas.openxmlformats.org/officeDocument/2006/relationships" xmlns:p="http://schemas.openxmlformats.org/presentationml/2006/main">
   <p:cSld>
+    <p:bg>
+      <p:bgRef idx="1001">
+        <a:schemeClr val="bg1"/>
+      </p:bgRef>
+    </p:bg>
     <p:spTree>
       <p:nvGrpSpPr>
         <p:cNvPr id="1" name=""/>
@@ -1838,6 +1576,7 @@
         <a:solidFill>
           <a:srgbClr val="FFFFFF"/>
         </a:solidFill>
+        <a:effectLst/>
       </p:bgPr>
     </p:bg>
     <p:spTree>
@@ -1927,7 +1666,7 @@
           </a:bodyPr>
           <a:lstStyle/>
           <a:p>
-            <a:pPr indent="0" marL="0">
+            <a:pPr marL="0" indent="0">
               <a:buNone/>
             </a:pPr>
             <a:r>
@@ -1944,7 +1683,7 @@
             <a:endParaRPr lang="en-US" sz="4400" dirty="0"/>
           </a:p>
           <a:p>
-            <a:pPr indent="0" marL="0">
+            <a:pPr marL="0" indent="0">
               <a:buNone/>
             </a:pPr>
             <a:r>
@@ -1983,7 +1722,7 @@
           <a:bodyPr wrap="square" lIns="0" tIns="0" rIns="0" bIns="0" rtlCol="0" anchor="ctr"/>
           <a:lstStyle/>
           <a:p>
-            <a:pPr indent="0" marL="0">
+            <a:pPr marL="0" indent="0">
               <a:buNone/>
             </a:pPr>
             <a:r>
@@ -2021,7 +1760,7 @@
           <a:bodyPr wrap="square" lIns="0" tIns="0" rIns="0" bIns="0" rtlCol="0" anchor="ctr"/>
           <a:lstStyle/>
           <a:p>
-            <a:pPr algn="ctr" indent="0" marL="0">
+            <a:pPr marL="0" indent="0" algn="ctr">
               <a:buNone/>
             </a:pPr>
             <a:r>
@@ -2057,7 +1796,7 @@
           <a:bodyPr wrap="square" lIns="0" tIns="0" rIns="0" bIns="0" rtlCol="0" anchor="ctr"/>
           <a:lstStyle/>
           <a:p>
-            <a:pPr indent="0" marL="0">
+            <a:pPr marL="0" indent="0">
               <a:buNone/>
             </a:pPr>
             <a:r>
@@ -2145,7 +1884,7 @@
           </a:bodyPr>
           <a:lstStyle/>
           <a:p>
-            <a:pPr algn="ctr" indent="0" marL="0">
+            <a:pPr marL="0" indent="0" algn="ctr">
               <a:buNone/>
             </a:pPr>
             <a:r>
@@ -2183,7 +1922,7 @@
           </a:bodyPr>
           <a:lstStyle/>
           <a:p>
-            <a:pPr algn="ctr" indent="0" marL="0">
+            <a:pPr marL="0" indent="0" algn="ctr">
               <a:buNone/>
             </a:pPr>
             <a:r>
@@ -2246,7 +1985,7 @@
           </a:bodyPr>
           <a:lstStyle/>
           <a:p>
-            <a:pPr algn="ctr" indent="0" marL="0">
+            <a:pPr marL="0" indent="0" algn="ctr">
               <a:buNone/>
             </a:pPr>
             <a:r>
@@ -2284,7 +2023,7 @@
           </a:bodyPr>
           <a:lstStyle/>
           <a:p>
-            <a:pPr algn="ctr" indent="0" marL="0">
+            <a:pPr marL="0" indent="0" algn="ctr">
               <a:buNone/>
             </a:pPr>
             <a:r>
@@ -2347,7 +2086,7 @@
           </a:bodyPr>
           <a:lstStyle/>
           <a:p>
-            <a:pPr algn="ctr" indent="0" marL="0">
+            <a:pPr marL="0" indent="0" algn="ctr">
               <a:buNone/>
             </a:pPr>
             <a:r>
@@ -2385,7 +2124,7 @@
           </a:bodyPr>
           <a:lstStyle/>
           <a:p>
-            <a:pPr algn="ctr" indent="0" marL="0">
+            <a:pPr marL="0" indent="0" algn="ctr">
               <a:buNone/>
             </a:pPr>
             <a:r>
@@ -2421,7 +2160,7 @@
           <a:bodyPr wrap="square" lIns="0" tIns="0" rIns="0" bIns="0" rtlCol="0" anchor="ctr"/>
           <a:lstStyle/>
           <a:p>
-            <a:pPr algn="r" indent="0" marL="0">
+            <a:pPr marL="0" indent="0" algn="r">
               <a:buNone/>
             </a:pPr>
             <a:r>
@@ -2452,6 +2191,7 @@
         <a:solidFill>
           <a:srgbClr val="FFFFFF"/>
         </a:solidFill>
+        <a:effectLst/>
       </p:bgPr>
     </p:bg>
     <p:spTree>
@@ -2539,7 +2279,7 @@
           <a:bodyPr wrap="square" lIns="0" tIns="0" rIns="0" bIns="0" rtlCol="0" anchor="ctr"/>
           <a:lstStyle/>
           <a:p>
-            <a:pPr indent="0" marL="0">
+            <a:pPr marL="0" indent="0">
               <a:buNone/>
             </a:pPr>
             <a:r>
@@ -2580,7 +2320,7 @@
           </a:bodyPr>
           <a:lstStyle/>
           <a:p>
-            <a:pPr indent="0" marL="0">
+            <a:pPr marL="0" indent="0">
               <a:buNone/>
             </a:pPr>
             <a:r>
@@ -2619,7 +2359,7 @@
           <a:bodyPr wrap="square" lIns="0" tIns="0" rIns="0" bIns="0" rtlCol="0" anchor="ctr"/>
           <a:lstStyle/>
           <a:p>
-            <a:pPr algn="r" indent="0" marL="0">
+            <a:pPr marL="0" indent="0" algn="r">
               <a:buNone/>
             </a:pPr>
             <a:r>
@@ -2684,7 +2424,7 @@
           </a:bodyPr>
           <a:lstStyle/>
           <a:p>
-            <a:pPr indent="0" marL="0">
+            <a:pPr marL="0" indent="0">
               <a:buNone/>
             </a:pPr>
             <a:r>
@@ -2722,7 +2462,7 @@
           </a:bodyPr>
           <a:lstStyle/>
           <a:p>
-            <a:pPr indent="0" marL="0">
+            <a:pPr marL="0" indent="0">
               <a:buNone/>
             </a:pPr>
             <a:r>
@@ -2745,7 +2485,7 @@
         </p:nvSpPr>
         <p:spPr>
           <a:xfrm>
-            <a:off x="896112" y="1801368"/>
+            <a:off x="896112" y="1968633"/>
             <a:ext cx="1865376" cy="182880"/>
           </a:xfrm>
           <a:prstGeom prst="rect">
@@ -2760,7 +2500,7 @@
           </a:bodyPr>
           <a:lstStyle/>
           <a:p>
-            <a:pPr indent="0" marL="0">
+            <a:pPr marL="0" indent="0">
               <a:buNone/>
             </a:pPr>
             <a:r>
@@ -2825,7 +2565,7 @@
           </a:bodyPr>
           <a:lstStyle/>
           <a:p>
-            <a:pPr indent="0" marL="0">
+            <a:pPr marL="0" indent="0">
               <a:buNone/>
             </a:pPr>
             <a:r>
@@ -2863,7 +2603,7 @@
           </a:bodyPr>
           <a:lstStyle/>
           <a:p>
-            <a:pPr indent="0" marL="0">
+            <a:pPr marL="0" indent="0">
               <a:buNone/>
             </a:pPr>
             <a:r>
@@ -2886,7 +2626,7 @@
         </p:nvSpPr>
         <p:spPr>
           <a:xfrm>
-            <a:off x="3319272" y="1801368"/>
+            <a:off x="3319272" y="1968633"/>
             <a:ext cx="1682496" cy="182880"/>
           </a:xfrm>
           <a:prstGeom prst="rect">
@@ -2901,7 +2641,7 @@
           </a:bodyPr>
           <a:lstStyle/>
           <a:p>
-            <a:pPr indent="0" marL="0">
+            <a:pPr marL="0" indent="0">
               <a:buNone/>
             </a:pPr>
             <a:r>
@@ -2966,7 +2706,7 @@
           </a:bodyPr>
           <a:lstStyle/>
           <a:p>
-            <a:pPr indent="0" marL="0">
+            <a:pPr marL="0" indent="0">
               <a:buNone/>
             </a:pPr>
             <a:r>
@@ -3004,7 +2744,7 @@
           </a:bodyPr>
           <a:lstStyle/>
           <a:p>
-            <a:pPr indent="0" marL="0">
+            <a:pPr marL="0" indent="0">
               <a:buNone/>
             </a:pPr>
             <a:r>
@@ -3027,7 +2767,7 @@
         </p:nvSpPr>
         <p:spPr>
           <a:xfrm>
-            <a:off x="5559552" y="1801368"/>
+            <a:off x="5559552" y="1957482"/>
             <a:ext cx="1499616" cy="182880"/>
           </a:xfrm>
           <a:prstGeom prst="rect">
@@ -3042,7 +2782,7 @@
           </a:bodyPr>
           <a:lstStyle/>
           <a:p>
-            <a:pPr indent="0" marL="0">
+            <a:pPr marL="0" indent="0">
               <a:buNone/>
             </a:pPr>
             <a:r>
@@ -3107,7 +2847,7 @@
           </a:bodyPr>
           <a:lstStyle/>
           <a:p>
-            <a:pPr indent="0" marL="0">
+            <a:pPr marL="0" indent="0">
               <a:buNone/>
             </a:pPr>
             <a:r>
@@ -3145,7 +2885,7 @@
           </a:bodyPr>
           <a:lstStyle/>
           <a:p>
-            <a:pPr indent="0" marL="0">
+            <a:pPr marL="0" indent="0">
               <a:buNone/>
             </a:pPr>
             <a:r>
@@ -3168,7 +2908,7 @@
         </p:nvSpPr>
         <p:spPr>
           <a:xfrm>
-            <a:off x="7616952" y="1801368"/>
+            <a:off x="7616952" y="1979784"/>
             <a:ext cx="1042416" cy="182880"/>
           </a:xfrm>
           <a:prstGeom prst="rect">
@@ -3179,11 +2919,11 @@
         </p:spPr>
         <p:txBody>
           <a:bodyPr wrap="square" lIns="0" tIns="0" rIns="0" bIns="0" rtlCol="0" anchor="ctr">
-            <a:normAutofit/>
-          </a:bodyPr>
-          <a:lstStyle/>
-          <a:p>
-            <a:pPr indent="0" marL="0">
+            <a:normAutofit fontScale="92500"/>
+          </a:bodyPr>
+          <a:lstStyle/>
+          <a:p>
+            <a:pPr marL="0" indent="0">
               <a:buNone/>
             </a:pPr>
             <a:r>
@@ -3206,7 +2946,7 @@
         </p:nvSpPr>
         <p:spPr>
           <a:xfrm>
-            <a:off x="777240" y="2651760"/>
+            <a:off x="777240" y="2484495"/>
             <a:ext cx="3154680" cy="182880"/>
           </a:xfrm>
           <a:prstGeom prst="rect">
@@ -3219,7 +2959,7 @@
           <a:bodyPr wrap="square" lIns="0" tIns="0" rIns="0" bIns="0" rtlCol="0" anchor="ctr"/>
           <a:lstStyle/>
           <a:p>
-            <a:pPr indent="0" marL="0">
+            <a:pPr marL="0" indent="0">
               <a:buNone/>
             </a:pPr>
             <a:r>
@@ -3280,7 +3020,7 @@
           <a:bodyPr wrap="square" lIns="0" tIns="0" rIns="0" bIns="0" rtlCol="0" anchor="ctr"/>
           <a:lstStyle/>
           <a:p>
-            <a:pPr algn="ctr" indent="0" marL="0">
+            <a:pPr marL="0" indent="0" algn="ctr">
               <a:buNone/>
             </a:pPr>
             <a:r>
@@ -3318,7 +3058,7 @@
           </a:bodyPr>
           <a:lstStyle/>
           <a:p>
-            <a:pPr algn="ctr" indent="0" marL="0">
+            <a:pPr marL="0" indent="0" algn="ctr">
               <a:buNone/>
             </a:pPr>
             <a:r>
@@ -3379,7 +3119,7 @@
           <a:bodyPr wrap="square" lIns="0" tIns="0" rIns="0" bIns="0" rtlCol="0" anchor="ctr"/>
           <a:lstStyle/>
           <a:p>
-            <a:pPr algn="ctr" indent="0" marL="0">
+            <a:pPr marL="0" indent="0" algn="ctr">
               <a:buNone/>
             </a:pPr>
             <a:r>
@@ -3417,7 +3157,7 @@
           </a:bodyPr>
           <a:lstStyle/>
           <a:p>
-            <a:pPr algn="ctr" indent="0" marL="0">
+            <a:pPr marL="0" indent="0" algn="ctr">
               <a:buNone/>
             </a:pPr>
             <a:r>
@@ -3478,7 +3218,7 @@
           <a:bodyPr wrap="square" lIns="0" tIns="0" rIns="0" bIns="0" rtlCol="0" anchor="ctr"/>
           <a:lstStyle/>
           <a:p>
-            <a:pPr algn="ctr" indent="0" marL="0">
+            <a:pPr marL="0" indent="0" algn="ctr">
               <a:buNone/>
             </a:pPr>
             <a:r>
@@ -3516,7 +3256,7 @@
           </a:bodyPr>
           <a:lstStyle/>
           <a:p>
-            <a:pPr algn="ctr" indent="0" marL="0">
+            <a:pPr marL="0" indent="0" algn="ctr">
               <a:buNone/>
             </a:pPr>
             <a:r>
@@ -3579,7 +3319,7 @@
           <a:bodyPr wrap="square" lIns="0" tIns="0" rIns="0" bIns="0" rtlCol="0" anchor="ctr"/>
           <a:lstStyle/>
           <a:p>
-            <a:pPr indent="0" marL="0">
+            <a:pPr marL="0" indent="0">
               <a:buNone/>
             </a:pPr>
             <a:r>
@@ -3617,7 +3357,7 @@
           </a:bodyPr>
           <a:lstStyle/>
           <a:p>
-            <a:pPr indent="0" marL="0">
+            <a:pPr marL="0" indent="0">
               <a:buNone/>
             </a:pPr>
             <a:r>
@@ -3682,7 +3422,7 @@
           </a:bodyPr>
           <a:lstStyle/>
           <a:p>
-            <a:pPr algn="ctr" indent="0" marL="0">
+            <a:pPr marL="0" indent="0" algn="ctr">
               <a:buNone/>
             </a:pPr>
             <a:r>
@@ -3747,7 +3487,7 @@
           </a:bodyPr>
           <a:lstStyle/>
           <a:p>
-            <a:pPr algn="ctr" indent="0" marL="0">
+            <a:pPr marL="0" indent="0" algn="ctr">
               <a:buNone/>
             </a:pPr>
             <a:r>
@@ -3812,7 +3552,7 @@
           </a:bodyPr>
           <a:lstStyle/>
           <a:p>
-            <a:pPr algn="ctr" indent="0" marL="0">
+            <a:pPr marL="0" indent="0" algn="ctr">
               <a:buNone/>
             </a:pPr>
             <a:r>
@@ -3850,7 +3590,7 @@
           </a:bodyPr>
           <a:lstStyle/>
           <a:p>
-            <a:pPr algn="ctr" indent="0" marL="0">
+            <a:pPr marL="0" indent="0" algn="ctr">
               <a:buNone/>
             </a:pPr>
             <a:r>
@@ -3881,6 +3621,7 @@
         <a:solidFill>
           <a:srgbClr val="FFFFFF"/>
         </a:solidFill>
+        <a:effectLst/>
       </p:bgPr>
     </p:bg>
     <p:spTree>
@@ -3968,7 +3709,7 @@
           <a:bodyPr wrap="square" lIns="0" tIns="0" rIns="0" bIns="0" rtlCol="0" anchor="ctr"/>
           <a:lstStyle/>
           <a:p>
-            <a:pPr indent="0" marL="0">
+            <a:pPr marL="0" indent="0">
               <a:buNone/>
             </a:pPr>
             <a:r>
@@ -4009,7 +3750,7 @@
           </a:bodyPr>
           <a:lstStyle/>
           <a:p>
-            <a:pPr indent="0" marL="0">
+            <a:pPr marL="0" indent="0">
               <a:buNone/>
             </a:pPr>
             <a:r>
@@ -4048,7 +3789,7 @@
           <a:bodyPr wrap="square" lIns="0" tIns="0" rIns="0" bIns="0" rtlCol="0" anchor="ctr"/>
           <a:lstStyle/>
           <a:p>
-            <a:pPr algn="r" indent="0" marL="0">
+            <a:pPr marL="0" indent="0" algn="r">
               <a:buNone/>
             </a:pPr>
             <a:r>
@@ -4111,7 +3852,7 @@
           <a:bodyPr wrap="square" lIns="0" tIns="0" rIns="0" bIns="0" rtlCol="0" anchor="ctr"/>
           <a:lstStyle/>
           <a:p>
-            <a:pPr indent="0" marL="0">
+            <a:pPr marL="0" indent="0">
               <a:buNone/>
             </a:pPr>
             <a:r>
@@ -4147,7 +3888,7 @@
           <a:bodyPr wrap="square" lIns="0" tIns="0" rIns="0" bIns="0" rtlCol="0" anchor="ctr"/>
           <a:lstStyle/>
           <a:p>
-            <a:pPr indent="0" marL="0">
+            <a:pPr marL="0" indent="0">
               <a:buNone/>
             </a:pPr>
             <a:r>
@@ -4185,7 +3926,7 @@
           </a:bodyPr>
           <a:lstStyle/>
           <a:p>
-            <a:pPr indent="0" marL="0">
+            <a:pPr marL="0" indent="0">
               <a:buNone/>
             </a:pPr>
             <a:r>
@@ -4248,7 +3989,7 @@
           <a:bodyPr wrap="square" lIns="0" tIns="0" rIns="0" bIns="0" rtlCol="0" anchor="ctr"/>
           <a:lstStyle/>
           <a:p>
-            <a:pPr indent="0" marL="0">
+            <a:pPr marL="0" indent="0">
               <a:buNone/>
             </a:pPr>
             <a:r>
@@ -4284,7 +4025,7 @@
           <a:bodyPr wrap="square" lIns="0" tIns="0" rIns="0" bIns="0" rtlCol="0" anchor="ctr"/>
           <a:lstStyle/>
           <a:p>
-            <a:pPr indent="0" marL="0">
+            <a:pPr marL="0" indent="0">
               <a:buNone/>
             </a:pPr>
             <a:r>
@@ -4322,7 +4063,7 @@
           </a:bodyPr>
           <a:lstStyle/>
           <a:p>
-            <a:pPr indent="0" marL="0">
+            <a:pPr marL="0" indent="0">
               <a:buNone/>
             </a:pPr>
             <a:r>
@@ -4385,7 +4126,7 @@
           <a:bodyPr wrap="square" lIns="0" tIns="0" rIns="0" bIns="0" rtlCol="0" anchor="ctr"/>
           <a:lstStyle/>
           <a:p>
-            <a:pPr indent="0" marL="0">
+            <a:pPr marL="0" indent="0">
               <a:buNone/>
             </a:pPr>
             <a:r>
@@ -4421,7 +4162,7 @@
           <a:bodyPr wrap="square" lIns="0" tIns="0" rIns="0" bIns="0" rtlCol="0" anchor="ctr"/>
           <a:lstStyle/>
           <a:p>
-            <a:pPr indent="0" marL="0">
+            <a:pPr marL="0" indent="0">
               <a:buNone/>
             </a:pPr>
             <a:r>
@@ -4459,7 +4200,7 @@
           </a:bodyPr>
           <a:lstStyle/>
           <a:p>
-            <a:pPr indent="0" marL="0">
+            <a:pPr marL="0" indent="0">
               <a:buNone/>
             </a:pPr>
             <a:r>
@@ -4495,7 +4236,7 @@
           <a:bodyPr wrap="square" lIns="0" tIns="0" rIns="0" bIns="0" rtlCol="0" anchor="ctr"/>
           <a:lstStyle/>
           <a:p>
-            <a:pPr indent="0" marL="0">
+            <a:pPr marL="0" indent="0">
               <a:buNone/>
             </a:pPr>
             <a:r>
@@ -4533,7 +4274,7 @@
           </a:bodyPr>
           <a:lstStyle/>
           <a:p>
-            <a:pPr indent="0" marL="0">
+            <a:pPr marL="0" indent="0">
               <a:buNone/>
             </a:pPr>
             <a:r>
@@ -4621,7 +4362,7 @@
           </a:bodyPr>
           <a:lstStyle/>
           <a:p>
-            <a:pPr indent="0" marL="0">
+            <a:pPr marL="0" indent="0">
               <a:buNone/>
             </a:pPr>
             <a:r>
@@ -4659,7 +4400,7 @@
           </a:bodyPr>
           <a:lstStyle/>
           <a:p>
-            <a:pPr indent="0" marL="0">
+            <a:pPr marL="0" indent="0">
               <a:buNone/>
             </a:pPr>
             <a:r>
@@ -4747,7 +4488,7 @@
           </a:bodyPr>
           <a:lstStyle/>
           <a:p>
-            <a:pPr indent="0" marL="0">
+            <a:pPr marL="0" indent="0">
               <a:buNone/>
             </a:pPr>
             <a:r>
@@ -4785,7 +4526,7 @@
           </a:bodyPr>
           <a:lstStyle/>
           <a:p>
-            <a:pPr indent="0" marL="0">
+            <a:pPr marL="0" indent="0">
               <a:buNone/>
             </a:pPr>
             <a:r>
@@ -4873,7 +4614,7 @@
           </a:bodyPr>
           <a:lstStyle/>
           <a:p>
-            <a:pPr indent="0" marL="0">
+            <a:pPr marL="0" indent="0">
               <a:buNone/>
             </a:pPr>
             <a:r>
@@ -4911,7 +4652,7 @@
           </a:bodyPr>
           <a:lstStyle/>
           <a:p>
-            <a:pPr indent="0" marL="0">
+            <a:pPr marL="0" indent="0">
               <a:buNone/>
             </a:pPr>
             <a:r>
@@ -4999,7 +4740,7 @@
           </a:bodyPr>
           <a:lstStyle/>
           <a:p>
-            <a:pPr indent="0" marL="0">
+            <a:pPr marL="0" indent="0">
               <a:buNone/>
             </a:pPr>
             <a:r>
@@ -5040,6 +4781,13 @@
             <a:prstDash val="solid"/>
           </a:ln>
         </p:spPr>
+        <p:txBody>
+          <a:bodyPr/>
+          <a:lstStyle/>
+          <a:p>
+            <a:endParaRPr lang="es-CL" dirty="0"/>
+          </a:p>
+        </p:txBody>
       </p:sp>
       <p:sp>
         <p:nvSpPr>
@@ -5062,7 +4810,7 @@
           <a:bodyPr wrap="square" lIns="0" tIns="0" rIns="0" bIns="0" rtlCol="0" anchor="ctr"/>
           <a:lstStyle/>
           <a:p>
-            <a:pPr indent="0" marL="0">
+            <a:pPr marL="0" indent="0">
               <a:buNone/>
             </a:pPr>
             <a:r>
@@ -5100,18 +4848,17 @@
           </a:bodyPr>
           <a:lstStyle/>
           <a:p>
-            <a:pPr indent="0" marL="0">
+            <a:pPr marL="0" indent="0">
               <a:buNone/>
             </a:pPr>
             <a:r>
               <a:rPr lang="en-US" sz="1050" dirty="0">
                 <a:solidFill>
-                  <a:srgbClr val="121426"/>
+                  <a:schemeClr val="bg1"/>
                 </a:solidFill>
               </a:rPr>
               <a:t>Competidores activan Pinterest-like, creators, eventos y contenido humano. Maicao puede diferenciarse con utilidad + cercanía + retail expertise.</a:t>
             </a:r>
-            <a:endParaRPr lang="en-US" sz="1050" dirty="0"/>
           </a:p>
         </p:txBody>
       </p:sp>
@@ -5131,6 +4878,7 @@
         <a:solidFill>
           <a:srgbClr val="FFFFFF"/>
         </a:solidFill>
+        <a:effectLst/>
       </p:bgPr>
     </p:bg>
     <p:spTree>
@@ -5218,7 +4966,7 @@
           <a:bodyPr wrap="square" lIns="0" tIns="0" rIns="0" bIns="0" rtlCol="0" anchor="ctr"/>
           <a:lstStyle/>
           <a:p>
-            <a:pPr indent="0" marL="0">
+            <a:pPr marL="0" indent="0">
               <a:buNone/>
             </a:pPr>
             <a:r>
@@ -5259,7 +5007,7 @@
           </a:bodyPr>
           <a:lstStyle/>
           <a:p>
-            <a:pPr indent="0" marL="0">
+            <a:pPr marL="0" indent="0">
               <a:buNone/>
             </a:pPr>
             <a:r>
@@ -5298,7 +5046,7 @@
           <a:bodyPr wrap="square" lIns="0" tIns="0" rIns="0" bIns="0" rtlCol="0" anchor="ctr"/>
           <a:lstStyle/>
           <a:p>
-            <a:pPr algn="r" indent="0" marL="0">
+            <a:pPr marL="0" indent="0" algn="r">
               <a:buNone/>
             </a:pPr>
             <a:r>
@@ -5386,7 +5134,7 @@
           <a:bodyPr wrap="square" lIns="0" tIns="0" rIns="0" bIns="0" rtlCol="0" anchor="ctr"/>
           <a:lstStyle/>
           <a:p>
-            <a:pPr algn="ctr" indent="0" marL="0">
+            <a:pPr marL="0" indent="0" algn="ctr">
               <a:buNone/>
             </a:pPr>
             <a:r>
@@ -5422,7 +5170,7 @@
           <a:bodyPr wrap="square" lIns="0" tIns="0" rIns="0" bIns="0" rtlCol="0" anchor="ctr"/>
           <a:lstStyle/>
           <a:p>
-            <a:pPr indent="0" marL="0">
+            <a:pPr marL="0" indent="0">
               <a:buNone/>
             </a:pPr>
             <a:r>
@@ -5460,7 +5208,7 @@
           </a:bodyPr>
           <a:lstStyle/>
           <a:p>
-            <a:pPr indent="0" marL="0">
+            <a:pPr marL="0" indent="0">
               <a:buNone/>
             </a:pPr>
             <a:r>
@@ -5496,7 +5244,7 @@
           <a:bodyPr wrap="square" lIns="0" tIns="0" rIns="0" bIns="0" rtlCol="0" anchor="ctr"/>
           <a:lstStyle/>
           <a:p>
-            <a:pPr indent="0" marL="0">
+            <a:pPr marL="0" indent="0">
               <a:buNone/>
             </a:pPr>
             <a:r>
@@ -5584,7 +5332,7 @@
           <a:bodyPr wrap="square" lIns="0" tIns="0" rIns="0" bIns="0" rtlCol="0" anchor="ctr"/>
           <a:lstStyle/>
           <a:p>
-            <a:pPr algn="ctr" indent="0" marL="0">
+            <a:pPr marL="0" indent="0" algn="ctr">
               <a:buNone/>
             </a:pPr>
             <a:r>
@@ -5620,7 +5368,7 @@
           <a:bodyPr wrap="square" lIns="0" tIns="0" rIns="0" bIns="0" rtlCol="0" anchor="ctr"/>
           <a:lstStyle/>
           <a:p>
-            <a:pPr indent="0" marL="0">
+            <a:pPr marL="0" indent="0">
               <a:buNone/>
             </a:pPr>
             <a:r>
@@ -5658,7 +5406,7 @@
           </a:bodyPr>
           <a:lstStyle/>
           <a:p>
-            <a:pPr indent="0" marL="0">
+            <a:pPr marL="0" indent="0">
               <a:buNone/>
             </a:pPr>
             <a:r>
@@ -5694,7 +5442,7 @@
           <a:bodyPr wrap="square" lIns="0" tIns="0" rIns="0" bIns="0" rtlCol="0" anchor="ctr"/>
           <a:lstStyle/>
           <a:p>
-            <a:pPr indent="0" marL="0">
+            <a:pPr marL="0" indent="0">
               <a:buNone/>
             </a:pPr>
             <a:r>
@@ -5782,7 +5530,7 @@
           <a:bodyPr wrap="square" lIns="0" tIns="0" rIns="0" bIns="0" rtlCol="0" anchor="ctr"/>
           <a:lstStyle/>
           <a:p>
-            <a:pPr algn="ctr" indent="0" marL="0">
+            <a:pPr marL="0" indent="0" algn="ctr">
               <a:buNone/>
             </a:pPr>
             <a:r>
@@ -5818,7 +5566,7 @@
           <a:bodyPr wrap="square" lIns="0" tIns="0" rIns="0" bIns="0" rtlCol="0" anchor="ctr"/>
           <a:lstStyle/>
           <a:p>
-            <a:pPr indent="0" marL="0">
+            <a:pPr marL="0" indent="0">
               <a:buNone/>
             </a:pPr>
             <a:r>
@@ -5856,7 +5604,7 @@
           </a:bodyPr>
           <a:lstStyle/>
           <a:p>
-            <a:pPr indent="0" marL="0">
+            <a:pPr marL="0" indent="0">
               <a:buNone/>
             </a:pPr>
             <a:r>
@@ -5892,7 +5640,7 @@
           <a:bodyPr wrap="square" lIns="0" tIns="0" rIns="0" bIns="0" rtlCol="0" anchor="ctr"/>
           <a:lstStyle/>
           <a:p>
-            <a:pPr indent="0" marL="0">
+            <a:pPr marL="0" indent="0">
               <a:buNone/>
             </a:pPr>
             <a:r>
@@ -5980,7 +5728,7 @@
           <a:bodyPr wrap="square" lIns="0" tIns="0" rIns="0" bIns="0" rtlCol="0" anchor="ctr"/>
           <a:lstStyle/>
           <a:p>
-            <a:pPr algn="ctr" indent="0" marL="0">
+            <a:pPr marL="0" indent="0" algn="ctr">
               <a:buNone/>
             </a:pPr>
             <a:r>
@@ -6016,7 +5764,7 @@
           <a:bodyPr wrap="square" lIns="0" tIns="0" rIns="0" bIns="0" rtlCol="0" anchor="ctr"/>
           <a:lstStyle/>
           <a:p>
-            <a:pPr indent="0" marL="0">
+            <a:pPr marL="0" indent="0">
               <a:buNone/>
             </a:pPr>
             <a:r>
@@ -6054,7 +5802,7 @@
           </a:bodyPr>
           <a:lstStyle/>
           <a:p>
-            <a:pPr indent="0" marL="0">
+            <a:pPr marL="0" indent="0">
               <a:buNone/>
             </a:pPr>
             <a:r>
@@ -6090,7 +5838,7 @@
           <a:bodyPr wrap="square" lIns="0" tIns="0" rIns="0" bIns="0" rtlCol="0" anchor="ctr"/>
           <a:lstStyle/>
           <a:p>
-            <a:pPr indent="0" marL="0">
+            <a:pPr marL="0" indent="0">
               <a:buNone/>
             </a:pPr>
             <a:r>
@@ -6155,7 +5903,7 @@
           </a:bodyPr>
           <a:lstStyle/>
           <a:p>
-            <a:pPr algn="ctr" indent="0" marL="0">
+            <a:pPr marL="0" indent="0" algn="ctr">
               <a:buNone/>
             </a:pPr>
             <a:r>
@@ -6186,6 +5934,7 @@
         <a:solidFill>
           <a:srgbClr val="FFFFFF"/>
         </a:solidFill>
+        <a:effectLst/>
       </p:bgPr>
     </p:bg>
     <p:spTree>
@@ -6210,7 +5959,7 @@
         </p:nvSpPr>
         <p:spPr>
           <a:xfrm>
-            <a:off x="0" y="0"/>
+            <a:off x="0" y="301752"/>
             <a:ext cx="12191695" cy="6858000"/>
           </a:xfrm>
           <a:prstGeom prst="rect">
@@ -6273,7 +6022,7 @@
           <a:bodyPr wrap="square" lIns="0" tIns="0" rIns="0" bIns="0" rtlCol="0" anchor="ctr"/>
           <a:lstStyle/>
           <a:p>
-            <a:pPr indent="0" marL="0">
+            <a:pPr marL="0" indent="0">
               <a:buNone/>
             </a:pPr>
             <a:r>
@@ -6314,7 +6063,7 @@
           </a:bodyPr>
           <a:lstStyle/>
           <a:p>
-            <a:pPr indent="0" marL="0">
+            <a:pPr marL="0" indent="0">
               <a:buNone/>
             </a:pPr>
             <a:r>
@@ -6353,7 +6102,7 @@
           <a:bodyPr wrap="square" lIns="0" tIns="0" rIns="0" bIns="0" rtlCol="0" anchor="ctr"/>
           <a:lstStyle/>
           <a:p>
-            <a:pPr algn="r" indent="0" marL="0">
+            <a:pPr marL="0" indent="0" algn="r">
               <a:buNone/>
             </a:pPr>
             <a:r>
@@ -6418,7 +6167,7 @@
           </a:bodyPr>
           <a:lstStyle/>
           <a:p>
-            <a:pPr indent="0" marL="0">
+            <a:pPr marL="0" indent="0">
               <a:buNone/>
             </a:pPr>
             <a:r>
@@ -6456,7 +6205,7 @@
           </a:bodyPr>
           <a:lstStyle/>
           <a:p>
-            <a:pPr indent="0" marL="0">
+            <a:pPr marL="0" indent="0">
               <a:buNone/>
             </a:pPr>
             <a:r>
@@ -6479,7 +6228,7 @@
         </p:nvSpPr>
         <p:spPr>
           <a:xfrm>
-            <a:off x="758952" y="1783080"/>
+            <a:off x="758952" y="1872288"/>
             <a:ext cx="1819656" cy="182880"/>
           </a:xfrm>
           <a:prstGeom prst="rect">
@@ -6494,7 +6243,7 @@
           </a:bodyPr>
           <a:lstStyle/>
           <a:p>
-            <a:pPr indent="0" marL="0">
+            <a:pPr marL="0" indent="0">
               <a:buNone/>
             </a:pPr>
             <a:r>
@@ -6559,7 +6308,7 @@
           </a:bodyPr>
           <a:lstStyle/>
           <a:p>
-            <a:pPr indent="0" marL="0">
+            <a:pPr marL="0" indent="0">
               <a:buNone/>
             </a:pPr>
             <a:r>
@@ -6597,7 +6346,7 @@
           </a:bodyPr>
           <a:lstStyle/>
           <a:p>
-            <a:pPr indent="0" marL="0">
+            <a:pPr marL="0" indent="0">
               <a:buNone/>
             </a:pPr>
             <a:r>
@@ -6620,7 +6369,7 @@
         </p:nvSpPr>
         <p:spPr>
           <a:xfrm>
-            <a:off x="3044952" y="1783080"/>
+            <a:off x="3044952" y="1872288"/>
             <a:ext cx="1819656" cy="182880"/>
           </a:xfrm>
           <a:prstGeom prst="rect">
@@ -6635,7 +6384,7 @@
           </a:bodyPr>
           <a:lstStyle/>
           <a:p>
-            <a:pPr indent="0" marL="0">
+            <a:pPr marL="0" indent="0">
               <a:buNone/>
             </a:pPr>
             <a:r>
@@ -6700,7 +6449,7 @@
           </a:bodyPr>
           <a:lstStyle/>
           <a:p>
-            <a:pPr indent="0" marL="0">
+            <a:pPr marL="0" indent="0">
               <a:buNone/>
             </a:pPr>
             <a:r>
@@ -6738,7 +6487,7 @@
           </a:bodyPr>
           <a:lstStyle/>
           <a:p>
-            <a:pPr indent="0" marL="0">
+            <a:pPr marL="0" indent="0">
               <a:buNone/>
             </a:pPr>
             <a:r>
@@ -6761,7 +6510,7 @@
         </p:nvSpPr>
         <p:spPr>
           <a:xfrm>
-            <a:off x="5330952" y="1783080"/>
+            <a:off x="5330952" y="1883439"/>
             <a:ext cx="1499616" cy="182880"/>
           </a:xfrm>
           <a:prstGeom prst="rect">
@@ -6776,7 +6525,7 @@
           </a:bodyPr>
           <a:lstStyle/>
           <a:p>
-            <a:pPr indent="0" marL="0">
+            <a:pPr marL="0" indent="0">
               <a:buNone/>
             </a:pPr>
             <a:r>
@@ -6841,7 +6590,7 @@
           </a:bodyPr>
           <a:lstStyle/>
           <a:p>
-            <a:pPr indent="0" marL="0">
+            <a:pPr marL="0" indent="0">
               <a:buNone/>
             </a:pPr>
             <a:r>
@@ -6879,7 +6628,7 @@
           </a:bodyPr>
           <a:lstStyle/>
           <a:p>
-            <a:pPr indent="0" marL="0">
+            <a:pPr marL="0" indent="0">
               <a:buNone/>
             </a:pPr>
             <a:r>
@@ -6902,7 +6651,7 @@
         </p:nvSpPr>
         <p:spPr>
           <a:xfrm>
-            <a:off x="7296912" y="1783080"/>
+            <a:off x="7296912" y="1883439"/>
             <a:ext cx="1499616" cy="182880"/>
           </a:xfrm>
           <a:prstGeom prst="rect">
@@ -6917,7 +6666,7 @@
           </a:bodyPr>
           <a:lstStyle/>
           <a:p>
-            <a:pPr indent="0" marL="0">
+            <a:pPr marL="0" indent="0">
               <a:buNone/>
             </a:pPr>
             <a:r>
@@ -6982,7 +6731,7 @@
           </a:bodyPr>
           <a:lstStyle/>
           <a:p>
-            <a:pPr indent="0" marL="0">
+            <a:pPr marL="0" indent="0">
               <a:buNone/>
             </a:pPr>
             <a:r>
@@ -7020,7 +6769,7 @@
           </a:bodyPr>
           <a:lstStyle/>
           <a:p>
-            <a:pPr indent="0" marL="0">
+            <a:pPr marL="0" indent="0">
               <a:buNone/>
             </a:pPr>
             <a:r>
@@ -7043,7 +6792,7 @@
         </p:nvSpPr>
         <p:spPr>
           <a:xfrm>
-            <a:off x="9262872" y="1783080"/>
+            <a:off x="9262872" y="1883439"/>
             <a:ext cx="1728216" cy="182880"/>
           </a:xfrm>
           <a:prstGeom prst="rect">
@@ -7058,7 +6807,7 @@
           </a:bodyPr>
           <a:lstStyle/>
           <a:p>
-            <a:pPr indent="0" marL="0">
+            <a:pPr marL="0" indent="0">
               <a:buNone/>
             </a:pPr>
             <a:r>
@@ -7094,7 +6843,7 @@
           <a:bodyPr wrap="square" lIns="0" tIns="0" rIns="0" bIns="0" rtlCol="0" anchor="ctr"/>
           <a:lstStyle/>
           <a:p>
-            <a:pPr indent="0" marL="0">
+            <a:pPr marL="0" indent="0">
               <a:buNone/>
             </a:pPr>
             <a:r>
@@ -7130,7 +6879,7 @@
           <a:bodyPr wrap="square" lIns="0" tIns="0" rIns="0" bIns="0" rtlCol="0" anchor="ctr"/>
           <a:lstStyle/>
           <a:p>
-            <a:pPr indent="0" marL="0">
+            <a:pPr marL="0" indent="0">
               <a:buNone/>
             </a:pPr>
             <a:r>
@@ -7191,7 +6940,7 @@
           <a:bodyPr wrap="square" lIns="0" tIns="0" rIns="0" bIns="0" rtlCol="0" anchor="ctr"/>
           <a:lstStyle/>
           <a:p>
-            <a:pPr algn="ctr" indent="0" marL="0">
+            <a:pPr marL="0" indent="0" algn="ctr">
               <a:buNone/>
             </a:pPr>
             <a:r>
@@ -7229,7 +6978,7 @@
           </a:bodyPr>
           <a:lstStyle/>
           <a:p>
-            <a:pPr algn="ctr" indent="0" marL="0">
+            <a:pPr marL="0" indent="0" algn="ctr">
               <a:buNone/>
             </a:pPr>
             <a:r>
@@ -7290,7 +7039,7 @@
           <a:bodyPr wrap="square" lIns="0" tIns="0" rIns="0" bIns="0" rtlCol="0" anchor="ctr"/>
           <a:lstStyle/>
           <a:p>
-            <a:pPr algn="ctr" indent="0" marL="0">
+            <a:pPr marL="0" indent="0" algn="ctr">
               <a:buNone/>
             </a:pPr>
             <a:r>
@@ -7328,7 +7077,7 @@
           </a:bodyPr>
           <a:lstStyle/>
           <a:p>
-            <a:pPr algn="ctr" indent="0" marL="0">
+            <a:pPr marL="0" indent="0" algn="ctr">
               <a:buNone/>
             </a:pPr>
             <a:r>
@@ -7389,7 +7138,7 @@
           <a:bodyPr wrap="square" lIns="0" tIns="0" rIns="0" bIns="0" rtlCol="0" anchor="ctr"/>
           <a:lstStyle/>
           <a:p>
-            <a:pPr algn="ctr" indent="0" marL="0">
+            <a:pPr marL="0" indent="0" algn="ctr">
               <a:buNone/>
             </a:pPr>
             <a:r>
@@ -7427,7 +7176,7 @@
           </a:bodyPr>
           <a:lstStyle/>
           <a:p>
-            <a:pPr algn="ctr" indent="0" marL="0">
+            <a:pPr marL="0" indent="0" algn="ctr">
               <a:buNone/>
             </a:pPr>
             <a:r>
@@ -7488,7 +7237,7 @@
           <a:bodyPr wrap="square" lIns="0" tIns="0" rIns="0" bIns="0" rtlCol="0" anchor="ctr"/>
           <a:lstStyle/>
           <a:p>
-            <a:pPr algn="ctr" indent="0" marL="0">
+            <a:pPr marL="0" indent="0" algn="ctr">
               <a:buNone/>
             </a:pPr>
             <a:r>
@@ -7526,7 +7275,7 @@
           </a:bodyPr>
           <a:lstStyle/>
           <a:p>
-            <a:pPr algn="ctr" indent="0" marL="0">
+            <a:pPr marL="0" indent="0" algn="ctr">
               <a:buNone/>
             </a:pPr>
             <a:r>
@@ -7591,7 +7340,7 @@
           </a:bodyPr>
           <a:lstStyle/>
           <a:p>
-            <a:pPr indent="0" marL="0">
+            <a:pPr marL="0" indent="0">
               <a:buNone/>
             </a:pPr>
             <a:r>
@@ -7656,7 +7405,7 @@
           </a:bodyPr>
           <a:lstStyle/>
           <a:p>
-            <a:pPr algn="ctr" indent="0" marL="0">
+            <a:pPr marL="0" indent="0" algn="ctr">
               <a:buNone/>
             </a:pPr>
             <a:r>
@@ -7721,7 +7470,7 @@
           </a:bodyPr>
           <a:lstStyle/>
           <a:p>
-            <a:pPr algn="ctr" indent="0" marL="0">
+            <a:pPr marL="0" indent="0" algn="ctr">
               <a:buNone/>
             </a:pPr>
             <a:r>
@@ -7786,7 +7535,7 @@
           </a:bodyPr>
           <a:lstStyle/>
           <a:p>
-            <a:pPr algn="ctr" indent="0" marL="0">
+            <a:pPr marL="0" indent="0" algn="ctr">
               <a:buNone/>
             </a:pPr>
             <a:r>
@@ -7817,6 +7566,7 @@
         <a:solidFill>
           <a:srgbClr val="FFFFFF"/>
         </a:solidFill>
+        <a:effectLst/>
       </p:bgPr>
     </p:bg>
     <p:spTree>
@@ -7904,7 +7654,7 @@
           <a:bodyPr wrap="square" lIns="0" tIns="0" rIns="0" bIns="0" rtlCol="0" anchor="ctr"/>
           <a:lstStyle/>
           <a:p>
-            <a:pPr indent="0" marL="0">
+            <a:pPr marL="0" indent="0">
               <a:buNone/>
             </a:pPr>
             <a:r>
@@ -7945,7 +7695,7 @@
           </a:bodyPr>
           <a:lstStyle/>
           <a:p>
-            <a:pPr indent="0" marL="0">
+            <a:pPr marL="0" indent="0">
               <a:buNone/>
             </a:pPr>
             <a:r>
@@ -7984,7 +7734,7 @@
           <a:bodyPr wrap="square" lIns="0" tIns="0" rIns="0" bIns="0" rtlCol="0" anchor="ctr"/>
           <a:lstStyle/>
           <a:p>
-            <a:pPr algn="r" indent="0" marL="0">
+            <a:pPr marL="0" indent="0" algn="r">
               <a:buNone/>
             </a:pPr>
             <a:r>
@@ -8020,7 +7770,7 @@
           <a:bodyPr wrap="square" lIns="0" tIns="0" rIns="0" bIns="0" rtlCol="0" anchor="ctr"/>
           <a:lstStyle/>
           <a:p>
-            <a:pPr indent="0" marL="0">
+            <a:pPr marL="0" indent="0">
               <a:buNone/>
             </a:pPr>
             <a:r>
@@ -8083,7 +7833,7 @@
           <a:bodyPr wrap="square" lIns="0" tIns="0" rIns="0" bIns="0" rtlCol="0" anchor="ctr"/>
           <a:lstStyle/>
           <a:p>
-            <a:pPr algn="ctr" indent="0" marL="0">
+            <a:pPr marL="0" indent="0" algn="ctr">
               <a:buNone/>
             </a:pPr>
             <a:r>
@@ -8119,7 +7869,7 @@
           <a:bodyPr wrap="square" lIns="0" tIns="0" rIns="0" bIns="0" rtlCol="0" anchor="ctr"/>
           <a:lstStyle/>
           <a:p>
-            <a:pPr indent="0" marL="0">
+            <a:pPr marL="0" indent="0">
               <a:buNone/>
             </a:pPr>
             <a:r>
@@ -8157,7 +7907,7 @@
           </a:bodyPr>
           <a:lstStyle/>
           <a:p>
-            <a:pPr indent="0" marL="0">
+            <a:pPr marL="0" indent="0">
               <a:buNone/>
             </a:pPr>
             <a:r>
@@ -8195,7 +7945,7 @@
           </a:bodyPr>
           <a:lstStyle/>
           <a:p>
-            <a:pPr indent="0" marL="0">
+            <a:pPr marL="0" indent="0">
               <a:buNone/>
             </a:pPr>
             <a:r>
@@ -8268,7 +8018,7 @@
         </p:nvSpPr>
         <p:spPr>
           <a:xfrm>
-            <a:off x="3657600" y="3776472"/>
+            <a:off x="3401122" y="3776472"/>
             <a:ext cx="822960" cy="164592"/>
           </a:xfrm>
           <a:prstGeom prst="rect">
@@ -8283,7 +8033,7 @@
           </a:bodyPr>
           <a:lstStyle/>
           <a:p>
-            <a:pPr indent="0" marL="0">
+            <a:pPr marL="0" indent="0">
               <a:buNone/>
             </a:pPr>
             <a:r>
@@ -8321,7 +8071,7 @@
           </a:bodyPr>
           <a:lstStyle/>
           <a:p>
-            <a:pPr indent="0" marL="0">
+            <a:pPr marL="0" indent="0">
               <a:buNone/>
             </a:pPr>
             <a:r>
@@ -8394,7 +8144,7 @@
         </p:nvSpPr>
         <p:spPr>
           <a:xfrm>
-            <a:off x="3657600" y="4142232"/>
+            <a:off x="3401124" y="4142232"/>
             <a:ext cx="822960" cy="164592"/>
           </a:xfrm>
           <a:prstGeom prst="rect">
@@ -8409,18 +8159,13 @@
           </a:bodyPr>
           <a:lstStyle/>
           <a:p>
-            <a:pPr indent="0" marL="0">
-              <a:buNone/>
-            </a:pPr>
-            <a:r>
-              <a:rPr lang="en-US" sz="800" dirty="0">
-                <a:solidFill>
-                  <a:srgbClr val="6E7280"/>
-                </a:solidFill>
-              </a:rPr>
+            <a:pPr marL="0" indent="0">
+              <a:buNone/>
+            </a:pPr>
+            <a:r>
+              <a:rPr lang="en-US" sz="800" b="1" dirty="0"/>
               <a:t>1.3%</a:t>
             </a:r>
-            <a:endParaRPr lang="en-US" sz="800" dirty="0"/>
           </a:p>
         </p:txBody>
       </p:sp>
@@ -8472,7 +8217,7 @@
           <a:bodyPr wrap="square" lIns="0" tIns="0" rIns="0" bIns="0" rtlCol="0" anchor="ctr"/>
           <a:lstStyle/>
           <a:p>
-            <a:pPr algn="ctr" indent="0" marL="0">
+            <a:pPr marL="0" indent="0" algn="ctr">
               <a:buNone/>
             </a:pPr>
             <a:r>
@@ -8508,7 +8253,7 @@
           <a:bodyPr wrap="square" lIns="0" tIns="0" rIns="0" bIns="0" rtlCol="0" anchor="ctr"/>
           <a:lstStyle/>
           <a:p>
-            <a:pPr indent="0" marL="0">
+            <a:pPr marL="0" indent="0">
               <a:buNone/>
             </a:pPr>
             <a:r>
@@ -8546,7 +8291,7 @@
           </a:bodyPr>
           <a:lstStyle/>
           <a:p>
-            <a:pPr indent="0" marL="0">
+            <a:pPr marL="0" indent="0">
               <a:buNone/>
             </a:pPr>
             <a:r>
@@ -8584,7 +8329,7 @@
           </a:bodyPr>
           <a:lstStyle/>
           <a:p>
-            <a:pPr indent="0" marL="0">
+            <a:pPr marL="0" indent="0">
               <a:buNone/>
             </a:pPr>
             <a:r>
@@ -8657,7 +8402,7 @@
         </p:nvSpPr>
         <p:spPr>
           <a:xfrm>
-            <a:off x="6766560" y="3776472"/>
+            <a:off x="6264760" y="3776472"/>
             <a:ext cx="822960" cy="164592"/>
           </a:xfrm>
           <a:prstGeom prst="rect">
@@ -8672,7 +8417,7 @@
           </a:bodyPr>
           <a:lstStyle/>
           <a:p>
-            <a:pPr indent="0" marL="0">
+            <a:pPr marL="0" indent="0">
               <a:buNone/>
             </a:pPr>
             <a:r>
@@ -8710,7 +8455,7 @@
           </a:bodyPr>
           <a:lstStyle/>
           <a:p>
-            <a:pPr indent="0" marL="0">
+            <a:pPr marL="0" indent="0">
               <a:buNone/>
             </a:pPr>
             <a:r>
@@ -8783,7 +8528,7 @@
         </p:nvSpPr>
         <p:spPr>
           <a:xfrm>
-            <a:off x="6766560" y="4142232"/>
+            <a:off x="6253605" y="4142232"/>
             <a:ext cx="822960" cy="164592"/>
           </a:xfrm>
           <a:prstGeom prst="rect">
@@ -8798,18 +8543,13 @@
           </a:bodyPr>
           <a:lstStyle/>
           <a:p>
-            <a:pPr indent="0" marL="0">
-              <a:buNone/>
-            </a:pPr>
-            <a:r>
-              <a:rPr lang="en-US" sz="800" dirty="0">
-                <a:solidFill>
-                  <a:srgbClr val="6E7280"/>
-                </a:solidFill>
-              </a:rPr>
+            <a:pPr marL="0" indent="0">
+              <a:buNone/>
+            </a:pPr>
+            <a:r>
+              <a:rPr lang="en-US" sz="800" b="1" dirty="0"/>
               <a:t>3.800.400</a:t>
             </a:r>
-            <a:endParaRPr lang="en-US" sz="800" dirty="0"/>
           </a:p>
         </p:txBody>
       </p:sp>
@@ -8861,7 +8601,7 @@
           <a:bodyPr wrap="square" lIns="0" tIns="0" rIns="0" bIns="0" rtlCol="0" anchor="ctr"/>
           <a:lstStyle/>
           <a:p>
-            <a:pPr algn="ctr" indent="0" marL="0">
+            <a:pPr marL="0" indent="0" algn="ctr">
               <a:buNone/>
             </a:pPr>
             <a:r>
@@ -8897,7 +8637,7 @@
           <a:bodyPr wrap="square" lIns="0" tIns="0" rIns="0" bIns="0" rtlCol="0" anchor="ctr"/>
           <a:lstStyle/>
           <a:p>
-            <a:pPr indent="0" marL="0">
+            <a:pPr marL="0" indent="0">
               <a:buNone/>
             </a:pPr>
             <a:r>
@@ -8935,7 +8675,7 @@
           </a:bodyPr>
           <a:lstStyle/>
           <a:p>
-            <a:pPr indent="0" marL="0">
+            <a:pPr marL="0" indent="0">
               <a:buNone/>
             </a:pPr>
             <a:r>
@@ -8973,7 +8713,7 @@
           </a:bodyPr>
           <a:lstStyle/>
           <a:p>
-            <a:pPr indent="0" marL="0">
+            <a:pPr marL="0" indent="0">
               <a:buNone/>
             </a:pPr>
             <a:r>
@@ -9046,7 +8786,7 @@
         </p:nvSpPr>
         <p:spPr>
           <a:xfrm>
-            <a:off x="9875520" y="3776472"/>
+            <a:off x="9574438" y="3776472"/>
             <a:ext cx="822960" cy="164592"/>
           </a:xfrm>
           <a:prstGeom prst="rect">
@@ -9061,7 +8801,7 @@
           </a:bodyPr>
           <a:lstStyle/>
           <a:p>
-            <a:pPr indent="0" marL="0">
+            <a:pPr marL="0" indent="0">
               <a:buNone/>
             </a:pPr>
             <a:r>
@@ -9099,7 +8839,7 @@
           </a:bodyPr>
           <a:lstStyle/>
           <a:p>
-            <a:pPr indent="0" marL="0">
+            <a:pPr marL="0" indent="0">
               <a:buNone/>
             </a:pPr>
             <a:r>
@@ -9172,7 +8912,7 @@
         </p:nvSpPr>
         <p:spPr>
           <a:xfrm>
-            <a:off x="9875520" y="4142232"/>
+            <a:off x="9585591" y="4142232"/>
             <a:ext cx="822960" cy="164592"/>
           </a:xfrm>
           <a:prstGeom prst="rect">
@@ -9187,18 +8927,13 @@
           </a:bodyPr>
           <a:lstStyle/>
           <a:p>
-            <a:pPr indent="0" marL="0">
-              <a:buNone/>
-            </a:pPr>
-            <a:r>
-              <a:rPr lang="en-US" sz="800" dirty="0">
-                <a:solidFill>
-                  <a:srgbClr val="6E7280"/>
-                </a:solidFill>
-              </a:rPr>
+            <a:pPr marL="0" indent="0">
+              <a:buNone/>
+            </a:pPr>
+            <a:r>
+              <a:rPr lang="en-US" sz="800" b="1" dirty="0"/>
               <a:t>156</a:t>
             </a:r>
-            <a:endParaRPr lang="en-US" sz="800" dirty="0"/>
           </a:p>
         </p:txBody>
       </p:sp>
@@ -9252,7 +8987,7 @@
           </a:bodyPr>
           <a:lstStyle/>
           <a:p>
-            <a:pPr indent="0" marL="0">
+            <a:pPr marL="0" indent="0">
               <a:buNone/>
             </a:pPr>
             <a:r>
@@ -9283,6 +9018,7 @@
         <a:solidFill>
           <a:srgbClr val="FFFFFF"/>
         </a:solidFill>
+        <a:effectLst/>
       </p:bgPr>
     </p:bg>
     <p:spTree>
@@ -9370,7 +9106,7 @@
           <a:bodyPr wrap="square" lIns="0" tIns="0" rIns="0" bIns="0" rtlCol="0" anchor="ctr"/>
           <a:lstStyle/>
           <a:p>
-            <a:pPr indent="0" marL="0">
+            <a:pPr marL="0" indent="0">
               <a:buNone/>
             </a:pPr>
             <a:r>
@@ -9411,7 +9147,7 @@
           </a:bodyPr>
           <a:lstStyle/>
           <a:p>
-            <a:pPr indent="0" marL="0">
+            <a:pPr marL="0" indent="0">
               <a:buNone/>
             </a:pPr>
             <a:r>
@@ -9450,7 +9186,7 @@
           <a:bodyPr wrap="square" lIns="0" tIns="0" rIns="0" bIns="0" rtlCol="0" anchor="ctr"/>
           <a:lstStyle/>
           <a:p>
-            <a:pPr algn="r" indent="0" marL="0">
+            <a:pPr marL="0" indent="0" algn="r">
               <a:buNone/>
             </a:pPr>
             <a:r>
@@ -9473,7 +9209,7 @@
         </p:nvSpPr>
         <p:spPr>
           <a:xfrm>
-            <a:off x="640080" y="1188720"/>
+            <a:off x="640080" y="1021455"/>
             <a:ext cx="3840480" cy="182880"/>
           </a:xfrm>
           <a:prstGeom prst="rect">
@@ -9486,7 +9222,7 @@
           <a:bodyPr wrap="square" lIns="0" tIns="0" rIns="0" bIns="0" rtlCol="0" anchor="ctr"/>
           <a:lstStyle/>
           <a:p>
-            <a:pPr indent="0" marL="0">
+            <a:pPr marL="0" indent="0">
               <a:buNone/>
             </a:pPr>
             <a:r>
@@ -9547,7 +9283,7 @@
           <a:bodyPr wrap="square" lIns="0" tIns="0" rIns="0" bIns="0" rtlCol="0" anchor="ctr"/>
           <a:lstStyle/>
           <a:p>
-            <a:pPr algn="ctr" indent="0" marL="0">
+            <a:pPr marL="0" indent="0" algn="ctr">
               <a:buNone/>
             </a:pPr>
             <a:r>
@@ -9585,7 +9321,7 @@
           </a:bodyPr>
           <a:lstStyle/>
           <a:p>
-            <a:pPr algn="ctr" indent="0" marL="0">
+            <a:pPr marL="0" indent="0" algn="ctr">
               <a:buNone/>
             </a:pPr>
             <a:r>
@@ -9646,7 +9382,7 @@
           <a:bodyPr wrap="square" lIns="0" tIns="0" rIns="0" bIns="0" rtlCol="0" anchor="ctr"/>
           <a:lstStyle/>
           <a:p>
-            <a:pPr algn="ctr" indent="0" marL="0">
+            <a:pPr marL="0" indent="0" algn="ctr">
               <a:buNone/>
             </a:pPr>
             <a:r>
@@ -9684,7 +9420,7 @@
           </a:bodyPr>
           <a:lstStyle/>
           <a:p>
-            <a:pPr algn="ctr" indent="0" marL="0">
+            <a:pPr marL="0" indent="0" algn="ctr">
               <a:buNone/>
             </a:pPr>
             <a:r>
@@ -9745,7 +9481,7 @@
           <a:bodyPr wrap="square" lIns="0" tIns="0" rIns="0" bIns="0" rtlCol="0" anchor="ctr"/>
           <a:lstStyle/>
           <a:p>
-            <a:pPr algn="ctr" indent="0" marL="0">
+            <a:pPr marL="0" indent="0" algn="ctr">
               <a:buNone/>
             </a:pPr>
             <a:r>
@@ -9783,7 +9519,7 @@
           </a:bodyPr>
           <a:lstStyle/>
           <a:p>
-            <a:pPr algn="ctr" indent="0" marL="0">
+            <a:pPr marL="0" indent="0" algn="ctr">
               <a:buNone/>
             </a:pPr>
             <a:r>
@@ -9806,7 +9542,7 @@
         </p:nvSpPr>
         <p:spPr>
           <a:xfrm>
-            <a:off x="4572000" y="1188720"/>
+            <a:off x="4572000" y="1021455"/>
             <a:ext cx="3291840" cy="182880"/>
           </a:xfrm>
           <a:prstGeom prst="rect">
@@ -9819,7 +9555,7 @@
           <a:bodyPr wrap="square" lIns="0" tIns="0" rIns="0" bIns="0" rtlCol="0" anchor="ctr"/>
           <a:lstStyle/>
           <a:p>
-            <a:pPr indent="0" marL="0">
+            <a:pPr marL="0" indent="0">
               <a:buNone/>
             </a:pPr>
             <a:r>
@@ -9880,7 +9616,7 @@
           <a:bodyPr wrap="square" lIns="0" tIns="0" rIns="0" bIns="0" rtlCol="0" anchor="ctr"/>
           <a:lstStyle/>
           <a:p>
-            <a:pPr algn="ctr" indent="0" marL="0">
+            <a:pPr marL="0" indent="0" algn="ctr">
               <a:buNone/>
             </a:pPr>
             <a:r>
@@ -9918,7 +9654,7 @@
           </a:bodyPr>
           <a:lstStyle/>
           <a:p>
-            <a:pPr algn="ctr" indent="0" marL="0">
+            <a:pPr marL="0" indent="0" algn="ctr">
               <a:buNone/>
             </a:pPr>
             <a:r>
@@ -9979,7 +9715,7 @@
           <a:bodyPr wrap="square" lIns="0" tIns="0" rIns="0" bIns="0" rtlCol="0" anchor="ctr"/>
           <a:lstStyle/>
           <a:p>
-            <a:pPr algn="ctr" indent="0" marL="0">
+            <a:pPr marL="0" indent="0" algn="ctr">
               <a:buNone/>
             </a:pPr>
             <a:r>
@@ -10017,7 +9753,7 @@
           </a:bodyPr>
           <a:lstStyle/>
           <a:p>
-            <a:pPr algn="ctr" indent="0" marL="0">
+            <a:pPr marL="0" indent="0" algn="ctr">
               <a:buNone/>
             </a:pPr>
             <a:r>
@@ -10078,7 +9814,7 @@
           <a:bodyPr wrap="square" lIns="0" tIns="0" rIns="0" bIns="0" rtlCol="0" anchor="ctr"/>
           <a:lstStyle/>
           <a:p>
-            <a:pPr algn="ctr" indent="0" marL="0">
+            <a:pPr marL="0" indent="0" algn="ctr">
               <a:buNone/>
             </a:pPr>
             <a:r>
@@ -10116,7 +9852,7 @@
           </a:bodyPr>
           <a:lstStyle/>
           <a:p>
-            <a:pPr algn="ctr" indent="0" marL="0">
+            <a:pPr marL="0" indent="0" algn="ctr">
               <a:buNone/>
             </a:pPr>
             <a:r>
@@ -10139,7 +9875,7 @@
         </p:nvSpPr>
         <p:spPr>
           <a:xfrm>
-            <a:off x="8138160" y="1188720"/>
+            <a:off x="8138160" y="1021455"/>
             <a:ext cx="2834640" cy="182880"/>
           </a:xfrm>
           <a:prstGeom prst="rect">
@@ -10152,7 +9888,7 @@
           <a:bodyPr wrap="square" lIns="0" tIns="0" rIns="0" bIns="0" rtlCol="0" anchor="ctr"/>
           <a:lstStyle/>
           <a:p>
-            <a:pPr indent="0" marL="0">
+            <a:pPr marL="0" indent="0">
               <a:buNone/>
             </a:pPr>
             <a:r>
@@ -10213,7 +9949,7 @@
           <a:bodyPr wrap="square" lIns="0" tIns="0" rIns="0" bIns="0" rtlCol="0" anchor="ctr"/>
           <a:lstStyle/>
           <a:p>
-            <a:pPr algn="ctr" indent="0" marL="0">
+            <a:pPr marL="0" indent="0" algn="ctr">
               <a:buNone/>
             </a:pPr>
             <a:r>
@@ -10251,7 +9987,7 @@
           </a:bodyPr>
           <a:lstStyle/>
           <a:p>
-            <a:pPr algn="ctr" indent="0" marL="0">
+            <a:pPr marL="0" indent="0" algn="ctr">
               <a:buNone/>
             </a:pPr>
             <a:r>
@@ -10312,7 +10048,7 @@
           <a:bodyPr wrap="square" lIns="0" tIns="0" rIns="0" bIns="0" rtlCol="0" anchor="ctr"/>
           <a:lstStyle/>
           <a:p>
-            <a:pPr algn="ctr" indent="0" marL="0">
+            <a:pPr marL="0" indent="0" algn="ctr">
               <a:buNone/>
             </a:pPr>
             <a:r>
@@ -10350,7 +10086,7 @@
           </a:bodyPr>
           <a:lstStyle/>
           <a:p>
-            <a:pPr algn="ctr" indent="0" marL="0">
+            <a:pPr marL="0" indent="0" algn="ctr">
               <a:buNone/>
             </a:pPr>
             <a:r>
@@ -10411,7 +10147,7 @@
           <a:bodyPr wrap="square" lIns="0" tIns="0" rIns="0" bIns="0" rtlCol="0" anchor="ctr"/>
           <a:lstStyle/>
           <a:p>
-            <a:pPr algn="ctr" indent="0" marL="0">
+            <a:pPr marL="0" indent="0" algn="ctr">
               <a:buNone/>
             </a:pPr>
             <a:r>
@@ -10449,7 +10185,7 @@
           </a:bodyPr>
           <a:lstStyle/>
           <a:p>
-            <a:pPr algn="ctr" indent="0" marL="0">
+            <a:pPr marL="0" indent="0" algn="ctr">
               <a:buNone/>
             </a:pPr>
             <a:r>
@@ -10512,7 +10248,7 @@
           <a:bodyPr wrap="square" lIns="0" tIns="0" rIns="0" bIns="0" rtlCol="0" anchor="ctr"/>
           <a:lstStyle/>
           <a:p>
-            <a:pPr indent="0" marL="0">
+            <a:pPr marL="0" indent="0">
               <a:buNone/>
             </a:pPr>
             <a:r>
@@ -10550,7 +10286,7 @@
           </a:bodyPr>
           <a:lstStyle/>
           <a:p>
-            <a:pPr indent="0" marL="0">
+            <a:pPr marL="0" indent="0">
               <a:buNone/>
             </a:pPr>
             <a:r>
@@ -10588,7 +10324,7 @@
           </a:bodyPr>
           <a:lstStyle/>
           <a:p>
-            <a:pPr indent="0" marL="0">
+            <a:pPr marL="0" indent="0">
               <a:buNone/>
             </a:pPr>
             <a:r>
@@ -10651,7 +10387,7 @@
           <a:bodyPr wrap="square" lIns="0" tIns="0" rIns="0" bIns="0" rtlCol="0" anchor="ctr"/>
           <a:lstStyle/>
           <a:p>
-            <a:pPr indent="0" marL="0">
+            <a:pPr marL="0" indent="0">
               <a:buNone/>
             </a:pPr>
             <a:r>
@@ -10689,7 +10425,7 @@
           </a:bodyPr>
           <a:lstStyle/>
           <a:p>
-            <a:pPr indent="0" marL="0">
+            <a:pPr marL="0" indent="0">
               <a:buNone/>
             </a:pPr>
             <a:r>
@@ -10727,7 +10463,7 @@
           </a:bodyPr>
           <a:lstStyle/>
           <a:p>
-            <a:pPr indent="0" marL="0">
+            <a:pPr marL="0" indent="0">
               <a:buNone/>
             </a:pPr>
             <a:r>
@@ -10790,7 +10526,7 @@
           <a:bodyPr wrap="square" lIns="0" tIns="0" rIns="0" bIns="0" rtlCol="0" anchor="ctr"/>
           <a:lstStyle/>
           <a:p>
-            <a:pPr indent="0" marL="0">
+            <a:pPr marL="0" indent="0">
               <a:buNone/>
             </a:pPr>
             <a:r>
@@ -10828,7 +10564,7 @@
           </a:bodyPr>
           <a:lstStyle/>
           <a:p>
-            <a:pPr indent="0" marL="0">
+            <a:pPr marL="0" indent="0">
               <a:buNone/>
             </a:pPr>
             <a:r>
@@ -10866,7 +10602,7 @@
           </a:bodyPr>
           <a:lstStyle/>
           <a:p>
-            <a:pPr indent="0" marL="0">
+            <a:pPr marL="0" indent="0">
               <a:buNone/>
             </a:pPr>
             <a:r>
@@ -10904,7 +10640,7 @@
           </a:bodyPr>
           <a:lstStyle/>
           <a:p>
-            <a:pPr algn="ctr" indent="0" marL="0">
+            <a:pPr marL="0" indent="0" algn="ctr">
               <a:buNone/>
             </a:pPr>
             <a:r>
@@ -10935,6 +10671,7 @@
         <a:solidFill>
           <a:srgbClr val="FFFFFF"/>
         </a:solidFill>
+        <a:effectLst/>
       </p:bgPr>
     </p:bg>
     <p:spTree>
@@ -11022,7 +10759,7 @@
           <a:bodyPr wrap="square" lIns="0" tIns="0" rIns="0" bIns="0" rtlCol="0" anchor="ctr"/>
           <a:lstStyle/>
           <a:p>
-            <a:pPr indent="0" marL="0">
+            <a:pPr marL="0" indent="0">
               <a:buNone/>
             </a:pPr>
             <a:r>
@@ -11063,7 +10800,7 @@
           </a:bodyPr>
           <a:lstStyle/>
           <a:p>
-            <a:pPr indent="0" marL="0">
+            <a:pPr marL="0" indent="0">
               <a:buNone/>
             </a:pPr>
             <a:r>
@@ -11102,7 +10839,7 @@
           <a:bodyPr wrap="square" lIns="0" tIns="0" rIns="0" bIns="0" rtlCol="0" anchor="ctr"/>
           <a:lstStyle/>
           <a:p>
-            <a:pPr algn="r" indent="0" marL="0">
+            <a:pPr marL="0" indent="0" algn="r">
               <a:buNone/>
             </a:pPr>
             <a:r>
@@ -11167,7 +10904,7 @@
           </a:bodyPr>
           <a:lstStyle/>
           <a:p>
-            <a:pPr indent="0" marL="0">
+            <a:pPr marL="0" indent="0">
               <a:buNone/>
             </a:pPr>
             <a:r>
@@ -11205,7 +10942,7 @@
           </a:bodyPr>
           <a:lstStyle/>
           <a:p>
-            <a:pPr indent="0" marL="0">
+            <a:pPr marL="0" indent="0">
               <a:buNone/>
             </a:pPr>
             <a:r>
@@ -11228,7 +10965,7 @@
         </p:nvSpPr>
         <p:spPr>
           <a:xfrm>
-            <a:off x="804672" y="1709928"/>
+            <a:off x="804672" y="1877193"/>
             <a:ext cx="1499616" cy="182880"/>
           </a:xfrm>
           <a:prstGeom prst="rect">
@@ -11243,7 +10980,7 @@
           </a:bodyPr>
           <a:lstStyle/>
           <a:p>
-            <a:pPr indent="0" marL="0">
+            <a:pPr marL="0" indent="0">
               <a:buNone/>
             </a:pPr>
             <a:r>
@@ -11308,7 +11045,7 @@
           </a:bodyPr>
           <a:lstStyle/>
           <a:p>
-            <a:pPr indent="0" marL="0">
+            <a:pPr marL="0" indent="0">
               <a:buNone/>
             </a:pPr>
             <a:r>
@@ -11346,7 +11083,7 @@
           </a:bodyPr>
           <a:lstStyle/>
           <a:p>
-            <a:pPr indent="0" marL="0">
+            <a:pPr marL="0" indent="0">
               <a:buNone/>
             </a:pPr>
             <a:r>
@@ -11369,7 +11106,7 @@
         </p:nvSpPr>
         <p:spPr>
           <a:xfrm>
-            <a:off x="2816352" y="1709928"/>
+            <a:off x="2816352" y="1877193"/>
             <a:ext cx="1088136" cy="182880"/>
           </a:xfrm>
           <a:prstGeom prst="rect">
@@ -11384,7 +11121,7 @@
           </a:bodyPr>
           <a:lstStyle/>
           <a:p>
-            <a:pPr indent="0" marL="0">
+            <a:pPr marL="0" indent="0">
               <a:buNone/>
             </a:pPr>
             <a:r>
@@ -11449,7 +11186,7 @@
           </a:bodyPr>
           <a:lstStyle/>
           <a:p>
-            <a:pPr indent="0" marL="0">
+            <a:pPr marL="0" indent="0">
               <a:buNone/>
             </a:pPr>
             <a:r>
@@ -11487,7 +11224,7 @@
           </a:bodyPr>
           <a:lstStyle/>
           <a:p>
-            <a:pPr indent="0" marL="0">
+            <a:pPr marL="0" indent="0">
               <a:buNone/>
             </a:pPr>
             <a:r>
@@ -11510,7 +11247,7 @@
         </p:nvSpPr>
         <p:spPr>
           <a:xfrm>
-            <a:off x="4416552" y="1709928"/>
+            <a:off x="4416552" y="1877193"/>
             <a:ext cx="1088136" cy="182880"/>
           </a:xfrm>
           <a:prstGeom prst="rect">
@@ -11525,7 +11262,7 @@
           </a:bodyPr>
           <a:lstStyle/>
           <a:p>
-            <a:pPr indent="0" marL="0">
+            <a:pPr marL="0" indent="0">
               <a:buNone/>
             </a:pPr>
             <a:r>
@@ -11590,7 +11327,7 @@
           </a:bodyPr>
           <a:lstStyle/>
           <a:p>
-            <a:pPr indent="0" marL="0">
+            <a:pPr marL="0" indent="0">
               <a:buNone/>
             </a:pPr>
             <a:r>
@@ -11628,7 +11365,7 @@
           </a:bodyPr>
           <a:lstStyle/>
           <a:p>
-            <a:pPr indent="0" marL="0">
+            <a:pPr marL="0" indent="0">
               <a:buNone/>
             </a:pPr>
             <a:r>
@@ -11651,7 +11388,7 @@
         </p:nvSpPr>
         <p:spPr>
           <a:xfrm>
-            <a:off x="6016752" y="1709928"/>
+            <a:off x="6016752" y="1877193"/>
             <a:ext cx="1499616" cy="182880"/>
           </a:xfrm>
           <a:prstGeom prst="rect">
@@ -11666,7 +11403,7 @@
           </a:bodyPr>
           <a:lstStyle/>
           <a:p>
-            <a:pPr indent="0" marL="0">
+            <a:pPr marL="0" indent="0">
               <a:buNone/>
             </a:pPr>
             <a:r>
@@ -11689,7 +11426,7 @@
         </p:nvSpPr>
         <p:spPr>
           <a:xfrm>
-            <a:off x="640080" y="2286000"/>
+            <a:off x="640080" y="2118735"/>
             <a:ext cx="2926080" cy="182880"/>
           </a:xfrm>
           <a:prstGeom prst="rect">
@@ -11702,7 +11439,7 @@
           <a:bodyPr wrap="square" lIns="0" tIns="0" rIns="0" bIns="0" rtlCol="0" anchor="ctr"/>
           <a:lstStyle/>
           <a:p>
-            <a:pPr indent="0" marL="0">
+            <a:pPr marL="0" indent="0">
               <a:buNone/>
             </a:pPr>
             <a:r>
@@ -11763,7 +11500,7 @@
           <a:bodyPr wrap="square" lIns="0" tIns="0" rIns="0" bIns="0" rtlCol="0" anchor="ctr"/>
           <a:lstStyle/>
           <a:p>
-            <a:pPr algn="ctr" indent="0" marL="0">
+            <a:pPr marL="0" indent="0" algn="ctr">
               <a:buNone/>
             </a:pPr>
             <a:r>
@@ -11801,7 +11538,7 @@
           </a:bodyPr>
           <a:lstStyle/>
           <a:p>
-            <a:pPr algn="ctr" indent="0" marL="0">
+            <a:pPr marL="0" indent="0" algn="ctr">
               <a:buNone/>
             </a:pPr>
             <a:r>
@@ -11862,7 +11599,7 @@
           <a:bodyPr wrap="square" lIns="0" tIns="0" rIns="0" bIns="0" rtlCol="0" anchor="ctr"/>
           <a:lstStyle/>
           <a:p>
-            <a:pPr algn="ctr" indent="0" marL="0">
+            <a:pPr marL="0" indent="0" algn="ctr">
               <a:buNone/>
             </a:pPr>
             <a:r>
@@ -11900,7 +11637,7 @@
           </a:bodyPr>
           <a:lstStyle/>
           <a:p>
-            <a:pPr algn="ctr" indent="0" marL="0">
+            <a:pPr marL="0" indent="0" algn="ctr">
               <a:buNone/>
             </a:pPr>
             <a:r>
@@ -11961,7 +11698,7 @@
           <a:bodyPr wrap="square" lIns="0" tIns="0" rIns="0" bIns="0" rtlCol="0" anchor="ctr"/>
           <a:lstStyle/>
           <a:p>
-            <a:pPr algn="ctr" indent="0" marL="0">
+            <a:pPr marL="0" indent="0" algn="ctr">
               <a:buNone/>
             </a:pPr>
             <a:r>
@@ -11999,7 +11736,7 @@
           </a:bodyPr>
           <a:lstStyle/>
           <a:p>
-            <a:pPr algn="ctr" indent="0" marL="0">
+            <a:pPr marL="0" indent="0" algn="ctr">
               <a:buNone/>
             </a:pPr>
             <a:r>
@@ -12022,7 +11759,7 @@
         </p:nvSpPr>
         <p:spPr>
           <a:xfrm>
-            <a:off x="3977640" y="2286000"/>
+            <a:off x="3977640" y="2107584"/>
             <a:ext cx="3657600" cy="182880"/>
           </a:xfrm>
           <a:prstGeom prst="rect">
@@ -12035,7 +11772,7 @@
           <a:bodyPr wrap="square" lIns="0" tIns="0" rIns="0" bIns="0" rtlCol="0" anchor="ctr"/>
           <a:lstStyle/>
           <a:p>
-            <a:pPr indent="0" marL="0">
+            <a:pPr marL="0" indent="0">
               <a:buNone/>
             </a:pPr>
             <a:r>
@@ -12096,7 +11833,7 @@
           <a:bodyPr wrap="square" lIns="0" tIns="0" rIns="0" bIns="0" rtlCol="0" anchor="ctr"/>
           <a:lstStyle/>
           <a:p>
-            <a:pPr algn="ctr" indent="0" marL="0">
+            <a:pPr marL="0" indent="0" algn="ctr">
               <a:buNone/>
             </a:pPr>
             <a:r>
@@ -12134,7 +11871,7 @@
           </a:bodyPr>
           <a:lstStyle/>
           <a:p>
-            <a:pPr algn="ctr" indent="0" marL="0">
+            <a:pPr marL="0" indent="0" algn="ctr">
               <a:buNone/>
             </a:pPr>
             <a:r>
@@ -12195,7 +11932,7 @@
           <a:bodyPr wrap="square" lIns="0" tIns="0" rIns="0" bIns="0" rtlCol="0" anchor="ctr"/>
           <a:lstStyle/>
           <a:p>
-            <a:pPr algn="ctr" indent="0" marL="0">
+            <a:pPr marL="0" indent="0" algn="ctr">
               <a:buNone/>
             </a:pPr>
             <a:r>
@@ -12233,7 +11970,7 @@
           </a:bodyPr>
           <a:lstStyle/>
           <a:p>
-            <a:pPr algn="ctr" indent="0" marL="0">
+            <a:pPr marL="0" indent="0" algn="ctr">
               <a:buNone/>
             </a:pPr>
             <a:r>
@@ -12294,7 +12031,7 @@
           <a:bodyPr wrap="square" lIns="0" tIns="0" rIns="0" bIns="0" rtlCol="0" anchor="ctr"/>
           <a:lstStyle/>
           <a:p>
-            <a:pPr algn="ctr" indent="0" marL="0">
+            <a:pPr marL="0" indent="0" algn="ctr">
               <a:buNone/>
             </a:pPr>
             <a:r>
@@ -12332,7 +12069,7 @@
           </a:bodyPr>
           <a:lstStyle/>
           <a:p>
-            <a:pPr algn="ctr" indent="0" marL="0">
+            <a:pPr marL="0" indent="0" algn="ctr">
               <a:buNone/>
             </a:pPr>
             <a:r>
@@ -12395,7 +12132,7 @@
           <a:bodyPr wrap="square" lIns="0" tIns="0" rIns="0" bIns="0" rtlCol="0" anchor="ctr"/>
           <a:lstStyle/>
           <a:p>
-            <a:pPr indent="0" marL="0">
+            <a:pPr marL="0" indent="0">
               <a:buNone/>
             </a:pPr>
             <a:r>
@@ -12433,7 +12170,7 @@
           </a:bodyPr>
           <a:lstStyle/>
           <a:p>
-            <a:pPr indent="0" marL="0">
+            <a:pPr marL="0" indent="0">
               <a:buNone/>
             </a:pPr>
             <a:r>
@@ -12447,7 +12184,7 @@
             <a:endParaRPr lang="en-US" sz="1050" dirty="0"/>
           </a:p>
           <a:p>
-            <a:pPr indent="0" marL="0">
+            <a:pPr marL="0" indent="0">
               <a:buNone/>
             </a:pPr>
             <a:r>
@@ -12461,7 +12198,7 @@
             <a:endParaRPr lang="en-US" sz="1050" dirty="0"/>
           </a:p>
           <a:p>
-            <a:pPr indent="0" marL="0">
+            <a:pPr marL="0" indent="0">
               <a:buNone/>
             </a:pPr>
             <a:r>
@@ -12497,7 +12234,7 @@
           <a:bodyPr wrap="square" lIns="0" tIns="0" rIns="0" bIns="0" rtlCol="0" anchor="ctr"/>
           <a:lstStyle/>
           <a:p>
-            <a:pPr indent="0" marL="0">
+            <a:pPr marL="0" indent="0">
               <a:buNone/>
             </a:pPr>
             <a:r>
@@ -12535,7 +12272,7 @@
           </a:bodyPr>
           <a:lstStyle/>
           <a:p>
-            <a:pPr indent="0" marL="0">
+            <a:pPr marL="0" indent="0">
               <a:buNone/>
             </a:pPr>
             <a:r>
@@ -12566,6 +12303,7 @@
         <a:solidFill>
           <a:srgbClr val="FFFFFF"/>
         </a:solidFill>
+        <a:effectLst/>
       </p:bgPr>
     </p:bg>
     <p:spTree>
@@ -12653,7 +12391,7 @@
           <a:bodyPr wrap="square" lIns="0" tIns="0" rIns="0" bIns="0" rtlCol="0" anchor="ctr"/>
           <a:lstStyle/>
           <a:p>
-            <a:pPr indent="0" marL="0">
+            <a:pPr marL="0" indent="0">
               <a:buNone/>
             </a:pPr>
             <a:r>
@@ -12694,7 +12432,7 @@
           </a:bodyPr>
           <a:lstStyle/>
           <a:p>
-            <a:pPr indent="0" marL="0">
+            <a:pPr marL="0" indent="0">
               <a:buNone/>
             </a:pPr>
             <a:r>
@@ -12733,7 +12471,7 @@
           <a:bodyPr wrap="square" lIns="0" tIns="0" rIns="0" bIns="0" rtlCol="0" anchor="ctr"/>
           <a:lstStyle/>
           <a:p>
-            <a:pPr algn="r" indent="0" marL="0">
+            <a:pPr marL="0" indent="0" algn="r">
               <a:buNone/>
             </a:pPr>
             <a:r>
@@ -12798,7 +12536,7 @@
           </a:bodyPr>
           <a:lstStyle/>
           <a:p>
-            <a:pPr indent="0" marL="0">
+            <a:pPr marL="0" indent="0">
               <a:buNone/>
             </a:pPr>
             <a:r>
@@ -12836,7 +12574,7 @@
           </a:bodyPr>
           <a:lstStyle/>
           <a:p>
-            <a:pPr indent="0" marL="0">
+            <a:pPr marL="0" indent="0">
               <a:buNone/>
             </a:pPr>
             <a:r>
@@ -12859,7 +12597,7 @@
         </p:nvSpPr>
         <p:spPr>
           <a:xfrm>
-            <a:off x="804672" y="1709928"/>
+            <a:off x="804672" y="1877193"/>
             <a:ext cx="1499616" cy="182880"/>
           </a:xfrm>
           <a:prstGeom prst="rect">
@@ -12874,7 +12612,7 @@
           </a:bodyPr>
           <a:lstStyle/>
           <a:p>
-            <a:pPr indent="0" marL="0">
+            <a:pPr marL="0" indent="0">
               <a:buNone/>
             </a:pPr>
             <a:r>
@@ -12939,7 +12677,7 @@
           </a:bodyPr>
           <a:lstStyle/>
           <a:p>
-            <a:pPr indent="0" marL="0">
+            <a:pPr marL="0" indent="0">
               <a:buNone/>
             </a:pPr>
             <a:r>
@@ -12977,7 +12715,7 @@
           </a:bodyPr>
           <a:lstStyle/>
           <a:p>
-            <a:pPr indent="0" marL="0">
+            <a:pPr marL="0" indent="0">
               <a:buNone/>
             </a:pPr>
             <a:r>
@@ -13000,7 +12738,7 @@
         </p:nvSpPr>
         <p:spPr>
           <a:xfrm>
-            <a:off x="2816352" y="1709928"/>
+            <a:off x="2816352" y="1877193"/>
             <a:ext cx="1499616" cy="182880"/>
           </a:xfrm>
           <a:prstGeom prst="rect">
@@ -13015,7 +12753,7 @@
           </a:bodyPr>
           <a:lstStyle/>
           <a:p>
-            <a:pPr indent="0" marL="0">
+            <a:pPr marL="0" indent="0">
               <a:buNone/>
             </a:pPr>
             <a:r>
@@ -13080,7 +12818,7 @@
           </a:bodyPr>
           <a:lstStyle/>
           <a:p>
-            <a:pPr indent="0" marL="0">
+            <a:pPr marL="0" indent="0">
               <a:buNone/>
             </a:pPr>
             <a:r>
@@ -13118,7 +12856,7 @@
           </a:bodyPr>
           <a:lstStyle/>
           <a:p>
-            <a:pPr indent="0" marL="0">
+            <a:pPr marL="0" indent="0">
               <a:buNone/>
             </a:pPr>
             <a:r>
@@ -13141,7 +12879,7 @@
         </p:nvSpPr>
         <p:spPr>
           <a:xfrm>
-            <a:off x="4828032" y="1709928"/>
+            <a:off x="4828032" y="1877193"/>
             <a:ext cx="1499616" cy="182880"/>
           </a:xfrm>
           <a:prstGeom prst="rect">
@@ -13156,7 +12894,7 @@
           </a:bodyPr>
           <a:lstStyle/>
           <a:p>
-            <a:pPr indent="0" marL="0">
+            <a:pPr marL="0" indent="0">
               <a:buNone/>
             </a:pPr>
             <a:r>
@@ -13221,7 +12959,7 @@
           </a:bodyPr>
           <a:lstStyle/>
           <a:p>
-            <a:pPr indent="0" marL="0">
+            <a:pPr marL="0" indent="0">
               <a:buNone/>
             </a:pPr>
             <a:r>
@@ -13259,7 +12997,7 @@
           </a:bodyPr>
           <a:lstStyle/>
           <a:p>
-            <a:pPr indent="0" marL="0">
+            <a:pPr marL="0" indent="0">
               <a:buNone/>
             </a:pPr>
             <a:r>
@@ -13282,7 +13020,7 @@
         </p:nvSpPr>
         <p:spPr>
           <a:xfrm>
-            <a:off x="6839712" y="1709928"/>
+            <a:off x="6839712" y="1877193"/>
             <a:ext cx="1088136" cy="182880"/>
           </a:xfrm>
           <a:prstGeom prst="rect">
@@ -13297,7 +13035,7 @@
           </a:bodyPr>
           <a:lstStyle/>
           <a:p>
-            <a:pPr indent="0" marL="0">
+            <a:pPr marL="0" indent="0">
               <a:buNone/>
             </a:pPr>
             <a:r>
@@ -13320,7 +13058,7 @@
         </p:nvSpPr>
         <p:spPr>
           <a:xfrm>
-            <a:off x="640080" y="2286000"/>
+            <a:off x="640080" y="2118735"/>
             <a:ext cx="3429000" cy="182880"/>
           </a:xfrm>
           <a:prstGeom prst="rect">
@@ -13333,7 +13071,7 @@
           <a:bodyPr wrap="square" lIns="0" tIns="0" rIns="0" bIns="0" rtlCol="0" anchor="ctr"/>
           <a:lstStyle/>
           <a:p>
-            <a:pPr indent="0" marL="0">
+            <a:pPr marL="0" indent="0">
               <a:buNone/>
             </a:pPr>
             <a:r>
@@ -13394,7 +13132,7 @@
           <a:bodyPr wrap="square" lIns="0" tIns="0" rIns="0" bIns="0" rtlCol="0" anchor="ctr"/>
           <a:lstStyle/>
           <a:p>
-            <a:pPr algn="ctr" indent="0" marL="0">
+            <a:pPr marL="0" indent="0" algn="ctr">
               <a:buNone/>
             </a:pPr>
             <a:r>
@@ -13432,7 +13170,7 @@
           </a:bodyPr>
           <a:lstStyle/>
           <a:p>
-            <a:pPr algn="ctr" indent="0" marL="0">
+            <a:pPr marL="0" indent="0" algn="ctr">
               <a:buNone/>
             </a:pPr>
             <a:r>
@@ -13493,7 +13231,7 @@
           <a:bodyPr wrap="square" lIns="0" tIns="0" rIns="0" bIns="0" rtlCol="0" anchor="ctr"/>
           <a:lstStyle/>
           <a:p>
-            <a:pPr algn="ctr" indent="0" marL="0">
+            <a:pPr marL="0" indent="0" algn="ctr">
               <a:buNone/>
             </a:pPr>
             <a:r>
@@ -13531,7 +13269,7 @@
           </a:bodyPr>
           <a:lstStyle/>
           <a:p>
-            <a:pPr algn="ctr" indent="0" marL="0">
+            <a:pPr marL="0" indent="0" algn="ctr">
               <a:buNone/>
             </a:pPr>
             <a:r>
@@ -13592,7 +13330,7 @@
           <a:bodyPr wrap="square" lIns="0" tIns="0" rIns="0" bIns="0" rtlCol="0" anchor="ctr"/>
           <a:lstStyle/>
           <a:p>
-            <a:pPr algn="ctr" indent="0" marL="0">
+            <a:pPr marL="0" indent="0" algn="ctr">
               <a:buNone/>
             </a:pPr>
             <a:r>
@@ -13630,7 +13368,7 @@
           </a:bodyPr>
           <a:lstStyle/>
           <a:p>
-            <a:pPr algn="ctr" indent="0" marL="0">
+            <a:pPr marL="0" indent="0" algn="ctr">
               <a:buNone/>
             </a:pPr>
             <a:r>
@@ -13653,7 +13391,7 @@
         </p:nvSpPr>
         <p:spPr>
           <a:xfrm>
-            <a:off x="4480560" y="2286000"/>
+            <a:off x="4480560" y="2118735"/>
             <a:ext cx="3200400" cy="182880"/>
           </a:xfrm>
           <a:prstGeom prst="rect">
@@ -13666,7 +13404,7 @@
           <a:bodyPr wrap="square" lIns="0" tIns="0" rIns="0" bIns="0" rtlCol="0" anchor="ctr"/>
           <a:lstStyle/>
           <a:p>
-            <a:pPr indent="0" marL="0">
+            <a:pPr marL="0" indent="0">
               <a:buNone/>
             </a:pPr>
             <a:r>
@@ -13727,7 +13465,7 @@
           <a:bodyPr wrap="square" lIns="0" tIns="0" rIns="0" bIns="0" rtlCol="0" anchor="ctr"/>
           <a:lstStyle/>
           <a:p>
-            <a:pPr algn="ctr" indent="0" marL="0">
+            <a:pPr marL="0" indent="0" algn="ctr">
               <a:buNone/>
             </a:pPr>
             <a:r>
@@ -13765,7 +13503,7 @@
           </a:bodyPr>
           <a:lstStyle/>
           <a:p>
-            <a:pPr algn="ctr" indent="0" marL="0">
+            <a:pPr marL="0" indent="0" algn="ctr">
               <a:buNone/>
             </a:pPr>
             <a:r>
@@ -13826,7 +13564,7 @@
           <a:bodyPr wrap="square" lIns="0" tIns="0" rIns="0" bIns="0" rtlCol="0" anchor="ctr"/>
           <a:lstStyle/>
           <a:p>
-            <a:pPr algn="ctr" indent="0" marL="0">
+            <a:pPr marL="0" indent="0" algn="ctr">
               <a:buNone/>
             </a:pPr>
             <a:r>
@@ -13864,7 +13602,7 @@
           </a:bodyPr>
           <a:lstStyle/>
           <a:p>
-            <a:pPr algn="ctr" indent="0" marL="0">
+            <a:pPr marL="0" indent="0" algn="ctr">
               <a:buNone/>
             </a:pPr>
             <a:r>
@@ -13925,7 +13663,7 @@
           <a:bodyPr wrap="square" lIns="0" tIns="0" rIns="0" bIns="0" rtlCol="0" anchor="ctr"/>
           <a:lstStyle/>
           <a:p>
-            <a:pPr algn="ctr" indent="0" marL="0">
+            <a:pPr marL="0" indent="0" algn="ctr">
               <a:buNone/>
             </a:pPr>
             <a:r>
@@ -13963,7 +13701,7 @@
           </a:bodyPr>
           <a:lstStyle/>
           <a:p>
-            <a:pPr algn="ctr" indent="0" marL="0">
+            <a:pPr marL="0" indent="0" algn="ctr">
               <a:buNone/>
             </a:pPr>
             <a:r>
@@ -14024,7 +13762,7 @@
           <a:bodyPr wrap="square" lIns="0" tIns="0" rIns="0" bIns="0" rtlCol="0" anchor="ctr"/>
           <a:lstStyle/>
           <a:p>
-            <a:pPr algn="ctr" indent="0" marL="0">
+            <a:pPr marL="0" indent="0" algn="ctr">
               <a:buNone/>
             </a:pPr>
             <a:r>
@@ -14062,7 +13800,7 @@
           </a:bodyPr>
           <a:lstStyle/>
           <a:p>
-            <a:pPr algn="ctr" indent="0" marL="0">
+            <a:pPr marL="0" indent="0" algn="ctr">
               <a:buNone/>
             </a:pPr>
             <a:r>
@@ -14125,7 +13863,7 @@
           <a:bodyPr wrap="square" lIns="0" tIns="0" rIns="0" bIns="0" rtlCol="0" anchor="ctr"/>
           <a:lstStyle/>
           <a:p>
-            <a:pPr indent="0" marL="0">
+            <a:pPr marL="0" indent="0">
               <a:buNone/>
             </a:pPr>
             <a:r>
@@ -14163,7 +13901,7 @@
           </a:bodyPr>
           <a:lstStyle/>
           <a:p>
-            <a:pPr indent="0" marL="0">
+            <a:pPr marL="0" indent="0">
               <a:buNone/>
             </a:pPr>
             <a:r>
@@ -14199,7 +13937,7 @@
           <a:bodyPr wrap="square" lIns="0" tIns="0" rIns="0" bIns="0" rtlCol="0" anchor="ctr"/>
           <a:lstStyle/>
           <a:p>
-            <a:pPr indent="0" marL="0">
+            <a:pPr marL="0" indent="0">
               <a:buNone/>
             </a:pPr>
             <a:r>
@@ -14237,7 +13975,7 @@
           </a:bodyPr>
           <a:lstStyle/>
           <a:p>
-            <a:pPr indent="0" marL="0">
+            <a:pPr marL="0" indent="0">
               <a:buNone/>
             </a:pPr>
             <a:r>
@@ -14268,6 +14006,7 @@
         <a:solidFill>
           <a:srgbClr val="FFFFFF"/>
         </a:solidFill>
+        <a:effectLst/>
       </p:bgPr>
     </p:bg>
     <p:spTree>
@@ -14355,7 +14094,7 @@
           <a:bodyPr wrap="square" lIns="0" tIns="0" rIns="0" bIns="0" rtlCol="0" anchor="ctr"/>
           <a:lstStyle/>
           <a:p>
-            <a:pPr indent="0" marL="0">
+            <a:pPr marL="0" indent="0">
               <a:buNone/>
             </a:pPr>
             <a:r>
@@ -14396,7 +14135,7 @@
           </a:bodyPr>
           <a:lstStyle/>
           <a:p>
-            <a:pPr indent="0" marL="0">
+            <a:pPr marL="0" indent="0">
               <a:buNone/>
             </a:pPr>
             <a:r>
@@ -14435,7 +14174,7 @@
           <a:bodyPr wrap="square" lIns="0" tIns="0" rIns="0" bIns="0" rtlCol="0" anchor="ctr"/>
           <a:lstStyle/>
           <a:p>
-            <a:pPr algn="r" indent="0" marL="0">
+            <a:pPr marL="0" indent="0" algn="r">
               <a:buNone/>
             </a:pPr>
             <a:r>
@@ -14500,7 +14239,7 @@
           </a:bodyPr>
           <a:lstStyle/>
           <a:p>
-            <a:pPr indent="0" marL="0">
+            <a:pPr marL="0" indent="0">
               <a:buNone/>
             </a:pPr>
             <a:r>
@@ -14538,7 +14277,7 @@
           </a:bodyPr>
           <a:lstStyle/>
           <a:p>
-            <a:pPr indent="0" marL="0">
+            <a:pPr marL="0" indent="0">
               <a:buNone/>
             </a:pPr>
             <a:r>
@@ -14561,7 +14300,7 @@
         </p:nvSpPr>
         <p:spPr>
           <a:xfrm>
-            <a:off x="804672" y="1709928"/>
+            <a:off x="804672" y="1877193"/>
             <a:ext cx="1499616" cy="182880"/>
           </a:xfrm>
           <a:prstGeom prst="rect">
@@ -14576,7 +14315,7 @@
           </a:bodyPr>
           <a:lstStyle/>
           <a:p>
-            <a:pPr indent="0" marL="0">
+            <a:pPr marL="0" indent="0">
               <a:buNone/>
             </a:pPr>
             <a:r>
@@ -14641,7 +14380,7 @@
           </a:bodyPr>
           <a:lstStyle/>
           <a:p>
-            <a:pPr indent="0" marL="0">
+            <a:pPr marL="0" indent="0">
               <a:buNone/>
             </a:pPr>
             <a:r>
@@ -14679,7 +14418,7 @@
           </a:bodyPr>
           <a:lstStyle/>
           <a:p>
-            <a:pPr indent="0" marL="0">
+            <a:pPr marL="0" indent="0">
               <a:buNone/>
             </a:pPr>
             <a:r>
@@ -14702,7 +14441,7 @@
         </p:nvSpPr>
         <p:spPr>
           <a:xfrm>
-            <a:off x="2816352" y="1709928"/>
+            <a:off x="2816352" y="1877193"/>
             <a:ext cx="1499616" cy="182880"/>
           </a:xfrm>
           <a:prstGeom prst="rect">
@@ -14717,7 +14456,7 @@
           </a:bodyPr>
           <a:lstStyle/>
           <a:p>
-            <a:pPr indent="0" marL="0">
+            <a:pPr marL="0" indent="0">
               <a:buNone/>
             </a:pPr>
             <a:r>
@@ -14782,7 +14521,7 @@
           </a:bodyPr>
           <a:lstStyle/>
           <a:p>
-            <a:pPr indent="0" marL="0">
+            <a:pPr marL="0" indent="0">
               <a:buNone/>
             </a:pPr>
             <a:r>
@@ -14820,7 +14559,7 @@
           </a:bodyPr>
           <a:lstStyle/>
           <a:p>
-            <a:pPr indent="0" marL="0">
+            <a:pPr marL="0" indent="0">
               <a:buNone/>
             </a:pPr>
             <a:r>
@@ -14843,7 +14582,7 @@
         </p:nvSpPr>
         <p:spPr>
           <a:xfrm>
-            <a:off x="4828032" y="1709928"/>
+            <a:off x="4828032" y="1877193"/>
             <a:ext cx="1499616" cy="182880"/>
           </a:xfrm>
           <a:prstGeom prst="rect">
@@ -14858,7 +14597,7 @@
           </a:bodyPr>
           <a:lstStyle/>
           <a:p>
-            <a:pPr indent="0" marL="0">
+            <a:pPr marL="0" indent="0">
               <a:buNone/>
             </a:pPr>
             <a:r>
@@ -14923,7 +14662,7 @@
           </a:bodyPr>
           <a:lstStyle/>
           <a:p>
-            <a:pPr indent="0" marL="0">
+            <a:pPr marL="0" indent="0">
               <a:buNone/>
             </a:pPr>
             <a:r>
@@ -14961,7 +14700,7 @@
           </a:bodyPr>
           <a:lstStyle/>
           <a:p>
-            <a:pPr indent="0" marL="0">
+            <a:pPr marL="0" indent="0">
               <a:buNone/>
             </a:pPr>
             <a:r>
@@ -14984,7 +14723,7 @@
         </p:nvSpPr>
         <p:spPr>
           <a:xfrm>
-            <a:off x="6839712" y="1709928"/>
+            <a:off x="6839712" y="1877193"/>
             <a:ext cx="1088136" cy="182880"/>
           </a:xfrm>
           <a:prstGeom prst="rect">
@@ -14999,7 +14738,7 @@
           </a:bodyPr>
           <a:lstStyle/>
           <a:p>
-            <a:pPr indent="0" marL="0">
+            <a:pPr marL="0" indent="0">
               <a:buNone/>
             </a:pPr>
             <a:r>
@@ -15022,7 +14761,7 @@
         </p:nvSpPr>
         <p:spPr>
           <a:xfrm>
-            <a:off x="640080" y="2286000"/>
+            <a:off x="640080" y="2118735"/>
             <a:ext cx="3657600" cy="182880"/>
           </a:xfrm>
           <a:prstGeom prst="rect">
@@ -15035,7 +14774,7 @@
           <a:bodyPr wrap="square" lIns="0" tIns="0" rIns="0" bIns="0" rtlCol="0" anchor="ctr"/>
           <a:lstStyle/>
           <a:p>
-            <a:pPr indent="0" marL="0">
+            <a:pPr marL="0" indent="0">
               <a:buNone/>
             </a:pPr>
             <a:r>
@@ -15096,7 +14835,7 @@
           <a:bodyPr wrap="square" lIns="0" tIns="0" rIns="0" bIns="0" rtlCol="0" anchor="ctr"/>
           <a:lstStyle/>
           <a:p>
-            <a:pPr algn="ctr" indent="0" marL="0">
+            <a:pPr marL="0" indent="0" algn="ctr">
               <a:buNone/>
             </a:pPr>
             <a:r>
@@ -15134,7 +14873,7 @@
           </a:bodyPr>
           <a:lstStyle/>
           <a:p>
-            <a:pPr algn="ctr" indent="0" marL="0">
+            <a:pPr marL="0" indent="0" algn="ctr">
               <a:buNone/>
             </a:pPr>
             <a:r>
@@ -15195,7 +14934,7 @@
           <a:bodyPr wrap="square" lIns="0" tIns="0" rIns="0" bIns="0" rtlCol="0" anchor="ctr"/>
           <a:lstStyle/>
           <a:p>
-            <a:pPr algn="ctr" indent="0" marL="0">
+            <a:pPr marL="0" indent="0" algn="ctr">
               <a:buNone/>
             </a:pPr>
             <a:r>
@@ -15233,7 +14972,7 @@
           </a:bodyPr>
           <a:lstStyle/>
           <a:p>
-            <a:pPr algn="ctr" indent="0" marL="0">
+            <a:pPr marL="0" indent="0" algn="ctr">
               <a:buNone/>
             </a:pPr>
             <a:r>
@@ -15294,7 +15033,7 @@
           <a:bodyPr wrap="square" lIns="0" tIns="0" rIns="0" bIns="0" rtlCol="0" anchor="ctr"/>
           <a:lstStyle/>
           <a:p>
-            <a:pPr algn="ctr" indent="0" marL="0">
+            <a:pPr marL="0" indent="0" algn="ctr">
               <a:buNone/>
             </a:pPr>
             <a:r>
@@ -15332,7 +15071,7 @@
           </a:bodyPr>
           <a:lstStyle/>
           <a:p>
-            <a:pPr algn="ctr" indent="0" marL="0">
+            <a:pPr marL="0" indent="0" algn="ctr">
               <a:buNone/>
             </a:pPr>
             <a:r>
@@ -15393,7 +15132,7 @@
           <a:bodyPr wrap="square" lIns="0" tIns="0" rIns="0" bIns="0" rtlCol="0" anchor="ctr"/>
           <a:lstStyle/>
           <a:p>
-            <a:pPr algn="ctr" indent="0" marL="0">
+            <a:pPr marL="0" indent="0" algn="ctr">
               <a:buNone/>
             </a:pPr>
             <a:r>
@@ -15431,7 +15170,7 @@
           </a:bodyPr>
           <a:lstStyle/>
           <a:p>
-            <a:pPr algn="ctr" indent="0" marL="0">
+            <a:pPr marL="0" indent="0" algn="ctr">
               <a:buNone/>
             </a:pPr>
             <a:r>
@@ -15492,7 +15231,7 @@
           <a:bodyPr wrap="square" lIns="0" tIns="0" rIns="0" bIns="0" rtlCol="0" anchor="ctr"/>
           <a:lstStyle/>
           <a:p>
-            <a:pPr algn="ctr" indent="0" marL="0">
+            <a:pPr marL="0" indent="0" algn="ctr">
               <a:buNone/>
             </a:pPr>
             <a:r>
@@ -15530,7 +15269,7 @@
           </a:bodyPr>
           <a:lstStyle/>
           <a:p>
-            <a:pPr algn="ctr" indent="0" marL="0">
+            <a:pPr marL="0" indent="0" algn="ctr">
               <a:buNone/>
             </a:pPr>
             <a:r>
@@ -15553,7 +15292,7 @@
         </p:nvSpPr>
         <p:spPr>
           <a:xfrm>
-            <a:off x="4709160" y="2286000"/>
+            <a:off x="4709160" y="2118735"/>
             <a:ext cx="3337560" cy="182880"/>
           </a:xfrm>
           <a:prstGeom prst="rect">
@@ -15566,7 +15305,7 @@
           <a:bodyPr wrap="square" lIns="0" tIns="0" rIns="0" bIns="0" rtlCol="0" anchor="ctr"/>
           <a:lstStyle/>
           <a:p>
-            <a:pPr indent="0" marL="0">
+            <a:pPr marL="0" indent="0">
               <a:buNone/>
             </a:pPr>
             <a:r>
@@ -15627,7 +15366,7 @@
           <a:bodyPr wrap="square" lIns="0" tIns="0" rIns="0" bIns="0" rtlCol="0" anchor="ctr"/>
           <a:lstStyle/>
           <a:p>
-            <a:pPr algn="ctr" indent="0" marL="0">
+            <a:pPr marL="0" indent="0" algn="ctr">
               <a:buNone/>
             </a:pPr>
             <a:r>
@@ -15665,7 +15404,7 @@
           </a:bodyPr>
           <a:lstStyle/>
           <a:p>
-            <a:pPr algn="ctr" indent="0" marL="0">
+            <a:pPr marL="0" indent="0" algn="ctr">
               <a:buNone/>
             </a:pPr>
             <a:r>
@@ -15726,7 +15465,7 @@
           <a:bodyPr wrap="square" lIns="0" tIns="0" rIns="0" bIns="0" rtlCol="0" anchor="ctr"/>
           <a:lstStyle/>
           <a:p>
-            <a:pPr algn="ctr" indent="0" marL="0">
+            <a:pPr marL="0" indent="0" algn="ctr">
               <a:buNone/>
             </a:pPr>
             <a:r>
@@ -15764,7 +15503,7 @@
           </a:bodyPr>
           <a:lstStyle/>
           <a:p>
-            <a:pPr algn="ctr" indent="0" marL="0">
+            <a:pPr marL="0" indent="0" algn="ctr">
               <a:buNone/>
             </a:pPr>
             <a:r>
@@ -15825,7 +15564,7 @@
           <a:bodyPr wrap="square" lIns="0" tIns="0" rIns="0" bIns="0" rtlCol="0" anchor="ctr"/>
           <a:lstStyle/>
           <a:p>
-            <a:pPr algn="ctr" indent="0" marL="0">
+            <a:pPr marL="0" indent="0" algn="ctr">
               <a:buNone/>
             </a:pPr>
             <a:r>
@@ -15863,7 +15602,7 @@
           </a:bodyPr>
           <a:lstStyle/>
           <a:p>
-            <a:pPr algn="ctr" indent="0" marL="0">
+            <a:pPr marL="0" indent="0" algn="ctr">
               <a:buNone/>
             </a:pPr>
             <a:r>
@@ -15926,7 +15665,7 @@
           <a:bodyPr wrap="square" lIns="0" tIns="0" rIns="0" bIns="0" rtlCol="0" anchor="ctr"/>
           <a:lstStyle/>
           <a:p>
-            <a:pPr indent="0" marL="0">
+            <a:pPr marL="0" indent="0">
               <a:buNone/>
             </a:pPr>
             <a:r>
@@ -15964,7 +15703,7 @@
           </a:bodyPr>
           <a:lstStyle/>
           <a:p>
-            <a:pPr indent="0" marL="0">
+            <a:pPr marL="0" indent="0">
               <a:buNone/>
             </a:pPr>
             <a:r>
@@ -16000,7 +15739,7 @@
           <a:bodyPr wrap="square" lIns="0" tIns="0" rIns="0" bIns="0" rtlCol="0" anchor="ctr"/>
           <a:lstStyle/>
           <a:p>
-            <a:pPr indent="0" marL="0">
+            <a:pPr marL="0" indent="0">
               <a:buNone/>
             </a:pPr>
             <a:r>
@@ -16038,7 +15777,7 @@
           </a:bodyPr>
           <a:lstStyle/>
           <a:p>
-            <a:pPr indent="0" marL="0">
+            <a:pPr marL="0" indent="0">
               <a:buNone/>
             </a:pPr>
             <a:r>
@@ -16069,6 +15808,7 @@
         <a:solidFill>
           <a:srgbClr val="FFFFFF"/>
         </a:solidFill>
+        <a:effectLst/>
       </p:bgPr>
     </p:bg>
     <p:spTree>
@@ -16156,7 +15896,7 @@
           <a:bodyPr wrap="square" lIns="0" tIns="0" rIns="0" bIns="0" rtlCol="0" anchor="ctr"/>
           <a:lstStyle/>
           <a:p>
-            <a:pPr indent="0" marL="0">
+            <a:pPr marL="0" indent="0">
               <a:buNone/>
             </a:pPr>
             <a:r>
@@ -16197,7 +15937,7 @@
           </a:bodyPr>
           <a:lstStyle/>
           <a:p>
-            <a:pPr indent="0" marL="0">
+            <a:pPr marL="0" indent="0">
               <a:buNone/>
             </a:pPr>
             <a:r>
@@ -16236,7 +15976,7 @@
           <a:bodyPr wrap="square" lIns="0" tIns="0" rIns="0" bIns="0" rtlCol="0" anchor="ctr"/>
           <a:lstStyle/>
           <a:p>
-            <a:pPr algn="r" indent="0" marL="0">
+            <a:pPr marL="0" indent="0" algn="r">
               <a:buNone/>
             </a:pPr>
             <a:r>
@@ -16272,7 +16012,7 @@
           <a:bodyPr wrap="square" lIns="0" tIns="0" rIns="0" bIns="0" rtlCol="0" anchor="ctr"/>
           <a:lstStyle/>
           <a:p>
-            <a:pPr indent="0" marL="0">
+            <a:pPr marL="0" indent="0">
               <a:buNone/>
             </a:pPr>
             <a:r>
@@ -16308,7 +16048,7 @@
           <a:bodyPr wrap="square" lIns="0" tIns="0" rIns="0" bIns="0" rtlCol="0" anchor="ctr"/>
           <a:lstStyle/>
           <a:p>
-            <a:pPr indent="0" marL="0">
+            <a:pPr marL="0" indent="0">
               <a:buNone/>
             </a:pPr>
             <a:r>
@@ -16371,7 +16111,7 @@
           <a:bodyPr wrap="square" lIns="0" tIns="0" rIns="0" bIns="0" rtlCol="0" anchor="ctr"/>
           <a:lstStyle/>
           <a:p>
-            <a:pPr indent="0" marL="0">
+            <a:pPr marL="0" indent="0">
               <a:buNone/>
             </a:pPr>
             <a:r>
@@ -16409,7 +16149,7 @@
           </a:bodyPr>
           <a:lstStyle/>
           <a:p>
-            <a:pPr algn="ctr" indent="0" marL="0">
+            <a:pPr marL="0" indent="0" algn="ctr">
               <a:buNone/>
             </a:pPr>
             <a:r>
@@ -16447,7 +16187,7 @@
           </a:bodyPr>
           <a:lstStyle/>
           <a:p>
-            <a:pPr algn="ctr" indent="0" marL="0">
+            <a:pPr marL="0" indent="0" algn="ctr">
               <a:buNone/>
             </a:pPr>
             <a:r>
@@ -16485,7 +16225,7 @@
           </a:bodyPr>
           <a:lstStyle/>
           <a:p>
-            <a:pPr algn="ctr" indent="0" marL="0">
+            <a:pPr marL="0" indent="0" algn="ctr">
               <a:buNone/>
             </a:pPr>
             <a:r>
@@ -16523,7 +16263,7 @@
           </a:bodyPr>
           <a:lstStyle/>
           <a:p>
-            <a:pPr algn="ctr" indent="0" marL="0">
+            <a:pPr marL="0" indent="0" algn="ctr">
               <a:buNone/>
             </a:pPr>
             <a:r>
@@ -16561,7 +16301,7 @@
           </a:bodyPr>
           <a:lstStyle/>
           <a:p>
-            <a:pPr algn="ctr" indent="0" marL="0">
+            <a:pPr marL="0" indent="0" algn="ctr">
               <a:buNone/>
             </a:pPr>
             <a:r>
@@ -16599,7 +16339,7 @@
           </a:bodyPr>
           <a:lstStyle/>
           <a:p>
-            <a:pPr algn="ctr" indent="0" marL="0">
+            <a:pPr marL="0" indent="0" algn="ctr">
               <a:buNone/>
             </a:pPr>
             <a:r>
@@ -16637,7 +16377,7 @@
           </a:bodyPr>
           <a:lstStyle/>
           <a:p>
-            <a:pPr indent="0" marL="0">
+            <a:pPr marL="0" indent="0">
               <a:buNone/>
             </a:pPr>
             <a:r>
@@ -16700,7 +16440,7 @@
           <a:bodyPr wrap="square" lIns="0" tIns="0" rIns="0" bIns="0" rtlCol="0" anchor="ctr"/>
           <a:lstStyle/>
           <a:p>
-            <a:pPr indent="0" marL="0">
+            <a:pPr marL="0" indent="0">
               <a:buNone/>
             </a:pPr>
             <a:r>
@@ -16738,7 +16478,7 @@
           </a:bodyPr>
           <a:lstStyle/>
           <a:p>
-            <a:pPr algn="ctr" indent="0" marL="0">
+            <a:pPr marL="0" indent="0" algn="ctr">
               <a:buNone/>
             </a:pPr>
             <a:r>
@@ -16776,7 +16516,7 @@
           </a:bodyPr>
           <a:lstStyle/>
           <a:p>
-            <a:pPr algn="ctr" indent="0" marL="0">
+            <a:pPr marL="0" indent="0" algn="ctr">
               <a:buNone/>
             </a:pPr>
             <a:r>
@@ -16814,7 +16554,7 @@
           </a:bodyPr>
           <a:lstStyle/>
           <a:p>
-            <a:pPr algn="ctr" indent="0" marL="0">
+            <a:pPr marL="0" indent="0" algn="ctr">
               <a:buNone/>
             </a:pPr>
             <a:r>
@@ -16852,7 +16592,7 @@
           </a:bodyPr>
           <a:lstStyle/>
           <a:p>
-            <a:pPr algn="ctr" indent="0" marL="0">
+            <a:pPr marL="0" indent="0" algn="ctr">
               <a:buNone/>
             </a:pPr>
             <a:r>
@@ -16890,7 +16630,7 @@
           </a:bodyPr>
           <a:lstStyle/>
           <a:p>
-            <a:pPr algn="ctr" indent="0" marL="0">
+            <a:pPr marL="0" indent="0" algn="ctr">
               <a:buNone/>
             </a:pPr>
             <a:r>
@@ -16928,7 +16668,7 @@
           </a:bodyPr>
           <a:lstStyle/>
           <a:p>
-            <a:pPr algn="ctr" indent="0" marL="0">
+            <a:pPr marL="0" indent="0" algn="ctr">
               <a:buNone/>
             </a:pPr>
             <a:r>
@@ -16966,7 +16706,7 @@
           </a:bodyPr>
           <a:lstStyle/>
           <a:p>
-            <a:pPr indent="0" marL="0">
+            <a:pPr marL="0" indent="0">
               <a:buNone/>
             </a:pPr>
             <a:r>
@@ -17029,7 +16769,7 @@
           <a:bodyPr wrap="square" lIns="0" tIns="0" rIns="0" bIns="0" rtlCol="0" anchor="ctr"/>
           <a:lstStyle/>
           <a:p>
-            <a:pPr indent="0" marL="0">
+            <a:pPr marL="0" indent="0">
               <a:buNone/>
             </a:pPr>
             <a:r>
@@ -17067,7 +16807,7 @@
           </a:bodyPr>
           <a:lstStyle/>
           <a:p>
-            <a:pPr algn="ctr" indent="0" marL="0">
+            <a:pPr marL="0" indent="0" algn="ctr">
               <a:buNone/>
             </a:pPr>
             <a:r>
@@ -17105,7 +16845,7 @@
           </a:bodyPr>
           <a:lstStyle/>
           <a:p>
-            <a:pPr algn="ctr" indent="0" marL="0">
+            <a:pPr marL="0" indent="0" algn="ctr">
               <a:buNone/>
             </a:pPr>
             <a:r>
@@ -17143,7 +16883,7 @@
           </a:bodyPr>
           <a:lstStyle/>
           <a:p>
-            <a:pPr algn="ctr" indent="0" marL="0">
+            <a:pPr marL="0" indent="0" algn="ctr">
               <a:buNone/>
             </a:pPr>
             <a:r>
@@ -17181,7 +16921,7 @@
           </a:bodyPr>
           <a:lstStyle/>
           <a:p>
-            <a:pPr algn="ctr" indent="0" marL="0">
+            <a:pPr marL="0" indent="0" algn="ctr">
               <a:buNone/>
             </a:pPr>
             <a:r>
@@ -17219,7 +16959,7 @@
           </a:bodyPr>
           <a:lstStyle/>
           <a:p>
-            <a:pPr algn="ctr" indent="0" marL="0">
+            <a:pPr marL="0" indent="0" algn="ctr">
               <a:buNone/>
             </a:pPr>
             <a:r>
@@ -17257,7 +16997,7 @@
           </a:bodyPr>
           <a:lstStyle/>
           <a:p>
-            <a:pPr algn="ctr" indent="0" marL="0">
+            <a:pPr marL="0" indent="0" algn="ctr">
               <a:buNone/>
             </a:pPr>
             <a:r>
@@ -17295,7 +17035,7 @@
           </a:bodyPr>
           <a:lstStyle/>
           <a:p>
-            <a:pPr indent="0" marL="0">
+            <a:pPr marL="0" indent="0">
               <a:buNone/>
             </a:pPr>
             <a:r>
@@ -17333,7 +17073,7 @@
           </a:bodyPr>
           <a:lstStyle/>
           <a:p>
-            <a:pPr algn="ctr" indent="0" marL="0">
+            <a:pPr marL="0" indent="0" algn="ctr">
               <a:buNone/>
             </a:pPr>
             <a:r>
@@ -17364,6 +17104,7 @@
         <a:solidFill>
           <a:srgbClr val="FFFFFF"/>
         </a:solidFill>
+        <a:effectLst/>
       </p:bgPr>
     </p:bg>
     <p:spTree>
@@ -17451,7 +17192,7 @@
           <a:bodyPr wrap="square" lIns="0" tIns="0" rIns="0" bIns="0" rtlCol="0" anchor="ctr"/>
           <a:lstStyle/>
           <a:p>
-            <a:pPr indent="0" marL="0">
+            <a:pPr marL="0" indent="0">
               <a:buNone/>
             </a:pPr>
             <a:r>
@@ -17477,7 +17218,7 @@
         </p:nvSpPr>
         <p:spPr>
           <a:xfrm>
-            <a:off x="502920" y="530352"/>
+            <a:off x="502920" y="541503"/>
             <a:ext cx="7680960" cy="411480"/>
           </a:xfrm>
           <a:prstGeom prst="rect">
@@ -17488,11 +17229,11 @@
         </p:spPr>
         <p:txBody>
           <a:bodyPr wrap="square" lIns="0" tIns="0" rIns="0" bIns="0" rtlCol="0" anchor="ctr">
-            <a:normAutofit/>
-          </a:bodyPr>
-          <a:lstStyle/>
-          <a:p>
-            <a:pPr indent="0" marL="0">
+            <a:normAutofit fontScale="70000" lnSpcReduction="20000"/>
+          </a:bodyPr>
+          <a:lstStyle/>
+          <a:p>
+            <a:pPr marL="0" indent="0">
               <a:buNone/>
             </a:pPr>
             <a:r>
@@ -17531,7 +17272,7 @@
           <a:bodyPr wrap="square" lIns="0" tIns="0" rIns="0" bIns="0" rtlCol="0" anchor="ctr"/>
           <a:lstStyle/>
           <a:p>
-            <a:pPr algn="r" indent="0" marL="0">
+            <a:pPr marL="0" indent="0" algn="r">
               <a:buNone/>
             </a:pPr>
             <a:r>
@@ -17596,7 +17337,7 @@
           </a:bodyPr>
           <a:lstStyle/>
           <a:p>
-            <a:pPr indent="0" marL="0">
+            <a:pPr marL="0" indent="0">
               <a:buNone/>
             </a:pPr>
             <a:r>
@@ -17634,7 +17375,7 @@
           </a:bodyPr>
           <a:lstStyle/>
           <a:p>
-            <a:pPr indent="0" marL="0">
+            <a:pPr marL="0" indent="0">
               <a:buNone/>
             </a:pPr>
             <a:r>
@@ -17657,7 +17398,7 @@
         </p:nvSpPr>
         <p:spPr>
           <a:xfrm>
-            <a:off x="804672" y="1709928"/>
+            <a:off x="804672" y="1877193"/>
             <a:ext cx="1499616" cy="182880"/>
           </a:xfrm>
           <a:prstGeom prst="rect">
@@ -17672,7 +17413,7 @@
           </a:bodyPr>
           <a:lstStyle/>
           <a:p>
-            <a:pPr indent="0" marL="0">
+            <a:pPr marL="0" indent="0">
               <a:buNone/>
             </a:pPr>
             <a:r>
@@ -17737,7 +17478,7 @@
           </a:bodyPr>
           <a:lstStyle/>
           <a:p>
-            <a:pPr indent="0" marL="0">
+            <a:pPr marL="0" indent="0">
               <a:buNone/>
             </a:pPr>
             <a:r>
@@ -17775,7 +17516,7 @@
           </a:bodyPr>
           <a:lstStyle/>
           <a:p>
-            <a:pPr indent="0" marL="0">
+            <a:pPr marL="0" indent="0">
               <a:buNone/>
             </a:pPr>
             <a:r>
@@ -17798,7 +17539,7 @@
         </p:nvSpPr>
         <p:spPr>
           <a:xfrm>
-            <a:off x="2816352" y="1709928"/>
+            <a:off x="2816352" y="1877193"/>
             <a:ext cx="1499616" cy="182880"/>
           </a:xfrm>
           <a:prstGeom prst="rect">
@@ -17813,7 +17554,7 @@
           </a:bodyPr>
           <a:lstStyle/>
           <a:p>
-            <a:pPr indent="0" marL="0">
+            <a:pPr marL="0" indent="0">
               <a:buNone/>
             </a:pPr>
             <a:r>
@@ -17878,7 +17619,7 @@
           </a:bodyPr>
           <a:lstStyle/>
           <a:p>
-            <a:pPr indent="0" marL="0">
+            <a:pPr marL="0" indent="0">
               <a:buNone/>
             </a:pPr>
             <a:r>
@@ -17916,7 +17657,7 @@
           </a:bodyPr>
           <a:lstStyle/>
           <a:p>
-            <a:pPr indent="0" marL="0">
+            <a:pPr marL="0" indent="0">
               <a:buNone/>
             </a:pPr>
             <a:r>
@@ -17939,7 +17680,7 @@
         </p:nvSpPr>
         <p:spPr>
           <a:xfrm>
-            <a:off x="4828032" y="1709928"/>
+            <a:off x="4828032" y="1877193"/>
             <a:ext cx="1499616" cy="182880"/>
           </a:xfrm>
           <a:prstGeom prst="rect">
@@ -17954,7 +17695,7 @@
           </a:bodyPr>
           <a:lstStyle/>
           <a:p>
-            <a:pPr indent="0" marL="0">
+            <a:pPr marL="0" indent="0">
               <a:buNone/>
             </a:pPr>
             <a:r>
@@ -18019,7 +17760,7 @@
           </a:bodyPr>
           <a:lstStyle/>
           <a:p>
-            <a:pPr indent="0" marL="0">
+            <a:pPr marL="0" indent="0">
               <a:buNone/>
             </a:pPr>
             <a:r>
@@ -18057,7 +17798,7 @@
           </a:bodyPr>
           <a:lstStyle/>
           <a:p>
-            <a:pPr indent="0" marL="0">
+            <a:pPr marL="0" indent="0">
               <a:buNone/>
             </a:pPr>
             <a:r>
@@ -18080,7 +17821,7 @@
         </p:nvSpPr>
         <p:spPr>
           <a:xfrm>
-            <a:off x="6839712" y="1709928"/>
+            <a:off x="6839712" y="1877193"/>
             <a:ext cx="1088136" cy="182880"/>
           </a:xfrm>
           <a:prstGeom prst="rect">
@@ -18095,7 +17836,7 @@
           </a:bodyPr>
           <a:lstStyle/>
           <a:p>
-            <a:pPr indent="0" marL="0">
+            <a:pPr marL="0" indent="0">
               <a:buNone/>
             </a:pPr>
             <a:r>
@@ -18131,7 +17872,7 @@
           <a:bodyPr wrap="square" lIns="0" tIns="0" rIns="0" bIns="0" rtlCol="0" anchor="ctr"/>
           <a:lstStyle/>
           <a:p>
-            <a:pPr indent="0" marL="0">
+            <a:pPr marL="0" indent="0">
               <a:buNone/>
             </a:pPr>
             <a:r>
@@ -18192,7 +17933,7 @@
           <a:bodyPr wrap="square" lIns="0" tIns="0" rIns="0" bIns="0" rtlCol="0" anchor="ctr"/>
           <a:lstStyle/>
           <a:p>
-            <a:pPr algn="ctr" indent="0" marL="0">
+            <a:pPr marL="0" indent="0" algn="ctr">
               <a:buNone/>
             </a:pPr>
             <a:r>
@@ -18230,7 +17971,7 @@
           </a:bodyPr>
           <a:lstStyle/>
           <a:p>
-            <a:pPr algn="ctr" indent="0" marL="0">
+            <a:pPr marL="0" indent="0" algn="ctr">
               <a:buNone/>
             </a:pPr>
             <a:r>
@@ -18291,7 +18032,7 @@
           <a:bodyPr wrap="square" lIns="0" tIns="0" rIns="0" bIns="0" rtlCol="0" anchor="ctr"/>
           <a:lstStyle/>
           <a:p>
-            <a:pPr algn="ctr" indent="0" marL="0">
+            <a:pPr marL="0" indent="0" algn="ctr">
               <a:buNone/>
             </a:pPr>
             <a:r>
@@ -18329,7 +18070,7 @@
           </a:bodyPr>
           <a:lstStyle/>
           <a:p>
-            <a:pPr algn="ctr" indent="0" marL="0">
+            <a:pPr marL="0" indent="0" algn="ctr">
               <a:buNone/>
             </a:pPr>
             <a:r>
@@ -18390,7 +18131,7 @@
           <a:bodyPr wrap="square" lIns="0" tIns="0" rIns="0" bIns="0" rtlCol="0" anchor="ctr"/>
           <a:lstStyle/>
           <a:p>
-            <a:pPr algn="ctr" indent="0" marL="0">
+            <a:pPr marL="0" indent="0" algn="ctr">
               <a:buNone/>
             </a:pPr>
             <a:r>
@@ -18428,7 +18169,7 @@
           </a:bodyPr>
           <a:lstStyle/>
           <a:p>
-            <a:pPr algn="ctr" indent="0" marL="0">
+            <a:pPr marL="0" indent="0" algn="ctr">
               <a:buNone/>
             </a:pPr>
             <a:r>
@@ -18489,7 +18230,7 @@
           <a:bodyPr wrap="square" lIns="0" tIns="0" rIns="0" bIns="0" rtlCol="0" anchor="ctr"/>
           <a:lstStyle/>
           <a:p>
-            <a:pPr algn="ctr" indent="0" marL="0">
+            <a:pPr marL="0" indent="0" algn="ctr">
               <a:buNone/>
             </a:pPr>
             <a:r>
@@ -18527,7 +18268,7 @@
           </a:bodyPr>
           <a:lstStyle/>
           <a:p>
-            <a:pPr algn="ctr" indent="0" marL="0">
+            <a:pPr marL="0" indent="0" algn="ctr">
               <a:buNone/>
             </a:pPr>
             <a:r>
@@ -18563,7 +18304,7 @@
           <a:bodyPr wrap="square" lIns="0" tIns="0" rIns="0" bIns="0" rtlCol="0" anchor="ctr"/>
           <a:lstStyle/>
           <a:p>
-            <a:pPr indent="0" marL="0">
+            <a:pPr marL="0" indent="0">
               <a:buNone/>
             </a:pPr>
             <a:r>
@@ -18624,7 +18365,7 @@
           <a:bodyPr wrap="square" lIns="0" tIns="0" rIns="0" bIns="0" rtlCol="0" anchor="ctr"/>
           <a:lstStyle/>
           <a:p>
-            <a:pPr algn="ctr" indent="0" marL="0">
+            <a:pPr marL="0" indent="0" algn="ctr">
               <a:buNone/>
             </a:pPr>
             <a:r>
@@ -18662,7 +18403,7 @@
           </a:bodyPr>
           <a:lstStyle/>
           <a:p>
-            <a:pPr algn="ctr" indent="0" marL="0">
+            <a:pPr marL="0" indent="0" algn="ctr">
               <a:buNone/>
             </a:pPr>
             <a:r>
@@ -18723,7 +18464,7 @@
           <a:bodyPr wrap="square" lIns="0" tIns="0" rIns="0" bIns="0" rtlCol="0" anchor="ctr"/>
           <a:lstStyle/>
           <a:p>
-            <a:pPr algn="ctr" indent="0" marL="0">
+            <a:pPr marL="0" indent="0" algn="ctr">
               <a:buNone/>
             </a:pPr>
             <a:r>
@@ -18761,7 +18502,7 @@
           </a:bodyPr>
           <a:lstStyle/>
           <a:p>
-            <a:pPr algn="ctr" indent="0" marL="0">
+            <a:pPr marL="0" indent="0" algn="ctr">
               <a:buNone/>
             </a:pPr>
             <a:r>
@@ -18822,7 +18563,7 @@
           <a:bodyPr wrap="square" lIns="0" tIns="0" rIns="0" bIns="0" rtlCol="0" anchor="ctr"/>
           <a:lstStyle/>
           <a:p>
-            <a:pPr algn="ctr" indent="0" marL="0">
+            <a:pPr marL="0" indent="0" algn="ctr">
               <a:buNone/>
             </a:pPr>
             <a:r>
@@ -18860,7 +18601,7 @@
           </a:bodyPr>
           <a:lstStyle/>
           <a:p>
-            <a:pPr algn="ctr" indent="0" marL="0">
+            <a:pPr marL="0" indent="0" algn="ctr">
               <a:buNone/>
             </a:pPr>
             <a:r>
@@ -18921,7 +18662,7 @@
           <a:bodyPr wrap="square" lIns="0" tIns="0" rIns="0" bIns="0" rtlCol="0" anchor="ctr"/>
           <a:lstStyle/>
           <a:p>
-            <a:pPr algn="ctr" indent="0" marL="0">
+            <a:pPr marL="0" indent="0" algn="ctr">
               <a:buNone/>
             </a:pPr>
             <a:r>
@@ -18959,7 +18700,7 @@
           </a:bodyPr>
           <a:lstStyle/>
           <a:p>
-            <a:pPr algn="ctr" indent="0" marL="0">
+            <a:pPr marL="0" indent="0" algn="ctr">
               <a:buNone/>
             </a:pPr>
             <a:r>
@@ -19022,7 +18763,7 @@
           <a:bodyPr wrap="square" lIns="0" tIns="0" rIns="0" bIns="0" rtlCol="0" anchor="ctr"/>
           <a:lstStyle/>
           <a:p>
-            <a:pPr indent="0" marL="0">
+            <a:pPr marL="0" indent="0">
               <a:buNone/>
             </a:pPr>
             <a:r>
@@ -19060,18 +18801,17 @@
           </a:bodyPr>
           <a:lstStyle/>
           <a:p>
-            <a:pPr indent="0" marL="0">
+            <a:pPr marL="0" indent="0">
               <a:buNone/>
             </a:pPr>
             <a:r>
               <a:rPr lang="en-US" sz="1050" dirty="0">
                 <a:solidFill>
-                  <a:srgbClr val="121426"/>
+                  <a:schemeClr val="bg1"/>
                 </a:solidFill>
               </a:rPr>
               <a:t>Skar sostiene interacción alta; Disley abre volumen nuevo con tono humorístico y cercano. Para próximos meses, combinar perfiles de alto alcance con micro-nichos de expertise.</a:t>
             </a:r>
-            <a:endParaRPr lang="en-US" sz="1050" dirty="0"/>
           </a:p>
         </p:txBody>
       </p:sp>
@@ -19096,7 +18836,7 @@
           <a:bodyPr wrap="square" lIns="0" tIns="0" rIns="0" bIns="0" rtlCol="0" anchor="ctr"/>
           <a:lstStyle/>
           <a:p>
-            <a:pPr indent="0" marL="0">
+            <a:pPr marL="0" indent="0">
               <a:buNone/>
             </a:pPr>
             <a:r>
@@ -19134,18 +18874,17 @@
           </a:bodyPr>
           <a:lstStyle/>
           <a:p>
-            <a:pPr indent="0" marL="0">
+            <a:pPr marL="0" indent="0">
               <a:buNone/>
             </a:pPr>
             <a:r>
               <a:rPr lang="en-US" sz="1050" dirty="0">
                 <a:solidFill>
-                  <a:srgbClr val="121426"/>
+                  <a:schemeClr val="bg1"/>
                 </a:solidFill>
               </a:rPr>
               <a:t>70% creators de performance, 20% nichos estratégicos, 10% apuestas en tendencia.</a:t>
             </a:r>
-            <a:endParaRPr lang="en-US" sz="1050" dirty="0"/>
           </a:p>
         </p:txBody>
       </p:sp>
@@ -19450,4 +19189,299 @@
     </a:ext>
   </a:extLst>
 </a:theme>
+</file>
+
+<file path=ppt/theme/theme2.xml><?xml version="1.0" encoding="utf-8"?>
+<a:theme xmlns:a="http://schemas.openxmlformats.org/drawingml/2006/main" name="Tema de Office">
+  <a:themeElements>
+    <a:clrScheme name="Office">
+      <a:dk1>
+        <a:sysClr val="windowText" lastClr="000000"/>
+      </a:dk1>
+      <a:lt1>
+        <a:sysClr val="window" lastClr="FFFFFF"/>
+      </a:lt1>
+      <a:dk2>
+        <a:srgbClr val="44546A"/>
+      </a:dk2>
+      <a:lt2>
+        <a:srgbClr val="E7E6E6"/>
+      </a:lt2>
+      <a:accent1>
+        <a:srgbClr val="4472C4"/>
+      </a:accent1>
+      <a:accent2>
+        <a:srgbClr val="ED7D31"/>
+      </a:accent2>
+      <a:accent3>
+        <a:srgbClr val="A5A5A5"/>
+      </a:accent3>
+      <a:accent4>
+        <a:srgbClr val="FFC000"/>
+      </a:accent4>
+      <a:accent5>
+        <a:srgbClr val="5B9BD5"/>
+      </a:accent5>
+      <a:accent6>
+        <a:srgbClr val="70AD47"/>
+      </a:accent6>
+      <a:hlink>
+        <a:srgbClr val="0563C1"/>
+      </a:hlink>
+      <a:folHlink>
+        <a:srgbClr val="954F72"/>
+      </a:folHlink>
+    </a:clrScheme>
+    <a:fontScheme name="Office">
+      <a:majorFont>
+        <a:latin typeface="Calibri Light" panose="020F0302020204030204"/>
+        <a:ea typeface=""/>
+        <a:cs typeface=""/>
+        <a:font script="Jpan" typeface="游ゴシック Light"/>
+        <a:font script="Hang" typeface="맑은 고딕"/>
+        <a:font script="Hans" typeface="等线 Light"/>
+        <a:font script="Hant" typeface="新細明體"/>
+        <a:font script="Arab" typeface="Times New Roman"/>
+        <a:font script="Hebr" typeface="Times New Roman"/>
+        <a:font script="Thai" typeface="Angsana New"/>
+        <a:font script="Ethi" typeface="Nyala"/>
+        <a:font script="Beng" typeface="Vrinda"/>
+        <a:font script="Gujr" typeface="Shruti"/>
+        <a:font script="Khmr" typeface="MoolBoran"/>
+        <a:font script="Knda" typeface="Tunga"/>
+        <a:font script="Guru" typeface="Raavi"/>
+        <a:font script="Cans" typeface="Euphemia"/>
+        <a:font script="Cher" typeface="Plantagenet Cherokee"/>
+        <a:font script="Yiii" typeface="Microsoft Yi Baiti"/>
+        <a:font script="Tibt" typeface="Microsoft Himalaya"/>
+        <a:font script="Thaa" typeface="MV Boli"/>
+        <a:font script="Deva" typeface="Mangal"/>
+        <a:font script="Telu" typeface="Gautami"/>
+        <a:font script="Taml" typeface="Latha"/>
+        <a:font script="Syrc" typeface="Estrangelo Edessa"/>
+        <a:font script="Orya" typeface="Kalinga"/>
+        <a:font script="Mlym" typeface="Kartika"/>
+        <a:font script="Laoo" typeface="DokChampa"/>
+        <a:font script="Sinh" typeface="Iskoola Pota"/>
+        <a:font script="Mong" typeface="Mongolian Baiti"/>
+        <a:font script="Viet" typeface="Times New Roman"/>
+        <a:font script="Uigh" typeface="Microsoft Uighur"/>
+        <a:font script="Geor" typeface="Sylfaen"/>
+        <a:font script="Armn" typeface="Arial"/>
+        <a:font script="Bugi" typeface="Leelawadee UI"/>
+        <a:font script="Bopo" typeface="Microsoft JhengHei"/>
+        <a:font script="Java" typeface="Javanese Text"/>
+        <a:font script="Lisu" typeface="Segoe UI"/>
+        <a:font script="Mymr" typeface="Myanmar Text"/>
+        <a:font script="Nkoo" typeface="Ebrima"/>
+        <a:font script="Olck" typeface="Nirmala UI"/>
+        <a:font script="Osma" typeface="Ebrima"/>
+        <a:font script="Phag" typeface="Phagspa"/>
+        <a:font script="Syrn" typeface="Estrangelo Edessa"/>
+        <a:font script="Syrj" typeface="Estrangelo Edessa"/>
+        <a:font script="Syre" typeface="Estrangelo Edessa"/>
+        <a:font script="Sora" typeface="Nirmala UI"/>
+        <a:font script="Tale" typeface="Microsoft Tai Le"/>
+        <a:font script="Talu" typeface="Microsoft New Tai Lue"/>
+        <a:font script="Tfng" typeface="Ebrima"/>
+      </a:majorFont>
+      <a:minorFont>
+        <a:latin typeface="Calibri" panose="020F0502020204030204"/>
+        <a:ea typeface=""/>
+        <a:cs typeface=""/>
+        <a:font script="Jpan" typeface="游ゴシック"/>
+        <a:font script="Hang" typeface="맑은 고딕"/>
+        <a:font script="Hans" typeface="等线"/>
+        <a:font script="Hant" typeface="新細明體"/>
+        <a:font script="Arab" typeface="Arial"/>
+        <a:font script="Hebr" typeface="Arial"/>
+        <a:font script="Thai" typeface="Cordia New"/>
+        <a:font script="Ethi" typeface="Nyala"/>
+        <a:font script="Beng" typeface="Vrinda"/>
+        <a:font script="Gujr" typeface="Shruti"/>
+        <a:font script="Khmr" typeface="DaunPenh"/>
+        <a:font script="Knda" typeface="Tunga"/>
+        <a:font script="Guru" typeface="Raavi"/>
+        <a:font script="Cans" typeface="Euphemia"/>
+        <a:font script="Cher" typeface="Plantagenet Cherokee"/>
+        <a:font script="Yiii" typeface="Microsoft Yi Baiti"/>
+        <a:font script="Tibt" typeface="Microsoft Himalaya"/>
+        <a:font script="Thaa" typeface="MV Boli"/>
+        <a:font script="Deva" typeface="Mangal"/>
+        <a:font script="Telu" typeface="Gautami"/>
+        <a:font script="Taml" typeface="Latha"/>
+        <a:font script="Syrc" typeface="Estrangelo Edessa"/>
+        <a:font script="Orya" typeface="Kalinga"/>
+        <a:font script="Mlym" typeface="Kartika"/>
+        <a:font script="Laoo" typeface="DokChampa"/>
+        <a:font script="Sinh" typeface="Iskoola Pota"/>
+        <a:font script="Mong" typeface="Mongolian Baiti"/>
+        <a:font script="Viet" typeface="Arial"/>
+        <a:font script="Uigh" typeface="Microsoft Uighur"/>
+        <a:font script="Geor" typeface="Sylfaen"/>
+        <a:font script="Armn" typeface="Arial"/>
+        <a:font script="Bugi" typeface="Leelawadee UI"/>
+        <a:font script="Bopo" typeface="Microsoft JhengHei"/>
+        <a:font script="Java" typeface="Javanese Text"/>
+        <a:font script="Lisu" typeface="Segoe UI"/>
+        <a:font script="Mymr" typeface="Myanmar Text"/>
+        <a:font script="Nkoo" typeface="Ebrima"/>
+        <a:font script="Olck" typeface="Nirmala UI"/>
+        <a:font script="Osma" typeface="Ebrima"/>
+        <a:font script="Phag" typeface="Phagspa"/>
+        <a:font script="Syrn" typeface="Estrangelo Edessa"/>
+        <a:font script="Syrj" typeface="Estrangelo Edessa"/>
+        <a:font script="Syre" typeface="Estrangelo Edessa"/>
+        <a:font script="Sora" typeface="Nirmala UI"/>
+        <a:font script="Tale" typeface="Microsoft Tai Le"/>
+        <a:font script="Talu" typeface="Microsoft New Tai Lue"/>
+        <a:font script="Tfng" typeface="Ebrima"/>
+      </a:minorFont>
+    </a:fontScheme>
+    <a:fmtScheme name="Office">
+      <a:fillStyleLst>
+        <a:solidFill>
+          <a:schemeClr val="phClr"/>
+        </a:solidFill>
+        <a:gradFill rotWithShape="1">
+          <a:gsLst>
+            <a:gs pos="0">
+              <a:schemeClr val="phClr">
+                <a:lumMod val="110000"/>
+                <a:satMod val="105000"/>
+                <a:tint val="67000"/>
+              </a:schemeClr>
+            </a:gs>
+            <a:gs pos="50000">
+              <a:schemeClr val="phClr">
+                <a:lumMod val="105000"/>
+                <a:satMod val="103000"/>
+                <a:tint val="73000"/>
+              </a:schemeClr>
+            </a:gs>
+            <a:gs pos="100000">
+              <a:schemeClr val="phClr">
+                <a:lumMod val="105000"/>
+                <a:satMod val="109000"/>
+                <a:tint val="81000"/>
+              </a:schemeClr>
+            </a:gs>
+          </a:gsLst>
+          <a:lin ang="5400000" scaled="0"/>
+        </a:gradFill>
+        <a:gradFill rotWithShape="1">
+          <a:gsLst>
+            <a:gs pos="0">
+              <a:schemeClr val="phClr">
+                <a:satMod val="103000"/>
+                <a:lumMod val="102000"/>
+                <a:tint val="94000"/>
+              </a:schemeClr>
+            </a:gs>
+            <a:gs pos="50000">
+              <a:schemeClr val="phClr">
+                <a:satMod val="110000"/>
+                <a:lumMod val="100000"/>
+                <a:shade val="100000"/>
+              </a:schemeClr>
+            </a:gs>
+            <a:gs pos="100000">
+              <a:schemeClr val="phClr">
+                <a:lumMod val="99000"/>
+                <a:satMod val="120000"/>
+                <a:shade val="78000"/>
+              </a:schemeClr>
+            </a:gs>
+          </a:gsLst>
+          <a:lin ang="5400000" scaled="0"/>
+        </a:gradFill>
+      </a:fillStyleLst>
+      <a:lnStyleLst>
+        <a:ln w="6350" cap="flat" cmpd="sng" algn="ctr">
+          <a:solidFill>
+            <a:schemeClr val="phClr"/>
+          </a:solidFill>
+          <a:prstDash val="solid"/>
+          <a:miter lim="800000"/>
+        </a:ln>
+        <a:ln w="12700" cap="flat" cmpd="sng" algn="ctr">
+          <a:solidFill>
+            <a:schemeClr val="phClr"/>
+          </a:solidFill>
+          <a:prstDash val="solid"/>
+          <a:miter lim="800000"/>
+        </a:ln>
+        <a:ln w="19050" cap="flat" cmpd="sng" algn="ctr">
+          <a:solidFill>
+            <a:schemeClr val="phClr"/>
+          </a:solidFill>
+          <a:prstDash val="solid"/>
+          <a:miter lim="800000"/>
+        </a:ln>
+      </a:lnStyleLst>
+      <a:effectStyleLst>
+        <a:effectStyle>
+          <a:effectLst/>
+        </a:effectStyle>
+        <a:effectStyle>
+          <a:effectLst/>
+        </a:effectStyle>
+        <a:effectStyle>
+          <a:effectLst>
+            <a:outerShdw blurRad="57150" dist="19050" dir="5400000" algn="ctr" rotWithShape="0">
+              <a:srgbClr val="000000">
+                <a:alpha val="63000"/>
+              </a:srgbClr>
+            </a:outerShdw>
+          </a:effectLst>
+        </a:effectStyle>
+      </a:effectStyleLst>
+      <a:bgFillStyleLst>
+        <a:solidFill>
+          <a:schemeClr val="phClr"/>
+        </a:solidFill>
+        <a:solidFill>
+          <a:schemeClr val="phClr">
+            <a:tint val="95000"/>
+            <a:satMod val="170000"/>
+          </a:schemeClr>
+        </a:solidFill>
+        <a:gradFill rotWithShape="1">
+          <a:gsLst>
+            <a:gs pos="0">
+              <a:schemeClr val="phClr">
+                <a:tint val="93000"/>
+                <a:satMod val="150000"/>
+                <a:shade val="98000"/>
+                <a:lumMod val="102000"/>
+              </a:schemeClr>
+            </a:gs>
+            <a:gs pos="50000">
+              <a:schemeClr val="phClr">
+                <a:tint val="98000"/>
+                <a:satMod val="130000"/>
+                <a:shade val="90000"/>
+                <a:lumMod val="103000"/>
+              </a:schemeClr>
+            </a:gs>
+            <a:gs pos="100000">
+              <a:schemeClr val="phClr">
+                <a:shade val="63000"/>
+                <a:satMod val="120000"/>
+              </a:schemeClr>
+            </a:gs>
+          </a:gsLst>
+          <a:lin ang="5400000" scaled="0"/>
+        </a:gradFill>
+      </a:bgFillStyleLst>
+    </a:fmtScheme>
+  </a:themeElements>
+  <a:objectDefaults/>
+  <a:extraClrSchemeLst/>
+  <a:extLst>
+    <a:ext uri="{05A4C25C-085E-4340-85A3-A5531E510DB2}">
+      <thm15:themeFamily xmlns:thm15="http://schemas.microsoft.com/office/thememl/2012/main" name="Office Theme" id="{62F939B6-93AF-4DB8-9C6B-D6C7DFDC589F}" vid="{4A3C46E8-61CC-4603-A589-7422A47A8E4A}"/>
+    </a:ext>
+  </a:extLst>
+</a:theme>
 </file>
--- a/template/Maicao_Template_Visual_v02.pptx
+++ b/template/Maicao_Template_Visual_v02.pptx
@@ -2216,7 +2216,7 @@
         </p:nvSpPr>
         <p:spPr>
           <a:xfrm>
-            <a:off x="0" y="0"/>
+            <a:off x="0" y="308142"/>
             <a:ext cx="12191695" cy="6858000"/>
           </a:xfrm>
           <a:prstGeom prst="rect">
@@ -2485,7 +2485,7 @@
         </p:nvSpPr>
         <p:spPr>
           <a:xfrm>
-            <a:off x="896112" y="1968633"/>
+            <a:off x="896112" y="1938528"/>
             <a:ext cx="1865376" cy="182880"/>
           </a:xfrm>
           <a:prstGeom prst="rect">
@@ -2626,7 +2626,7 @@
         </p:nvSpPr>
         <p:spPr>
           <a:xfrm>
-            <a:off x="3319272" y="1968633"/>
+            <a:off x="3319272" y="1934342"/>
             <a:ext cx="1682496" cy="182880"/>
           </a:xfrm>
           <a:prstGeom prst="rect">
@@ -2767,7 +2767,7 @@
         </p:nvSpPr>
         <p:spPr>
           <a:xfrm>
-            <a:off x="5559552" y="1957482"/>
+            <a:off x="5559552" y="1934342"/>
             <a:ext cx="1499616" cy="182880"/>
           </a:xfrm>
           <a:prstGeom prst="rect">
@@ -2908,7 +2908,7 @@
         </p:nvSpPr>
         <p:spPr>
           <a:xfrm>
-            <a:off x="7616952" y="1979784"/>
+            <a:off x="7616952" y="1934342"/>
             <a:ext cx="1042416" cy="182880"/>
           </a:xfrm>
           <a:prstGeom prst="rect">
@@ -6228,7 +6228,7 @@
         </p:nvSpPr>
         <p:spPr>
           <a:xfrm>
-            <a:off x="758952" y="1872288"/>
+            <a:off x="758952" y="1920240"/>
             <a:ext cx="1819656" cy="182880"/>
           </a:xfrm>
           <a:prstGeom prst="rect">
@@ -6369,7 +6369,7 @@
         </p:nvSpPr>
         <p:spPr>
           <a:xfrm>
-            <a:off x="3044952" y="1872288"/>
+            <a:off x="3044952" y="1926465"/>
             <a:ext cx="1819656" cy="182880"/>
           </a:xfrm>
           <a:prstGeom prst="rect">
@@ -6510,7 +6510,7 @@
         </p:nvSpPr>
         <p:spPr>
           <a:xfrm>
-            <a:off x="5330952" y="1883439"/>
+            <a:off x="5314819" y="1926465"/>
             <a:ext cx="1499616" cy="182880"/>
           </a:xfrm>
           <a:prstGeom prst="rect">
@@ -6651,7 +6651,7 @@
         </p:nvSpPr>
         <p:spPr>
           <a:xfrm>
-            <a:off x="7296912" y="1883439"/>
+            <a:off x="7296912" y="1926465"/>
             <a:ext cx="1499616" cy="182880"/>
           </a:xfrm>
           <a:prstGeom prst="rect">
@@ -6792,7 +6792,7 @@
         </p:nvSpPr>
         <p:spPr>
           <a:xfrm>
-            <a:off x="9262872" y="1883439"/>
+            <a:off x="9262872" y="1915448"/>
             <a:ext cx="1728216" cy="182880"/>
           </a:xfrm>
           <a:prstGeom prst="rect">
@@ -10965,7 +10965,7 @@
         </p:nvSpPr>
         <p:spPr>
           <a:xfrm>
-            <a:off x="804672" y="1877193"/>
+            <a:off x="804672" y="1844142"/>
             <a:ext cx="1499616" cy="182880"/>
           </a:xfrm>
           <a:prstGeom prst="rect">
@@ -11106,7 +11106,7 @@
         </p:nvSpPr>
         <p:spPr>
           <a:xfrm>
-            <a:off x="2816352" y="1877193"/>
+            <a:off x="2743200" y="1844142"/>
             <a:ext cx="1088136" cy="182880"/>
           </a:xfrm>
           <a:prstGeom prst="rect">
@@ -11247,7 +11247,7 @@
         </p:nvSpPr>
         <p:spPr>
           <a:xfrm>
-            <a:off x="4416552" y="1877193"/>
+            <a:off x="4416552" y="1844142"/>
             <a:ext cx="1088136" cy="182880"/>
           </a:xfrm>
           <a:prstGeom prst="rect">
@@ -11388,7 +11388,7 @@
         </p:nvSpPr>
         <p:spPr>
           <a:xfrm>
-            <a:off x="6016752" y="1877193"/>
+            <a:off x="6016752" y="1844142"/>
             <a:ext cx="1499616" cy="182880"/>
           </a:xfrm>
           <a:prstGeom prst="rect">
@@ -12328,7 +12328,7 @@
         </p:nvSpPr>
         <p:spPr>
           <a:xfrm>
-            <a:off x="0" y="0"/>
+            <a:off x="0" y="305712"/>
             <a:ext cx="12191695" cy="6858000"/>
           </a:xfrm>
           <a:prstGeom prst="rect">
@@ -12597,7 +12597,7 @@
         </p:nvSpPr>
         <p:spPr>
           <a:xfrm>
-            <a:off x="804672" y="1877193"/>
+            <a:off x="795312" y="1877193"/>
             <a:ext cx="1499616" cy="182880"/>
           </a:xfrm>
           <a:prstGeom prst="rect">
@@ -12738,7 +12738,7 @@
         </p:nvSpPr>
         <p:spPr>
           <a:xfrm>
-            <a:off x="2816352" y="1877193"/>
+            <a:off x="2804350" y="1878045"/>
             <a:ext cx="1499616" cy="182880"/>
           </a:xfrm>
           <a:prstGeom prst="rect">
@@ -12879,7 +12879,7 @@
         </p:nvSpPr>
         <p:spPr>
           <a:xfrm>
-            <a:off x="4828032" y="1877193"/>
+            <a:off x="4850892" y="1875346"/>
             <a:ext cx="1499616" cy="182880"/>
           </a:xfrm>
           <a:prstGeom prst="rect">
@@ -13020,7 +13020,7 @@
         </p:nvSpPr>
         <p:spPr>
           <a:xfrm>
-            <a:off x="6839712" y="1877193"/>
+            <a:off x="6850570" y="1878045"/>
             <a:ext cx="1088136" cy="182880"/>
           </a:xfrm>
           <a:prstGeom prst="rect">
@@ -14441,7 +14441,7 @@
         </p:nvSpPr>
         <p:spPr>
           <a:xfrm>
-            <a:off x="2816352" y="1877193"/>
+            <a:off x="2816352" y="1874903"/>
             <a:ext cx="1499616" cy="182880"/>
           </a:xfrm>
           <a:prstGeom prst="rect">
@@ -14582,7 +14582,7 @@
         </p:nvSpPr>
         <p:spPr>
           <a:xfrm>
-            <a:off x="4828032" y="1877193"/>
+            <a:off x="4818888" y="1877193"/>
             <a:ext cx="1499616" cy="182880"/>
           </a:xfrm>
           <a:prstGeom prst="rect">
@@ -14723,7 +14723,7 @@
         </p:nvSpPr>
         <p:spPr>
           <a:xfrm>
-            <a:off x="6839712" y="1877193"/>
+            <a:off x="6830407" y="1875729"/>
             <a:ext cx="1088136" cy="182880"/>
           </a:xfrm>
           <a:prstGeom prst="rect">
@@ -17398,7 +17398,7 @@
         </p:nvSpPr>
         <p:spPr>
           <a:xfrm>
-            <a:off x="804672" y="1877193"/>
+            <a:off x="804672" y="1855986"/>
             <a:ext cx="1499616" cy="182880"/>
           </a:xfrm>
           <a:prstGeom prst="rect">
@@ -17539,7 +17539,7 @@
         </p:nvSpPr>
         <p:spPr>
           <a:xfrm>
-            <a:off x="2816352" y="1877193"/>
+            <a:off x="2816352" y="1851660"/>
             <a:ext cx="1499616" cy="182880"/>
           </a:xfrm>
           <a:prstGeom prst="rect">
@@ -17680,7 +17680,7 @@
         </p:nvSpPr>
         <p:spPr>
           <a:xfrm>
-            <a:off x="4828032" y="1877193"/>
+            <a:off x="4828032" y="1855986"/>
             <a:ext cx="1499616" cy="182880"/>
           </a:xfrm>
           <a:prstGeom prst="rect">
@@ -17821,7 +17821,7 @@
         </p:nvSpPr>
         <p:spPr>
           <a:xfrm>
-            <a:off x="6839712" y="1877193"/>
+            <a:off x="6839712" y="1822679"/>
             <a:ext cx="1088136" cy="182880"/>
           </a:xfrm>
           <a:prstGeom prst="rect">
@@ -17859,7 +17859,7 @@
         </p:nvSpPr>
         <p:spPr>
           <a:xfrm>
-            <a:off x="640080" y="2286000"/>
+            <a:off x="640080" y="2121408"/>
             <a:ext cx="3886200" cy="182880"/>
           </a:xfrm>
           <a:prstGeom prst="rect">
@@ -18291,7 +18291,7 @@
         </p:nvSpPr>
         <p:spPr>
           <a:xfrm>
-            <a:off x="4892040" y="2286000"/>
+            <a:off x="4884610" y="2121408"/>
             <a:ext cx="3383280" cy="182880"/>
           </a:xfrm>
           <a:prstGeom prst="rect">

--- a/template/Maicao_Template_Visual_v02.pptx
+++ b/template/Maicao_Template_Visual_v02.pptx
@@ -148,7 +148,7 @@
     </p:spTree>
     <p:extLst>
       <p:ext uri="{BB962C8B-B14F-4D97-AF65-F5344CB8AC3E}">
-        <p14:creationId xmlns:p14="http://schemas.microsoft.com/office/powerpoint/2010/main" val="3964711816"/>
+        <p14:creationId xmlns:p14="http://schemas.microsoft.com/office/powerpoint/2010/main" val="957131248"/>
       </p:ext>
     </p:extLst>
   </p:cSld>
@@ -2216,7 +2216,7 @@
         </p:nvSpPr>
         <p:spPr>
           <a:xfrm>
-            <a:off x="0" y="308142"/>
+            <a:off x="0" y="0"/>
             <a:ext cx="12191695" cy="6858000"/>
           </a:xfrm>
           <a:prstGeom prst="rect">
@@ -2485,7 +2485,7 @@
         </p:nvSpPr>
         <p:spPr>
           <a:xfrm>
-            <a:off x="896112" y="1938528"/>
+            <a:off x="896112" y="1801368"/>
             <a:ext cx="1865376" cy="182880"/>
           </a:xfrm>
           <a:prstGeom prst="rect">
@@ -2626,7 +2626,7 @@
         </p:nvSpPr>
         <p:spPr>
           <a:xfrm>
-            <a:off x="3319272" y="1934342"/>
+            <a:off x="3319272" y="1801368"/>
             <a:ext cx="1682496" cy="182880"/>
           </a:xfrm>
           <a:prstGeom prst="rect">
@@ -2767,7 +2767,7 @@
         </p:nvSpPr>
         <p:spPr>
           <a:xfrm>
-            <a:off x="5559552" y="1934342"/>
+            <a:off x="5559552" y="1801368"/>
             <a:ext cx="1499616" cy="182880"/>
           </a:xfrm>
           <a:prstGeom prst="rect">
@@ -2908,7 +2908,7 @@
         </p:nvSpPr>
         <p:spPr>
           <a:xfrm>
-            <a:off x="7616952" y="1934342"/>
+            <a:off x="7616952" y="1801368"/>
             <a:ext cx="1042416" cy="182880"/>
           </a:xfrm>
           <a:prstGeom prst="rect">
@@ -2919,7 +2919,7 @@
         </p:spPr>
         <p:txBody>
           <a:bodyPr wrap="square" lIns="0" tIns="0" rIns="0" bIns="0" rtlCol="0" anchor="ctr">
-            <a:normAutofit fontScale="92500"/>
+            <a:normAutofit/>
           </a:bodyPr>
           <a:lstStyle/>
           <a:p>
@@ -2946,7 +2946,7 @@
         </p:nvSpPr>
         <p:spPr>
           <a:xfrm>
-            <a:off x="777240" y="2484495"/>
+            <a:off x="777240" y="2651760"/>
             <a:ext cx="3154680" cy="182880"/>
           </a:xfrm>
           <a:prstGeom prst="rect">
@@ -4781,13 +4781,6 @@
             <a:prstDash val="solid"/>
           </a:ln>
         </p:spPr>
-        <p:txBody>
-          <a:bodyPr/>
-          <a:lstStyle/>
-          <a:p>
-            <a:endParaRPr lang="es-CL" dirty="0"/>
-          </a:p>
-        </p:txBody>
       </p:sp>
       <p:sp>
         <p:nvSpPr>
@@ -4854,11 +4847,12 @@
             <a:r>
               <a:rPr lang="en-US" sz="1050" dirty="0">
                 <a:solidFill>
-                  <a:schemeClr val="bg1"/>
+                  <a:srgbClr val="121426"/>
                 </a:solidFill>
               </a:rPr>
               <a:t>Competidores activan Pinterest-like, creators, eventos y contenido humano. Maicao puede diferenciarse con utilidad + cercanía + retail expertise.</a:t>
             </a:r>
+            <a:endParaRPr lang="en-US" sz="1050" dirty="0"/>
           </a:p>
         </p:txBody>
       </p:sp>
@@ -5959,7 +5953,7 @@
         </p:nvSpPr>
         <p:spPr>
           <a:xfrm>
-            <a:off x="0" y="301752"/>
+            <a:off x="0" y="0"/>
             <a:ext cx="12191695" cy="6858000"/>
           </a:xfrm>
           <a:prstGeom prst="rect">
@@ -6228,7 +6222,7 @@
         </p:nvSpPr>
         <p:spPr>
           <a:xfrm>
-            <a:off x="758952" y="1920240"/>
+            <a:off x="758952" y="1872288"/>
             <a:ext cx="1819656" cy="182880"/>
           </a:xfrm>
           <a:prstGeom prst="rect">
@@ -6369,7 +6363,7 @@
         </p:nvSpPr>
         <p:spPr>
           <a:xfrm>
-            <a:off x="3044952" y="1926465"/>
+            <a:off x="3044952" y="1861137"/>
             <a:ext cx="1819656" cy="182880"/>
           </a:xfrm>
           <a:prstGeom prst="rect">
@@ -6510,7 +6504,7 @@
         </p:nvSpPr>
         <p:spPr>
           <a:xfrm>
-            <a:off x="5314819" y="1926465"/>
+            <a:off x="5330952" y="1861137"/>
             <a:ext cx="1499616" cy="182880"/>
           </a:xfrm>
           <a:prstGeom prst="rect">
@@ -6651,7 +6645,7 @@
         </p:nvSpPr>
         <p:spPr>
           <a:xfrm>
-            <a:off x="7296912" y="1926465"/>
+            <a:off x="7296912" y="1861137"/>
             <a:ext cx="1499616" cy="182880"/>
           </a:xfrm>
           <a:prstGeom prst="rect">
@@ -6792,7 +6786,7 @@
         </p:nvSpPr>
         <p:spPr>
           <a:xfrm>
-            <a:off x="9262872" y="1915448"/>
+            <a:off x="9262872" y="1872288"/>
             <a:ext cx="1728216" cy="182880"/>
           </a:xfrm>
           <a:prstGeom prst="rect">
@@ -8018,7 +8012,7 @@
         </p:nvSpPr>
         <p:spPr>
           <a:xfrm>
-            <a:off x="3401122" y="3776472"/>
+            <a:off x="3657600" y="3776472"/>
             <a:ext cx="822960" cy="164592"/>
           </a:xfrm>
           <a:prstGeom prst="rect">
@@ -8144,7 +8138,7 @@
         </p:nvSpPr>
         <p:spPr>
           <a:xfrm>
-            <a:off x="3401124" y="4142232"/>
+            <a:off x="3657600" y="4142232"/>
             <a:ext cx="822960" cy="164592"/>
           </a:xfrm>
           <a:prstGeom prst="rect">
@@ -8163,9 +8157,14 @@
               <a:buNone/>
             </a:pPr>
             <a:r>
-              <a:rPr lang="en-US" sz="800" b="1" dirty="0"/>
+              <a:rPr lang="en-US" sz="800" dirty="0">
+                <a:solidFill>
+                  <a:srgbClr val="6E7280"/>
+                </a:solidFill>
+              </a:rPr>
               <a:t>1.3%</a:t>
             </a:r>
+            <a:endParaRPr lang="en-US" sz="800" dirty="0"/>
           </a:p>
         </p:txBody>
       </p:sp>
@@ -8402,7 +8401,7 @@
         </p:nvSpPr>
         <p:spPr>
           <a:xfrm>
-            <a:off x="6264760" y="3776472"/>
+            <a:off x="6766560" y="3776472"/>
             <a:ext cx="822960" cy="164592"/>
           </a:xfrm>
           <a:prstGeom prst="rect">
@@ -8528,7 +8527,7 @@
         </p:nvSpPr>
         <p:spPr>
           <a:xfrm>
-            <a:off x="6253605" y="4142232"/>
+            <a:off x="6766560" y="4142232"/>
             <a:ext cx="822960" cy="164592"/>
           </a:xfrm>
           <a:prstGeom prst="rect">
@@ -8547,9 +8546,14 @@
               <a:buNone/>
             </a:pPr>
             <a:r>
-              <a:rPr lang="en-US" sz="800" b="1" dirty="0"/>
+              <a:rPr lang="en-US" sz="800" dirty="0">
+                <a:solidFill>
+                  <a:srgbClr val="6E7280"/>
+                </a:solidFill>
+              </a:rPr>
               <a:t>3.800.400</a:t>
             </a:r>
+            <a:endParaRPr lang="en-US" sz="800" dirty="0"/>
           </a:p>
         </p:txBody>
       </p:sp>
@@ -8786,7 +8790,7 @@
         </p:nvSpPr>
         <p:spPr>
           <a:xfrm>
-            <a:off x="9574438" y="3776472"/>
+            <a:off x="9875520" y="3776472"/>
             <a:ext cx="822960" cy="164592"/>
           </a:xfrm>
           <a:prstGeom prst="rect">
@@ -8912,7 +8916,7 @@
         </p:nvSpPr>
         <p:spPr>
           <a:xfrm>
-            <a:off x="9585591" y="4142232"/>
+            <a:off x="9875520" y="4142232"/>
             <a:ext cx="822960" cy="164592"/>
           </a:xfrm>
           <a:prstGeom prst="rect">
@@ -8931,9 +8935,14 @@
               <a:buNone/>
             </a:pPr>
             <a:r>
-              <a:rPr lang="en-US" sz="800" b="1" dirty="0"/>
+              <a:rPr lang="en-US" sz="800" dirty="0">
+                <a:solidFill>
+                  <a:srgbClr val="6E7280"/>
+                </a:solidFill>
+              </a:rPr>
               <a:t>156</a:t>
             </a:r>
+            <a:endParaRPr lang="en-US" sz="800" dirty="0"/>
           </a:p>
         </p:txBody>
       </p:sp>
@@ -9209,7 +9218,7 @@
         </p:nvSpPr>
         <p:spPr>
           <a:xfrm>
-            <a:off x="640080" y="1021455"/>
+            <a:off x="640080" y="1188720"/>
             <a:ext cx="3840480" cy="182880"/>
           </a:xfrm>
           <a:prstGeom prst="rect">
@@ -9542,7 +9551,7 @@
         </p:nvSpPr>
         <p:spPr>
           <a:xfrm>
-            <a:off x="4572000" y="1021455"/>
+            <a:off x="4572000" y="1188720"/>
             <a:ext cx="3291840" cy="182880"/>
           </a:xfrm>
           <a:prstGeom prst="rect">
@@ -9875,7 +9884,7 @@
         </p:nvSpPr>
         <p:spPr>
           <a:xfrm>
-            <a:off x="8138160" y="1021455"/>
+            <a:off x="8138160" y="1188720"/>
             <a:ext cx="2834640" cy="182880"/>
           </a:xfrm>
           <a:prstGeom prst="rect">
@@ -10965,7 +10974,7 @@
         </p:nvSpPr>
         <p:spPr>
           <a:xfrm>
-            <a:off x="804672" y="1844142"/>
+            <a:off x="804672" y="1709928"/>
             <a:ext cx="1499616" cy="182880"/>
           </a:xfrm>
           <a:prstGeom prst="rect">
@@ -11106,7 +11115,7 @@
         </p:nvSpPr>
         <p:spPr>
           <a:xfrm>
-            <a:off x="2743200" y="1844142"/>
+            <a:off x="2816352" y="1709928"/>
             <a:ext cx="1088136" cy="182880"/>
           </a:xfrm>
           <a:prstGeom prst="rect">
@@ -11247,7 +11256,7 @@
         </p:nvSpPr>
         <p:spPr>
           <a:xfrm>
-            <a:off x="4416552" y="1844142"/>
+            <a:off x="4416552" y="1709928"/>
             <a:ext cx="1088136" cy="182880"/>
           </a:xfrm>
           <a:prstGeom prst="rect">
@@ -11388,7 +11397,7 @@
         </p:nvSpPr>
         <p:spPr>
           <a:xfrm>
-            <a:off x="6016752" y="1844142"/>
+            <a:off x="6016752" y="1709928"/>
             <a:ext cx="1499616" cy="182880"/>
           </a:xfrm>
           <a:prstGeom prst="rect">
@@ -11426,7 +11435,7 @@
         </p:nvSpPr>
         <p:spPr>
           <a:xfrm>
-            <a:off x="640080" y="2118735"/>
+            <a:off x="640080" y="2286000"/>
             <a:ext cx="2926080" cy="182880"/>
           </a:xfrm>
           <a:prstGeom prst="rect">
@@ -11759,7 +11768,7 @@
         </p:nvSpPr>
         <p:spPr>
           <a:xfrm>
-            <a:off x="3977640" y="2107584"/>
+            <a:off x="3977640" y="2286000"/>
             <a:ext cx="3657600" cy="182880"/>
           </a:xfrm>
           <a:prstGeom prst="rect">
@@ -12328,7 +12337,7 @@
         </p:nvSpPr>
         <p:spPr>
           <a:xfrm>
-            <a:off x="0" y="305712"/>
+            <a:off x="0" y="0"/>
             <a:ext cx="12191695" cy="6858000"/>
           </a:xfrm>
           <a:prstGeom prst="rect">
@@ -12597,7 +12606,7 @@
         </p:nvSpPr>
         <p:spPr>
           <a:xfrm>
-            <a:off x="795312" y="1877193"/>
+            <a:off x="804672" y="1709928"/>
             <a:ext cx="1499616" cy="182880"/>
           </a:xfrm>
           <a:prstGeom prst="rect">
@@ -12738,7 +12747,7 @@
         </p:nvSpPr>
         <p:spPr>
           <a:xfrm>
-            <a:off x="2804350" y="1878045"/>
+            <a:off x="2816352" y="1709928"/>
             <a:ext cx="1499616" cy="182880"/>
           </a:xfrm>
           <a:prstGeom prst="rect">
@@ -12879,7 +12888,7 @@
         </p:nvSpPr>
         <p:spPr>
           <a:xfrm>
-            <a:off x="4850892" y="1875346"/>
+            <a:off x="4828032" y="1709928"/>
             <a:ext cx="1499616" cy="182880"/>
           </a:xfrm>
           <a:prstGeom prst="rect">
@@ -13020,7 +13029,7 @@
         </p:nvSpPr>
         <p:spPr>
           <a:xfrm>
-            <a:off x="6850570" y="1878045"/>
+            <a:off x="6839712" y="1709928"/>
             <a:ext cx="1088136" cy="182880"/>
           </a:xfrm>
           <a:prstGeom prst="rect">
@@ -13058,7 +13067,7 @@
         </p:nvSpPr>
         <p:spPr>
           <a:xfrm>
-            <a:off x="640080" y="2118735"/>
+            <a:off x="640080" y="2286000"/>
             <a:ext cx="3429000" cy="182880"/>
           </a:xfrm>
           <a:prstGeom prst="rect">
@@ -13391,7 +13400,7 @@
         </p:nvSpPr>
         <p:spPr>
           <a:xfrm>
-            <a:off x="4480560" y="2118735"/>
+            <a:off x="4480560" y="2286000"/>
             <a:ext cx="3200400" cy="182880"/>
           </a:xfrm>
           <a:prstGeom prst="rect">
@@ -14300,7 +14309,7 @@
         </p:nvSpPr>
         <p:spPr>
           <a:xfrm>
-            <a:off x="804672" y="1877193"/>
+            <a:off x="804672" y="1709928"/>
             <a:ext cx="1499616" cy="182880"/>
           </a:xfrm>
           <a:prstGeom prst="rect">
@@ -14441,7 +14450,7 @@
         </p:nvSpPr>
         <p:spPr>
           <a:xfrm>
-            <a:off x="2816352" y="1874903"/>
+            <a:off x="2816352" y="1709928"/>
             <a:ext cx="1499616" cy="182880"/>
           </a:xfrm>
           <a:prstGeom prst="rect">
@@ -14582,7 +14591,7 @@
         </p:nvSpPr>
         <p:spPr>
           <a:xfrm>
-            <a:off x="4818888" y="1877193"/>
+            <a:off x="4828032" y="1709928"/>
             <a:ext cx="1499616" cy="182880"/>
           </a:xfrm>
           <a:prstGeom prst="rect">
@@ -14723,7 +14732,7 @@
         </p:nvSpPr>
         <p:spPr>
           <a:xfrm>
-            <a:off x="6830407" y="1875729"/>
+            <a:off x="6839712" y="1709928"/>
             <a:ext cx="1088136" cy="182880"/>
           </a:xfrm>
           <a:prstGeom prst="rect">
@@ -14761,7 +14770,7 @@
         </p:nvSpPr>
         <p:spPr>
           <a:xfrm>
-            <a:off x="640080" y="2118735"/>
+            <a:off x="640080" y="2286000"/>
             <a:ext cx="3657600" cy="182880"/>
           </a:xfrm>
           <a:prstGeom prst="rect">
@@ -15292,7 +15301,7 @@
         </p:nvSpPr>
         <p:spPr>
           <a:xfrm>
-            <a:off x="4709160" y="2118735"/>
+            <a:off x="4709160" y="2286000"/>
             <a:ext cx="3337560" cy="182880"/>
           </a:xfrm>
           <a:prstGeom prst="rect">
@@ -17218,7 +17227,7 @@
         </p:nvSpPr>
         <p:spPr>
           <a:xfrm>
-            <a:off x="502920" y="541503"/>
+            <a:off x="502920" y="530352"/>
             <a:ext cx="7680960" cy="411480"/>
           </a:xfrm>
           <a:prstGeom prst="rect">
@@ -17229,7 +17238,7 @@
         </p:spPr>
         <p:txBody>
           <a:bodyPr wrap="square" lIns="0" tIns="0" rIns="0" bIns="0" rtlCol="0" anchor="ctr">
-            <a:normAutofit fontScale="70000" lnSpcReduction="20000"/>
+            <a:normAutofit/>
           </a:bodyPr>
           <a:lstStyle/>
           <a:p>
@@ -17398,7 +17407,7 @@
         </p:nvSpPr>
         <p:spPr>
           <a:xfrm>
-            <a:off x="804672" y="1855986"/>
+            <a:off x="804672" y="1709928"/>
             <a:ext cx="1499616" cy="182880"/>
           </a:xfrm>
           <a:prstGeom prst="rect">
@@ -17539,7 +17548,7 @@
         </p:nvSpPr>
         <p:spPr>
           <a:xfrm>
-            <a:off x="2816352" y="1851660"/>
+            <a:off x="2816352" y="1709928"/>
             <a:ext cx="1499616" cy="182880"/>
           </a:xfrm>
           <a:prstGeom prst="rect">
@@ -17680,7 +17689,7 @@
         </p:nvSpPr>
         <p:spPr>
           <a:xfrm>
-            <a:off x="4828032" y="1855986"/>
+            <a:off x="4828032" y="1709928"/>
             <a:ext cx="1499616" cy="182880"/>
           </a:xfrm>
           <a:prstGeom prst="rect">
@@ -17821,7 +17830,7 @@
         </p:nvSpPr>
         <p:spPr>
           <a:xfrm>
-            <a:off x="6839712" y="1822679"/>
+            <a:off x="6839712" y="1709928"/>
             <a:ext cx="1088136" cy="182880"/>
           </a:xfrm>
           <a:prstGeom prst="rect">
@@ -17859,7 +17868,7 @@
         </p:nvSpPr>
         <p:spPr>
           <a:xfrm>
-            <a:off x="640080" y="2121408"/>
+            <a:off x="640080" y="2286000"/>
             <a:ext cx="3886200" cy="182880"/>
           </a:xfrm>
           <a:prstGeom prst="rect">
@@ -18291,7 +18300,7 @@
         </p:nvSpPr>
         <p:spPr>
           <a:xfrm>
-            <a:off x="4884610" y="2121408"/>
+            <a:off x="4892040" y="2286000"/>
             <a:ext cx="3383280" cy="182880"/>
           </a:xfrm>
           <a:prstGeom prst="rect">
@@ -18807,11 +18816,12 @@
             <a:r>
               <a:rPr lang="en-US" sz="1050" dirty="0">
                 <a:solidFill>
-                  <a:schemeClr val="bg1"/>
+                  <a:srgbClr val="121426"/>
                 </a:solidFill>
               </a:rPr>
               <a:t>Skar sostiene interacción alta; Disley abre volumen nuevo con tono humorístico y cercano. Para próximos meses, combinar perfiles de alto alcance con micro-nichos de expertise.</a:t>
             </a:r>
+            <a:endParaRPr lang="en-US" sz="1050" dirty="0"/>
           </a:p>
         </p:txBody>
       </p:sp>
@@ -18880,11 +18890,12 @@
             <a:r>
               <a:rPr lang="en-US" sz="1050" dirty="0">
                 <a:solidFill>
-                  <a:schemeClr val="bg1"/>
+                  <a:srgbClr val="121426"/>
                 </a:solidFill>
               </a:rPr>
               <a:t>70% creators de performance, 20% nichos estratégicos, 10% apuestas en tendencia.</a:t>
             </a:r>
+            <a:endParaRPr lang="en-US" sz="1050" dirty="0"/>
           </a:p>
         </p:txBody>
       </p:sp>

--- a/template/Maicao_Template_Visual_v02.pptx
+++ b/template/Maicao_Template_Visual_v02.pptx
@@ -148,7 +148,7 @@
     </p:spTree>
     <p:extLst>
       <p:ext uri="{BB962C8B-B14F-4D97-AF65-F5344CB8AC3E}">
-        <p14:creationId xmlns:p14="http://schemas.microsoft.com/office/powerpoint/2010/main" val="957131248"/>
+        <p14:creationId xmlns:p14="http://schemas.microsoft.com/office/powerpoint/2010/main" val="3964711816"/>
       </p:ext>
     </p:extLst>
   </p:cSld>
@@ -2216,7 +2216,7 @@
         </p:nvSpPr>
         <p:spPr>
           <a:xfrm>
-            <a:off x="0" y="0"/>
+            <a:off x="0" y="308142"/>
             <a:ext cx="12191695" cy="6858000"/>
           </a:xfrm>
           <a:prstGeom prst="rect">
@@ -2485,7 +2485,7 @@
         </p:nvSpPr>
         <p:spPr>
           <a:xfrm>
-            <a:off x="896112" y="1801368"/>
+            <a:off x="896112" y="1938528"/>
             <a:ext cx="1865376" cy="182880"/>
           </a:xfrm>
           <a:prstGeom prst="rect">
@@ -2626,7 +2626,7 @@
         </p:nvSpPr>
         <p:spPr>
           <a:xfrm>
-            <a:off x="3319272" y="1801368"/>
+            <a:off x="3319272" y="1934342"/>
             <a:ext cx="1682496" cy="182880"/>
           </a:xfrm>
           <a:prstGeom prst="rect">
@@ -2767,7 +2767,7 @@
         </p:nvSpPr>
         <p:spPr>
           <a:xfrm>
-            <a:off x="5559552" y="1801368"/>
+            <a:off x="5559552" y="1934342"/>
             <a:ext cx="1499616" cy="182880"/>
           </a:xfrm>
           <a:prstGeom prst="rect">
@@ -2908,7 +2908,7 @@
         </p:nvSpPr>
         <p:spPr>
           <a:xfrm>
-            <a:off x="7616952" y="1801368"/>
+            <a:off x="7616952" y="1934342"/>
             <a:ext cx="1042416" cy="182880"/>
           </a:xfrm>
           <a:prstGeom prst="rect">
@@ -2919,7 +2919,7 @@
         </p:spPr>
         <p:txBody>
           <a:bodyPr wrap="square" lIns="0" tIns="0" rIns="0" bIns="0" rtlCol="0" anchor="ctr">
-            <a:normAutofit/>
+            <a:normAutofit fontScale="92500"/>
           </a:bodyPr>
           <a:lstStyle/>
           <a:p>
@@ -2946,7 +2946,7 @@
         </p:nvSpPr>
         <p:spPr>
           <a:xfrm>
-            <a:off x="777240" y="2651760"/>
+            <a:off x="777240" y="2484495"/>
             <a:ext cx="3154680" cy="182880"/>
           </a:xfrm>
           <a:prstGeom prst="rect">
@@ -4781,6 +4781,13 @@
             <a:prstDash val="solid"/>
           </a:ln>
         </p:spPr>
+        <p:txBody>
+          <a:bodyPr/>
+          <a:lstStyle/>
+          <a:p>
+            <a:endParaRPr lang="es-CL" dirty="0"/>
+          </a:p>
+        </p:txBody>
       </p:sp>
       <p:sp>
         <p:nvSpPr>
@@ -4847,12 +4854,11 @@
             <a:r>
               <a:rPr lang="en-US" sz="1050" dirty="0">
                 <a:solidFill>
-                  <a:srgbClr val="121426"/>
+                  <a:schemeClr val="bg1"/>
                 </a:solidFill>
               </a:rPr>
               <a:t>Competidores activan Pinterest-like, creators, eventos y contenido humano. Maicao puede diferenciarse con utilidad + cercanía + retail expertise.</a:t>
             </a:r>
-            <a:endParaRPr lang="en-US" sz="1050" dirty="0"/>
           </a:p>
         </p:txBody>
       </p:sp>
@@ -5953,7 +5959,7 @@
         </p:nvSpPr>
         <p:spPr>
           <a:xfrm>
-            <a:off x="0" y="0"/>
+            <a:off x="0" y="301752"/>
             <a:ext cx="12191695" cy="6858000"/>
           </a:xfrm>
           <a:prstGeom prst="rect">
@@ -6069,7 +6075,7 @@
                 <a:ea typeface="Aptos Display" pitchFamily="34" charset="-122"/>
                 <a:cs typeface="Aptos Display" pitchFamily="34" charset="-120"/>
               </a:rPr>
-              <a:t>Dashboard ejecutivo: en 10 segundos</a:t>
+              <a:t>Dashboard ejecutivo: </a:t>
             </a:r>
             <a:endParaRPr lang="en-US" sz="2600" dirty="0"/>
           </a:p>
@@ -6222,7 +6228,7 @@
         </p:nvSpPr>
         <p:spPr>
           <a:xfrm>
-            <a:off x="758952" y="1872288"/>
+            <a:off x="758952" y="1920240"/>
             <a:ext cx="1819656" cy="182880"/>
           </a:xfrm>
           <a:prstGeom prst="rect">
@@ -6363,7 +6369,7 @@
         </p:nvSpPr>
         <p:spPr>
           <a:xfrm>
-            <a:off x="3044952" y="1861137"/>
+            <a:off x="3044952" y="1926465"/>
             <a:ext cx="1819656" cy="182880"/>
           </a:xfrm>
           <a:prstGeom prst="rect">
@@ -6504,7 +6510,7 @@
         </p:nvSpPr>
         <p:spPr>
           <a:xfrm>
-            <a:off x="5330952" y="1861137"/>
+            <a:off x="5314819" y="1926465"/>
             <a:ext cx="1499616" cy="182880"/>
           </a:xfrm>
           <a:prstGeom prst="rect">
@@ -6645,7 +6651,7 @@
         </p:nvSpPr>
         <p:spPr>
           <a:xfrm>
-            <a:off x="7296912" y="1861137"/>
+            <a:off x="7296912" y="1926465"/>
             <a:ext cx="1499616" cy="182880"/>
           </a:xfrm>
           <a:prstGeom prst="rect">
@@ -6786,7 +6792,7 @@
         </p:nvSpPr>
         <p:spPr>
           <a:xfrm>
-            <a:off x="9262872" y="1872288"/>
+            <a:off x="9262872" y="1915448"/>
             <a:ext cx="1728216" cy="182880"/>
           </a:xfrm>
           <a:prstGeom prst="rect">
@@ -8012,7 +8018,7 @@
         </p:nvSpPr>
         <p:spPr>
           <a:xfrm>
-            <a:off x="3657600" y="3776472"/>
+            <a:off x="3401122" y="3776472"/>
             <a:ext cx="822960" cy="164592"/>
           </a:xfrm>
           <a:prstGeom prst="rect">
@@ -8138,7 +8144,7 @@
         </p:nvSpPr>
         <p:spPr>
           <a:xfrm>
-            <a:off x="3657600" y="4142232"/>
+            <a:off x="3401124" y="4142232"/>
             <a:ext cx="822960" cy="164592"/>
           </a:xfrm>
           <a:prstGeom prst="rect">
@@ -8157,14 +8163,9 @@
               <a:buNone/>
             </a:pPr>
             <a:r>
-              <a:rPr lang="en-US" sz="800" dirty="0">
-                <a:solidFill>
-                  <a:srgbClr val="6E7280"/>
-                </a:solidFill>
-              </a:rPr>
+              <a:rPr lang="en-US" sz="800" b="1" dirty="0"/>
               <a:t>1.3%</a:t>
             </a:r>
-            <a:endParaRPr lang="en-US" sz="800" dirty="0"/>
           </a:p>
         </p:txBody>
       </p:sp>
@@ -8401,7 +8402,7 @@
         </p:nvSpPr>
         <p:spPr>
           <a:xfrm>
-            <a:off x="6766560" y="3776472"/>
+            <a:off x="6264760" y="3776472"/>
             <a:ext cx="822960" cy="164592"/>
           </a:xfrm>
           <a:prstGeom prst="rect">
@@ -8527,7 +8528,7 @@
         </p:nvSpPr>
         <p:spPr>
           <a:xfrm>
-            <a:off x="6766560" y="4142232"/>
+            <a:off x="6253605" y="4142232"/>
             <a:ext cx="822960" cy="164592"/>
           </a:xfrm>
           <a:prstGeom prst="rect">
@@ -8546,14 +8547,9 @@
               <a:buNone/>
             </a:pPr>
             <a:r>
-              <a:rPr lang="en-US" sz="800" dirty="0">
-                <a:solidFill>
-                  <a:srgbClr val="6E7280"/>
-                </a:solidFill>
-              </a:rPr>
+              <a:rPr lang="en-US" sz="800" b="1" dirty="0"/>
               <a:t>3.800.400</a:t>
             </a:r>
-            <a:endParaRPr lang="en-US" sz="800" dirty="0"/>
           </a:p>
         </p:txBody>
       </p:sp>
@@ -8790,7 +8786,7 @@
         </p:nvSpPr>
         <p:spPr>
           <a:xfrm>
-            <a:off x="9875520" y="3776472"/>
+            <a:off x="9574438" y="3776472"/>
             <a:ext cx="822960" cy="164592"/>
           </a:xfrm>
           <a:prstGeom prst="rect">
@@ -8916,7 +8912,7 @@
         </p:nvSpPr>
         <p:spPr>
           <a:xfrm>
-            <a:off x="9875520" y="4142232"/>
+            <a:off x="9585591" y="4142232"/>
             <a:ext cx="822960" cy="164592"/>
           </a:xfrm>
           <a:prstGeom prst="rect">
@@ -8935,14 +8931,9 @@
               <a:buNone/>
             </a:pPr>
             <a:r>
-              <a:rPr lang="en-US" sz="800" dirty="0">
-                <a:solidFill>
-                  <a:srgbClr val="6E7280"/>
-                </a:solidFill>
-              </a:rPr>
+              <a:rPr lang="en-US" sz="800" b="1" dirty="0"/>
               <a:t>156</a:t>
             </a:r>
-            <a:endParaRPr lang="en-US" sz="800" dirty="0"/>
           </a:p>
         </p:txBody>
       </p:sp>
@@ -9218,7 +9209,7 @@
         </p:nvSpPr>
         <p:spPr>
           <a:xfrm>
-            <a:off x="640080" y="1188720"/>
+            <a:off x="640080" y="1021455"/>
             <a:ext cx="3840480" cy="182880"/>
           </a:xfrm>
           <a:prstGeom prst="rect">
@@ -9551,7 +9542,7 @@
         </p:nvSpPr>
         <p:spPr>
           <a:xfrm>
-            <a:off x="4572000" y="1188720"/>
+            <a:off x="4572000" y="1021455"/>
             <a:ext cx="3291840" cy="182880"/>
           </a:xfrm>
           <a:prstGeom prst="rect">
@@ -9884,7 +9875,7 @@
         </p:nvSpPr>
         <p:spPr>
           <a:xfrm>
-            <a:off x="8138160" y="1188720"/>
+            <a:off x="8138160" y="1021455"/>
             <a:ext cx="2834640" cy="182880"/>
           </a:xfrm>
           <a:prstGeom prst="rect">
@@ -10974,7 +10965,7 @@
         </p:nvSpPr>
         <p:spPr>
           <a:xfrm>
-            <a:off x="804672" y="1709928"/>
+            <a:off x="804672" y="1844142"/>
             <a:ext cx="1499616" cy="182880"/>
           </a:xfrm>
           <a:prstGeom prst="rect">
@@ -11115,7 +11106,7 @@
         </p:nvSpPr>
         <p:spPr>
           <a:xfrm>
-            <a:off x="2816352" y="1709928"/>
+            <a:off x="2743200" y="1844142"/>
             <a:ext cx="1088136" cy="182880"/>
           </a:xfrm>
           <a:prstGeom prst="rect">
@@ -11256,7 +11247,7 @@
         </p:nvSpPr>
         <p:spPr>
           <a:xfrm>
-            <a:off x="4416552" y="1709928"/>
+            <a:off x="4416552" y="1844142"/>
             <a:ext cx="1088136" cy="182880"/>
           </a:xfrm>
           <a:prstGeom prst="rect">
@@ -11397,7 +11388,7 @@
         </p:nvSpPr>
         <p:spPr>
           <a:xfrm>
-            <a:off x="6016752" y="1709928"/>
+            <a:off x="6016752" y="1844142"/>
             <a:ext cx="1499616" cy="182880"/>
           </a:xfrm>
           <a:prstGeom prst="rect">
@@ -11435,7 +11426,7 @@
         </p:nvSpPr>
         <p:spPr>
           <a:xfrm>
-            <a:off x="640080" y="2286000"/>
+            <a:off x="640080" y="2118735"/>
             <a:ext cx="2926080" cy="182880"/>
           </a:xfrm>
           <a:prstGeom prst="rect">
@@ -11768,7 +11759,7 @@
         </p:nvSpPr>
         <p:spPr>
           <a:xfrm>
-            <a:off x="3977640" y="2286000"/>
+            <a:off x="3977640" y="2107584"/>
             <a:ext cx="3657600" cy="182880"/>
           </a:xfrm>
           <a:prstGeom prst="rect">
@@ -12337,7 +12328,7 @@
         </p:nvSpPr>
         <p:spPr>
           <a:xfrm>
-            <a:off x="0" y="0"/>
+            <a:off x="0" y="305712"/>
             <a:ext cx="12191695" cy="6858000"/>
           </a:xfrm>
           <a:prstGeom prst="rect">
@@ -12606,7 +12597,7 @@
         </p:nvSpPr>
         <p:spPr>
           <a:xfrm>
-            <a:off x="804672" y="1709928"/>
+            <a:off x="795312" y="1877193"/>
             <a:ext cx="1499616" cy="182880"/>
           </a:xfrm>
           <a:prstGeom prst="rect">
@@ -12747,7 +12738,7 @@
         </p:nvSpPr>
         <p:spPr>
           <a:xfrm>
-            <a:off x="2816352" y="1709928"/>
+            <a:off x="2804350" y="1878045"/>
             <a:ext cx="1499616" cy="182880"/>
           </a:xfrm>
           <a:prstGeom prst="rect">
@@ -12888,7 +12879,7 @@
         </p:nvSpPr>
         <p:spPr>
           <a:xfrm>
-            <a:off x="4828032" y="1709928"/>
+            <a:off x="4850892" y="1875346"/>
             <a:ext cx="1499616" cy="182880"/>
           </a:xfrm>
           <a:prstGeom prst="rect">
@@ -13029,7 +13020,7 @@
         </p:nvSpPr>
         <p:spPr>
           <a:xfrm>
-            <a:off x="6839712" y="1709928"/>
+            <a:off x="6850570" y="1878045"/>
             <a:ext cx="1088136" cy="182880"/>
           </a:xfrm>
           <a:prstGeom prst="rect">
@@ -13067,7 +13058,7 @@
         </p:nvSpPr>
         <p:spPr>
           <a:xfrm>
-            <a:off x="640080" y="2286000"/>
+            <a:off x="640080" y="2118735"/>
             <a:ext cx="3429000" cy="182880"/>
           </a:xfrm>
           <a:prstGeom prst="rect">
@@ -13400,7 +13391,7 @@
         </p:nvSpPr>
         <p:spPr>
           <a:xfrm>
-            <a:off x="4480560" y="2286000"/>
+            <a:off x="4480560" y="2118735"/>
             <a:ext cx="3200400" cy="182880"/>
           </a:xfrm>
           <a:prstGeom prst="rect">
@@ -14309,7 +14300,7 @@
         </p:nvSpPr>
         <p:spPr>
           <a:xfrm>
-            <a:off x="804672" y="1709928"/>
+            <a:off x="804672" y="1877193"/>
             <a:ext cx="1499616" cy="182880"/>
           </a:xfrm>
           <a:prstGeom prst="rect">
@@ -14450,7 +14441,7 @@
         </p:nvSpPr>
         <p:spPr>
           <a:xfrm>
-            <a:off x="2816352" y="1709928"/>
+            <a:off x="2816352" y="1874903"/>
             <a:ext cx="1499616" cy="182880"/>
           </a:xfrm>
           <a:prstGeom prst="rect">
@@ -14591,7 +14582,7 @@
         </p:nvSpPr>
         <p:spPr>
           <a:xfrm>
-            <a:off x="4828032" y="1709928"/>
+            <a:off x="4818888" y="1877193"/>
             <a:ext cx="1499616" cy="182880"/>
           </a:xfrm>
           <a:prstGeom prst="rect">
@@ -14732,7 +14723,7 @@
         </p:nvSpPr>
         <p:spPr>
           <a:xfrm>
-            <a:off x="6839712" y="1709928"/>
+            <a:off x="6830407" y="1875729"/>
             <a:ext cx="1088136" cy="182880"/>
           </a:xfrm>
           <a:prstGeom prst="rect">
@@ -14770,7 +14761,7 @@
         </p:nvSpPr>
         <p:spPr>
           <a:xfrm>
-            <a:off x="640080" y="2286000"/>
+            <a:off x="640080" y="2118735"/>
             <a:ext cx="3657600" cy="182880"/>
           </a:xfrm>
           <a:prstGeom prst="rect">
@@ -15301,7 +15292,7 @@
         </p:nvSpPr>
         <p:spPr>
           <a:xfrm>
-            <a:off x="4709160" y="2286000"/>
+            <a:off x="4709160" y="2118735"/>
             <a:ext cx="3337560" cy="182880"/>
           </a:xfrm>
           <a:prstGeom prst="rect">
@@ -17227,7 +17218,7 @@
         </p:nvSpPr>
         <p:spPr>
           <a:xfrm>
-            <a:off x="502920" y="530352"/>
+            <a:off x="502920" y="541503"/>
             <a:ext cx="7680960" cy="411480"/>
           </a:xfrm>
           <a:prstGeom prst="rect">
@@ -17238,7 +17229,7 @@
         </p:spPr>
         <p:txBody>
           <a:bodyPr wrap="square" lIns="0" tIns="0" rIns="0" bIns="0" rtlCol="0" anchor="ctr">
-            <a:normAutofit/>
+            <a:normAutofit fontScale="70000" lnSpcReduction="20000"/>
           </a:bodyPr>
           <a:lstStyle/>
           <a:p>
@@ -17407,7 +17398,7 @@
         </p:nvSpPr>
         <p:spPr>
           <a:xfrm>
-            <a:off x="804672" y="1709928"/>
+            <a:off x="804672" y="1855986"/>
             <a:ext cx="1499616" cy="182880"/>
           </a:xfrm>
           <a:prstGeom prst="rect">
@@ -17548,7 +17539,7 @@
         </p:nvSpPr>
         <p:spPr>
           <a:xfrm>
-            <a:off x="2816352" y="1709928"/>
+            <a:off x="2816352" y="1851660"/>
             <a:ext cx="1499616" cy="182880"/>
           </a:xfrm>
           <a:prstGeom prst="rect">
@@ -17689,7 +17680,7 @@
         </p:nvSpPr>
         <p:spPr>
           <a:xfrm>
-            <a:off x="4828032" y="1709928"/>
+            <a:off x="4828032" y="1855986"/>
             <a:ext cx="1499616" cy="182880"/>
           </a:xfrm>
           <a:prstGeom prst="rect">
@@ -17830,7 +17821,7 @@
         </p:nvSpPr>
         <p:spPr>
           <a:xfrm>
-            <a:off x="6839712" y="1709928"/>
+            <a:off x="6839712" y="1822679"/>
             <a:ext cx="1088136" cy="182880"/>
           </a:xfrm>
           <a:prstGeom prst="rect">
@@ -17868,7 +17859,7 @@
         </p:nvSpPr>
         <p:spPr>
           <a:xfrm>
-            <a:off x="640080" y="2286000"/>
+            <a:off x="640080" y="2121408"/>
             <a:ext cx="3886200" cy="182880"/>
           </a:xfrm>
           <a:prstGeom prst="rect">
@@ -18300,7 +18291,7 @@
         </p:nvSpPr>
         <p:spPr>
           <a:xfrm>
-            <a:off x="4892040" y="2286000"/>
+            <a:off x="4884610" y="2121408"/>
             <a:ext cx="3383280" cy="182880"/>
           </a:xfrm>
           <a:prstGeom prst="rect">
@@ -18816,12 +18807,11 @@
             <a:r>
               <a:rPr lang="en-US" sz="1050" dirty="0">
                 <a:solidFill>
-                  <a:srgbClr val="121426"/>
+                  <a:schemeClr val="bg1"/>
                 </a:solidFill>
               </a:rPr>
               <a:t>Skar sostiene interacción alta; Disley abre volumen nuevo con tono humorístico y cercano. Para próximos meses, combinar perfiles de alto alcance con micro-nichos de expertise.</a:t>
             </a:r>
-            <a:endParaRPr lang="en-US" sz="1050" dirty="0"/>
           </a:p>
         </p:txBody>
       </p:sp>
@@ -18890,12 +18880,11 @@
             <a:r>
               <a:rPr lang="en-US" sz="1050" dirty="0">
                 <a:solidFill>
-                  <a:srgbClr val="121426"/>
+                  <a:schemeClr val="bg1"/>
                 </a:solidFill>
               </a:rPr>
               <a:t>70% creators de performance, 20% nichos estratégicos, 10% apuestas en tendencia.</a:t>
             </a:r>
-            <a:endParaRPr lang="en-US" sz="1050" dirty="0"/>
           </a:p>
         </p:txBody>
       </p:sp>

--- a/template/Maicao_Template_Visual_v02.pptx
+++ b/template/Maicao_Template_Visual_v02.pptx
@@ -4,9 +4,6 @@
   <p:sldMasterIdLst>
     <p:sldMasterId id="2147483648" r:id="rId1"/>
   </p:sldMasterIdLst>
-  <p:notesMasterIdLst>
-    <p:notesMasterId r:id="rId14"/>
-  </p:notesMasterIdLst>
   <p:sldIdLst>
     <p:sldId id="256" r:id="rId2"/>
     <p:sldId id="257" r:id="rId3"/>
@@ -21,8 +18,11 @@
     <p:sldId id="266" r:id="rId12"/>
     <p:sldId id="267" r:id="rId13"/>
   </p:sldIdLst>
-  <p:sldSz cx="12192000" cy="6858000"/>
-  <p:notesSz cx="6858000" cy="12192000"/>
+  <p:notesMasterIdLst>
+    <p:notesMasterId r:id="rId14"/>
+  </p:notesMasterIdLst>
+  <p:sldSz cx="12191695" cy="6858000"/>
+  <p:notesSz cx="6858000" cy="12191695"/>
   <p:defaultTextStyle>
     <a:lvl1pPr marL="0" algn="l" defTabSz="914400" rtl="0" eaLnBrk="1" latinLnBrk="0" hangingPunct="1">
       <a:defRPr sz="1800" kern="1200">
@@ -115,11 +115,6 @@
       </a:defRPr>
     </a:lvl9pPr>
   </p:defaultTextStyle>
-  <p:extLst>
-    <p:ext uri="{EFAFB233-063F-42B5-8137-9DF3F51BA10A}">
-      <p15:sldGuideLst xmlns:p15="http://schemas.microsoft.com/office/powerpoint/2012/main"/>
-    </p:ext>
-  </p:extLst>
 </p:presentation>
 </file>
 
@@ -145,10 +140,234 @@
           <a:chExt cx="0" cy="0"/>
         </a:xfrm>
       </p:grpSpPr>
+      <p:sp>
+        <p:nvSpPr>
+          <p:cNvPr id="2" name="Header Placeholder 1"/>
+          <p:cNvSpPr>
+            <a:spLocks noGrp="1"/>
+          </p:cNvSpPr>
+          <p:nvPr>
+            <p:ph type="hdr" sz="quarter"/>
+          </p:nvPr>
+        </p:nvSpPr>
+        <p:spPr>
+          <a:xfrm>
+            <a:off x="0" y="0"/>
+            <a:ext cx="2971800" cy="458788"/>
+          </a:xfrm>
+          <a:prstGeom prst="rect">
+            <a:avLst/>
+          </a:prstGeom>
+        </p:spPr>
+        <p:txBody>
+          <a:bodyPr vert="horz" lIns="91440" tIns="45720" rIns="91440" bIns="45720" rtlCol="0"/>
+          <a:lstStyle>
+            <a:lvl1pPr algn="l">
+              <a:defRPr sz="1200"/>
+            </a:lvl1pPr>
+          </a:lstStyle>
+          <a:p>
+            <a:endParaRPr lang="en-US"/>
+          </a:p>
+        </p:txBody>
+      </p:sp>
+      <p:sp>
+        <p:nvSpPr>
+          <p:cNvPr id="3" name="Date Placeholder 2"/>
+          <p:cNvSpPr>
+            <a:spLocks noGrp="1"/>
+          </p:cNvSpPr>
+          <p:nvPr>
+            <p:ph type="dt" idx="1"/>
+          </p:nvPr>
+        </p:nvSpPr>
+        <p:spPr>
+          <a:xfrm>
+            <a:off x="3884613" y="0"/>
+            <a:ext cx="2971800" cy="458788"/>
+          </a:xfrm>
+          <a:prstGeom prst="rect">
+            <a:avLst/>
+          </a:prstGeom>
+        </p:spPr>
+        <p:txBody>
+          <a:bodyPr vert="horz" lIns="91440" tIns="45720" rIns="91440" bIns="45720" rtlCol="0"/>
+          <a:lstStyle>
+            <a:lvl1pPr algn="r">
+              <a:defRPr sz="1200"/>
+            </a:lvl1pPr>
+          </a:lstStyle>
+          <a:p>
+            <a:fld id="{5282F153-3F37-0F45-9E97-73ACFA13230C}" type="datetimeFigureOut">
+              <a:rPr lang="en-US"/>
+              <a:t>7/23/19</a:t>
+            </a:fld>
+            <a:endParaRPr lang="en-US"/>
+          </a:p>
+        </p:txBody>
+      </p:sp>
+      <p:sp>
+        <p:nvSpPr>
+          <p:cNvPr id="4" name="Slide Image Placeholder 3"/>
+          <p:cNvSpPr>
+            <a:spLocks noGrp="1" noRot="1" noChangeAspect="1"/>
+          </p:cNvSpPr>
+          <p:nvPr>
+            <p:ph type="sldImg" idx="2"/>
+          </p:nvPr>
+        </p:nvSpPr>
+        <p:spPr>
+          <a:xfrm>
+            <a:off x="685800" y="1143000"/>
+            <a:ext cx="5486400" cy="3086100"/>
+          </a:xfrm>
+          <a:prstGeom prst="rect">
+            <a:avLst/>
+          </a:prstGeom>
+          <a:noFill/>
+          <a:ln w="12700">
+            <a:solidFill>
+              <a:prstClr val="black"/>
+            </a:solidFill>
+          </a:ln>
+        </p:spPr>
+        <p:txBody>
+          <a:bodyPr vert="horz" lIns="91440" tIns="45720" rIns="91440" bIns="45720" rtlCol="0" anchor="ctr"/>
+          <a:lstStyle/>
+          <a:p>
+            <a:endParaRPr lang="en-US"/>
+          </a:p>
+        </p:txBody>
+      </p:sp>
+      <p:sp>
+        <p:nvSpPr>
+          <p:cNvPr id="5" name="Notes Placeholder 4"/>
+          <p:cNvSpPr>
+            <a:spLocks noGrp="1"/>
+          </p:cNvSpPr>
+          <p:nvPr>
+            <p:ph type="body" sz="quarter" idx="3"/>
+          </p:nvPr>
+        </p:nvSpPr>
+        <p:spPr>
+          <a:xfrm>
+            <a:off x="685800" y="4400550"/>
+            <a:ext cx="5486400" cy="3600450"/>
+          </a:xfrm>
+          <a:prstGeom prst="rect">
+            <a:avLst/>
+          </a:prstGeom>
+        </p:spPr>
+        <p:txBody>
+          <a:bodyPr vert="horz" lIns="91440" tIns="45720" rIns="91440" bIns="45720" rtlCol="0"/>
+          <a:lstStyle/>
+          <a:p>
+            <a:pPr lvl="0"/>
+            <a:r>
+              <a:rPr lang="en-US"/>
+              <a:t>Click to edit Master text styles</a:t>
+            </a:r>
+          </a:p>
+          <a:p>
+            <a:pPr lvl="1"/>
+            <a:r>
+              <a:rPr lang="en-US"/>
+              <a:t>Second level</a:t>
+            </a:r>
+          </a:p>
+          <a:p>
+            <a:pPr lvl="2"/>
+            <a:r>
+              <a:rPr lang="en-US"/>
+              <a:t>Third level</a:t>
+            </a:r>
+          </a:p>
+          <a:p>
+            <a:pPr lvl="3"/>
+            <a:r>
+              <a:rPr lang="en-US"/>
+              <a:t>Fourth level</a:t>
+            </a:r>
+          </a:p>
+          <a:p>
+            <a:pPr lvl="4"/>
+            <a:r>
+              <a:rPr lang="en-US"/>
+              <a:t>Fifth level</a:t>
+            </a:r>
+          </a:p>
+        </p:txBody>
+      </p:sp>
+      <p:sp>
+        <p:nvSpPr>
+          <p:cNvPr id="6" name="Footer Placeholder 5"/>
+          <p:cNvSpPr>
+            <a:spLocks noGrp="1"/>
+          </p:cNvSpPr>
+          <p:nvPr>
+            <p:ph type="ftr" sz="quarter" idx="4"/>
+          </p:nvPr>
+        </p:nvSpPr>
+        <p:spPr>
+          <a:xfrm>
+            <a:off x="0" y="8685213"/>
+            <a:ext cx="2971800" cy="458787"/>
+          </a:xfrm>
+          <a:prstGeom prst="rect">
+            <a:avLst/>
+          </a:prstGeom>
+        </p:spPr>
+        <p:txBody>
+          <a:bodyPr vert="horz" lIns="91440" tIns="45720" rIns="91440" bIns="45720" rtlCol="0" anchor="b"/>
+          <a:lstStyle>
+            <a:lvl1pPr algn="l">
+              <a:defRPr sz="1200"/>
+            </a:lvl1pPr>
+          </a:lstStyle>
+          <a:p>
+            <a:endParaRPr lang="en-US"/>
+          </a:p>
+        </p:txBody>
+      </p:sp>
+      <p:sp>
+        <p:nvSpPr>
+          <p:cNvPr id="7" name="Slide Number Placeholder 6"/>
+          <p:cNvSpPr>
+            <a:spLocks noGrp="1"/>
+          </p:cNvSpPr>
+          <p:nvPr>
+            <p:ph type="sldNum" sz="quarter" idx="5"/>
+          </p:nvPr>
+        </p:nvSpPr>
+        <p:spPr>
+          <a:xfrm>
+            <a:off x="3884613" y="8685213"/>
+            <a:ext cx="2971800" cy="458787"/>
+          </a:xfrm>
+          <a:prstGeom prst="rect">
+            <a:avLst/>
+          </a:prstGeom>
+        </p:spPr>
+        <p:txBody>
+          <a:bodyPr vert="horz" lIns="91440" tIns="45720" rIns="91440" bIns="45720" rtlCol="0" anchor="b"/>
+          <a:lstStyle>
+            <a:lvl1pPr algn="r">
+              <a:defRPr sz="1200"/>
+            </a:lvl1pPr>
+          </a:lstStyle>
+          <a:p>
+            <a:fld id="{CE5E9CC1-C706-0F49-92D6-E571CC5EEA8F}" type="slidenum">
+              <a:rPr lang="en-US"/>
+              <a:t>‹#›</a:t>
+            </a:fld>
+            <a:endParaRPr lang="en-US"/>
+          </a:p>
+        </p:txBody>
+      </p:sp>
     </p:spTree>
     <p:extLst>
       <p:ext uri="{BB962C8B-B14F-4D97-AF65-F5344CB8AC3E}">
-        <p14:creationId xmlns:p14="http://schemas.microsoft.com/office/powerpoint/2010/main" val="3964711816"/>
+        <p14:creationId xmlns:p14="http://schemas.microsoft.com/office/powerpoint/2010/main" val="1024086991"/>
       </p:ext>
     </p:extLst>
   </p:cSld>
@@ -292,6 +511,10 @@
           <a:bodyPr/>
           <a:lstStyle/>
           <a:p>
+            <a:r>
+              <a:rPr lang="en-US" dirty="0"/>
+              <a:t/>
+            </a:r>
             <a:endParaRPr lang="en-US" dirty="0"/>
           </a:p>
         </p:txBody>
@@ -376,6 +599,10 @@
           <a:bodyPr/>
           <a:lstStyle/>
           <a:p>
+            <a:r>
+              <a:rPr lang="en-US" dirty="0"/>
+              <a:t/>
+            </a:r>
             <a:endParaRPr lang="en-US" dirty="0"/>
           </a:p>
         </p:txBody>
@@ -460,6 +687,10 @@
           <a:bodyPr/>
           <a:lstStyle/>
           <a:p>
+            <a:r>
+              <a:rPr lang="en-US" dirty="0"/>
+              <a:t/>
+            </a:r>
             <a:endParaRPr lang="en-US" dirty="0"/>
           </a:p>
         </p:txBody>
@@ -544,6 +775,10 @@
           <a:bodyPr/>
           <a:lstStyle/>
           <a:p>
+            <a:r>
+              <a:rPr lang="en-US" dirty="0"/>
+              <a:t/>
+            </a:r>
             <a:endParaRPr lang="en-US" dirty="0"/>
           </a:p>
         </p:txBody>
@@ -628,6 +863,10 @@
           <a:bodyPr/>
           <a:lstStyle/>
           <a:p>
+            <a:r>
+              <a:rPr lang="en-US" dirty="0"/>
+              <a:t/>
+            </a:r>
             <a:endParaRPr lang="en-US" dirty="0"/>
           </a:p>
         </p:txBody>
@@ -712,6 +951,10 @@
           <a:bodyPr/>
           <a:lstStyle/>
           <a:p>
+            <a:r>
+              <a:rPr lang="en-US" dirty="0"/>
+              <a:t/>
+            </a:r>
             <a:endParaRPr lang="en-US" dirty="0"/>
           </a:p>
         </p:txBody>
@@ -796,6 +1039,10 @@
           <a:bodyPr/>
           <a:lstStyle/>
           <a:p>
+            <a:r>
+              <a:rPr lang="en-US" dirty="0"/>
+              <a:t/>
+            </a:r>
             <a:endParaRPr lang="en-US" dirty="0"/>
           </a:p>
         </p:txBody>
@@ -880,6 +1127,10 @@
           <a:bodyPr/>
           <a:lstStyle/>
           <a:p>
+            <a:r>
+              <a:rPr lang="en-US" dirty="0"/>
+              <a:t/>
+            </a:r>
             <a:endParaRPr lang="en-US" dirty="0"/>
           </a:p>
         </p:txBody>
@@ -964,6 +1215,10 @@
           <a:bodyPr/>
           <a:lstStyle/>
           <a:p>
+            <a:r>
+              <a:rPr lang="en-US" dirty="0"/>
+              <a:t/>
+            </a:r>
             <a:endParaRPr lang="en-US" dirty="0"/>
           </a:p>
         </p:txBody>
@@ -1048,6 +1303,10 @@
           <a:bodyPr/>
           <a:lstStyle/>
           <a:p>
+            <a:r>
+              <a:rPr lang="en-US" dirty="0"/>
+              <a:t/>
+            </a:r>
             <a:endParaRPr lang="en-US" dirty="0"/>
           </a:p>
         </p:txBody>
@@ -1132,6 +1391,10 @@
           <a:bodyPr/>
           <a:lstStyle/>
           <a:p>
+            <a:r>
+              <a:rPr lang="en-US" dirty="0"/>
+              <a:t/>
+            </a:r>
             <a:endParaRPr lang="en-US" dirty="0"/>
           </a:p>
         </p:txBody>
@@ -1216,6 +1479,10 @@
           <a:bodyPr/>
           <a:lstStyle/>
           <a:p>
+            <a:r>
+              <a:rPr lang="en-US" dirty="0"/>
+              <a:t/>
+            </a:r>
             <a:endParaRPr lang="en-US" dirty="0"/>
           </a:p>
         </p:txBody>
@@ -1289,11 +1556,6 @@
 <file path=ppt/slideMasters/slideMaster1.xml><?xml version="1.0" encoding="utf-8"?>
 <p:sldMaster xmlns:a="http://schemas.openxmlformats.org/drawingml/2006/main" xmlns:r="http://schemas.openxmlformats.org/officeDocument/2006/relationships" xmlns:p="http://schemas.openxmlformats.org/presentationml/2006/main">
   <p:cSld>
-    <p:bg>
-      <p:bgRef idx="1001">
-        <a:schemeClr val="bg1"/>
-      </p:bgRef>
-    </p:bg>
     <p:spTree>
       <p:nvGrpSpPr>
         <p:cNvPr id="1" name=""/>
@@ -1576,7 +1838,6 @@
         <a:solidFill>
           <a:srgbClr val="FFFFFF"/>
         </a:solidFill>
-        <a:effectLst/>
       </p:bgPr>
     </p:bg>
     <p:spTree>
@@ -1666,7 +1927,7 @@
           </a:bodyPr>
           <a:lstStyle/>
           <a:p>
-            <a:pPr marL="0" indent="0">
+            <a:pPr indent="0" marL="0">
               <a:buNone/>
             </a:pPr>
             <a:r>
@@ -1683,7 +1944,7 @@
             <a:endParaRPr lang="en-US" sz="4400" dirty="0"/>
           </a:p>
           <a:p>
-            <a:pPr marL="0" indent="0">
+            <a:pPr indent="0" marL="0">
               <a:buNone/>
             </a:pPr>
             <a:r>
@@ -1722,7 +1983,7 @@
           <a:bodyPr wrap="square" lIns="0" tIns="0" rIns="0" bIns="0" rtlCol="0" anchor="ctr"/>
           <a:lstStyle/>
           <a:p>
-            <a:pPr marL="0" indent="0">
+            <a:pPr indent="0" marL="0">
               <a:buNone/>
             </a:pPr>
             <a:r>
@@ -1760,7 +2021,7 @@
           <a:bodyPr wrap="square" lIns="0" tIns="0" rIns="0" bIns="0" rtlCol="0" anchor="ctr"/>
           <a:lstStyle/>
           <a:p>
-            <a:pPr marL="0" indent="0" algn="ctr">
+            <a:pPr algn="ctr" indent="0" marL="0">
               <a:buNone/>
             </a:pPr>
             <a:r>
@@ -1796,7 +2057,7 @@
           <a:bodyPr wrap="square" lIns="0" tIns="0" rIns="0" bIns="0" rtlCol="0" anchor="ctr"/>
           <a:lstStyle/>
           <a:p>
-            <a:pPr marL="0" indent="0">
+            <a:pPr indent="0" marL="0">
               <a:buNone/>
             </a:pPr>
             <a:r>
@@ -1884,7 +2145,7 @@
           </a:bodyPr>
           <a:lstStyle/>
           <a:p>
-            <a:pPr marL="0" indent="0" algn="ctr">
+            <a:pPr algn="ctr" indent="0" marL="0">
               <a:buNone/>
             </a:pPr>
             <a:r>
@@ -1922,7 +2183,7 @@
           </a:bodyPr>
           <a:lstStyle/>
           <a:p>
-            <a:pPr marL="0" indent="0" algn="ctr">
+            <a:pPr algn="ctr" indent="0" marL="0">
               <a:buNone/>
             </a:pPr>
             <a:r>
@@ -1985,7 +2246,7 @@
           </a:bodyPr>
           <a:lstStyle/>
           <a:p>
-            <a:pPr marL="0" indent="0" algn="ctr">
+            <a:pPr algn="ctr" indent="0" marL="0">
               <a:buNone/>
             </a:pPr>
             <a:r>
@@ -2023,7 +2284,7 @@
           </a:bodyPr>
           <a:lstStyle/>
           <a:p>
-            <a:pPr marL="0" indent="0" algn="ctr">
+            <a:pPr algn="ctr" indent="0" marL="0">
               <a:buNone/>
             </a:pPr>
             <a:r>
@@ -2086,7 +2347,7 @@
           </a:bodyPr>
           <a:lstStyle/>
           <a:p>
-            <a:pPr marL="0" indent="0" algn="ctr">
+            <a:pPr algn="ctr" indent="0" marL="0">
               <a:buNone/>
             </a:pPr>
             <a:r>
@@ -2124,7 +2385,7 @@
           </a:bodyPr>
           <a:lstStyle/>
           <a:p>
-            <a:pPr marL="0" indent="0" algn="ctr">
+            <a:pPr algn="ctr" indent="0" marL="0">
               <a:buNone/>
             </a:pPr>
             <a:r>
@@ -2160,7 +2421,7 @@
           <a:bodyPr wrap="square" lIns="0" tIns="0" rIns="0" bIns="0" rtlCol="0" anchor="ctr"/>
           <a:lstStyle/>
           <a:p>
-            <a:pPr marL="0" indent="0" algn="r">
+            <a:pPr algn="r" indent="0" marL="0">
               <a:buNone/>
             </a:pPr>
             <a:r>
@@ -2191,7 +2452,6 @@
         <a:solidFill>
           <a:srgbClr val="FFFFFF"/>
         </a:solidFill>
-        <a:effectLst/>
       </p:bgPr>
     </p:bg>
     <p:spTree>
@@ -2216,7 +2476,7 @@
         </p:nvSpPr>
         <p:spPr>
           <a:xfrm>
-            <a:off x="0" y="308142"/>
+            <a:off x="0" y="0"/>
             <a:ext cx="12191695" cy="6858000"/>
           </a:xfrm>
           <a:prstGeom prst="rect">
@@ -2279,7 +2539,7 @@
           <a:bodyPr wrap="square" lIns="0" tIns="0" rIns="0" bIns="0" rtlCol="0" anchor="ctr"/>
           <a:lstStyle/>
           <a:p>
-            <a:pPr marL="0" indent="0">
+            <a:pPr indent="0" marL="0">
               <a:buNone/>
             </a:pPr>
             <a:r>
@@ -2320,7 +2580,7 @@
           </a:bodyPr>
           <a:lstStyle/>
           <a:p>
-            <a:pPr marL="0" indent="0">
+            <a:pPr indent="0" marL="0">
               <a:buNone/>
             </a:pPr>
             <a:r>
@@ -2359,7 +2619,7 @@
           <a:bodyPr wrap="square" lIns="0" tIns="0" rIns="0" bIns="0" rtlCol="0" anchor="ctr"/>
           <a:lstStyle/>
           <a:p>
-            <a:pPr marL="0" indent="0" algn="r">
+            <a:pPr algn="r" indent="0" marL="0">
               <a:buNone/>
             </a:pPr>
             <a:r>
@@ -2424,7 +2684,7 @@
           </a:bodyPr>
           <a:lstStyle/>
           <a:p>
-            <a:pPr marL="0" indent="0">
+            <a:pPr indent="0" marL="0">
               <a:buNone/>
             </a:pPr>
             <a:r>
@@ -2462,7 +2722,7 @@
           </a:bodyPr>
           <a:lstStyle/>
           <a:p>
-            <a:pPr marL="0" indent="0">
+            <a:pPr indent="0" marL="0">
               <a:buNone/>
             </a:pPr>
             <a:r>
@@ -2485,7 +2745,7 @@
         </p:nvSpPr>
         <p:spPr>
           <a:xfrm>
-            <a:off x="896112" y="1938528"/>
+            <a:off x="896112" y="1801368"/>
             <a:ext cx="1865376" cy="182880"/>
           </a:xfrm>
           <a:prstGeom prst="rect">
@@ -2500,7 +2760,7 @@
           </a:bodyPr>
           <a:lstStyle/>
           <a:p>
-            <a:pPr marL="0" indent="0">
+            <a:pPr indent="0" marL="0">
               <a:buNone/>
             </a:pPr>
             <a:r>
@@ -2565,7 +2825,7 @@
           </a:bodyPr>
           <a:lstStyle/>
           <a:p>
-            <a:pPr marL="0" indent="0">
+            <a:pPr indent="0" marL="0">
               <a:buNone/>
             </a:pPr>
             <a:r>
@@ -2603,7 +2863,7 @@
           </a:bodyPr>
           <a:lstStyle/>
           <a:p>
-            <a:pPr marL="0" indent="0">
+            <a:pPr indent="0" marL="0">
               <a:buNone/>
             </a:pPr>
             <a:r>
@@ -2626,7 +2886,7 @@
         </p:nvSpPr>
         <p:spPr>
           <a:xfrm>
-            <a:off x="3319272" y="1934342"/>
+            <a:off x="3319272" y="1801368"/>
             <a:ext cx="1682496" cy="182880"/>
           </a:xfrm>
           <a:prstGeom prst="rect">
@@ -2641,7 +2901,7 @@
           </a:bodyPr>
           <a:lstStyle/>
           <a:p>
-            <a:pPr marL="0" indent="0">
+            <a:pPr indent="0" marL="0">
               <a:buNone/>
             </a:pPr>
             <a:r>
@@ -2706,7 +2966,7 @@
           </a:bodyPr>
           <a:lstStyle/>
           <a:p>
-            <a:pPr marL="0" indent="0">
+            <a:pPr indent="0" marL="0">
               <a:buNone/>
             </a:pPr>
             <a:r>
@@ -2744,7 +3004,7 @@
           </a:bodyPr>
           <a:lstStyle/>
           <a:p>
-            <a:pPr marL="0" indent="0">
+            <a:pPr indent="0" marL="0">
               <a:buNone/>
             </a:pPr>
             <a:r>
@@ -2767,7 +3027,7 @@
         </p:nvSpPr>
         <p:spPr>
           <a:xfrm>
-            <a:off x="5559552" y="1934342"/>
+            <a:off x="5559552" y="1801368"/>
             <a:ext cx="1499616" cy="182880"/>
           </a:xfrm>
           <a:prstGeom prst="rect">
@@ -2782,7 +3042,7 @@
           </a:bodyPr>
           <a:lstStyle/>
           <a:p>
-            <a:pPr marL="0" indent="0">
+            <a:pPr indent="0" marL="0">
               <a:buNone/>
             </a:pPr>
             <a:r>
@@ -2847,7 +3107,7 @@
           </a:bodyPr>
           <a:lstStyle/>
           <a:p>
-            <a:pPr marL="0" indent="0">
+            <a:pPr indent="0" marL="0">
               <a:buNone/>
             </a:pPr>
             <a:r>
@@ -2885,7 +3145,7 @@
           </a:bodyPr>
           <a:lstStyle/>
           <a:p>
-            <a:pPr marL="0" indent="0">
+            <a:pPr indent="0" marL="0">
               <a:buNone/>
             </a:pPr>
             <a:r>
@@ -2908,7 +3168,7 @@
         </p:nvSpPr>
         <p:spPr>
           <a:xfrm>
-            <a:off x="7616952" y="1934342"/>
+            <a:off x="7616952" y="1801368"/>
             <a:ext cx="1042416" cy="182880"/>
           </a:xfrm>
           <a:prstGeom prst="rect">
@@ -2919,11 +3179,11 @@
         </p:spPr>
         <p:txBody>
           <a:bodyPr wrap="square" lIns="0" tIns="0" rIns="0" bIns="0" rtlCol="0" anchor="ctr">
-            <a:normAutofit fontScale="92500"/>
-          </a:bodyPr>
-          <a:lstStyle/>
-          <a:p>
-            <a:pPr marL="0" indent="0">
+            <a:normAutofit/>
+          </a:bodyPr>
+          <a:lstStyle/>
+          <a:p>
+            <a:pPr indent="0" marL="0">
               <a:buNone/>
             </a:pPr>
             <a:r>
@@ -2946,7 +3206,7 @@
         </p:nvSpPr>
         <p:spPr>
           <a:xfrm>
-            <a:off x="777240" y="2484495"/>
+            <a:off x="777240" y="2651760"/>
             <a:ext cx="3154680" cy="182880"/>
           </a:xfrm>
           <a:prstGeom prst="rect">
@@ -2959,7 +3219,7 @@
           <a:bodyPr wrap="square" lIns="0" tIns="0" rIns="0" bIns="0" rtlCol="0" anchor="ctr"/>
           <a:lstStyle/>
           <a:p>
-            <a:pPr marL="0" indent="0">
+            <a:pPr indent="0" marL="0">
               <a:buNone/>
             </a:pPr>
             <a:r>
@@ -3020,7 +3280,7 @@
           <a:bodyPr wrap="square" lIns="0" tIns="0" rIns="0" bIns="0" rtlCol="0" anchor="ctr"/>
           <a:lstStyle/>
           <a:p>
-            <a:pPr marL="0" indent="0" algn="ctr">
+            <a:pPr algn="ctr" indent="0" marL="0">
               <a:buNone/>
             </a:pPr>
             <a:r>
@@ -3058,7 +3318,7 @@
           </a:bodyPr>
           <a:lstStyle/>
           <a:p>
-            <a:pPr marL="0" indent="0" algn="ctr">
+            <a:pPr algn="ctr" indent="0" marL="0">
               <a:buNone/>
             </a:pPr>
             <a:r>
@@ -3119,7 +3379,7 @@
           <a:bodyPr wrap="square" lIns="0" tIns="0" rIns="0" bIns="0" rtlCol="0" anchor="ctr"/>
           <a:lstStyle/>
           <a:p>
-            <a:pPr marL="0" indent="0" algn="ctr">
+            <a:pPr algn="ctr" indent="0" marL="0">
               <a:buNone/>
             </a:pPr>
             <a:r>
@@ -3157,7 +3417,7 @@
           </a:bodyPr>
           <a:lstStyle/>
           <a:p>
-            <a:pPr marL="0" indent="0" algn="ctr">
+            <a:pPr algn="ctr" indent="0" marL="0">
               <a:buNone/>
             </a:pPr>
             <a:r>
@@ -3218,7 +3478,7 @@
           <a:bodyPr wrap="square" lIns="0" tIns="0" rIns="0" bIns="0" rtlCol="0" anchor="ctr"/>
           <a:lstStyle/>
           <a:p>
-            <a:pPr marL="0" indent="0" algn="ctr">
+            <a:pPr algn="ctr" indent="0" marL="0">
               <a:buNone/>
             </a:pPr>
             <a:r>
@@ -3256,7 +3516,7 @@
           </a:bodyPr>
           <a:lstStyle/>
           <a:p>
-            <a:pPr marL="0" indent="0" algn="ctr">
+            <a:pPr algn="ctr" indent="0" marL="0">
               <a:buNone/>
             </a:pPr>
             <a:r>
@@ -3319,7 +3579,7 @@
           <a:bodyPr wrap="square" lIns="0" tIns="0" rIns="0" bIns="0" rtlCol="0" anchor="ctr"/>
           <a:lstStyle/>
           <a:p>
-            <a:pPr marL="0" indent="0">
+            <a:pPr indent="0" marL="0">
               <a:buNone/>
             </a:pPr>
             <a:r>
@@ -3357,7 +3617,7 @@
           </a:bodyPr>
           <a:lstStyle/>
           <a:p>
-            <a:pPr marL="0" indent="0">
+            <a:pPr indent="0" marL="0">
               <a:buNone/>
             </a:pPr>
             <a:r>
@@ -3422,7 +3682,7 @@
           </a:bodyPr>
           <a:lstStyle/>
           <a:p>
-            <a:pPr marL="0" indent="0" algn="ctr">
+            <a:pPr algn="ctr" indent="0" marL="0">
               <a:buNone/>
             </a:pPr>
             <a:r>
@@ -3487,7 +3747,7 @@
           </a:bodyPr>
           <a:lstStyle/>
           <a:p>
-            <a:pPr marL="0" indent="0" algn="ctr">
+            <a:pPr algn="ctr" indent="0" marL="0">
               <a:buNone/>
             </a:pPr>
             <a:r>
@@ -3552,7 +3812,7 @@
           </a:bodyPr>
           <a:lstStyle/>
           <a:p>
-            <a:pPr marL="0" indent="0" algn="ctr">
+            <a:pPr algn="ctr" indent="0" marL="0">
               <a:buNone/>
             </a:pPr>
             <a:r>
@@ -3590,7 +3850,7 @@
           </a:bodyPr>
           <a:lstStyle/>
           <a:p>
-            <a:pPr marL="0" indent="0" algn="ctr">
+            <a:pPr algn="ctr" indent="0" marL="0">
               <a:buNone/>
             </a:pPr>
             <a:r>
@@ -3621,7 +3881,6 @@
         <a:solidFill>
           <a:srgbClr val="FFFFFF"/>
         </a:solidFill>
-        <a:effectLst/>
       </p:bgPr>
     </p:bg>
     <p:spTree>
@@ -3709,7 +3968,7 @@
           <a:bodyPr wrap="square" lIns="0" tIns="0" rIns="0" bIns="0" rtlCol="0" anchor="ctr"/>
           <a:lstStyle/>
           <a:p>
-            <a:pPr marL="0" indent="0">
+            <a:pPr indent="0" marL="0">
               <a:buNone/>
             </a:pPr>
             <a:r>
@@ -3750,7 +4009,7 @@
           </a:bodyPr>
           <a:lstStyle/>
           <a:p>
-            <a:pPr marL="0" indent="0">
+            <a:pPr indent="0" marL="0">
               <a:buNone/>
             </a:pPr>
             <a:r>
@@ -3789,7 +4048,7 @@
           <a:bodyPr wrap="square" lIns="0" tIns="0" rIns="0" bIns="0" rtlCol="0" anchor="ctr"/>
           <a:lstStyle/>
           <a:p>
-            <a:pPr marL="0" indent="0" algn="r">
+            <a:pPr algn="r" indent="0" marL="0">
               <a:buNone/>
             </a:pPr>
             <a:r>
@@ -3852,7 +4111,7 @@
           <a:bodyPr wrap="square" lIns="0" tIns="0" rIns="0" bIns="0" rtlCol="0" anchor="ctr"/>
           <a:lstStyle/>
           <a:p>
-            <a:pPr marL="0" indent="0">
+            <a:pPr indent="0" marL="0">
               <a:buNone/>
             </a:pPr>
             <a:r>
@@ -3888,7 +4147,7 @@
           <a:bodyPr wrap="square" lIns="0" tIns="0" rIns="0" bIns="0" rtlCol="0" anchor="ctr"/>
           <a:lstStyle/>
           <a:p>
-            <a:pPr marL="0" indent="0">
+            <a:pPr indent="0" marL="0">
               <a:buNone/>
             </a:pPr>
             <a:r>
@@ -3926,7 +4185,7 @@
           </a:bodyPr>
           <a:lstStyle/>
           <a:p>
-            <a:pPr marL="0" indent="0">
+            <a:pPr indent="0" marL="0">
               <a:buNone/>
             </a:pPr>
             <a:r>
@@ -3989,7 +4248,7 @@
           <a:bodyPr wrap="square" lIns="0" tIns="0" rIns="0" bIns="0" rtlCol="0" anchor="ctr"/>
           <a:lstStyle/>
           <a:p>
-            <a:pPr marL="0" indent="0">
+            <a:pPr indent="0" marL="0">
               <a:buNone/>
             </a:pPr>
             <a:r>
@@ -4025,7 +4284,7 @@
           <a:bodyPr wrap="square" lIns="0" tIns="0" rIns="0" bIns="0" rtlCol="0" anchor="ctr"/>
           <a:lstStyle/>
           <a:p>
-            <a:pPr marL="0" indent="0">
+            <a:pPr indent="0" marL="0">
               <a:buNone/>
             </a:pPr>
             <a:r>
@@ -4063,7 +4322,7 @@
           </a:bodyPr>
           <a:lstStyle/>
           <a:p>
-            <a:pPr marL="0" indent="0">
+            <a:pPr indent="0" marL="0">
               <a:buNone/>
             </a:pPr>
             <a:r>
@@ -4126,7 +4385,7 @@
           <a:bodyPr wrap="square" lIns="0" tIns="0" rIns="0" bIns="0" rtlCol="0" anchor="ctr"/>
           <a:lstStyle/>
           <a:p>
-            <a:pPr marL="0" indent="0">
+            <a:pPr indent="0" marL="0">
               <a:buNone/>
             </a:pPr>
             <a:r>
@@ -4162,7 +4421,7 @@
           <a:bodyPr wrap="square" lIns="0" tIns="0" rIns="0" bIns="0" rtlCol="0" anchor="ctr"/>
           <a:lstStyle/>
           <a:p>
-            <a:pPr marL="0" indent="0">
+            <a:pPr indent="0" marL="0">
               <a:buNone/>
             </a:pPr>
             <a:r>
@@ -4200,7 +4459,7 @@
           </a:bodyPr>
           <a:lstStyle/>
           <a:p>
-            <a:pPr marL="0" indent="0">
+            <a:pPr indent="0" marL="0">
               <a:buNone/>
             </a:pPr>
             <a:r>
@@ -4236,7 +4495,7 @@
           <a:bodyPr wrap="square" lIns="0" tIns="0" rIns="0" bIns="0" rtlCol="0" anchor="ctr"/>
           <a:lstStyle/>
           <a:p>
-            <a:pPr marL="0" indent="0">
+            <a:pPr indent="0" marL="0">
               <a:buNone/>
             </a:pPr>
             <a:r>
@@ -4274,7 +4533,7 @@
           </a:bodyPr>
           <a:lstStyle/>
           <a:p>
-            <a:pPr marL="0" indent="0">
+            <a:pPr indent="0" marL="0">
               <a:buNone/>
             </a:pPr>
             <a:r>
@@ -4362,7 +4621,7 @@
           </a:bodyPr>
           <a:lstStyle/>
           <a:p>
-            <a:pPr marL="0" indent="0">
+            <a:pPr indent="0" marL="0">
               <a:buNone/>
             </a:pPr>
             <a:r>
@@ -4400,7 +4659,7 @@
           </a:bodyPr>
           <a:lstStyle/>
           <a:p>
-            <a:pPr marL="0" indent="0">
+            <a:pPr indent="0" marL="0">
               <a:buNone/>
             </a:pPr>
             <a:r>
@@ -4488,7 +4747,7 @@
           </a:bodyPr>
           <a:lstStyle/>
           <a:p>
-            <a:pPr marL="0" indent="0">
+            <a:pPr indent="0" marL="0">
               <a:buNone/>
             </a:pPr>
             <a:r>
@@ -4526,7 +4785,7 @@
           </a:bodyPr>
           <a:lstStyle/>
           <a:p>
-            <a:pPr marL="0" indent="0">
+            <a:pPr indent="0" marL="0">
               <a:buNone/>
             </a:pPr>
             <a:r>
@@ -4614,7 +4873,7 @@
           </a:bodyPr>
           <a:lstStyle/>
           <a:p>
-            <a:pPr marL="0" indent="0">
+            <a:pPr indent="0" marL="0">
               <a:buNone/>
             </a:pPr>
             <a:r>
@@ -4652,7 +4911,7 @@
           </a:bodyPr>
           <a:lstStyle/>
           <a:p>
-            <a:pPr marL="0" indent="0">
+            <a:pPr indent="0" marL="0">
               <a:buNone/>
             </a:pPr>
             <a:r>
@@ -4740,7 +4999,7 @@
           </a:bodyPr>
           <a:lstStyle/>
           <a:p>
-            <a:pPr marL="0" indent="0">
+            <a:pPr indent="0" marL="0">
               <a:buNone/>
             </a:pPr>
             <a:r>
@@ -4781,13 +5040,6 @@
             <a:prstDash val="solid"/>
           </a:ln>
         </p:spPr>
-        <p:txBody>
-          <a:bodyPr/>
-          <a:lstStyle/>
-          <a:p>
-            <a:endParaRPr lang="es-CL" dirty="0"/>
-          </a:p>
-        </p:txBody>
       </p:sp>
       <p:sp>
         <p:nvSpPr>
@@ -4810,7 +5062,7 @@
           <a:bodyPr wrap="square" lIns="0" tIns="0" rIns="0" bIns="0" rtlCol="0" anchor="ctr"/>
           <a:lstStyle/>
           <a:p>
-            <a:pPr marL="0" indent="0">
+            <a:pPr indent="0" marL="0">
               <a:buNone/>
             </a:pPr>
             <a:r>
@@ -4848,17 +5100,18 @@
           </a:bodyPr>
           <a:lstStyle/>
           <a:p>
-            <a:pPr marL="0" indent="0">
+            <a:pPr indent="0" marL="0">
               <a:buNone/>
             </a:pPr>
             <a:r>
               <a:rPr lang="en-US" sz="1050" dirty="0">
                 <a:solidFill>
-                  <a:schemeClr val="bg1"/>
+                  <a:srgbClr val="121426"/>
                 </a:solidFill>
               </a:rPr>
               <a:t>Competidores activan Pinterest-like, creators, eventos y contenido humano. Maicao puede diferenciarse con utilidad + cercanía + retail expertise.</a:t>
             </a:r>
+            <a:endParaRPr lang="en-US" sz="1050" dirty="0"/>
           </a:p>
         </p:txBody>
       </p:sp>
@@ -4878,7 +5131,6 @@
         <a:solidFill>
           <a:srgbClr val="FFFFFF"/>
         </a:solidFill>
-        <a:effectLst/>
       </p:bgPr>
     </p:bg>
     <p:spTree>
@@ -4966,7 +5218,7 @@
           <a:bodyPr wrap="square" lIns="0" tIns="0" rIns="0" bIns="0" rtlCol="0" anchor="ctr"/>
           <a:lstStyle/>
           <a:p>
-            <a:pPr marL="0" indent="0">
+            <a:pPr indent="0" marL="0">
               <a:buNone/>
             </a:pPr>
             <a:r>
@@ -5007,7 +5259,7 @@
           </a:bodyPr>
           <a:lstStyle/>
           <a:p>
-            <a:pPr marL="0" indent="0">
+            <a:pPr indent="0" marL="0">
               <a:buNone/>
             </a:pPr>
             <a:r>
@@ -5046,7 +5298,7 @@
           <a:bodyPr wrap="square" lIns="0" tIns="0" rIns="0" bIns="0" rtlCol="0" anchor="ctr"/>
           <a:lstStyle/>
           <a:p>
-            <a:pPr marL="0" indent="0" algn="r">
+            <a:pPr algn="r" indent="0" marL="0">
               <a:buNone/>
             </a:pPr>
             <a:r>
@@ -5134,7 +5386,7 @@
           <a:bodyPr wrap="square" lIns="0" tIns="0" rIns="0" bIns="0" rtlCol="0" anchor="ctr"/>
           <a:lstStyle/>
           <a:p>
-            <a:pPr marL="0" indent="0" algn="ctr">
+            <a:pPr algn="ctr" indent="0" marL="0">
               <a:buNone/>
             </a:pPr>
             <a:r>
@@ -5170,7 +5422,7 @@
           <a:bodyPr wrap="square" lIns="0" tIns="0" rIns="0" bIns="0" rtlCol="0" anchor="ctr"/>
           <a:lstStyle/>
           <a:p>
-            <a:pPr marL="0" indent="0">
+            <a:pPr indent="0" marL="0">
               <a:buNone/>
             </a:pPr>
             <a:r>
@@ -5208,7 +5460,7 @@
           </a:bodyPr>
           <a:lstStyle/>
           <a:p>
-            <a:pPr marL="0" indent="0">
+            <a:pPr indent="0" marL="0">
               <a:buNone/>
             </a:pPr>
             <a:r>
@@ -5244,7 +5496,7 @@
           <a:bodyPr wrap="square" lIns="0" tIns="0" rIns="0" bIns="0" rtlCol="0" anchor="ctr"/>
           <a:lstStyle/>
           <a:p>
-            <a:pPr marL="0" indent="0">
+            <a:pPr indent="0" marL="0">
               <a:buNone/>
             </a:pPr>
             <a:r>
@@ -5332,7 +5584,7 @@
           <a:bodyPr wrap="square" lIns="0" tIns="0" rIns="0" bIns="0" rtlCol="0" anchor="ctr"/>
           <a:lstStyle/>
           <a:p>
-            <a:pPr marL="0" indent="0" algn="ctr">
+            <a:pPr algn="ctr" indent="0" marL="0">
               <a:buNone/>
             </a:pPr>
             <a:r>
@@ -5368,7 +5620,7 @@
           <a:bodyPr wrap="square" lIns="0" tIns="0" rIns="0" bIns="0" rtlCol="0" anchor="ctr"/>
           <a:lstStyle/>
           <a:p>
-            <a:pPr marL="0" indent="0">
+            <a:pPr indent="0" marL="0">
               <a:buNone/>
             </a:pPr>
             <a:r>
@@ -5406,7 +5658,7 @@
           </a:bodyPr>
           <a:lstStyle/>
           <a:p>
-            <a:pPr marL="0" indent="0">
+            <a:pPr indent="0" marL="0">
               <a:buNone/>
             </a:pPr>
             <a:r>
@@ -5442,7 +5694,7 @@
           <a:bodyPr wrap="square" lIns="0" tIns="0" rIns="0" bIns="0" rtlCol="0" anchor="ctr"/>
           <a:lstStyle/>
           <a:p>
-            <a:pPr marL="0" indent="0">
+            <a:pPr indent="0" marL="0">
               <a:buNone/>
             </a:pPr>
             <a:r>
@@ -5530,7 +5782,7 @@
           <a:bodyPr wrap="square" lIns="0" tIns="0" rIns="0" bIns="0" rtlCol="0" anchor="ctr"/>
           <a:lstStyle/>
           <a:p>
-            <a:pPr marL="0" indent="0" algn="ctr">
+            <a:pPr algn="ctr" indent="0" marL="0">
               <a:buNone/>
             </a:pPr>
             <a:r>
@@ -5566,7 +5818,7 @@
           <a:bodyPr wrap="square" lIns="0" tIns="0" rIns="0" bIns="0" rtlCol="0" anchor="ctr"/>
           <a:lstStyle/>
           <a:p>
-            <a:pPr marL="0" indent="0">
+            <a:pPr indent="0" marL="0">
               <a:buNone/>
             </a:pPr>
             <a:r>
@@ -5604,7 +5856,7 @@
           </a:bodyPr>
           <a:lstStyle/>
           <a:p>
-            <a:pPr marL="0" indent="0">
+            <a:pPr indent="0" marL="0">
               <a:buNone/>
             </a:pPr>
             <a:r>
@@ -5640,7 +5892,7 @@
           <a:bodyPr wrap="square" lIns="0" tIns="0" rIns="0" bIns="0" rtlCol="0" anchor="ctr"/>
           <a:lstStyle/>
           <a:p>
-            <a:pPr marL="0" indent="0">
+            <a:pPr indent="0" marL="0">
               <a:buNone/>
             </a:pPr>
             <a:r>
@@ -5728,7 +5980,7 @@
           <a:bodyPr wrap="square" lIns="0" tIns="0" rIns="0" bIns="0" rtlCol="0" anchor="ctr"/>
           <a:lstStyle/>
           <a:p>
-            <a:pPr marL="0" indent="0" algn="ctr">
+            <a:pPr algn="ctr" indent="0" marL="0">
               <a:buNone/>
             </a:pPr>
             <a:r>
@@ -5764,7 +6016,7 @@
           <a:bodyPr wrap="square" lIns="0" tIns="0" rIns="0" bIns="0" rtlCol="0" anchor="ctr"/>
           <a:lstStyle/>
           <a:p>
-            <a:pPr marL="0" indent="0">
+            <a:pPr indent="0" marL="0">
               <a:buNone/>
             </a:pPr>
             <a:r>
@@ -5802,7 +6054,7 @@
           </a:bodyPr>
           <a:lstStyle/>
           <a:p>
-            <a:pPr marL="0" indent="0">
+            <a:pPr indent="0" marL="0">
               <a:buNone/>
             </a:pPr>
             <a:r>
@@ -5838,7 +6090,7 @@
           <a:bodyPr wrap="square" lIns="0" tIns="0" rIns="0" bIns="0" rtlCol="0" anchor="ctr"/>
           <a:lstStyle/>
           <a:p>
-            <a:pPr marL="0" indent="0">
+            <a:pPr indent="0" marL="0">
               <a:buNone/>
             </a:pPr>
             <a:r>
@@ -5903,7 +6155,7 @@
           </a:bodyPr>
           <a:lstStyle/>
           <a:p>
-            <a:pPr marL="0" indent="0" algn="ctr">
+            <a:pPr algn="ctr" indent="0" marL="0">
               <a:buNone/>
             </a:pPr>
             <a:r>
@@ -5934,7 +6186,6 @@
         <a:solidFill>
           <a:srgbClr val="FFFFFF"/>
         </a:solidFill>
-        <a:effectLst/>
       </p:bgPr>
     </p:bg>
     <p:spTree>
@@ -5959,7 +6210,7 @@
         </p:nvSpPr>
         <p:spPr>
           <a:xfrm>
-            <a:off x="0" y="301752"/>
+            <a:off x="0" y="0"/>
             <a:ext cx="12191695" cy="6858000"/>
           </a:xfrm>
           <a:prstGeom prst="rect">
@@ -6022,7 +6273,7 @@
           <a:bodyPr wrap="square" lIns="0" tIns="0" rIns="0" bIns="0" rtlCol="0" anchor="ctr"/>
           <a:lstStyle/>
           <a:p>
-            <a:pPr marL="0" indent="0">
+            <a:pPr indent="0" marL="0">
               <a:buNone/>
             </a:pPr>
             <a:r>
@@ -6063,7 +6314,7 @@
           </a:bodyPr>
           <a:lstStyle/>
           <a:p>
-            <a:pPr marL="0" indent="0">
+            <a:pPr indent="0" marL="0">
               <a:buNone/>
             </a:pPr>
             <a:r>
@@ -6075,7 +6326,7 @@
                 <a:ea typeface="Aptos Display" pitchFamily="34" charset="-122"/>
                 <a:cs typeface="Aptos Display" pitchFamily="34" charset="-120"/>
               </a:rPr>
-              <a:t>Dashboard ejecutivo: </a:t>
+              <a:t>Dashboard ejecutivo: en 10 segundos</a:t>
             </a:r>
             <a:endParaRPr lang="en-US" sz="2600" dirty="0"/>
           </a:p>
@@ -6102,7 +6353,7 @@
           <a:bodyPr wrap="square" lIns="0" tIns="0" rIns="0" bIns="0" rtlCol="0" anchor="ctr"/>
           <a:lstStyle/>
           <a:p>
-            <a:pPr marL="0" indent="0" algn="r">
+            <a:pPr algn="r" indent="0" marL="0">
               <a:buNone/>
             </a:pPr>
             <a:r>
@@ -6167,7 +6418,7 @@
           </a:bodyPr>
           <a:lstStyle/>
           <a:p>
-            <a:pPr marL="0" indent="0">
+            <a:pPr indent="0" marL="0">
               <a:buNone/>
             </a:pPr>
             <a:r>
@@ -6205,7 +6456,7 @@
           </a:bodyPr>
           <a:lstStyle/>
           <a:p>
-            <a:pPr marL="0" indent="0">
+            <a:pPr indent="0" marL="0">
               <a:buNone/>
             </a:pPr>
             <a:r>
@@ -6228,7 +6479,7 @@
         </p:nvSpPr>
         <p:spPr>
           <a:xfrm>
-            <a:off x="758952" y="1920240"/>
+            <a:off x="758952" y="1783080"/>
             <a:ext cx="1819656" cy="182880"/>
           </a:xfrm>
           <a:prstGeom prst="rect">
@@ -6243,7 +6494,7 @@
           </a:bodyPr>
           <a:lstStyle/>
           <a:p>
-            <a:pPr marL="0" indent="0">
+            <a:pPr indent="0" marL="0">
               <a:buNone/>
             </a:pPr>
             <a:r>
@@ -6308,7 +6559,7 @@
           </a:bodyPr>
           <a:lstStyle/>
           <a:p>
-            <a:pPr marL="0" indent="0">
+            <a:pPr indent="0" marL="0">
               <a:buNone/>
             </a:pPr>
             <a:r>
@@ -6346,7 +6597,7 @@
           </a:bodyPr>
           <a:lstStyle/>
           <a:p>
-            <a:pPr marL="0" indent="0">
+            <a:pPr indent="0" marL="0">
               <a:buNone/>
             </a:pPr>
             <a:r>
@@ -6369,7 +6620,7 @@
         </p:nvSpPr>
         <p:spPr>
           <a:xfrm>
-            <a:off x="3044952" y="1926465"/>
+            <a:off x="3044952" y="1783080"/>
             <a:ext cx="1819656" cy="182880"/>
           </a:xfrm>
           <a:prstGeom prst="rect">
@@ -6384,7 +6635,7 @@
           </a:bodyPr>
           <a:lstStyle/>
           <a:p>
-            <a:pPr marL="0" indent="0">
+            <a:pPr indent="0" marL="0">
               <a:buNone/>
             </a:pPr>
             <a:r>
@@ -6449,7 +6700,7 @@
           </a:bodyPr>
           <a:lstStyle/>
           <a:p>
-            <a:pPr marL="0" indent="0">
+            <a:pPr indent="0" marL="0">
               <a:buNone/>
             </a:pPr>
             <a:r>
@@ -6487,7 +6738,7 @@
           </a:bodyPr>
           <a:lstStyle/>
           <a:p>
-            <a:pPr marL="0" indent="0">
+            <a:pPr indent="0" marL="0">
               <a:buNone/>
             </a:pPr>
             <a:r>
@@ -6510,7 +6761,7 @@
         </p:nvSpPr>
         <p:spPr>
           <a:xfrm>
-            <a:off x="5314819" y="1926465"/>
+            <a:off x="5330952" y="1783080"/>
             <a:ext cx="1499616" cy="182880"/>
           </a:xfrm>
           <a:prstGeom prst="rect">
@@ -6525,7 +6776,7 @@
           </a:bodyPr>
           <a:lstStyle/>
           <a:p>
-            <a:pPr marL="0" indent="0">
+            <a:pPr indent="0" marL="0">
               <a:buNone/>
             </a:pPr>
             <a:r>
@@ -6590,7 +6841,7 @@
           </a:bodyPr>
           <a:lstStyle/>
           <a:p>
-            <a:pPr marL="0" indent="0">
+            <a:pPr indent="0" marL="0">
               <a:buNone/>
             </a:pPr>
             <a:r>
@@ -6628,7 +6879,7 @@
           </a:bodyPr>
           <a:lstStyle/>
           <a:p>
-            <a:pPr marL="0" indent="0">
+            <a:pPr indent="0" marL="0">
               <a:buNone/>
             </a:pPr>
             <a:r>
@@ -6651,7 +6902,7 @@
         </p:nvSpPr>
         <p:spPr>
           <a:xfrm>
-            <a:off x="7296912" y="1926465"/>
+            <a:off x="7296912" y="1783080"/>
             <a:ext cx="1499616" cy="182880"/>
           </a:xfrm>
           <a:prstGeom prst="rect">
@@ -6666,7 +6917,7 @@
           </a:bodyPr>
           <a:lstStyle/>
           <a:p>
-            <a:pPr marL="0" indent="0">
+            <a:pPr indent="0" marL="0">
               <a:buNone/>
             </a:pPr>
             <a:r>
@@ -6731,7 +6982,7 @@
           </a:bodyPr>
           <a:lstStyle/>
           <a:p>
-            <a:pPr marL="0" indent="0">
+            <a:pPr indent="0" marL="0">
               <a:buNone/>
             </a:pPr>
             <a:r>
@@ -6769,7 +7020,7 @@
           </a:bodyPr>
           <a:lstStyle/>
           <a:p>
-            <a:pPr marL="0" indent="0">
+            <a:pPr indent="0" marL="0">
               <a:buNone/>
             </a:pPr>
             <a:r>
@@ -6792,7 +7043,7 @@
         </p:nvSpPr>
         <p:spPr>
           <a:xfrm>
-            <a:off x="9262872" y="1915448"/>
+            <a:off x="9262872" y="1783080"/>
             <a:ext cx="1728216" cy="182880"/>
           </a:xfrm>
           <a:prstGeom prst="rect">
@@ -6807,7 +7058,7 @@
           </a:bodyPr>
           <a:lstStyle/>
           <a:p>
-            <a:pPr marL="0" indent="0">
+            <a:pPr indent="0" marL="0">
               <a:buNone/>
             </a:pPr>
             <a:r>
@@ -6843,7 +7094,7 @@
           <a:bodyPr wrap="square" lIns="0" tIns="0" rIns="0" bIns="0" rtlCol="0" anchor="ctr"/>
           <a:lstStyle/>
           <a:p>
-            <a:pPr marL="0" indent="0">
+            <a:pPr indent="0" marL="0">
               <a:buNone/>
             </a:pPr>
             <a:r>
@@ -6879,7 +7130,7 @@
           <a:bodyPr wrap="square" lIns="0" tIns="0" rIns="0" bIns="0" rtlCol="0" anchor="ctr"/>
           <a:lstStyle/>
           <a:p>
-            <a:pPr marL="0" indent="0">
+            <a:pPr indent="0" marL="0">
               <a:buNone/>
             </a:pPr>
             <a:r>
@@ -6940,7 +7191,7 @@
           <a:bodyPr wrap="square" lIns="0" tIns="0" rIns="0" bIns="0" rtlCol="0" anchor="ctr"/>
           <a:lstStyle/>
           <a:p>
-            <a:pPr marL="0" indent="0" algn="ctr">
+            <a:pPr algn="ctr" indent="0" marL="0">
               <a:buNone/>
             </a:pPr>
             <a:r>
@@ -6978,7 +7229,7 @@
           </a:bodyPr>
           <a:lstStyle/>
           <a:p>
-            <a:pPr marL="0" indent="0" algn="ctr">
+            <a:pPr algn="ctr" indent="0" marL="0">
               <a:buNone/>
             </a:pPr>
             <a:r>
@@ -7039,7 +7290,7 @@
           <a:bodyPr wrap="square" lIns="0" tIns="0" rIns="0" bIns="0" rtlCol="0" anchor="ctr"/>
           <a:lstStyle/>
           <a:p>
-            <a:pPr marL="0" indent="0" algn="ctr">
+            <a:pPr algn="ctr" indent="0" marL="0">
               <a:buNone/>
             </a:pPr>
             <a:r>
@@ -7077,7 +7328,7 @@
           </a:bodyPr>
           <a:lstStyle/>
           <a:p>
-            <a:pPr marL="0" indent="0" algn="ctr">
+            <a:pPr algn="ctr" indent="0" marL="0">
               <a:buNone/>
             </a:pPr>
             <a:r>
@@ -7138,7 +7389,7 @@
           <a:bodyPr wrap="square" lIns="0" tIns="0" rIns="0" bIns="0" rtlCol="0" anchor="ctr"/>
           <a:lstStyle/>
           <a:p>
-            <a:pPr marL="0" indent="0" algn="ctr">
+            <a:pPr algn="ctr" indent="0" marL="0">
               <a:buNone/>
             </a:pPr>
             <a:r>
@@ -7176,7 +7427,7 @@
           </a:bodyPr>
           <a:lstStyle/>
           <a:p>
-            <a:pPr marL="0" indent="0" algn="ctr">
+            <a:pPr algn="ctr" indent="0" marL="0">
               <a:buNone/>
             </a:pPr>
             <a:r>
@@ -7237,7 +7488,7 @@
           <a:bodyPr wrap="square" lIns="0" tIns="0" rIns="0" bIns="0" rtlCol="0" anchor="ctr"/>
           <a:lstStyle/>
           <a:p>
-            <a:pPr marL="0" indent="0" algn="ctr">
+            <a:pPr algn="ctr" indent="0" marL="0">
               <a:buNone/>
             </a:pPr>
             <a:r>
@@ -7275,7 +7526,7 @@
           </a:bodyPr>
           <a:lstStyle/>
           <a:p>
-            <a:pPr marL="0" indent="0" algn="ctr">
+            <a:pPr algn="ctr" indent="0" marL="0">
               <a:buNone/>
             </a:pPr>
             <a:r>
@@ -7340,7 +7591,7 @@
           </a:bodyPr>
           <a:lstStyle/>
           <a:p>
-            <a:pPr marL="0" indent="0">
+            <a:pPr indent="0" marL="0">
               <a:buNone/>
             </a:pPr>
             <a:r>
@@ -7405,7 +7656,7 @@
           </a:bodyPr>
           <a:lstStyle/>
           <a:p>
-            <a:pPr marL="0" indent="0" algn="ctr">
+            <a:pPr algn="ctr" indent="0" marL="0">
               <a:buNone/>
             </a:pPr>
             <a:r>
@@ -7470,7 +7721,7 @@
           </a:bodyPr>
           <a:lstStyle/>
           <a:p>
-            <a:pPr marL="0" indent="0" algn="ctr">
+            <a:pPr algn="ctr" indent="0" marL="0">
               <a:buNone/>
             </a:pPr>
             <a:r>
@@ -7535,7 +7786,7 @@
           </a:bodyPr>
           <a:lstStyle/>
           <a:p>
-            <a:pPr marL="0" indent="0" algn="ctr">
+            <a:pPr algn="ctr" indent="0" marL="0">
               <a:buNone/>
             </a:pPr>
             <a:r>
@@ -7566,7 +7817,6 @@
         <a:solidFill>
           <a:srgbClr val="FFFFFF"/>
         </a:solidFill>
-        <a:effectLst/>
       </p:bgPr>
     </p:bg>
     <p:spTree>
@@ -7654,7 +7904,7 @@
           <a:bodyPr wrap="square" lIns="0" tIns="0" rIns="0" bIns="0" rtlCol="0" anchor="ctr"/>
           <a:lstStyle/>
           <a:p>
-            <a:pPr marL="0" indent="0">
+            <a:pPr indent="0" marL="0">
               <a:buNone/>
             </a:pPr>
             <a:r>
@@ -7695,7 +7945,7 @@
           </a:bodyPr>
           <a:lstStyle/>
           <a:p>
-            <a:pPr marL="0" indent="0">
+            <a:pPr indent="0" marL="0">
               <a:buNone/>
             </a:pPr>
             <a:r>
@@ -7734,7 +7984,7 @@
           <a:bodyPr wrap="square" lIns="0" tIns="0" rIns="0" bIns="0" rtlCol="0" anchor="ctr"/>
           <a:lstStyle/>
           <a:p>
-            <a:pPr marL="0" indent="0" algn="r">
+            <a:pPr algn="r" indent="0" marL="0">
               <a:buNone/>
             </a:pPr>
             <a:r>
@@ -7770,7 +8020,7 @@
           <a:bodyPr wrap="square" lIns="0" tIns="0" rIns="0" bIns="0" rtlCol="0" anchor="ctr"/>
           <a:lstStyle/>
           <a:p>
-            <a:pPr marL="0" indent="0">
+            <a:pPr indent="0" marL="0">
               <a:buNone/>
             </a:pPr>
             <a:r>
@@ -7833,7 +8083,7 @@
           <a:bodyPr wrap="square" lIns="0" tIns="0" rIns="0" bIns="0" rtlCol="0" anchor="ctr"/>
           <a:lstStyle/>
           <a:p>
-            <a:pPr marL="0" indent="0" algn="ctr">
+            <a:pPr algn="ctr" indent="0" marL="0">
               <a:buNone/>
             </a:pPr>
             <a:r>
@@ -7869,7 +8119,7 @@
           <a:bodyPr wrap="square" lIns="0" tIns="0" rIns="0" bIns="0" rtlCol="0" anchor="ctr"/>
           <a:lstStyle/>
           <a:p>
-            <a:pPr marL="0" indent="0">
+            <a:pPr indent="0" marL="0">
               <a:buNone/>
             </a:pPr>
             <a:r>
@@ -7907,7 +8157,7 @@
           </a:bodyPr>
           <a:lstStyle/>
           <a:p>
-            <a:pPr marL="0" indent="0">
+            <a:pPr indent="0" marL="0">
               <a:buNone/>
             </a:pPr>
             <a:r>
@@ -7945,7 +8195,7 @@
           </a:bodyPr>
           <a:lstStyle/>
           <a:p>
-            <a:pPr marL="0" indent="0">
+            <a:pPr indent="0" marL="0">
               <a:buNone/>
             </a:pPr>
             <a:r>
@@ -8018,7 +8268,7 @@
         </p:nvSpPr>
         <p:spPr>
           <a:xfrm>
-            <a:off x="3401122" y="3776472"/>
+            <a:off x="3657600" y="3776472"/>
             <a:ext cx="822960" cy="164592"/>
           </a:xfrm>
           <a:prstGeom prst="rect">
@@ -8033,7 +8283,7 @@
           </a:bodyPr>
           <a:lstStyle/>
           <a:p>
-            <a:pPr marL="0" indent="0">
+            <a:pPr indent="0" marL="0">
               <a:buNone/>
             </a:pPr>
             <a:r>
@@ -8071,7 +8321,7 @@
           </a:bodyPr>
           <a:lstStyle/>
           <a:p>
-            <a:pPr marL="0" indent="0">
+            <a:pPr indent="0" marL="0">
               <a:buNone/>
             </a:pPr>
             <a:r>
@@ -8144,7 +8394,7 @@
         </p:nvSpPr>
         <p:spPr>
           <a:xfrm>
-            <a:off x="3401124" y="4142232"/>
+            <a:off x="3657600" y="4142232"/>
             <a:ext cx="822960" cy="164592"/>
           </a:xfrm>
           <a:prstGeom prst="rect">
@@ -8159,13 +8409,18 @@
           </a:bodyPr>
           <a:lstStyle/>
           <a:p>
-            <a:pPr marL="0" indent="0">
-              <a:buNone/>
-            </a:pPr>
-            <a:r>
-              <a:rPr lang="en-US" sz="800" b="1" dirty="0"/>
+            <a:pPr indent="0" marL="0">
+              <a:buNone/>
+            </a:pPr>
+            <a:r>
+              <a:rPr lang="en-US" sz="800" dirty="0">
+                <a:solidFill>
+                  <a:srgbClr val="6E7280"/>
+                </a:solidFill>
+              </a:rPr>
               <a:t>1.3%</a:t>
             </a:r>
+            <a:endParaRPr lang="en-US" sz="800" dirty="0"/>
           </a:p>
         </p:txBody>
       </p:sp>
@@ -8217,7 +8472,7 @@
           <a:bodyPr wrap="square" lIns="0" tIns="0" rIns="0" bIns="0" rtlCol="0" anchor="ctr"/>
           <a:lstStyle/>
           <a:p>
-            <a:pPr marL="0" indent="0" algn="ctr">
+            <a:pPr algn="ctr" indent="0" marL="0">
               <a:buNone/>
             </a:pPr>
             <a:r>
@@ -8253,7 +8508,7 @@
           <a:bodyPr wrap="square" lIns="0" tIns="0" rIns="0" bIns="0" rtlCol="0" anchor="ctr"/>
           <a:lstStyle/>
           <a:p>
-            <a:pPr marL="0" indent="0">
+            <a:pPr indent="0" marL="0">
               <a:buNone/>
             </a:pPr>
             <a:r>
@@ -8291,7 +8546,7 @@
           </a:bodyPr>
           <a:lstStyle/>
           <a:p>
-            <a:pPr marL="0" indent="0">
+            <a:pPr indent="0" marL="0">
               <a:buNone/>
             </a:pPr>
             <a:r>
@@ -8329,7 +8584,7 @@
           </a:bodyPr>
           <a:lstStyle/>
           <a:p>
-            <a:pPr marL="0" indent="0">
+            <a:pPr indent="0" marL="0">
               <a:buNone/>
             </a:pPr>
             <a:r>
@@ -8402,7 +8657,7 @@
         </p:nvSpPr>
         <p:spPr>
           <a:xfrm>
-            <a:off x="6264760" y="3776472"/>
+            <a:off x="6766560" y="3776472"/>
             <a:ext cx="822960" cy="164592"/>
           </a:xfrm>
           <a:prstGeom prst="rect">
@@ -8417,7 +8672,7 @@
           </a:bodyPr>
           <a:lstStyle/>
           <a:p>
-            <a:pPr marL="0" indent="0">
+            <a:pPr indent="0" marL="0">
               <a:buNone/>
             </a:pPr>
             <a:r>
@@ -8455,7 +8710,7 @@
           </a:bodyPr>
           <a:lstStyle/>
           <a:p>
-            <a:pPr marL="0" indent="0">
+            <a:pPr indent="0" marL="0">
               <a:buNone/>
             </a:pPr>
             <a:r>
@@ -8528,7 +8783,7 @@
         </p:nvSpPr>
         <p:spPr>
           <a:xfrm>
-            <a:off x="6253605" y="4142232"/>
+            <a:off x="6766560" y="4142232"/>
             <a:ext cx="822960" cy="164592"/>
           </a:xfrm>
           <a:prstGeom prst="rect">
@@ -8543,13 +8798,18 @@
           </a:bodyPr>
           <a:lstStyle/>
           <a:p>
-            <a:pPr marL="0" indent="0">
-              <a:buNone/>
-            </a:pPr>
-            <a:r>
-              <a:rPr lang="en-US" sz="800" b="1" dirty="0"/>
+            <a:pPr indent="0" marL="0">
+              <a:buNone/>
+            </a:pPr>
+            <a:r>
+              <a:rPr lang="en-US" sz="800" dirty="0">
+                <a:solidFill>
+                  <a:srgbClr val="6E7280"/>
+                </a:solidFill>
+              </a:rPr>
               <a:t>3.800.400</a:t>
             </a:r>
+            <a:endParaRPr lang="en-US" sz="800" dirty="0"/>
           </a:p>
         </p:txBody>
       </p:sp>
@@ -8601,7 +8861,7 @@
           <a:bodyPr wrap="square" lIns="0" tIns="0" rIns="0" bIns="0" rtlCol="0" anchor="ctr"/>
           <a:lstStyle/>
           <a:p>
-            <a:pPr marL="0" indent="0" algn="ctr">
+            <a:pPr algn="ctr" indent="0" marL="0">
               <a:buNone/>
             </a:pPr>
             <a:r>
@@ -8637,7 +8897,7 @@
           <a:bodyPr wrap="square" lIns="0" tIns="0" rIns="0" bIns="0" rtlCol="0" anchor="ctr"/>
           <a:lstStyle/>
           <a:p>
-            <a:pPr marL="0" indent="0">
+            <a:pPr indent="0" marL="0">
               <a:buNone/>
             </a:pPr>
             <a:r>
@@ -8675,7 +8935,7 @@
           </a:bodyPr>
           <a:lstStyle/>
           <a:p>
-            <a:pPr marL="0" indent="0">
+            <a:pPr indent="0" marL="0">
               <a:buNone/>
             </a:pPr>
             <a:r>
@@ -8713,7 +8973,7 @@
           </a:bodyPr>
           <a:lstStyle/>
           <a:p>
-            <a:pPr marL="0" indent="0">
+            <a:pPr indent="0" marL="0">
               <a:buNone/>
             </a:pPr>
             <a:r>
@@ -8786,7 +9046,7 @@
         </p:nvSpPr>
         <p:spPr>
           <a:xfrm>
-            <a:off x="9574438" y="3776472"/>
+            <a:off x="9875520" y="3776472"/>
             <a:ext cx="822960" cy="164592"/>
           </a:xfrm>
           <a:prstGeom prst="rect">
@@ -8801,7 +9061,7 @@
           </a:bodyPr>
           <a:lstStyle/>
           <a:p>
-            <a:pPr marL="0" indent="0">
+            <a:pPr indent="0" marL="0">
               <a:buNone/>
             </a:pPr>
             <a:r>
@@ -8839,7 +9099,7 @@
           </a:bodyPr>
           <a:lstStyle/>
           <a:p>
-            <a:pPr marL="0" indent="0">
+            <a:pPr indent="0" marL="0">
               <a:buNone/>
             </a:pPr>
             <a:r>
@@ -8912,7 +9172,7 @@
         </p:nvSpPr>
         <p:spPr>
           <a:xfrm>
-            <a:off x="9585591" y="4142232"/>
+            <a:off x="9875520" y="4142232"/>
             <a:ext cx="822960" cy="164592"/>
           </a:xfrm>
           <a:prstGeom prst="rect">
@@ -8927,13 +9187,18 @@
           </a:bodyPr>
           <a:lstStyle/>
           <a:p>
-            <a:pPr marL="0" indent="0">
-              <a:buNone/>
-            </a:pPr>
-            <a:r>
-              <a:rPr lang="en-US" sz="800" b="1" dirty="0"/>
+            <a:pPr indent="0" marL="0">
+              <a:buNone/>
+            </a:pPr>
+            <a:r>
+              <a:rPr lang="en-US" sz="800" dirty="0">
+                <a:solidFill>
+                  <a:srgbClr val="6E7280"/>
+                </a:solidFill>
+              </a:rPr>
               <a:t>156</a:t>
             </a:r>
+            <a:endParaRPr lang="en-US" sz="800" dirty="0"/>
           </a:p>
         </p:txBody>
       </p:sp>
@@ -8987,7 +9252,7 @@
           </a:bodyPr>
           <a:lstStyle/>
           <a:p>
-            <a:pPr marL="0" indent="0">
+            <a:pPr indent="0" marL="0">
               <a:buNone/>
             </a:pPr>
             <a:r>
@@ -9018,7 +9283,6 @@
         <a:solidFill>
           <a:srgbClr val="FFFFFF"/>
         </a:solidFill>
-        <a:effectLst/>
       </p:bgPr>
     </p:bg>
     <p:spTree>
@@ -9106,7 +9370,7 @@
           <a:bodyPr wrap="square" lIns="0" tIns="0" rIns="0" bIns="0" rtlCol="0" anchor="ctr"/>
           <a:lstStyle/>
           <a:p>
-            <a:pPr marL="0" indent="0">
+            <a:pPr indent="0" marL="0">
               <a:buNone/>
             </a:pPr>
             <a:r>
@@ -9147,7 +9411,7 @@
           </a:bodyPr>
           <a:lstStyle/>
           <a:p>
-            <a:pPr marL="0" indent="0">
+            <a:pPr indent="0" marL="0">
               <a:buNone/>
             </a:pPr>
             <a:r>
@@ -9186,7 +9450,7 @@
           <a:bodyPr wrap="square" lIns="0" tIns="0" rIns="0" bIns="0" rtlCol="0" anchor="ctr"/>
           <a:lstStyle/>
           <a:p>
-            <a:pPr marL="0" indent="0" algn="r">
+            <a:pPr algn="r" indent="0" marL="0">
               <a:buNone/>
             </a:pPr>
             <a:r>
@@ -9209,7 +9473,7 @@
         </p:nvSpPr>
         <p:spPr>
           <a:xfrm>
-            <a:off x="640080" y="1021455"/>
+            <a:off x="640080" y="1188720"/>
             <a:ext cx="3840480" cy="182880"/>
           </a:xfrm>
           <a:prstGeom prst="rect">
@@ -9222,7 +9486,7 @@
           <a:bodyPr wrap="square" lIns="0" tIns="0" rIns="0" bIns="0" rtlCol="0" anchor="ctr"/>
           <a:lstStyle/>
           <a:p>
-            <a:pPr marL="0" indent="0">
+            <a:pPr indent="0" marL="0">
               <a:buNone/>
             </a:pPr>
             <a:r>
@@ -9239,7 +9503,7 @@
       </p:sp>
       <p:sp>
         <p:nvSpPr>
-          <p:cNvPr id="8" name="Shape 6"/>
+          <p:cNvPr id="8" name="bar_channel_views_ig"/>
           <p:cNvSpPr/>
           <p:nvPr/>
         </p:nvSpPr>
@@ -9283,7 +9547,7 @@
           <a:bodyPr wrap="square" lIns="0" tIns="0" rIns="0" bIns="0" rtlCol="0" anchor="ctr"/>
           <a:lstStyle/>
           <a:p>
-            <a:pPr marL="0" indent="0" algn="ctr">
+            <a:pPr algn="ctr" indent="0" marL="0">
               <a:buNone/>
             </a:pPr>
             <a:r>
@@ -9300,7 +9564,7 @@
       </p:sp>
       <p:sp>
         <p:nvSpPr>
-          <p:cNvPr id="10" name="Text 8"/>
+          <p:cNvPr id="10" name="label_channel_views_ig"/>
           <p:cNvSpPr/>
           <p:nvPr/>
         </p:nvSpPr>
@@ -9321,7 +9585,7 @@
           </a:bodyPr>
           <a:lstStyle/>
           <a:p>
-            <a:pPr marL="0" indent="0" algn="ctr">
+            <a:pPr algn="ctr" indent="0" marL="0">
               <a:buNone/>
             </a:pPr>
             <a:r>
@@ -9338,7 +9602,7 @@
       </p:sp>
       <p:sp>
         <p:nvSpPr>
-          <p:cNvPr id="11" name="Shape 9"/>
+          <p:cNvPr id="11" name="bar_channel_views_fb"/>
           <p:cNvSpPr/>
           <p:nvPr/>
         </p:nvSpPr>
@@ -9382,7 +9646,7 @@
           <a:bodyPr wrap="square" lIns="0" tIns="0" rIns="0" bIns="0" rtlCol="0" anchor="ctr"/>
           <a:lstStyle/>
           <a:p>
-            <a:pPr marL="0" indent="0" algn="ctr">
+            <a:pPr algn="ctr" indent="0" marL="0">
               <a:buNone/>
             </a:pPr>
             <a:r>
@@ -9399,7 +9663,7 @@
       </p:sp>
       <p:sp>
         <p:nvSpPr>
-          <p:cNvPr id="13" name="Text 11"/>
+          <p:cNvPr id="13" name="label_channel_views_fb"/>
           <p:cNvSpPr/>
           <p:nvPr/>
         </p:nvSpPr>
@@ -9420,7 +9684,7 @@
           </a:bodyPr>
           <a:lstStyle/>
           <a:p>
-            <a:pPr marL="0" indent="0" algn="ctr">
+            <a:pPr algn="ctr" indent="0" marL="0">
               <a:buNone/>
             </a:pPr>
             <a:r>
@@ -9437,7 +9701,7 @@
       </p:sp>
       <p:sp>
         <p:nvSpPr>
-          <p:cNvPr id="14" name="Shape 12"/>
+          <p:cNvPr id="14" name="bar_channel_views_tt"/>
           <p:cNvSpPr/>
           <p:nvPr/>
         </p:nvSpPr>
@@ -9481,7 +9745,7 @@
           <a:bodyPr wrap="square" lIns="0" tIns="0" rIns="0" bIns="0" rtlCol="0" anchor="ctr"/>
           <a:lstStyle/>
           <a:p>
-            <a:pPr marL="0" indent="0" algn="ctr">
+            <a:pPr algn="ctr" indent="0" marL="0">
               <a:buNone/>
             </a:pPr>
             <a:r>
@@ -9498,7 +9762,7 @@
       </p:sp>
       <p:sp>
         <p:nvSpPr>
-          <p:cNvPr id="16" name="Text 14"/>
+          <p:cNvPr id="16" name="label_channel_views_tt"/>
           <p:cNvSpPr/>
           <p:nvPr/>
         </p:nvSpPr>
@@ -9519,7 +9783,7 @@
           </a:bodyPr>
           <a:lstStyle/>
           <a:p>
-            <a:pPr marL="0" indent="0" algn="ctr">
+            <a:pPr algn="ctr" indent="0" marL="0">
               <a:buNone/>
             </a:pPr>
             <a:r>
@@ -9542,7 +9806,7 @@
         </p:nvSpPr>
         <p:spPr>
           <a:xfrm>
-            <a:off x="4572000" y="1021455"/>
+            <a:off x="4572000" y="1188720"/>
             <a:ext cx="3291840" cy="182880"/>
           </a:xfrm>
           <a:prstGeom prst="rect">
@@ -9555,7 +9819,7 @@
           <a:bodyPr wrap="square" lIns="0" tIns="0" rIns="0" bIns="0" rtlCol="0" anchor="ctr"/>
           <a:lstStyle/>
           <a:p>
-            <a:pPr marL="0" indent="0">
+            <a:pPr indent="0" marL="0">
               <a:buNone/>
             </a:pPr>
             <a:r>
@@ -9572,7 +9836,7 @@
       </p:sp>
       <p:sp>
         <p:nvSpPr>
-          <p:cNvPr id="18" name="Shape 16"/>
+          <p:cNvPr id="18" name="bar_channel_reach_ig"/>
           <p:cNvSpPr/>
           <p:nvPr/>
         </p:nvSpPr>
@@ -9616,7 +9880,7 @@
           <a:bodyPr wrap="square" lIns="0" tIns="0" rIns="0" bIns="0" rtlCol="0" anchor="ctr"/>
           <a:lstStyle/>
           <a:p>
-            <a:pPr marL="0" indent="0" algn="ctr">
+            <a:pPr algn="ctr" indent="0" marL="0">
               <a:buNone/>
             </a:pPr>
             <a:r>
@@ -9633,7 +9897,7 @@
       </p:sp>
       <p:sp>
         <p:nvSpPr>
-          <p:cNvPr id="20" name="Text 18"/>
+          <p:cNvPr id="20" name="label_channel_reach_ig"/>
           <p:cNvSpPr/>
           <p:nvPr/>
         </p:nvSpPr>
@@ -9654,7 +9918,7 @@
           </a:bodyPr>
           <a:lstStyle/>
           <a:p>
-            <a:pPr marL="0" indent="0" algn="ctr">
+            <a:pPr algn="ctr" indent="0" marL="0">
               <a:buNone/>
             </a:pPr>
             <a:r>
@@ -9671,7 +9935,7 @@
       </p:sp>
       <p:sp>
         <p:nvSpPr>
-          <p:cNvPr id="21" name="Shape 19"/>
+          <p:cNvPr id="21" name="bar_channel_reach_fb"/>
           <p:cNvSpPr/>
           <p:nvPr/>
         </p:nvSpPr>
@@ -9715,7 +9979,7 @@
           <a:bodyPr wrap="square" lIns="0" tIns="0" rIns="0" bIns="0" rtlCol="0" anchor="ctr"/>
           <a:lstStyle/>
           <a:p>
-            <a:pPr marL="0" indent="0" algn="ctr">
+            <a:pPr algn="ctr" indent="0" marL="0">
               <a:buNone/>
             </a:pPr>
             <a:r>
@@ -9732,7 +9996,7 @@
       </p:sp>
       <p:sp>
         <p:nvSpPr>
-          <p:cNvPr id="23" name="Text 21"/>
+          <p:cNvPr id="23" name="label_channel_reach_fb"/>
           <p:cNvSpPr/>
           <p:nvPr/>
         </p:nvSpPr>
@@ -9753,7 +10017,7 @@
           </a:bodyPr>
           <a:lstStyle/>
           <a:p>
-            <a:pPr marL="0" indent="0" algn="ctr">
+            <a:pPr algn="ctr" indent="0" marL="0">
               <a:buNone/>
             </a:pPr>
             <a:r>
@@ -9770,7 +10034,7 @@
       </p:sp>
       <p:sp>
         <p:nvSpPr>
-          <p:cNvPr id="24" name="Shape 22"/>
+          <p:cNvPr id="24" name="bar_channel_reach_tt"/>
           <p:cNvSpPr/>
           <p:nvPr/>
         </p:nvSpPr>
@@ -9814,7 +10078,7 @@
           <a:bodyPr wrap="square" lIns="0" tIns="0" rIns="0" bIns="0" rtlCol="0" anchor="ctr"/>
           <a:lstStyle/>
           <a:p>
-            <a:pPr marL="0" indent="0" algn="ctr">
+            <a:pPr algn="ctr" indent="0" marL="0">
               <a:buNone/>
             </a:pPr>
             <a:r>
@@ -9831,7 +10095,7 @@
       </p:sp>
       <p:sp>
         <p:nvSpPr>
-          <p:cNvPr id="26" name="Text 24"/>
+          <p:cNvPr id="26" name="label_channel_reach_tt"/>
           <p:cNvSpPr/>
           <p:nvPr/>
         </p:nvSpPr>
@@ -9852,7 +10116,7 @@
           </a:bodyPr>
           <a:lstStyle/>
           <a:p>
-            <a:pPr marL="0" indent="0" algn="ctr">
+            <a:pPr algn="ctr" indent="0" marL="0">
               <a:buNone/>
             </a:pPr>
             <a:r>
@@ -9875,7 +10139,7 @@
         </p:nvSpPr>
         <p:spPr>
           <a:xfrm>
-            <a:off x="8138160" y="1021455"/>
+            <a:off x="8138160" y="1188720"/>
             <a:ext cx="2834640" cy="182880"/>
           </a:xfrm>
           <a:prstGeom prst="rect">
@@ -9888,7 +10152,7 @@
           <a:bodyPr wrap="square" lIns="0" tIns="0" rIns="0" bIns="0" rtlCol="0" anchor="ctr"/>
           <a:lstStyle/>
           <a:p>
-            <a:pPr marL="0" indent="0">
+            <a:pPr indent="0" marL="0">
               <a:buNone/>
             </a:pPr>
             <a:r>
@@ -9905,7 +10169,7 @@
       </p:sp>
       <p:sp>
         <p:nvSpPr>
-          <p:cNvPr id="28" name="Shape 26"/>
+          <p:cNvPr id="28" name="bar_channel_er_ig"/>
           <p:cNvSpPr/>
           <p:nvPr/>
         </p:nvSpPr>
@@ -9949,7 +10213,7 @@
           <a:bodyPr wrap="square" lIns="0" tIns="0" rIns="0" bIns="0" rtlCol="0" anchor="ctr"/>
           <a:lstStyle/>
           <a:p>
-            <a:pPr marL="0" indent="0" algn="ctr">
+            <a:pPr algn="ctr" indent="0" marL="0">
               <a:buNone/>
             </a:pPr>
             <a:r>
@@ -9966,7 +10230,7 @@
       </p:sp>
       <p:sp>
         <p:nvSpPr>
-          <p:cNvPr id="30" name="Text 28"/>
+          <p:cNvPr id="30" name="label_channel_er_ig"/>
           <p:cNvSpPr/>
           <p:nvPr/>
         </p:nvSpPr>
@@ -9987,7 +10251,7 @@
           </a:bodyPr>
           <a:lstStyle/>
           <a:p>
-            <a:pPr marL="0" indent="0" algn="ctr">
+            <a:pPr algn="ctr" indent="0" marL="0">
               <a:buNone/>
             </a:pPr>
             <a:r>
@@ -10004,7 +10268,7 @@
       </p:sp>
       <p:sp>
         <p:nvSpPr>
-          <p:cNvPr id="31" name="Shape 29"/>
+          <p:cNvPr id="31" name="bar_channel_er_fb"/>
           <p:cNvSpPr/>
           <p:nvPr/>
         </p:nvSpPr>
@@ -10048,7 +10312,7 @@
           <a:bodyPr wrap="square" lIns="0" tIns="0" rIns="0" bIns="0" rtlCol="0" anchor="ctr"/>
           <a:lstStyle/>
           <a:p>
-            <a:pPr marL="0" indent="0" algn="ctr">
+            <a:pPr algn="ctr" indent="0" marL="0">
               <a:buNone/>
             </a:pPr>
             <a:r>
@@ -10065,7 +10329,7 @@
       </p:sp>
       <p:sp>
         <p:nvSpPr>
-          <p:cNvPr id="33" name="Text 31"/>
+          <p:cNvPr id="33" name="label_channel_er_fb"/>
           <p:cNvSpPr/>
           <p:nvPr/>
         </p:nvSpPr>
@@ -10086,7 +10350,7 @@
           </a:bodyPr>
           <a:lstStyle/>
           <a:p>
-            <a:pPr marL="0" indent="0" algn="ctr">
+            <a:pPr algn="ctr" indent="0" marL="0">
               <a:buNone/>
             </a:pPr>
             <a:r>
@@ -10103,7 +10367,7 @@
       </p:sp>
       <p:sp>
         <p:nvSpPr>
-          <p:cNvPr id="34" name="Shape 32"/>
+          <p:cNvPr id="34" name="bar_channel_er_tt"/>
           <p:cNvSpPr/>
           <p:nvPr/>
         </p:nvSpPr>
@@ -10147,7 +10411,7 @@
           <a:bodyPr wrap="square" lIns="0" tIns="0" rIns="0" bIns="0" rtlCol="0" anchor="ctr"/>
           <a:lstStyle/>
           <a:p>
-            <a:pPr marL="0" indent="0" algn="ctr">
+            <a:pPr algn="ctr" indent="0" marL="0">
               <a:buNone/>
             </a:pPr>
             <a:r>
@@ -10164,7 +10428,7 @@
       </p:sp>
       <p:sp>
         <p:nvSpPr>
-          <p:cNvPr id="36" name="Text 34"/>
+          <p:cNvPr id="36" name="label_channel_er_tt"/>
           <p:cNvSpPr/>
           <p:nvPr/>
         </p:nvSpPr>
@@ -10185,7 +10449,7 @@
           </a:bodyPr>
           <a:lstStyle/>
           <a:p>
-            <a:pPr marL="0" indent="0" algn="ctr">
+            <a:pPr algn="ctr" indent="0" marL="0">
               <a:buNone/>
             </a:pPr>
             <a:r>
@@ -10248,7 +10512,7 @@
           <a:bodyPr wrap="square" lIns="0" tIns="0" rIns="0" bIns="0" rtlCol="0" anchor="ctr"/>
           <a:lstStyle/>
           <a:p>
-            <a:pPr marL="0" indent="0">
+            <a:pPr indent="0" marL="0">
               <a:buNone/>
             </a:pPr>
             <a:r>
@@ -10286,7 +10550,7 @@
           </a:bodyPr>
           <a:lstStyle/>
           <a:p>
-            <a:pPr marL="0" indent="0">
+            <a:pPr indent="0" marL="0">
               <a:buNone/>
             </a:pPr>
             <a:r>
@@ -10324,7 +10588,7 @@
           </a:bodyPr>
           <a:lstStyle/>
           <a:p>
-            <a:pPr marL="0" indent="0">
+            <a:pPr indent="0" marL="0">
               <a:buNone/>
             </a:pPr>
             <a:r>
@@ -10387,7 +10651,7 @@
           <a:bodyPr wrap="square" lIns="0" tIns="0" rIns="0" bIns="0" rtlCol="0" anchor="ctr"/>
           <a:lstStyle/>
           <a:p>
-            <a:pPr marL="0" indent="0">
+            <a:pPr indent="0" marL="0">
               <a:buNone/>
             </a:pPr>
             <a:r>
@@ -10425,7 +10689,7 @@
           </a:bodyPr>
           <a:lstStyle/>
           <a:p>
-            <a:pPr marL="0" indent="0">
+            <a:pPr indent="0" marL="0">
               <a:buNone/>
             </a:pPr>
             <a:r>
@@ -10463,7 +10727,7 @@
           </a:bodyPr>
           <a:lstStyle/>
           <a:p>
-            <a:pPr marL="0" indent="0">
+            <a:pPr indent="0" marL="0">
               <a:buNone/>
             </a:pPr>
             <a:r>
@@ -10526,7 +10790,7 @@
           <a:bodyPr wrap="square" lIns="0" tIns="0" rIns="0" bIns="0" rtlCol="0" anchor="ctr"/>
           <a:lstStyle/>
           <a:p>
-            <a:pPr marL="0" indent="0">
+            <a:pPr indent="0" marL="0">
               <a:buNone/>
             </a:pPr>
             <a:r>
@@ -10564,7 +10828,7 @@
           </a:bodyPr>
           <a:lstStyle/>
           <a:p>
-            <a:pPr marL="0" indent="0">
+            <a:pPr indent="0" marL="0">
               <a:buNone/>
             </a:pPr>
             <a:r>
@@ -10602,7 +10866,7 @@
           </a:bodyPr>
           <a:lstStyle/>
           <a:p>
-            <a:pPr marL="0" indent="0">
+            <a:pPr indent="0" marL="0">
               <a:buNone/>
             </a:pPr>
             <a:r>
@@ -10640,7 +10904,7 @@
           </a:bodyPr>
           <a:lstStyle/>
           <a:p>
-            <a:pPr marL="0" indent="0" algn="ctr">
+            <a:pPr algn="ctr" indent="0" marL="0">
               <a:buNone/>
             </a:pPr>
             <a:r>
@@ -10671,7 +10935,6 @@
         <a:solidFill>
           <a:srgbClr val="FFFFFF"/>
         </a:solidFill>
-        <a:effectLst/>
       </p:bgPr>
     </p:bg>
     <p:spTree>
@@ -10759,7 +11022,7 @@
           <a:bodyPr wrap="square" lIns="0" tIns="0" rIns="0" bIns="0" rtlCol="0" anchor="ctr"/>
           <a:lstStyle/>
           <a:p>
-            <a:pPr marL="0" indent="0">
+            <a:pPr indent="0" marL="0">
               <a:buNone/>
             </a:pPr>
             <a:r>
@@ -10800,7 +11063,7 @@
           </a:bodyPr>
           <a:lstStyle/>
           <a:p>
-            <a:pPr marL="0" indent="0">
+            <a:pPr indent="0" marL="0">
               <a:buNone/>
             </a:pPr>
             <a:r>
@@ -10839,7 +11102,7 @@
           <a:bodyPr wrap="square" lIns="0" tIns="0" rIns="0" bIns="0" rtlCol="0" anchor="ctr"/>
           <a:lstStyle/>
           <a:p>
-            <a:pPr marL="0" indent="0" algn="r">
+            <a:pPr algn="r" indent="0" marL="0">
               <a:buNone/>
             </a:pPr>
             <a:r>
@@ -10904,7 +11167,7 @@
           </a:bodyPr>
           <a:lstStyle/>
           <a:p>
-            <a:pPr marL="0" indent="0">
+            <a:pPr indent="0" marL="0">
               <a:buNone/>
             </a:pPr>
             <a:r>
@@ -10942,7 +11205,7 @@
           </a:bodyPr>
           <a:lstStyle/>
           <a:p>
-            <a:pPr marL="0" indent="0">
+            <a:pPr indent="0" marL="0">
               <a:buNone/>
             </a:pPr>
             <a:r>
@@ -10965,7 +11228,7 @@
         </p:nvSpPr>
         <p:spPr>
           <a:xfrm>
-            <a:off x="804672" y="1844142"/>
+            <a:off x="804672" y="1709928"/>
             <a:ext cx="1499616" cy="182880"/>
           </a:xfrm>
           <a:prstGeom prst="rect">
@@ -10980,7 +11243,7 @@
           </a:bodyPr>
           <a:lstStyle/>
           <a:p>
-            <a:pPr marL="0" indent="0">
+            <a:pPr indent="0" marL="0">
               <a:buNone/>
             </a:pPr>
             <a:r>
@@ -11045,7 +11308,7 @@
           </a:bodyPr>
           <a:lstStyle/>
           <a:p>
-            <a:pPr marL="0" indent="0">
+            <a:pPr indent="0" marL="0">
               <a:buNone/>
             </a:pPr>
             <a:r>
@@ -11083,7 +11346,7 @@
           </a:bodyPr>
           <a:lstStyle/>
           <a:p>
-            <a:pPr marL="0" indent="0">
+            <a:pPr indent="0" marL="0">
               <a:buNone/>
             </a:pPr>
             <a:r>
@@ -11106,7 +11369,7 @@
         </p:nvSpPr>
         <p:spPr>
           <a:xfrm>
-            <a:off x="2743200" y="1844142"/>
+            <a:off x="2816352" y="1709928"/>
             <a:ext cx="1088136" cy="182880"/>
           </a:xfrm>
           <a:prstGeom prst="rect">
@@ -11121,7 +11384,7 @@
           </a:bodyPr>
           <a:lstStyle/>
           <a:p>
-            <a:pPr marL="0" indent="0">
+            <a:pPr indent="0" marL="0">
               <a:buNone/>
             </a:pPr>
             <a:r>
@@ -11186,7 +11449,7 @@
           </a:bodyPr>
           <a:lstStyle/>
           <a:p>
-            <a:pPr marL="0" indent="0">
+            <a:pPr indent="0" marL="0">
               <a:buNone/>
             </a:pPr>
             <a:r>
@@ -11224,7 +11487,7 @@
           </a:bodyPr>
           <a:lstStyle/>
           <a:p>
-            <a:pPr marL="0" indent="0">
+            <a:pPr indent="0" marL="0">
               <a:buNone/>
             </a:pPr>
             <a:r>
@@ -11247,7 +11510,7 @@
         </p:nvSpPr>
         <p:spPr>
           <a:xfrm>
-            <a:off x="4416552" y="1844142"/>
+            <a:off x="4416552" y="1709928"/>
             <a:ext cx="1088136" cy="182880"/>
           </a:xfrm>
           <a:prstGeom prst="rect">
@@ -11262,7 +11525,7 @@
           </a:bodyPr>
           <a:lstStyle/>
           <a:p>
-            <a:pPr marL="0" indent="0">
+            <a:pPr indent="0" marL="0">
               <a:buNone/>
             </a:pPr>
             <a:r>
@@ -11327,7 +11590,7 @@
           </a:bodyPr>
           <a:lstStyle/>
           <a:p>
-            <a:pPr marL="0" indent="0">
+            <a:pPr indent="0" marL="0">
               <a:buNone/>
             </a:pPr>
             <a:r>
@@ -11365,7 +11628,7 @@
           </a:bodyPr>
           <a:lstStyle/>
           <a:p>
-            <a:pPr marL="0" indent="0">
+            <a:pPr indent="0" marL="0">
               <a:buNone/>
             </a:pPr>
             <a:r>
@@ -11388,7 +11651,7 @@
         </p:nvSpPr>
         <p:spPr>
           <a:xfrm>
-            <a:off x="6016752" y="1844142"/>
+            <a:off x="6016752" y="1709928"/>
             <a:ext cx="1499616" cy="182880"/>
           </a:xfrm>
           <a:prstGeom prst="rect">
@@ -11403,7 +11666,7 @@
           </a:bodyPr>
           <a:lstStyle/>
           <a:p>
-            <a:pPr marL="0" indent="0">
+            <a:pPr indent="0" marL="0">
               <a:buNone/>
             </a:pPr>
             <a:r>
@@ -11426,7 +11689,7 @@
         </p:nvSpPr>
         <p:spPr>
           <a:xfrm>
-            <a:off x="640080" y="2118735"/>
+            <a:off x="640080" y="2286000"/>
             <a:ext cx="2926080" cy="182880"/>
           </a:xfrm>
           <a:prstGeom prst="rect">
@@ -11439,7 +11702,7 @@
           <a:bodyPr wrap="square" lIns="0" tIns="0" rIns="0" bIns="0" rtlCol="0" anchor="ctr"/>
           <a:lstStyle/>
           <a:p>
-            <a:pPr marL="0" indent="0">
+            <a:pPr indent="0" marL="0">
               <a:buNone/>
             </a:pPr>
             <a:r>
@@ -11456,7 +11719,7 @@
       </p:sp>
       <p:sp>
         <p:nvSpPr>
-          <p:cNvPr id="24" name="Shape 22"/>
+          <p:cNvPr id="24" name="bar_ig_mix_stories"/>
           <p:cNvSpPr/>
           <p:nvPr/>
         </p:nvSpPr>
@@ -11500,7 +11763,7 @@
           <a:bodyPr wrap="square" lIns="0" tIns="0" rIns="0" bIns="0" rtlCol="0" anchor="ctr"/>
           <a:lstStyle/>
           <a:p>
-            <a:pPr marL="0" indent="0" algn="ctr">
+            <a:pPr algn="ctr" indent="0" marL="0">
               <a:buNone/>
             </a:pPr>
             <a:r>
@@ -11517,7 +11780,7 @@
       </p:sp>
       <p:sp>
         <p:nvSpPr>
-          <p:cNvPr id="26" name="Text 24"/>
+          <p:cNvPr id="26" name="label_ig_mix_stories"/>
           <p:cNvSpPr/>
           <p:nvPr/>
         </p:nvSpPr>
@@ -11538,7 +11801,7 @@
           </a:bodyPr>
           <a:lstStyle/>
           <a:p>
-            <a:pPr marL="0" indent="0" algn="ctr">
+            <a:pPr algn="ctr" indent="0" marL="0">
               <a:buNone/>
             </a:pPr>
             <a:r>
@@ -11555,7 +11818,7 @@
       </p:sp>
       <p:sp>
         <p:nvSpPr>
-          <p:cNvPr id="27" name="Shape 25"/>
+          <p:cNvPr id="27" name="bar_ig_mix_reels"/>
           <p:cNvSpPr/>
           <p:nvPr/>
         </p:nvSpPr>
@@ -11599,7 +11862,7 @@
           <a:bodyPr wrap="square" lIns="0" tIns="0" rIns="0" bIns="0" rtlCol="0" anchor="ctr"/>
           <a:lstStyle/>
           <a:p>
-            <a:pPr marL="0" indent="0" algn="ctr">
+            <a:pPr algn="ctr" indent="0" marL="0">
               <a:buNone/>
             </a:pPr>
             <a:r>
@@ -11616,7 +11879,7 @@
       </p:sp>
       <p:sp>
         <p:nvSpPr>
-          <p:cNvPr id="29" name="Text 27"/>
+          <p:cNvPr id="29" name="label_ig_mix_reels"/>
           <p:cNvSpPr/>
           <p:nvPr/>
         </p:nvSpPr>
@@ -11637,7 +11900,7 @@
           </a:bodyPr>
           <a:lstStyle/>
           <a:p>
-            <a:pPr marL="0" indent="0" algn="ctr">
+            <a:pPr algn="ctr" indent="0" marL="0">
               <a:buNone/>
             </a:pPr>
             <a:r>
@@ -11654,7 +11917,7 @@
       </p:sp>
       <p:sp>
         <p:nvSpPr>
-          <p:cNvPr id="30" name="Shape 28"/>
+          <p:cNvPr id="30" name="bar_ig_mix_carousels"/>
           <p:cNvSpPr/>
           <p:nvPr/>
         </p:nvSpPr>
@@ -11698,7 +11961,7 @@
           <a:bodyPr wrap="square" lIns="0" tIns="0" rIns="0" bIns="0" rtlCol="0" anchor="ctr"/>
           <a:lstStyle/>
           <a:p>
-            <a:pPr marL="0" indent="0" algn="ctr">
+            <a:pPr algn="ctr" indent="0" marL="0">
               <a:buNone/>
             </a:pPr>
             <a:r>
@@ -11715,7 +11978,7 @@
       </p:sp>
       <p:sp>
         <p:nvSpPr>
-          <p:cNvPr id="32" name="Text 30"/>
+          <p:cNvPr id="32" name="label_ig_mix_carousels"/>
           <p:cNvSpPr/>
           <p:nvPr/>
         </p:nvSpPr>
@@ -11736,7 +11999,7 @@
           </a:bodyPr>
           <a:lstStyle/>
           <a:p>
-            <a:pPr marL="0" indent="0" algn="ctr">
+            <a:pPr algn="ctr" indent="0" marL="0">
               <a:buNone/>
             </a:pPr>
             <a:r>
@@ -11759,7 +12022,7 @@
         </p:nvSpPr>
         <p:spPr>
           <a:xfrm>
-            <a:off x="3977640" y="2107584"/>
+            <a:off x="3977640" y="2286000"/>
             <a:ext cx="3657600" cy="182880"/>
           </a:xfrm>
           <a:prstGeom prst="rect">
@@ -11772,7 +12035,7 @@
           <a:bodyPr wrap="square" lIns="0" tIns="0" rIns="0" bIns="0" rtlCol="0" anchor="ctr"/>
           <a:lstStyle/>
           <a:p>
-            <a:pPr marL="0" indent="0">
+            <a:pPr indent="0" marL="0">
               <a:buNone/>
             </a:pPr>
             <a:r>
@@ -11789,7 +12052,7 @@
       </p:sp>
       <p:sp>
         <p:nvSpPr>
-          <p:cNvPr id="34" name="Shape 32"/>
+          <p:cNvPr id="34" name="bar_ig_top_1"/>
           <p:cNvSpPr/>
           <p:nvPr/>
         </p:nvSpPr>
@@ -11833,7 +12096,7 @@
           <a:bodyPr wrap="square" lIns="0" tIns="0" rIns="0" bIns="0" rtlCol="0" anchor="ctr"/>
           <a:lstStyle/>
           <a:p>
-            <a:pPr marL="0" indent="0" algn="ctr">
+            <a:pPr algn="ctr" indent="0" marL="0">
               <a:buNone/>
             </a:pPr>
             <a:r>
@@ -11850,7 +12113,7 @@
       </p:sp>
       <p:sp>
         <p:nvSpPr>
-          <p:cNvPr id="36" name="Text 34"/>
+          <p:cNvPr id="36" name="label_ig_top_1"/>
           <p:cNvSpPr/>
           <p:nvPr/>
         </p:nvSpPr>
@@ -11871,7 +12134,7 @@
           </a:bodyPr>
           <a:lstStyle/>
           <a:p>
-            <a:pPr marL="0" indent="0" algn="ctr">
+            <a:pPr algn="ctr" indent="0" marL="0">
               <a:buNone/>
             </a:pPr>
             <a:r>
@@ -11888,7 +12151,7 @@
       </p:sp>
       <p:sp>
         <p:nvSpPr>
-          <p:cNvPr id="37" name="Shape 35"/>
+          <p:cNvPr id="37" name="bar_ig_top_2"/>
           <p:cNvSpPr/>
           <p:nvPr/>
         </p:nvSpPr>
@@ -11932,7 +12195,7 @@
           <a:bodyPr wrap="square" lIns="0" tIns="0" rIns="0" bIns="0" rtlCol="0" anchor="ctr"/>
           <a:lstStyle/>
           <a:p>
-            <a:pPr marL="0" indent="0" algn="ctr">
+            <a:pPr algn="ctr" indent="0" marL="0">
               <a:buNone/>
             </a:pPr>
             <a:r>
@@ -11949,7 +12212,7 @@
       </p:sp>
       <p:sp>
         <p:nvSpPr>
-          <p:cNvPr id="39" name="Text 37"/>
+          <p:cNvPr id="39" name="label_ig_top_2"/>
           <p:cNvSpPr/>
           <p:nvPr/>
         </p:nvSpPr>
@@ -11970,7 +12233,7 @@
           </a:bodyPr>
           <a:lstStyle/>
           <a:p>
-            <a:pPr marL="0" indent="0" algn="ctr">
+            <a:pPr algn="ctr" indent="0" marL="0">
               <a:buNone/>
             </a:pPr>
             <a:r>
@@ -11987,7 +12250,7 @@
       </p:sp>
       <p:sp>
         <p:nvSpPr>
-          <p:cNvPr id="40" name="Shape 38"/>
+          <p:cNvPr id="40" name="bar_ig_top_3"/>
           <p:cNvSpPr/>
           <p:nvPr/>
         </p:nvSpPr>
@@ -12031,7 +12294,7 @@
           <a:bodyPr wrap="square" lIns="0" tIns="0" rIns="0" bIns="0" rtlCol="0" anchor="ctr"/>
           <a:lstStyle/>
           <a:p>
-            <a:pPr marL="0" indent="0" algn="ctr">
+            <a:pPr algn="ctr" indent="0" marL="0">
               <a:buNone/>
             </a:pPr>
             <a:r>
@@ -12048,7 +12311,7 @@
       </p:sp>
       <p:sp>
         <p:nvSpPr>
-          <p:cNvPr id="42" name="Text 40"/>
+          <p:cNvPr id="42" name="label_ig_top_3"/>
           <p:cNvSpPr/>
           <p:nvPr/>
         </p:nvSpPr>
@@ -12069,7 +12332,7 @@
           </a:bodyPr>
           <a:lstStyle/>
           <a:p>
-            <a:pPr marL="0" indent="0" algn="ctr">
+            <a:pPr algn="ctr" indent="0" marL="0">
               <a:buNone/>
             </a:pPr>
             <a:r>
@@ -12132,7 +12395,7 @@
           <a:bodyPr wrap="square" lIns="0" tIns="0" rIns="0" bIns="0" rtlCol="0" anchor="ctr"/>
           <a:lstStyle/>
           <a:p>
-            <a:pPr marL="0" indent="0">
+            <a:pPr indent="0" marL="0">
               <a:buNone/>
             </a:pPr>
             <a:r>
@@ -12170,7 +12433,7 @@
           </a:bodyPr>
           <a:lstStyle/>
           <a:p>
-            <a:pPr marL="0" indent="0">
+            <a:pPr indent="0" marL="0">
               <a:buNone/>
             </a:pPr>
             <a:r>
@@ -12184,7 +12447,7 @@
             <a:endParaRPr lang="en-US" sz="1050" dirty="0"/>
           </a:p>
           <a:p>
-            <a:pPr marL="0" indent="0">
+            <a:pPr indent="0" marL="0">
               <a:buNone/>
             </a:pPr>
             <a:r>
@@ -12198,7 +12461,7 @@
             <a:endParaRPr lang="en-US" sz="1050" dirty="0"/>
           </a:p>
           <a:p>
-            <a:pPr marL="0" indent="0">
+            <a:pPr indent="0" marL="0">
               <a:buNone/>
             </a:pPr>
             <a:r>
@@ -12234,7 +12497,7 @@
           <a:bodyPr wrap="square" lIns="0" tIns="0" rIns="0" bIns="0" rtlCol="0" anchor="ctr"/>
           <a:lstStyle/>
           <a:p>
-            <a:pPr marL="0" indent="0">
+            <a:pPr indent="0" marL="0">
               <a:buNone/>
             </a:pPr>
             <a:r>
@@ -12272,7 +12535,7 @@
           </a:bodyPr>
           <a:lstStyle/>
           <a:p>
-            <a:pPr marL="0" indent="0">
+            <a:pPr indent="0" marL="0">
               <a:buNone/>
             </a:pPr>
             <a:r>
@@ -12303,7 +12566,6 @@
         <a:solidFill>
           <a:srgbClr val="FFFFFF"/>
         </a:solidFill>
-        <a:effectLst/>
       </p:bgPr>
     </p:bg>
     <p:spTree>
@@ -12328,7 +12590,7 @@
         </p:nvSpPr>
         <p:spPr>
           <a:xfrm>
-            <a:off x="0" y="305712"/>
+            <a:off x="0" y="0"/>
             <a:ext cx="12191695" cy="6858000"/>
           </a:xfrm>
           <a:prstGeom prst="rect">
@@ -12391,7 +12653,7 @@
           <a:bodyPr wrap="square" lIns="0" tIns="0" rIns="0" bIns="0" rtlCol="0" anchor="ctr"/>
           <a:lstStyle/>
           <a:p>
-            <a:pPr marL="0" indent="0">
+            <a:pPr indent="0" marL="0">
               <a:buNone/>
             </a:pPr>
             <a:r>
@@ -12432,7 +12694,7 @@
           </a:bodyPr>
           <a:lstStyle/>
           <a:p>
-            <a:pPr marL="0" indent="0">
+            <a:pPr indent="0" marL="0">
               <a:buNone/>
             </a:pPr>
             <a:r>
@@ -12471,7 +12733,7 @@
           <a:bodyPr wrap="square" lIns="0" tIns="0" rIns="0" bIns="0" rtlCol="0" anchor="ctr"/>
           <a:lstStyle/>
           <a:p>
-            <a:pPr marL="0" indent="0" algn="r">
+            <a:pPr algn="r" indent="0" marL="0">
               <a:buNone/>
             </a:pPr>
             <a:r>
@@ -12536,7 +12798,7 @@
           </a:bodyPr>
           <a:lstStyle/>
           <a:p>
-            <a:pPr marL="0" indent="0">
+            <a:pPr indent="0" marL="0">
               <a:buNone/>
             </a:pPr>
             <a:r>
@@ -12574,7 +12836,7 @@
           </a:bodyPr>
           <a:lstStyle/>
           <a:p>
-            <a:pPr marL="0" indent="0">
+            <a:pPr indent="0" marL="0">
               <a:buNone/>
             </a:pPr>
             <a:r>
@@ -12597,7 +12859,7 @@
         </p:nvSpPr>
         <p:spPr>
           <a:xfrm>
-            <a:off x="795312" y="1877193"/>
+            <a:off x="804672" y="1709928"/>
             <a:ext cx="1499616" cy="182880"/>
           </a:xfrm>
           <a:prstGeom prst="rect">
@@ -12612,7 +12874,7 @@
           </a:bodyPr>
           <a:lstStyle/>
           <a:p>
-            <a:pPr marL="0" indent="0">
+            <a:pPr indent="0" marL="0">
               <a:buNone/>
             </a:pPr>
             <a:r>
@@ -12677,7 +12939,7 @@
           </a:bodyPr>
           <a:lstStyle/>
           <a:p>
-            <a:pPr marL="0" indent="0">
+            <a:pPr indent="0" marL="0">
               <a:buNone/>
             </a:pPr>
             <a:r>
@@ -12715,7 +12977,7 @@
           </a:bodyPr>
           <a:lstStyle/>
           <a:p>
-            <a:pPr marL="0" indent="0">
+            <a:pPr indent="0" marL="0">
               <a:buNone/>
             </a:pPr>
             <a:r>
@@ -12738,7 +13000,7 @@
         </p:nvSpPr>
         <p:spPr>
           <a:xfrm>
-            <a:off x="2804350" y="1878045"/>
+            <a:off x="2816352" y="1709928"/>
             <a:ext cx="1499616" cy="182880"/>
           </a:xfrm>
           <a:prstGeom prst="rect">
@@ -12753,7 +13015,7 @@
           </a:bodyPr>
           <a:lstStyle/>
           <a:p>
-            <a:pPr marL="0" indent="0">
+            <a:pPr indent="0" marL="0">
               <a:buNone/>
             </a:pPr>
             <a:r>
@@ -12818,7 +13080,7 @@
           </a:bodyPr>
           <a:lstStyle/>
           <a:p>
-            <a:pPr marL="0" indent="0">
+            <a:pPr indent="0" marL="0">
               <a:buNone/>
             </a:pPr>
             <a:r>
@@ -12856,7 +13118,7 @@
           </a:bodyPr>
           <a:lstStyle/>
           <a:p>
-            <a:pPr marL="0" indent="0">
+            <a:pPr indent="0" marL="0">
               <a:buNone/>
             </a:pPr>
             <a:r>
@@ -12879,7 +13141,7 @@
         </p:nvSpPr>
         <p:spPr>
           <a:xfrm>
-            <a:off x="4850892" y="1875346"/>
+            <a:off x="4828032" y="1709928"/>
             <a:ext cx="1499616" cy="182880"/>
           </a:xfrm>
           <a:prstGeom prst="rect">
@@ -12894,7 +13156,7 @@
           </a:bodyPr>
           <a:lstStyle/>
           <a:p>
-            <a:pPr marL="0" indent="0">
+            <a:pPr indent="0" marL="0">
               <a:buNone/>
             </a:pPr>
             <a:r>
@@ -12959,7 +13221,7 @@
           </a:bodyPr>
           <a:lstStyle/>
           <a:p>
-            <a:pPr marL="0" indent="0">
+            <a:pPr indent="0" marL="0">
               <a:buNone/>
             </a:pPr>
             <a:r>
@@ -12997,7 +13259,7 @@
           </a:bodyPr>
           <a:lstStyle/>
           <a:p>
-            <a:pPr marL="0" indent="0">
+            <a:pPr indent="0" marL="0">
               <a:buNone/>
             </a:pPr>
             <a:r>
@@ -13020,7 +13282,7 @@
         </p:nvSpPr>
         <p:spPr>
           <a:xfrm>
-            <a:off x="6850570" y="1878045"/>
+            <a:off x="6839712" y="1709928"/>
             <a:ext cx="1088136" cy="182880"/>
           </a:xfrm>
           <a:prstGeom prst="rect">
@@ -13035,7 +13297,7 @@
           </a:bodyPr>
           <a:lstStyle/>
           <a:p>
-            <a:pPr marL="0" indent="0">
+            <a:pPr indent="0" marL="0">
               <a:buNone/>
             </a:pPr>
             <a:r>
@@ -13058,7 +13320,7 @@
         </p:nvSpPr>
         <p:spPr>
           <a:xfrm>
-            <a:off x="640080" y="2118735"/>
+            <a:off x="640080" y="2286000"/>
             <a:ext cx="3429000" cy="182880"/>
           </a:xfrm>
           <a:prstGeom prst="rect">
@@ -13071,7 +13333,7 @@
           <a:bodyPr wrap="square" lIns="0" tIns="0" rIns="0" bIns="0" rtlCol="0" anchor="ctr"/>
           <a:lstStyle/>
           <a:p>
-            <a:pPr marL="0" indent="0">
+            <a:pPr indent="0" marL="0">
               <a:buNone/>
             </a:pPr>
             <a:r>
@@ -13088,7 +13350,7 @@
       </p:sp>
       <p:sp>
         <p:nvSpPr>
-          <p:cNvPr id="24" name="Shape 22"/>
+          <p:cNvPr id="24" name="bar_fb_top_1"/>
           <p:cNvSpPr/>
           <p:nvPr/>
         </p:nvSpPr>
@@ -13132,7 +13394,7 @@
           <a:bodyPr wrap="square" lIns="0" tIns="0" rIns="0" bIns="0" rtlCol="0" anchor="ctr"/>
           <a:lstStyle/>
           <a:p>
-            <a:pPr marL="0" indent="0" algn="ctr">
+            <a:pPr algn="ctr" indent="0" marL="0">
               <a:buNone/>
             </a:pPr>
             <a:r>
@@ -13149,7 +13411,7 @@
       </p:sp>
       <p:sp>
         <p:nvSpPr>
-          <p:cNvPr id="26" name="Text 24"/>
+          <p:cNvPr id="26" name="label_fb_top_1"/>
           <p:cNvSpPr/>
           <p:nvPr/>
         </p:nvSpPr>
@@ -13170,7 +13432,7 @@
           </a:bodyPr>
           <a:lstStyle/>
           <a:p>
-            <a:pPr marL="0" indent="0" algn="ctr">
+            <a:pPr algn="ctr" indent="0" marL="0">
               <a:buNone/>
             </a:pPr>
             <a:r>
@@ -13187,7 +13449,7 @@
       </p:sp>
       <p:sp>
         <p:nvSpPr>
-          <p:cNvPr id="27" name="Shape 25"/>
+          <p:cNvPr id="27" name="bar_fb_top_2"/>
           <p:cNvSpPr/>
           <p:nvPr/>
         </p:nvSpPr>
@@ -13231,7 +13493,7 @@
           <a:bodyPr wrap="square" lIns="0" tIns="0" rIns="0" bIns="0" rtlCol="0" anchor="ctr"/>
           <a:lstStyle/>
           <a:p>
-            <a:pPr marL="0" indent="0" algn="ctr">
+            <a:pPr algn="ctr" indent="0" marL="0">
               <a:buNone/>
             </a:pPr>
             <a:r>
@@ -13248,7 +13510,7 @@
       </p:sp>
       <p:sp>
         <p:nvSpPr>
-          <p:cNvPr id="29" name="Text 27"/>
+          <p:cNvPr id="29" name="label_fb_top_2"/>
           <p:cNvSpPr/>
           <p:nvPr/>
         </p:nvSpPr>
@@ -13269,7 +13531,7 @@
           </a:bodyPr>
           <a:lstStyle/>
           <a:p>
-            <a:pPr marL="0" indent="0" algn="ctr">
+            <a:pPr algn="ctr" indent="0" marL="0">
               <a:buNone/>
             </a:pPr>
             <a:r>
@@ -13286,7 +13548,7 @@
       </p:sp>
       <p:sp>
         <p:nvSpPr>
-          <p:cNvPr id="30" name="Shape 28"/>
+          <p:cNvPr id="30" name="bar_fb_top_3"/>
           <p:cNvSpPr/>
           <p:nvPr/>
         </p:nvSpPr>
@@ -13330,7 +13592,7 @@
           <a:bodyPr wrap="square" lIns="0" tIns="0" rIns="0" bIns="0" rtlCol="0" anchor="ctr"/>
           <a:lstStyle/>
           <a:p>
-            <a:pPr marL="0" indent="0" algn="ctr">
+            <a:pPr algn="ctr" indent="0" marL="0">
               <a:buNone/>
             </a:pPr>
             <a:r>
@@ -13347,7 +13609,7 @@
       </p:sp>
       <p:sp>
         <p:nvSpPr>
-          <p:cNvPr id="32" name="Text 30"/>
+          <p:cNvPr id="32" name="label_fb_top_3"/>
           <p:cNvSpPr/>
           <p:nvPr/>
         </p:nvSpPr>
@@ -13368,7 +13630,7 @@
           </a:bodyPr>
           <a:lstStyle/>
           <a:p>
-            <a:pPr marL="0" indent="0" algn="ctr">
+            <a:pPr algn="ctr" indent="0" marL="0">
               <a:buNone/>
             </a:pPr>
             <a:r>
@@ -13391,7 +13653,7 @@
         </p:nvSpPr>
         <p:spPr>
           <a:xfrm>
-            <a:off x="4480560" y="2118735"/>
+            <a:off x="4480560" y="2286000"/>
             <a:ext cx="3200400" cy="182880"/>
           </a:xfrm>
           <a:prstGeom prst="rect">
@@ -13404,7 +13666,7 @@
           <a:bodyPr wrap="square" lIns="0" tIns="0" rIns="0" bIns="0" rtlCol="0" anchor="ctr"/>
           <a:lstStyle/>
           <a:p>
-            <a:pPr marL="0" indent="0">
+            <a:pPr indent="0" marL="0">
               <a:buNone/>
             </a:pPr>
             <a:r>
@@ -13421,7 +13683,7 @@
       </p:sp>
       <p:sp>
         <p:nvSpPr>
-          <p:cNvPr id="34" name="Shape 32"/>
+          <p:cNvPr id="34" name="bar_fb_format_stories"/>
           <p:cNvSpPr/>
           <p:nvPr/>
         </p:nvSpPr>
@@ -13465,7 +13727,7 @@
           <a:bodyPr wrap="square" lIns="0" tIns="0" rIns="0" bIns="0" rtlCol="0" anchor="ctr"/>
           <a:lstStyle/>
           <a:p>
-            <a:pPr marL="0" indent="0" algn="ctr">
+            <a:pPr algn="ctr" indent="0" marL="0">
               <a:buNone/>
             </a:pPr>
             <a:r>
@@ -13482,7 +13744,7 @@
       </p:sp>
       <p:sp>
         <p:nvSpPr>
-          <p:cNvPr id="36" name="Text 34"/>
+          <p:cNvPr id="36" name="label_fb_format_stories"/>
           <p:cNvSpPr/>
           <p:nvPr/>
         </p:nvSpPr>
@@ -13503,7 +13765,7 @@
           </a:bodyPr>
           <a:lstStyle/>
           <a:p>
-            <a:pPr marL="0" indent="0" algn="ctr">
+            <a:pPr algn="ctr" indent="0" marL="0">
               <a:buNone/>
             </a:pPr>
             <a:r>
@@ -13520,7 +13782,7 @@
       </p:sp>
       <p:sp>
         <p:nvSpPr>
-          <p:cNvPr id="37" name="Shape 35"/>
+          <p:cNvPr id="37" name="bar_fb_format_reels"/>
           <p:cNvSpPr/>
           <p:nvPr/>
         </p:nvSpPr>
@@ -13564,7 +13826,7 @@
           <a:bodyPr wrap="square" lIns="0" tIns="0" rIns="0" bIns="0" rtlCol="0" anchor="ctr"/>
           <a:lstStyle/>
           <a:p>
-            <a:pPr marL="0" indent="0" algn="ctr">
+            <a:pPr algn="ctr" indent="0" marL="0">
               <a:buNone/>
             </a:pPr>
             <a:r>
@@ -13581,7 +13843,7 @@
       </p:sp>
       <p:sp>
         <p:nvSpPr>
-          <p:cNvPr id="39" name="Text 37"/>
+          <p:cNvPr id="39" name="label_fb_format_reels"/>
           <p:cNvSpPr/>
           <p:nvPr/>
         </p:nvSpPr>
@@ -13602,7 +13864,7 @@
           </a:bodyPr>
           <a:lstStyle/>
           <a:p>
-            <a:pPr marL="0" indent="0" algn="ctr">
+            <a:pPr algn="ctr" indent="0" marL="0">
               <a:buNone/>
             </a:pPr>
             <a:r>
@@ -13619,7 +13881,7 @@
       </p:sp>
       <p:sp>
         <p:nvSpPr>
-          <p:cNvPr id="40" name="Shape 38"/>
+          <p:cNvPr id="40" name="bar_fb_format_carousels"/>
           <p:cNvSpPr/>
           <p:nvPr/>
         </p:nvSpPr>
@@ -13663,7 +13925,7 @@
           <a:bodyPr wrap="square" lIns="0" tIns="0" rIns="0" bIns="0" rtlCol="0" anchor="ctr"/>
           <a:lstStyle/>
           <a:p>
-            <a:pPr marL="0" indent="0" algn="ctr">
+            <a:pPr algn="ctr" indent="0" marL="0">
               <a:buNone/>
             </a:pPr>
             <a:r>
@@ -13680,7 +13942,7 @@
       </p:sp>
       <p:sp>
         <p:nvSpPr>
-          <p:cNvPr id="42" name="Text 40"/>
+          <p:cNvPr id="42" name="label_fb_format_carousels"/>
           <p:cNvSpPr/>
           <p:nvPr/>
         </p:nvSpPr>
@@ -13701,7 +13963,7 @@
           </a:bodyPr>
           <a:lstStyle/>
           <a:p>
-            <a:pPr marL="0" indent="0" algn="ctr">
+            <a:pPr algn="ctr" indent="0" marL="0">
               <a:buNone/>
             </a:pPr>
             <a:r>
@@ -13718,7 +13980,7 @@
       </p:sp>
       <p:sp>
         <p:nvSpPr>
-          <p:cNvPr id="43" name="Shape 41"/>
+          <p:cNvPr id="43" name="bar_fb_format_post"/>
           <p:cNvSpPr/>
           <p:nvPr/>
         </p:nvSpPr>
@@ -13762,7 +14024,7 @@
           <a:bodyPr wrap="square" lIns="0" tIns="0" rIns="0" bIns="0" rtlCol="0" anchor="ctr"/>
           <a:lstStyle/>
           <a:p>
-            <a:pPr marL="0" indent="0" algn="ctr">
+            <a:pPr algn="ctr" indent="0" marL="0">
               <a:buNone/>
             </a:pPr>
             <a:r>
@@ -13779,7 +14041,7 @@
       </p:sp>
       <p:sp>
         <p:nvSpPr>
-          <p:cNvPr id="45" name="Text 43"/>
+          <p:cNvPr id="45" name="label_fb_format_post"/>
           <p:cNvSpPr/>
           <p:nvPr/>
         </p:nvSpPr>
@@ -13800,7 +14062,7 @@
           </a:bodyPr>
           <a:lstStyle/>
           <a:p>
-            <a:pPr marL="0" indent="0" algn="ctr">
+            <a:pPr algn="ctr" indent="0" marL="0">
               <a:buNone/>
             </a:pPr>
             <a:r>
@@ -13863,7 +14125,7 @@
           <a:bodyPr wrap="square" lIns="0" tIns="0" rIns="0" bIns="0" rtlCol="0" anchor="ctr"/>
           <a:lstStyle/>
           <a:p>
-            <a:pPr marL="0" indent="0">
+            <a:pPr indent="0" marL="0">
               <a:buNone/>
             </a:pPr>
             <a:r>
@@ -13901,7 +14163,7 @@
           </a:bodyPr>
           <a:lstStyle/>
           <a:p>
-            <a:pPr marL="0" indent="0">
+            <a:pPr indent="0" marL="0">
               <a:buNone/>
             </a:pPr>
             <a:r>
@@ -13937,7 +14199,7 @@
           <a:bodyPr wrap="square" lIns="0" tIns="0" rIns="0" bIns="0" rtlCol="0" anchor="ctr"/>
           <a:lstStyle/>
           <a:p>
-            <a:pPr marL="0" indent="0">
+            <a:pPr indent="0" marL="0">
               <a:buNone/>
             </a:pPr>
             <a:r>
@@ -13975,7 +14237,7 @@
           </a:bodyPr>
           <a:lstStyle/>
           <a:p>
-            <a:pPr marL="0" indent="0">
+            <a:pPr indent="0" marL="0">
               <a:buNone/>
             </a:pPr>
             <a:r>
@@ -14006,7 +14268,6 @@
         <a:solidFill>
           <a:srgbClr val="FFFFFF"/>
         </a:solidFill>
-        <a:effectLst/>
       </p:bgPr>
     </p:bg>
     <p:spTree>
@@ -14094,7 +14355,7 @@
           <a:bodyPr wrap="square" lIns="0" tIns="0" rIns="0" bIns="0" rtlCol="0" anchor="ctr"/>
           <a:lstStyle/>
           <a:p>
-            <a:pPr marL="0" indent="0">
+            <a:pPr indent="0" marL="0">
               <a:buNone/>
             </a:pPr>
             <a:r>
@@ -14135,7 +14396,7 @@
           </a:bodyPr>
           <a:lstStyle/>
           <a:p>
-            <a:pPr marL="0" indent="0">
+            <a:pPr indent="0" marL="0">
               <a:buNone/>
             </a:pPr>
             <a:r>
@@ -14174,7 +14435,7 @@
           <a:bodyPr wrap="square" lIns="0" tIns="0" rIns="0" bIns="0" rtlCol="0" anchor="ctr"/>
           <a:lstStyle/>
           <a:p>
-            <a:pPr marL="0" indent="0" algn="r">
+            <a:pPr algn="r" indent="0" marL="0">
               <a:buNone/>
             </a:pPr>
             <a:r>
@@ -14239,7 +14500,7 @@
           </a:bodyPr>
           <a:lstStyle/>
           <a:p>
-            <a:pPr marL="0" indent="0">
+            <a:pPr indent="0" marL="0">
               <a:buNone/>
             </a:pPr>
             <a:r>
@@ -14277,7 +14538,7 @@
           </a:bodyPr>
           <a:lstStyle/>
           <a:p>
-            <a:pPr marL="0" indent="0">
+            <a:pPr indent="0" marL="0">
               <a:buNone/>
             </a:pPr>
             <a:r>
@@ -14300,7 +14561,7 @@
         </p:nvSpPr>
         <p:spPr>
           <a:xfrm>
-            <a:off x="804672" y="1877193"/>
+            <a:off x="804672" y="1709928"/>
             <a:ext cx="1499616" cy="182880"/>
           </a:xfrm>
           <a:prstGeom prst="rect">
@@ -14315,7 +14576,7 @@
           </a:bodyPr>
           <a:lstStyle/>
           <a:p>
-            <a:pPr marL="0" indent="0">
+            <a:pPr indent="0" marL="0">
               <a:buNone/>
             </a:pPr>
             <a:r>
@@ -14380,7 +14641,7 @@
           </a:bodyPr>
           <a:lstStyle/>
           <a:p>
-            <a:pPr marL="0" indent="0">
+            <a:pPr indent="0" marL="0">
               <a:buNone/>
             </a:pPr>
             <a:r>
@@ -14418,7 +14679,7 @@
           </a:bodyPr>
           <a:lstStyle/>
           <a:p>
-            <a:pPr marL="0" indent="0">
+            <a:pPr indent="0" marL="0">
               <a:buNone/>
             </a:pPr>
             <a:r>
@@ -14441,7 +14702,7 @@
         </p:nvSpPr>
         <p:spPr>
           <a:xfrm>
-            <a:off x="2816352" y="1874903"/>
+            <a:off x="2816352" y="1709928"/>
             <a:ext cx="1499616" cy="182880"/>
           </a:xfrm>
           <a:prstGeom prst="rect">
@@ -14456,7 +14717,7 @@
           </a:bodyPr>
           <a:lstStyle/>
           <a:p>
-            <a:pPr marL="0" indent="0">
+            <a:pPr indent="0" marL="0">
               <a:buNone/>
             </a:pPr>
             <a:r>
@@ -14521,7 +14782,7 @@
           </a:bodyPr>
           <a:lstStyle/>
           <a:p>
-            <a:pPr marL="0" indent="0">
+            <a:pPr indent="0" marL="0">
               <a:buNone/>
             </a:pPr>
             <a:r>
@@ -14559,7 +14820,7 @@
           </a:bodyPr>
           <a:lstStyle/>
           <a:p>
-            <a:pPr marL="0" indent="0">
+            <a:pPr indent="0" marL="0">
               <a:buNone/>
             </a:pPr>
             <a:r>
@@ -14582,7 +14843,7 @@
         </p:nvSpPr>
         <p:spPr>
           <a:xfrm>
-            <a:off x="4818888" y="1877193"/>
+            <a:off x="4828032" y="1709928"/>
             <a:ext cx="1499616" cy="182880"/>
           </a:xfrm>
           <a:prstGeom prst="rect">
@@ -14597,7 +14858,7 @@
           </a:bodyPr>
           <a:lstStyle/>
           <a:p>
-            <a:pPr marL="0" indent="0">
+            <a:pPr indent="0" marL="0">
               <a:buNone/>
             </a:pPr>
             <a:r>
@@ -14662,7 +14923,7 @@
           </a:bodyPr>
           <a:lstStyle/>
           <a:p>
-            <a:pPr marL="0" indent="0">
+            <a:pPr indent="0" marL="0">
               <a:buNone/>
             </a:pPr>
             <a:r>
@@ -14700,7 +14961,7 @@
           </a:bodyPr>
           <a:lstStyle/>
           <a:p>
-            <a:pPr marL="0" indent="0">
+            <a:pPr indent="0" marL="0">
               <a:buNone/>
             </a:pPr>
             <a:r>
@@ -14723,7 +14984,7 @@
         </p:nvSpPr>
         <p:spPr>
           <a:xfrm>
-            <a:off x="6830407" y="1875729"/>
+            <a:off x="6839712" y="1709928"/>
             <a:ext cx="1088136" cy="182880"/>
           </a:xfrm>
           <a:prstGeom prst="rect">
@@ -14738,7 +14999,7 @@
           </a:bodyPr>
           <a:lstStyle/>
           <a:p>
-            <a:pPr marL="0" indent="0">
+            <a:pPr indent="0" marL="0">
               <a:buNone/>
             </a:pPr>
             <a:r>
@@ -14761,7 +15022,7 @@
         </p:nvSpPr>
         <p:spPr>
           <a:xfrm>
-            <a:off x="640080" y="2118735"/>
+            <a:off x="640080" y="2286000"/>
             <a:ext cx="3657600" cy="182880"/>
           </a:xfrm>
           <a:prstGeom prst="rect">
@@ -14774,7 +15035,7 @@
           <a:bodyPr wrap="square" lIns="0" tIns="0" rIns="0" bIns="0" rtlCol="0" anchor="ctr"/>
           <a:lstStyle/>
           <a:p>
-            <a:pPr marL="0" indent="0">
+            <a:pPr indent="0" marL="0">
               <a:buNone/>
             </a:pPr>
             <a:r>
@@ -14791,7 +15052,7 @@
       </p:sp>
       <p:sp>
         <p:nvSpPr>
-          <p:cNvPr id="24" name="Shape 22"/>
+          <p:cNvPr id="24" name="bar_tt_age_18_24"/>
           <p:cNvSpPr/>
           <p:nvPr/>
         </p:nvSpPr>
@@ -14835,7 +15096,7 @@
           <a:bodyPr wrap="square" lIns="0" tIns="0" rIns="0" bIns="0" rtlCol="0" anchor="ctr"/>
           <a:lstStyle/>
           <a:p>
-            <a:pPr marL="0" indent="0" algn="ctr">
+            <a:pPr algn="ctr" indent="0" marL="0">
               <a:buNone/>
             </a:pPr>
             <a:r>
@@ -14852,7 +15113,7 @@
       </p:sp>
       <p:sp>
         <p:nvSpPr>
-          <p:cNvPr id="26" name="Text 24"/>
+          <p:cNvPr id="26" name="label_tt_age_18_24"/>
           <p:cNvSpPr/>
           <p:nvPr/>
         </p:nvSpPr>
@@ -14873,7 +15134,7 @@
           </a:bodyPr>
           <a:lstStyle/>
           <a:p>
-            <a:pPr marL="0" indent="0" algn="ctr">
+            <a:pPr algn="ctr" indent="0" marL="0">
               <a:buNone/>
             </a:pPr>
             <a:r>
@@ -14890,7 +15151,7 @@
       </p:sp>
       <p:sp>
         <p:nvSpPr>
-          <p:cNvPr id="27" name="Shape 25"/>
+          <p:cNvPr id="27" name="bar_tt_age_25_34"/>
           <p:cNvSpPr/>
           <p:nvPr/>
         </p:nvSpPr>
@@ -14934,7 +15195,7 @@
           <a:bodyPr wrap="square" lIns="0" tIns="0" rIns="0" bIns="0" rtlCol="0" anchor="ctr"/>
           <a:lstStyle/>
           <a:p>
-            <a:pPr marL="0" indent="0" algn="ctr">
+            <a:pPr algn="ctr" indent="0" marL="0">
               <a:buNone/>
             </a:pPr>
             <a:r>
@@ -14951,7 +15212,7 @@
       </p:sp>
       <p:sp>
         <p:nvSpPr>
-          <p:cNvPr id="29" name="Text 27"/>
+          <p:cNvPr id="29" name="label_tt_age_25_34"/>
           <p:cNvSpPr/>
           <p:nvPr/>
         </p:nvSpPr>
@@ -14972,7 +15233,7 @@
           </a:bodyPr>
           <a:lstStyle/>
           <a:p>
-            <a:pPr marL="0" indent="0" algn="ctr">
+            <a:pPr algn="ctr" indent="0" marL="0">
               <a:buNone/>
             </a:pPr>
             <a:r>
@@ -14989,7 +15250,7 @@
       </p:sp>
       <p:sp>
         <p:nvSpPr>
-          <p:cNvPr id="30" name="Shape 28"/>
+          <p:cNvPr id="30" name="bar_tt_age_35_44"/>
           <p:cNvSpPr/>
           <p:nvPr/>
         </p:nvSpPr>
@@ -15033,7 +15294,7 @@
           <a:bodyPr wrap="square" lIns="0" tIns="0" rIns="0" bIns="0" rtlCol="0" anchor="ctr"/>
           <a:lstStyle/>
           <a:p>
-            <a:pPr marL="0" indent="0" algn="ctr">
+            <a:pPr algn="ctr" indent="0" marL="0">
               <a:buNone/>
             </a:pPr>
             <a:r>
@@ -15050,7 +15311,7 @@
       </p:sp>
       <p:sp>
         <p:nvSpPr>
-          <p:cNvPr id="32" name="Text 30"/>
+          <p:cNvPr id="32" name="label_tt_age_35_44"/>
           <p:cNvSpPr/>
           <p:nvPr/>
         </p:nvSpPr>
@@ -15071,7 +15332,7 @@
           </a:bodyPr>
           <a:lstStyle/>
           <a:p>
-            <a:pPr marL="0" indent="0" algn="ctr">
+            <a:pPr algn="ctr" indent="0" marL="0">
               <a:buNone/>
             </a:pPr>
             <a:r>
@@ -15088,7 +15349,7 @@
       </p:sp>
       <p:sp>
         <p:nvSpPr>
-          <p:cNvPr id="33" name="Shape 31"/>
+          <p:cNvPr id="33" name="bar_tt_age_45_54"/>
           <p:cNvSpPr/>
           <p:nvPr/>
         </p:nvSpPr>
@@ -15132,7 +15393,7 @@
           <a:bodyPr wrap="square" lIns="0" tIns="0" rIns="0" bIns="0" rtlCol="0" anchor="ctr"/>
           <a:lstStyle/>
           <a:p>
-            <a:pPr marL="0" indent="0" algn="ctr">
+            <a:pPr algn="ctr" indent="0" marL="0">
               <a:buNone/>
             </a:pPr>
             <a:r>
@@ -15149,7 +15410,7 @@
       </p:sp>
       <p:sp>
         <p:nvSpPr>
-          <p:cNvPr id="35" name="Text 33"/>
+          <p:cNvPr id="35" name="label_tt_age_45_54"/>
           <p:cNvSpPr/>
           <p:nvPr/>
         </p:nvSpPr>
@@ -15170,7 +15431,7 @@
           </a:bodyPr>
           <a:lstStyle/>
           <a:p>
-            <a:pPr marL="0" indent="0" algn="ctr">
+            <a:pPr algn="ctr" indent="0" marL="0">
               <a:buNone/>
             </a:pPr>
             <a:r>
@@ -15187,7 +15448,7 @@
       </p:sp>
       <p:sp>
         <p:nvSpPr>
-          <p:cNvPr id="36" name="Shape 34"/>
+          <p:cNvPr id="36" name="bar_tt_age_55"/>
           <p:cNvSpPr/>
           <p:nvPr/>
         </p:nvSpPr>
@@ -15231,7 +15492,7 @@
           <a:bodyPr wrap="square" lIns="0" tIns="0" rIns="0" bIns="0" rtlCol="0" anchor="ctr"/>
           <a:lstStyle/>
           <a:p>
-            <a:pPr marL="0" indent="0" algn="ctr">
+            <a:pPr algn="ctr" indent="0" marL="0">
               <a:buNone/>
             </a:pPr>
             <a:r>
@@ -15248,7 +15509,7 @@
       </p:sp>
       <p:sp>
         <p:nvSpPr>
-          <p:cNvPr id="38" name="Text 36"/>
+          <p:cNvPr id="38" name="label_tt_age_55"/>
           <p:cNvSpPr/>
           <p:nvPr/>
         </p:nvSpPr>
@@ -15269,7 +15530,7 @@
           </a:bodyPr>
           <a:lstStyle/>
           <a:p>
-            <a:pPr marL="0" indent="0" algn="ctr">
+            <a:pPr algn="ctr" indent="0" marL="0">
               <a:buNone/>
             </a:pPr>
             <a:r>
@@ -15292,7 +15553,7 @@
         </p:nvSpPr>
         <p:spPr>
           <a:xfrm>
-            <a:off x="4709160" y="2118735"/>
+            <a:off x="4709160" y="2286000"/>
             <a:ext cx="3337560" cy="182880"/>
           </a:xfrm>
           <a:prstGeom prst="rect">
@@ -15305,7 +15566,7 @@
           <a:bodyPr wrap="square" lIns="0" tIns="0" rIns="0" bIns="0" rtlCol="0" anchor="ctr"/>
           <a:lstStyle/>
           <a:p>
-            <a:pPr marL="0" indent="0">
+            <a:pPr indent="0" marL="0">
               <a:buNone/>
             </a:pPr>
             <a:r>
@@ -15322,7 +15583,7 @@
       </p:sp>
       <p:sp>
         <p:nvSpPr>
-          <p:cNvPr id="40" name="Shape 38"/>
+          <p:cNvPr id="40" name="bar_tt_top_1"/>
           <p:cNvSpPr/>
           <p:nvPr/>
         </p:nvSpPr>
@@ -15366,7 +15627,7 @@
           <a:bodyPr wrap="square" lIns="0" tIns="0" rIns="0" bIns="0" rtlCol="0" anchor="ctr"/>
           <a:lstStyle/>
           <a:p>
-            <a:pPr marL="0" indent="0" algn="ctr">
+            <a:pPr algn="ctr" indent="0" marL="0">
               <a:buNone/>
             </a:pPr>
             <a:r>
@@ -15383,7 +15644,7 @@
       </p:sp>
       <p:sp>
         <p:nvSpPr>
-          <p:cNvPr id="42" name="Text 40"/>
+          <p:cNvPr id="42" name="label_tt_top_1"/>
           <p:cNvSpPr/>
           <p:nvPr/>
         </p:nvSpPr>
@@ -15404,7 +15665,7 @@
           </a:bodyPr>
           <a:lstStyle/>
           <a:p>
-            <a:pPr marL="0" indent="0" algn="ctr">
+            <a:pPr algn="ctr" indent="0" marL="0">
               <a:buNone/>
             </a:pPr>
             <a:r>
@@ -15421,7 +15682,7 @@
       </p:sp>
       <p:sp>
         <p:nvSpPr>
-          <p:cNvPr id="43" name="Shape 41"/>
+          <p:cNvPr id="43" name="bar_tt_top_2"/>
           <p:cNvSpPr/>
           <p:nvPr/>
         </p:nvSpPr>
@@ -15465,7 +15726,7 @@
           <a:bodyPr wrap="square" lIns="0" tIns="0" rIns="0" bIns="0" rtlCol="0" anchor="ctr"/>
           <a:lstStyle/>
           <a:p>
-            <a:pPr marL="0" indent="0" algn="ctr">
+            <a:pPr algn="ctr" indent="0" marL="0">
               <a:buNone/>
             </a:pPr>
             <a:r>
@@ -15482,7 +15743,7 @@
       </p:sp>
       <p:sp>
         <p:nvSpPr>
-          <p:cNvPr id="45" name="Text 43"/>
+          <p:cNvPr id="45" name="label_tt_top_2"/>
           <p:cNvSpPr/>
           <p:nvPr/>
         </p:nvSpPr>
@@ -15503,7 +15764,7 @@
           </a:bodyPr>
           <a:lstStyle/>
           <a:p>
-            <a:pPr marL="0" indent="0" algn="ctr">
+            <a:pPr algn="ctr" indent="0" marL="0">
               <a:buNone/>
             </a:pPr>
             <a:r>
@@ -15520,7 +15781,7 @@
       </p:sp>
       <p:sp>
         <p:nvSpPr>
-          <p:cNvPr id="46" name="Shape 44"/>
+          <p:cNvPr id="46" name="bar_tt_top_3"/>
           <p:cNvSpPr/>
           <p:nvPr/>
         </p:nvSpPr>
@@ -15564,7 +15825,7 @@
           <a:bodyPr wrap="square" lIns="0" tIns="0" rIns="0" bIns="0" rtlCol="0" anchor="ctr"/>
           <a:lstStyle/>
           <a:p>
-            <a:pPr marL="0" indent="0" algn="ctr">
+            <a:pPr algn="ctr" indent="0" marL="0">
               <a:buNone/>
             </a:pPr>
             <a:r>
@@ -15581,7 +15842,7 @@
       </p:sp>
       <p:sp>
         <p:nvSpPr>
-          <p:cNvPr id="48" name="Text 46"/>
+          <p:cNvPr id="48" name="label_tt_top_3"/>
           <p:cNvSpPr/>
           <p:nvPr/>
         </p:nvSpPr>
@@ -15602,7 +15863,7 @@
           </a:bodyPr>
           <a:lstStyle/>
           <a:p>
-            <a:pPr marL="0" indent="0" algn="ctr">
+            <a:pPr algn="ctr" indent="0" marL="0">
               <a:buNone/>
             </a:pPr>
             <a:r>
@@ -15665,7 +15926,7 @@
           <a:bodyPr wrap="square" lIns="0" tIns="0" rIns="0" bIns="0" rtlCol="0" anchor="ctr"/>
           <a:lstStyle/>
           <a:p>
-            <a:pPr marL="0" indent="0">
+            <a:pPr indent="0" marL="0">
               <a:buNone/>
             </a:pPr>
             <a:r>
@@ -15703,7 +15964,7 @@
           </a:bodyPr>
           <a:lstStyle/>
           <a:p>
-            <a:pPr marL="0" indent="0">
+            <a:pPr indent="0" marL="0">
               <a:buNone/>
             </a:pPr>
             <a:r>
@@ -15739,7 +16000,7 @@
           <a:bodyPr wrap="square" lIns="0" tIns="0" rIns="0" bIns="0" rtlCol="0" anchor="ctr"/>
           <a:lstStyle/>
           <a:p>
-            <a:pPr marL="0" indent="0">
+            <a:pPr indent="0" marL="0">
               <a:buNone/>
             </a:pPr>
             <a:r>
@@ -15777,7 +16038,7 @@
           </a:bodyPr>
           <a:lstStyle/>
           <a:p>
-            <a:pPr marL="0" indent="0">
+            <a:pPr indent="0" marL="0">
               <a:buNone/>
             </a:pPr>
             <a:r>
@@ -15808,7 +16069,6 @@
         <a:solidFill>
           <a:srgbClr val="FFFFFF"/>
         </a:solidFill>
-        <a:effectLst/>
       </p:bgPr>
     </p:bg>
     <p:spTree>
@@ -15896,7 +16156,7 @@
           <a:bodyPr wrap="square" lIns="0" tIns="0" rIns="0" bIns="0" rtlCol="0" anchor="ctr"/>
           <a:lstStyle/>
           <a:p>
-            <a:pPr marL="0" indent="0">
+            <a:pPr indent="0" marL="0">
               <a:buNone/>
             </a:pPr>
             <a:r>
@@ -15937,7 +16197,7 @@
           </a:bodyPr>
           <a:lstStyle/>
           <a:p>
-            <a:pPr marL="0" indent="0">
+            <a:pPr indent="0" marL="0">
               <a:buNone/>
             </a:pPr>
             <a:r>
@@ -15976,7 +16236,7 @@
           <a:bodyPr wrap="square" lIns="0" tIns="0" rIns="0" bIns="0" rtlCol="0" anchor="ctr"/>
           <a:lstStyle/>
           <a:p>
-            <a:pPr marL="0" indent="0" algn="r">
+            <a:pPr algn="r" indent="0" marL="0">
               <a:buNone/>
             </a:pPr>
             <a:r>
@@ -16012,7 +16272,7 @@
           <a:bodyPr wrap="square" lIns="0" tIns="0" rIns="0" bIns="0" rtlCol="0" anchor="ctr"/>
           <a:lstStyle/>
           <a:p>
-            <a:pPr marL="0" indent="0">
+            <a:pPr indent="0" marL="0">
               <a:buNone/>
             </a:pPr>
             <a:r>
@@ -16048,7 +16308,7 @@
           <a:bodyPr wrap="square" lIns="0" tIns="0" rIns="0" bIns="0" rtlCol="0" anchor="ctr"/>
           <a:lstStyle/>
           <a:p>
-            <a:pPr marL="0" indent="0">
+            <a:pPr indent="0" marL="0">
               <a:buNone/>
             </a:pPr>
             <a:r>
@@ -16111,7 +16371,7 @@
           <a:bodyPr wrap="square" lIns="0" tIns="0" rIns="0" bIns="0" rtlCol="0" anchor="ctr"/>
           <a:lstStyle/>
           <a:p>
-            <a:pPr marL="0" indent="0">
+            <a:pPr indent="0" marL="0">
               <a:buNone/>
             </a:pPr>
             <a:r>
@@ -16149,7 +16409,7 @@
           </a:bodyPr>
           <a:lstStyle/>
           <a:p>
-            <a:pPr marL="0" indent="0" algn="ctr">
+            <a:pPr algn="ctr" indent="0" marL="0">
               <a:buNone/>
             </a:pPr>
             <a:r>
@@ -16187,7 +16447,7 @@
           </a:bodyPr>
           <a:lstStyle/>
           <a:p>
-            <a:pPr marL="0" indent="0" algn="ctr">
+            <a:pPr algn="ctr" indent="0" marL="0">
               <a:buNone/>
             </a:pPr>
             <a:r>
@@ -16225,7 +16485,7 @@
           </a:bodyPr>
           <a:lstStyle/>
           <a:p>
-            <a:pPr marL="0" indent="0" algn="ctr">
+            <a:pPr algn="ctr" indent="0" marL="0">
               <a:buNone/>
             </a:pPr>
             <a:r>
@@ -16263,7 +16523,7 @@
           </a:bodyPr>
           <a:lstStyle/>
           <a:p>
-            <a:pPr marL="0" indent="0" algn="ctr">
+            <a:pPr algn="ctr" indent="0" marL="0">
               <a:buNone/>
             </a:pPr>
             <a:r>
@@ -16301,7 +16561,7 @@
           </a:bodyPr>
           <a:lstStyle/>
           <a:p>
-            <a:pPr marL="0" indent="0" algn="ctr">
+            <a:pPr algn="ctr" indent="0" marL="0">
               <a:buNone/>
             </a:pPr>
             <a:r>
@@ -16339,7 +16599,7 @@
           </a:bodyPr>
           <a:lstStyle/>
           <a:p>
-            <a:pPr marL="0" indent="0" algn="ctr">
+            <a:pPr algn="ctr" indent="0" marL="0">
               <a:buNone/>
             </a:pPr>
             <a:r>
@@ -16377,7 +16637,7 @@
           </a:bodyPr>
           <a:lstStyle/>
           <a:p>
-            <a:pPr marL="0" indent="0">
+            <a:pPr indent="0" marL="0">
               <a:buNone/>
             </a:pPr>
             <a:r>
@@ -16440,7 +16700,7 @@
           <a:bodyPr wrap="square" lIns="0" tIns="0" rIns="0" bIns="0" rtlCol="0" anchor="ctr"/>
           <a:lstStyle/>
           <a:p>
-            <a:pPr marL="0" indent="0">
+            <a:pPr indent="0" marL="0">
               <a:buNone/>
             </a:pPr>
             <a:r>
@@ -16478,7 +16738,7 @@
           </a:bodyPr>
           <a:lstStyle/>
           <a:p>
-            <a:pPr marL="0" indent="0" algn="ctr">
+            <a:pPr algn="ctr" indent="0" marL="0">
               <a:buNone/>
             </a:pPr>
             <a:r>
@@ -16516,7 +16776,7 @@
           </a:bodyPr>
           <a:lstStyle/>
           <a:p>
-            <a:pPr marL="0" indent="0" algn="ctr">
+            <a:pPr algn="ctr" indent="0" marL="0">
               <a:buNone/>
             </a:pPr>
             <a:r>
@@ -16554,7 +16814,7 @@
           </a:bodyPr>
           <a:lstStyle/>
           <a:p>
-            <a:pPr marL="0" indent="0" algn="ctr">
+            <a:pPr algn="ctr" indent="0" marL="0">
               <a:buNone/>
             </a:pPr>
             <a:r>
@@ -16592,7 +16852,7 @@
           </a:bodyPr>
           <a:lstStyle/>
           <a:p>
-            <a:pPr marL="0" indent="0" algn="ctr">
+            <a:pPr algn="ctr" indent="0" marL="0">
               <a:buNone/>
             </a:pPr>
             <a:r>
@@ -16630,7 +16890,7 @@
           </a:bodyPr>
           <a:lstStyle/>
           <a:p>
-            <a:pPr marL="0" indent="0" algn="ctr">
+            <a:pPr algn="ctr" indent="0" marL="0">
               <a:buNone/>
             </a:pPr>
             <a:r>
@@ -16668,7 +16928,7 @@
           </a:bodyPr>
           <a:lstStyle/>
           <a:p>
-            <a:pPr marL="0" indent="0" algn="ctr">
+            <a:pPr algn="ctr" indent="0" marL="0">
               <a:buNone/>
             </a:pPr>
             <a:r>
@@ -16706,7 +16966,7 @@
           </a:bodyPr>
           <a:lstStyle/>
           <a:p>
-            <a:pPr marL="0" indent="0">
+            <a:pPr indent="0" marL="0">
               <a:buNone/>
             </a:pPr>
             <a:r>
@@ -16769,7 +17029,7 @@
           <a:bodyPr wrap="square" lIns="0" tIns="0" rIns="0" bIns="0" rtlCol="0" anchor="ctr"/>
           <a:lstStyle/>
           <a:p>
-            <a:pPr marL="0" indent="0">
+            <a:pPr indent="0" marL="0">
               <a:buNone/>
             </a:pPr>
             <a:r>
@@ -16807,7 +17067,7 @@
           </a:bodyPr>
           <a:lstStyle/>
           <a:p>
-            <a:pPr marL="0" indent="0" algn="ctr">
+            <a:pPr algn="ctr" indent="0" marL="0">
               <a:buNone/>
             </a:pPr>
             <a:r>
@@ -16845,7 +17105,7 @@
           </a:bodyPr>
           <a:lstStyle/>
           <a:p>
-            <a:pPr marL="0" indent="0" algn="ctr">
+            <a:pPr algn="ctr" indent="0" marL="0">
               <a:buNone/>
             </a:pPr>
             <a:r>
@@ -16883,7 +17143,7 @@
           </a:bodyPr>
           <a:lstStyle/>
           <a:p>
-            <a:pPr marL="0" indent="0" algn="ctr">
+            <a:pPr algn="ctr" indent="0" marL="0">
               <a:buNone/>
             </a:pPr>
             <a:r>
@@ -16921,7 +17181,7 @@
           </a:bodyPr>
           <a:lstStyle/>
           <a:p>
-            <a:pPr marL="0" indent="0" algn="ctr">
+            <a:pPr algn="ctr" indent="0" marL="0">
               <a:buNone/>
             </a:pPr>
             <a:r>
@@ -16959,7 +17219,7 @@
           </a:bodyPr>
           <a:lstStyle/>
           <a:p>
-            <a:pPr marL="0" indent="0" algn="ctr">
+            <a:pPr algn="ctr" indent="0" marL="0">
               <a:buNone/>
             </a:pPr>
             <a:r>
@@ -16997,7 +17257,7 @@
           </a:bodyPr>
           <a:lstStyle/>
           <a:p>
-            <a:pPr marL="0" indent="0" algn="ctr">
+            <a:pPr algn="ctr" indent="0" marL="0">
               <a:buNone/>
             </a:pPr>
             <a:r>
@@ -17035,7 +17295,7 @@
           </a:bodyPr>
           <a:lstStyle/>
           <a:p>
-            <a:pPr marL="0" indent="0">
+            <a:pPr indent="0" marL="0">
               <a:buNone/>
             </a:pPr>
             <a:r>
@@ -17073,7 +17333,7 @@
           </a:bodyPr>
           <a:lstStyle/>
           <a:p>
-            <a:pPr marL="0" indent="0" algn="ctr">
+            <a:pPr algn="ctr" indent="0" marL="0">
               <a:buNone/>
             </a:pPr>
             <a:r>
@@ -17104,7 +17364,6 @@
         <a:solidFill>
           <a:srgbClr val="FFFFFF"/>
         </a:solidFill>
-        <a:effectLst/>
       </p:bgPr>
     </p:bg>
     <p:spTree>
@@ -17192,7 +17451,7 @@
           <a:bodyPr wrap="square" lIns="0" tIns="0" rIns="0" bIns="0" rtlCol="0" anchor="ctr"/>
           <a:lstStyle/>
           <a:p>
-            <a:pPr marL="0" indent="0">
+            <a:pPr indent="0" marL="0">
               <a:buNone/>
             </a:pPr>
             <a:r>
@@ -17218,7 +17477,7 @@
         </p:nvSpPr>
         <p:spPr>
           <a:xfrm>
-            <a:off x="502920" y="541503"/>
+            <a:off x="502920" y="530352"/>
             <a:ext cx="7680960" cy="411480"/>
           </a:xfrm>
           <a:prstGeom prst="rect">
@@ -17229,11 +17488,11 @@
         </p:spPr>
         <p:txBody>
           <a:bodyPr wrap="square" lIns="0" tIns="0" rIns="0" bIns="0" rtlCol="0" anchor="ctr">
-            <a:normAutofit fontScale="70000" lnSpcReduction="20000"/>
-          </a:bodyPr>
-          <a:lstStyle/>
-          <a:p>
-            <a:pPr marL="0" indent="0">
+            <a:normAutofit/>
+          </a:bodyPr>
+          <a:lstStyle/>
+          <a:p>
+            <a:pPr indent="0" marL="0">
               <a:buNone/>
             </a:pPr>
             <a:r>
@@ -17272,7 +17531,7 @@
           <a:bodyPr wrap="square" lIns="0" tIns="0" rIns="0" bIns="0" rtlCol="0" anchor="ctr"/>
           <a:lstStyle/>
           <a:p>
-            <a:pPr marL="0" indent="0" algn="r">
+            <a:pPr algn="r" indent="0" marL="0">
               <a:buNone/>
             </a:pPr>
             <a:r>
@@ -17337,7 +17596,7 @@
           </a:bodyPr>
           <a:lstStyle/>
           <a:p>
-            <a:pPr marL="0" indent="0">
+            <a:pPr indent="0" marL="0">
               <a:buNone/>
             </a:pPr>
             <a:r>
@@ -17375,7 +17634,7 @@
           </a:bodyPr>
           <a:lstStyle/>
           <a:p>
-            <a:pPr marL="0" indent="0">
+            <a:pPr indent="0" marL="0">
               <a:buNone/>
             </a:pPr>
             <a:r>
@@ -17398,7 +17657,7 @@
         </p:nvSpPr>
         <p:spPr>
           <a:xfrm>
-            <a:off x="804672" y="1855986"/>
+            <a:off x="804672" y="1709928"/>
             <a:ext cx="1499616" cy="182880"/>
           </a:xfrm>
           <a:prstGeom prst="rect">
@@ -17413,7 +17672,7 @@
           </a:bodyPr>
           <a:lstStyle/>
           <a:p>
-            <a:pPr marL="0" indent="0">
+            <a:pPr indent="0" marL="0">
               <a:buNone/>
             </a:pPr>
             <a:r>
@@ -17478,7 +17737,7 @@
           </a:bodyPr>
           <a:lstStyle/>
           <a:p>
-            <a:pPr marL="0" indent="0">
+            <a:pPr indent="0" marL="0">
               <a:buNone/>
             </a:pPr>
             <a:r>
@@ -17516,7 +17775,7 @@
           </a:bodyPr>
           <a:lstStyle/>
           <a:p>
-            <a:pPr marL="0" indent="0">
+            <a:pPr indent="0" marL="0">
               <a:buNone/>
             </a:pPr>
             <a:r>
@@ -17539,7 +17798,7 @@
         </p:nvSpPr>
         <p:spPr>
           <a:xfrm>
-            <a:off x="2816352" y="1851660"/>
+            <a:off x="2816352" y="1709928"/>
             <a:ext cx="1499616" cy="182880"/>
           </a:xfrm>
           <a:prstGeom prst="rect">
@@ -17554,7 +17813,7 @@
           </a:bodyPr>
           <a:lstStyle/>
           <a:p>
-            <a:pPr marL="0" indent="0">
+            <a:pPr indent="0" marL="0">
               <a:buNone/>
             </a:pPr>
             <a:r>
@@ -17619,7 +17878,7 @@
           </a:bodyPr>
           <a:lstStyle/>
           <a:p>
-            <a:pPr marL="0" indent="0">
+            <a:pPr indent="0" marL="0">
               <a:buNone/>
             </a:pPr>
             <a:r>
@@ -17657,7 +17916,7 @@
           </a:bodyPr>
           <a:lstStyle/>
           <a:p>
-            <a:pPr marL="0" indent="0">
+            <a:pPr indent="0" marL="0">
               <a:buNone/>
             </a:pPr>
             <a:r>
@@ -17680,7 +17939,7 @@
         </p:nvSpPr>
         <p:spPr>
           <a:xfrm>
-            <a:off x="4828032" y="1855986"/>
+            <a:off x="4828032" y="1709928"/>
             <a:ext cx="1499616" cy="182880"/>
           </a:xfrm>
           <a:prstGeom prst="rect">
@@ -17695,7 +17954,7 @@
           </a:bodyPr>
           <a:lstStyle/>
           <a:p>
-            <a:pPr marL="0" indent="0">
+            <a:pPr indent="0" marL="0">
               <a:buNone/>
             </a:pPr>
             <a:r>
@@ -17760,7 +18019,7 @@
           </a:bodyPr>
           <a:lstStyle/>
           <a:p>
-            <a:pPr marL="0" indent="0">
+            <a:pPr indent="0" marL="0">
               <a:buNone/>
             </a:pPr>
             <a:r>
@@ -17798,7 +18057,7 @@
           </a:bodyPr>
           <a:lstStyle/>
           <a:p>
-            <a:pPr marL="0" indent="0">
+            <a:pPr indent="0" marL="0">
               <a:buNone/>
             </a:pPr>
             <a:r>
@@ -17821,7 +18080,7 @@
         </p:nvSpPr>
         <p:spPr>
           <a:xfrm>
-            <a:off x="6839712" y="1822679"/>
+            <a:off x="6839712" y="1709928"/>
             <a:ext cx="1088136" cy="182880"/>
           </a:xfrm>
           <a:prstGeom prst="rect">
@@ -17836,7 +18095,7 @@
           </a:bodyPr>
           <a:lstStyle/>
           <a:p>
-            <a:pPr marL="0" indent="0">
+            <a:pPr indent="0" marL="0">
               <a:buNone/>
             </a:pPr>
             <a:r>
@@ -17859,7 +18118,7 @@
         </p:nvSpPr>
         <p:spPr>
           <a:xfrm>
-            <a:off x="640080" y="2121408"/>
+            <a:off x="640080" y="2286000"/>
             <a:ext cx="3886200" cy="182880"/>
           </a:xfrm>
           <a:prstGeom prst="rect">
@@ -17872,7 +18131,7 @@
           <a:bodyPr wrap="square" lIns="0" tIns="0" rIns="0" bIns="0" rtlCol="0" anchor="ctr"/>
           <a:lstStyle/>
           <a:p>
-            <a:pPr marL="0" indent="0">
+            <a:pPr indent="0" marL="0">
               <a:buNone/>
             </a:pPr>
             <a:r>
@@ -17889,7 +18148,7 @@
       </p:sp>
       <p:sp>
         <p:nvSpPr>
-          <p:cNvPr id="24" name="Shape 22"/>
+          <p:cNvPr id="24" name="bar_squad_views_skar"/>
           <p:cNvSpPr/>
           <p:nvPr/>
         </p:nvSpPr>
@@ -17933,7 +18192,7 @@
           <a:bodyPr wrap="square" lIns="0" tIns="0" rIns="0" bIns="0" rtlCol="0" anchor="ctr"/>
           <a:lstStyle/>
           <a:p>
-            <a:pPr marL="0" indent="0" algn="ctr">
+            <a:pPr algn="ctr" indent="0" marL="0">
               <a:buNone/>
             </a:pPr>
             <a:r>
@@ -17950,7 +18209,7 @@
       </p:sp>
       <p:sp>
         <p:nvSpPr>
-          <p:cNvPr id="26" name="Text 24"/>
+          <p:cNvPr id="26" name="label_squad_views_skar"/>
           <p:cNvSpPr/>
           <p:nvPr/>
         </p:nvSpPr>
@@ -17971,7 +18230,7 @@
           </a:bodyPr>
           <a:lstStyle/>
           <a:p>
-            <a:pPr marL="0" indent="0" algn="ctr">
+            <a:pPr algn="ctr" indent="0" marL="0">
               <a:buNone/>
             </a:pPr>
             <a:r>
@@ -17988,7 +18247,7 @@
       </p:sp>
       <p:sp>
         <p:nvSpPr>
-          <p:cNvPr id="27" name="Shape 25"/>
+          <p:cNvPr id="27" name="bar_squad_views_busquilla"/>
           <p:cNvSpPr/>
           <p:nvPr/>
         </p:nvSpPr>
@@ -18032,7 +18291,7 @@
           <a:bodyPr wrap="square" lIns="0" tIns="0" rIns="0" bIns="0" rtlCol="0" anchor="ctr"/>
           <a:lstStyle/>
           <a:p>
-            <a:pPr marL="0" indent="0" algn="ctr">
+            <a:pPr algn="ctr" indent="0" marL="0">
               <a:buNone/>
             </a:pPr>
             <a:r>
@@ -18049,7 +18308,7 @@
       </p:sp>
       <p:sp>
         <p:nvSpPr>
-          <p:cNvPr id="29" name="Text 27"/>
+          <p:cNvPr id="29" name="label_squad_views_busquilla"/>
           <p:cNvSpPr/>
           <p:nvPr/>
         </p:nvSpPr>
@@ -18070,7 +18329,7 @@
           </a:bodyPr>
           <a:lstStyle/>
           <a:p>
-            <a:pPr marL="0" indent="0" algn="ctr">
+            <a:pPr algn="ctr" indent="0" marL="0">
               <a:buNone/>
             </a:pPr>
             <a:r>
@@ -18087,7 +18346,7 @@
       </p:sp>
       <p:sp>
         <p:nvSpPr>
-          <p:cNvPr id="30" name="Shape 28"/>
+          <p:cNvPr id="30" name="bar_squad_views_cami"/>
           <p:cNvSpPr/>
           <p:nvPr/>
         </p:nvSpPr>
@@ -18131,7 +18390,7 @@
           <a:bodyPr wrap="square" lIns="0" tIns="0" rIns="0" bIns="0" rtlCol="0" anchor="ctr"/>
           <a:lstStyle/>
           <a:p>
-            <a:pPr marL="0" indent="0" algn="ctr">
+            <a:pPr algn="ctr" indent="0" marL="0">
               <a:buNone/>
             </a:pPr>
             <a:r>
@@ -18148,7 +18407,7 @@
       </p:sp>
       <p:sp>
         <p:nvSpPr>
-          <p:cNvPr id="32" name="Text 30"/>
+          <p:cNvPr id="32" name="label_squad_views_cami"/>
           <p:cNvSpPr/>
           <p:nvPr/>
         </p:nvSpPr>
@@ -18169,7 +18428,7 @@
           </a:bodyPr>
           <a:lstStyle/>
           <a:p>
-            <a:pPr marL="0" indent="0" algn="ctr">
+            <a:pPr algn="ctr" indent="0" marL="0">
               <a:buNone/>
             </a:pPr>
             <a:r>
@@ -18186,7 +18445,7 @@
       </p:sp>
       <p:sp>
         <p:nvSpPr>
-          <p:cNvPr id="33" name="Shape 31"/>
+          <p:cNvPr id="33" name="bar_squad_views_disley"/>
           <p:cNvSpPr/>
           <p:nvPr/>
         </p:nvSpPr>
@@ -18230,7 +18489,7 @@
           <a:bodyPr wrap="square" lIns="0" tIns="0" rIns="0" bIns="0" rtlCol="0" anchor="ctr"/>
           <a:lstStyle/>
           <a:p>
-            <a:pPr marL="0" indent="0" algn="ctr">
+            <a:pPr algn="ctr" indent="0" marL="0">
               <a:buNone/>
             </a:pPr>
             <a:r>
@@ -18247,7 +18506,7 @@
       </p:sp>
       <p:sp>
         <p:nvSpPr>
-          <p:cNvPr id="35" name="Text 33"/>
+          <p:cNvPr id="35" name="label_squad_views_disley"/>
           <p:cNvSpPr/>
           <p:nvPr/>
         </p:nvSpPr>
@@ -18268,7 +18527,7 @@
           </a:bodyPr>
           <a:lstStyle/>
           <a:p>
-            <a:pPr marL="0" indent="0" algn="ctr">
+            <a:pPr algn="ctr" indent="0" marL="0">
               <a:buNone/>
             </a:pPr>
             <a:r>
@@ -18291,7 +18550,7 @@
         </p:nvSpPr>
         <p:spPr>
           <a:xfrm>
-            <a:off x="4884610" y="2121408"/>
+            <a:off x="4892040" y="2286000"/>
             <a:ext cx="3383280" cy="182880"/>
           </a:xfrm>
           <a:prstGeom prst="rect">
@@ -18304,7 +18563,7 @@
           <a:bodyPr wrap="square" lIns="0" tIns="0" rIns="0" bIns="0" rtlCol="0" anchor="ctr"/>
           <a:lstStyle/>
           <a:p>
-            <a:pPr marL="0" indent="0">
+            <a:pPr indent="0" marL="0">
               <a:buNone/>
             </a:pPr>
             <a:r>
@@ -18321,7 +18580,7 @@
       </p:sp>
       <p:sp>
         <p:nvSpPr>
-          <p:cNvPr id="37" name="Shape 35"/>
+          <p:cNvPr id="37" name="bar_squad_er_skar"/>
           <p:cNvSpPr/>
           <p:nvPr/>
         </p:nvSpPr>
@@ -18365,7 +18624,7 @@
           <a:bodyPr wrap="square" lIns="0" tIns="0" rIns="0" bIns="0" rtlCol="0" anchor="ctr"/>
           <a:lstStyle/>
           <a:p>
-            <a:pPr marL="0" indent="0" algn="ctr">
+            <a:pPr algn="ctr" indent="0" marL="0">
               <a:buNone/>
             </a:pPr>
             <a:r>
@@ -18382,7 +18641,7 @@
       </p:sp>
       <p:sp>
         <p:nvSpPr>
-          <p:cNvPr id="39" name="Text 37"/>
+          <p:cNvPr id="39" name="label_squad_er_skar"/>
           <p:cNvSpPr/>
           <p:nvPr/>
         </p:nvSpPr>
@@ -18403,7 +18662,7 @@
           </a:bodyPr>
           <a:lstStyle/>
           <a:p>
-            <a:pPr marL="0" indent="0" algn="ctr">
+            <a:pPr algn="ctr" indent="0" marL="0">
               <a:buNone/>
             </a:pPr>
             <a:r>
@@ -18420,7 +18679,7 @@
       </p:sp>
       <p:sp>
         <p:nvSpPr>
-          <p:cNvPr id="40" name="Shape 38"/>
+          <p:cNvPr id="40" name="bar_squad_er_busquilla"/>
           <p:cNvSpPr/>
           <p:nvPr/>
         </p:nvSpPr>
@@ -18464,7 +18723,7 @@
           <a:bodyPr wrap="square" lIns="0" tIns="0" rIns="0" bIns="0" rtlCol="0" anchor="ctr"/>
           <a:lstStyle/>
           <a:p>
-            <a:pPr marL="0" indent="0" algn="ctr">
+            <a:pPr algn="ctr" indent="0" marL="0">
               <a:buNone/>
             </a:pPr>
             <a:r>
@@ -18481,7 +18740,7 @@
       </p:sp>
       <p:sp>
         <p:nvSpPr>
-          <p:cNvPr id="42" name="Text 40"/>
+          <p:cNvPr id="42" name="label_squad_er_busquilla"/>
           <p:cNvSpPr/>
           <p:nvPr/>
         </p:nvSpPr>
@@ -18502,7 +18761,7 @@
           </a:bodyPr>
           <a:lstStyle/>
           <a:p>
-            <a:pPr marL="0" indent="0" algn="ctr">
+            <a:pPr algn="ctr" indent="0" marL="0">
               <a:buNone/>
             </a:pPr>
             <a:r>
@@ -18519,7 +18778,7 @@
       </p:sp>
       <p:sp>
         <p:nvSpPr>
-          <p:cNvPr id="43" name="Shape 41"/>
+          <p:cNvPr id="43" name="bar_squad_er_cami"/>
           <p:cNvSpPr/>
           <p:nvPr/>
         </p:nvSpPr>
@@ -18563,7 +18822,7 @@
           <a:bodyPr wrap="square" lIns="0" tIns="0" rIns="0" bIns="0" rtlCol="0" anchor="ctr"/>
           <a:lstStyle/>
           <a:p>
-            <a:pPr marL="0" indent="0" algn="ctr">
+            <a:pPr algn="ctr" indent="0" marL="0">
               <a:buNone/>
             </a:pPr>
             <a:r>
@@ -18580,7 +18839,7 @@
       </p:sp>
       <p:sp>
         <p:nvSpPr>
-          <p:cNvPr id="45" name="Text 43"/>
+          <p:cNvPr id="45" name="label_squad_er_cami"/>
           <p:cNvSpPr/>
           <p:nvPr/>
         </p:nvSpPr>
@@ -18601,7 +18860,7 @@
           </a:bodyPr>
           <a:lstStyle/>
           <a:p>
-            <a:pPr marL="0" indent="0" algn="ctr">
+            <a:pPr algn="ctr" indent="0" marL="0">
               <a:buNone/>
             </a:pPr>
             <a:r>
@@ -18618,7 +18877,7 @@
       </p:sp>
       <p:sp>
         <p:nvSpPr>
-          <p:cNvPr id="46" name="Shape 44"/>
+          <p:cNvPr id="46" name="bar_squad_er_disley"/>
           <p:cNvSpPr/>
           <p:nvPr/>
         </p:nvSpPr>
@@ -18662,7 +18921,7 @@
           <a:bodyPr wrap="square" lIns="0" tIns="0" rIns="0" bIns="0" rtlCol="0" anchor="ctr"/>
           <a:lstStyle/>
           <a:p>
-            <a:pPr marL="0" indent="0" algn="ctr">
+            <a:pPr algn="ctr" indent="0" marL="0">
               <a:buNone/>
             </a:pPr>
             <a:r>
@@ -18679,7 +18938,7 @@
       </p:sp>
       <p:sp>
         <p:nvSpPr>
-          <p:cNvPr id="48" name="Text 46"/>
+          <p:cNvPr id="48" name="label_squad_er_disley"/>
           <p:cNvSpPr/>
           <p:nvPr/>
         </p:nvSpPr>
@@ -18700,7 +18959,7 @@
           </a:bodyPr>
           <a:lstStyle/>
           <a:p>
-            <a:pPr marL="0" indent="0" algn="ctr">
+            <a:pPr algn="ctr" indent="0" marL="0">
               <a:buNone/>
             </a:pPr>
             <a:r>
@@ -18763,7 +19022,7 @@
           <a:bodyPr wrap="square" lIns="0" tIns="0" rIns="0" bIns="0" rtlCol="0" anchor="ctr"/>
           <a:lstStyle/>
           <a:p>
-            <a:pPr marL="0" indent="0">
+            <a:pPr indent="0" marL="0">
               <a:buNone/>
             </a:pPr>
             <a:r>
@@ -18801,17 +19060,18 @@
           </a:bodyPr>
           <a:lstStyle/>
           <a:p>
-            <a:pPr marL="0" indent="0">
+            <a:pPr indent="0" marL="0">
               <a:buNone/>
             </a:pPr>
             <a:r>
               <a:rPr lang="en-US" sz="1050" dirty="0">
                 <a:solidFill>
-                  <a:schemeClr val="bg1"/>
+                  <a:srgbClr val="121426"/>
                 </a:solidFill>
               </a:rPr>
               <a:t>Skar sostiene interacción alta; Disley abre volumen nuevo con tono humorístico y cercano. Para próximos meses, combinar perfiles de alto alcance con micro-nichos de expertise.</a:t>
             </a:r>
+            <a:endParaRPr lang="en-US" sz="1050" dirty="0"/>
           </a:p>
         </p:txBody>
       </p:sp>
@@ -18836,7 +19096,7 @@
           <a:bodyPr wrap="square" lIns="0" tIns="0" rIns="0" bIns="0" rtlCol="0" anchor="ctr"/>
           <a:lstStyle/>
           <a:p>
-            <a:pPr marL="0" indent="0">
+            <a:pPr indent="0" marL="0">
               <a:buNone/>
             </a:pPr>
             <a:r>
@@ -18874,17 +19134,18 @@
           </a:bodyPr>
           <a:lstStyle/>
           <a:p>
-            <a:pPr marL="0" indent="0">
+            <a:pPr indent="0" marL="0">
               <a:buNone/>
             </a:pPr>
             <a:r>
               <a:rPr lang="en-US" sz="1050" dirty="0">
                 <a:solidFill>
-                  <a:schemeClr val="bg1"/>
+                  <a:srgbClr val="121426"/>
                 </a:solidFill>
               </a:rPr>
               <a:t>70% creators de performance, 20% nichos estratégicos, 10% apuestas en tendencia.</a:t>
             </a:r>
+            <a:endParaRPr lang="en-US" sz="1050" dirty="0"/>
           </a:p>
         </p:txBody>
       </p:sp>
@@ -19189,299 +19450,4 @@
     </a:ext>
   </a:extLst>
 </a:theme>
-</file>
-
-<file path=ppt/theme/theme2.xml><?xml version="1.0" encoding="utf-8"?>
-<a:theme xmlns:a="http://schemas.openxmlformats.org/drawingml/2006/main" name="Tema de Office">
-  <a:themeElements>
-    <a:clrScheme name="Office">
-      <a:dk1>
-        <a:sysClr val="windowText" lastClr="000000"/>
-      </a:dk1>
-      <a:lt1>
-        <a:sysClr val="window" lastClr="FFFFFF"/>
-      </a:lt1>
-      <a:dk2>
-        <a:srgbClr val="44546A"/>
-      </a:dk2>
-      <a:lt2>
-        <a:srgbClr val="E7E6E6"/>
-      </a:lt2>
-      <a:accent1>
-        <a:srgbClr val="4472C4"/>
-      </a:accent1>
-      <a:accent2>
-        <a:srgbClr val="ED7D31"/>
-      </a:accent2>
-      <a:accent3>
-        <a:srgbClr val="A5A5A5"/>
-      </a:accent3>
-      <a:accent4>
-        <a:srgbClr val="FFC000"/>
-      </a:accent4>
-      <a:accent5>
-        <a:srgbClr val="5B9BD5"/>
-      </a:accent5>
-      <a:accent6>
-        <a:srgbClr val="70AD47"/>
-      </a:accent6>
-      <a:hlink>
-        <a:srgbClr val="0563C1"/>
-      </a:hlink>
-      <a:folHlink>
-        <a:srgbClr val="954F72"/>
-      </a:folHlink>
-    </a:clrScheme>
-    <a:fontScheme name="Office">
-      <a:majorFont>
-        <a:latin typeface="Calibri Light" panose="020F0302020204030204"/>
-        <a:ea typeface=""/>
-        <a:cs typeface=""/>
-        <a:font script="Jpan" typeface="游ゴシック Light"/>
-        <a:font script="Hang" typeface="맑은 고딕"/>
-        <a:font script="Hans" typeface="等线 Light"/>
-        <a:font script="Hant" typeface="新細明體"/>
-        <a:font script="Arab" typeface="Times New Roman"/>
-        <a:font script="Hebr" typeface="Times New Roman"/>
-        <a:font script="Thai" typeface="Angsana New"/>
-        <a:font script="Ethi" typeface="Nyala"/>
-        <a:font script="Beng" typeface="Vrinda"/>
-        <a:font script="Gujr" typeface="Shruti"/>
-        <a:font script="Khmr" typeface="MoolBoran"/>
-        <a:font script="Knda" typeface="Tunga"/>
-        <a:font script="Guru" typeface="Raavi"/>
-        <a:font script="Cans" typeface="Euphemia"/>
-        <a:font script="Cher" typeface="Plantagenet Cherokee"/>
-        <a:font script="Yiii" typeface="Microsoft Yi Baiti"/>
-        <a:font script="Tibt" typeface="Microsoft Himalaya"/>
-        <a:font script="Thaa" typeface="MV Boli"/>
-        <a:font script="Deva" typeface="Mangal"/>
-        <a:font script="Telu" typeface="Gautami"/>
-        <a:font script="Taml" typeface="Latha"/>
-        <a:font script="Syrc" typeface="Estrangelo Edessa"/>
-        <a:font script="Orya" typeface="Kalinga"/>
-        <a:font script="Mlym" typeface="Kartika"/>
-        <a:font script="Laoo" typeface="DokChampa"/>
-        <a:font script="Sinh" typeface="Iskoola Pota"/>
-        <a:font script="Mong" typeface="Mongolian Baiti"/>
-        <a:font script="Viet" typeface="Times New Roman"/>
-        <a:font script="Uigh" typeface="Microsoft Uighur"/>
-        <a:font script="Geor" typeface="Sylfaen"/>
-        <a:font script="Armn" typeface="Arial"/>
-        <a:font script="Bugi" typeface="Leelawadee UI"/>
-        <a:font script="Bopo" typeface="Microsoft JhengHei"/>
-        <a:font script="Java" typeface="Javanese Text"/>
-        <a:font script="Lisu" typeface="Segoe UI"/>
-        <a:font script="Mymr" typeface="Myanmar Text"/>
-        <a:font script="Nkoo" typeface="Ebrima"/>
-        <a:font script="Olck" typeface="Nirmala UI"/>
-        <a:font script="Osma" typeface="Ebrima"/>
-        <a:font script="Phag" typeface="Phagspa"/>
-        <a:font script="Syrn" typeface="Estrangelo Edessa"/>
-        <a:font script="Syrj" typeface="Estrangelo Edessa"/>
-        <a:font script="Syre" typeface="Estrangelo Edessa"/>
-        <a:font script="Sora" typeface="Nirmala UI"/>
-        <a:font script="Tale" typeface="Microsoft Tai Le"/>
-        <a:font script="Talu" typeface="Microsoft New Tai Lue"/>
-        <a:font script="Tfng" typeface="Ebrima"/>
-      </a:majorFont>
-      <a:minorFont>
-        <a:latin typeface="Calibri" panose="020F0502020204030204"/>
-        <a:ea typeface=""/>
-        <a:cs typeface=""/>
-        <a:font script="Jpan" typeface="游ゴシック"/>
-        <a:font script="Hang" typeface="맑은 고딕"/>
-        <a:font script="Hans" typeface="等线"/>
-        <a:font script="Hant" typeface="新細明體"/>
-        <a:font script="Arab" typeface="Arial"/>
-        <a:font script="Hebr" typeface="Arial"/>
-        <a:font script="Thai" typeface="Cordia New"/>
-        <a:font script="Ethi" typeface="Nyala"/>
-        <a:font script="Beng" typeface="Vrinda"/>
-        <a:font script="Gujr" typeface="Shruti"/>
-        <a:font script="Khmr" typeface="DaunPenh"/>
-        <a:font script="Knda" typeface="Tunga"/>
-        <a:font script="Guru" typeface="Raavi"/>
-        <a:font script="Cans" typeface="Euphemia"/>
-        <a:font script="Cher" typeface="Plantagenet Cherokee"/>
-        <a:font script="Yiii" typeface="Microsoft Yi Baiti"/>
-        <a:font script="Tibt" typeface="Microsoft Himalaya"/>
-        <a:font script="Thaa" typeface="MV Boli"/>
-        <a:font script="Deva" typeface="Mangal"/>
-        <a:font script="Telu" typeface="Gautami"/>
-        <a:font script="Taml" typeface="Latha"/>
-        <a:font script="Syrc" typeface="Estrangelo Edessa"/>
-        <a:font script="Orya" typeface="Kalinga"/>
-        <a:font script="Mlym" typeface="Kartika"/>
-        <a:font script="Laoo" typeface="DokChampa"/>
-        <a:font script="Sinh" typeface="Iskoola Pota"/>
-        <a:font script="Mong" typeface="Mongolian Baiti"/>
-        <a:font script="Viet" typeface="Arial"/>
-        <a:font script="Uigh" typeface="Microsoft Uighur"/>
-        <a:font script="Geor" typeface="Sylfaen"/>
-        <a:font script="Armn" typeface="Arial"/>
-        <a:font script="Bugi" typeface="Leelawadee UI"/>
-        <a:font script="Bopo" typeface="Microsoft JhengHei"/>
-        <a:font script="Java" typeface="Javanese Text"/>
-        <a:font script="Lisu" typeface="Segoe UI"/>
-        <a:font script="Mymr" typeface="Myanmar Text"/>
-        <a:font script="Nkoo" typeface="Ebrima"/>
-        <a:font script="Olck" typeface="Nirmala UI"/>
-        <a:font script="Osma" typeface="Ebrima"/>
-        <a:font script="Phag" typeface="Phagspa"/>
-        <a:font script="Syrn" typeface="Estrangelo Edessa"/>
-        <a:font script="Syrj" typeface="Estrangelo Edessa"/>
-        <a:font script="Syre" typeface="Estrangelo Edessa"/>
-        <a:font script="Sora" typeface="Nirmala UI"/>
-        <a:font script="Tale" typeface="Microsoft Tai Le"/>
-        <a:font script="Talu" typeface="Microsoft New Tai Lue"/>
-        <a:font script="Tfng" typeface="Ebrima"/>
-      </a:minorFont>
-    </a:fontScheme>
-    <a:fmtScheme name="Office">
-      <a:fillStyleLst>
-        <a:solidFill>
-          <a:schemeClr val="phClr"/>
-        </a:solidFill>
-        <a:gradFill rotWithShape="1">
-          <a:gsLst>
-            <a:gs pos="0">
-              <a:schemeClr val="phClr">
-                <a:lumMod val="110000"/>
-                <a:satMod val="105000"/>
-                <a:tint val="67000"/>
-              </a:schemeClr>
-            </a:gs>
-            <a:gs pos="50000">
-              <a:schemeClr val="phClr">
-                <a:lumMod val="105000"/>
-                <a:satMod val="103000"/>
-                <a:tint val="73000"/>
-              </a:schemeClr>
-            </a:gs>
-            <a:gs pos="100000">
-              <a:schemeClr val="phClr">
-                <a:lumMod val="105000"/>
-                <a:satMod val="109000"/>
-                <a:tint val="81000"/>
-              </a:schemeClr>
-            </a:gs>
-          </a:gsLst>
-          <a:lin ang="5400000" scaled="0"/>
-        </a:gradFill>
-        <a:gradFill rotWithShape="1">
-          <a:gsLst>
-            <a:gs pos="0">
-              <a:schemeClr val="phClr">
-                <a:satMod val="103000"/>
-                <a:lumMod val="102000"/>
-                <a:tint val="94000"/>
-              </a:schemeClr>
-            </a:gs>
-            <a:gs pos="50000">
-              <a:schemeClr val="phClr">
-                <a:satMod val="110000"/>
-                <a:lumMod val="100000"/>
-                <a:shade val="100000"/>
-              </a:schemeClr>
-            </a:gs>
-            <a:gs pos="100000">
-              <a:schemeClr val="phClr">
-                <a:lumMod val="99000"/>
-                <a:satMod val="120000"/>
-                <a:shade val="78000"/>
-              </a:schemeClr>
-            </a:gs>
-          </a:gsLst>
-          <a:lin ang="5400000" scaled="0"/>
-        </a:gradFill>
-      </a:fillStyleLst>
-      <a:lnStyleLst>
-        <a:ln w="6350" cap="flat" cmpd="sng" algn="ctr">
-          <a:solidFill>
-            <a:schemeClr val="phClr"/>
-          </a:solidFill>
-          <a:prstDash val="solid"/>
-          <a:miter lim="800000"/>
-        </a:ln>
-        <a:ln w="12700" cap="flat" cmpd="sng" algn="ctr">
-          <a:solidFill>
-            <a:schemeClr val="phClr"/>
-          </a:solidFill>
-          <a:prstDash val="solid"/>
-          <a:miter lim="800000"/>
-        </a:ln>
-        <a:ln w="19050" cap="flat" cmpd="sng" algn="ctr">
-          <a:solidFill>
-            <a:schemeClr val="phClr"/>
-          </a:solidFill>
-          <a:prstDash val="solid"/>
-          <a:miter lim="800000"/>
-        </a:ln>
-      </a:lnStyleLst>
-      <a:effectStyleLst>
-        <a:effectStyle>
-          <a:effectLst/>
-        </a:effectStyle>
-        <a:effectStyle>
-          <a:effectLst/>
-        </a:effectStyle>
-        <a:effectStyle>
-          <a:effectLst>
-            <a:outerShdw blurRad="57150" dist="19050" dir="5400000" algn="ctr" rotWithShape="0">
-              <a:srgbClr val="000000">
-                <a:alpha val="63000"/>
-              </a:srgbClr>
-            </a:outerShdw>
-          </a:effectLst>
-        </a:effectStyle>
-      </a:effectStyleLst>
-      <a:bgFillStyleLst>
-        <a:solidFill>
-          <a:schemeClr val="phClr"/>
-        </a:solidFill>
-        <a:solidFill>
-          <a:schemeClr val="phClr">
-            <a:tint val="95000"/>
-            <a:satMod val="170000"/>
-          </a:schemeClr>
-        </a:solidFill>
-        <a:gradFill rotWithShape="1">
-          <a:gsLst>
-            <a:gs pos="0">
-              <a:schemeClr val="phClr">
-                <a:tint val="93000"/>
-                <a:satMod val="150000"/>
-                <a:shade val="98000"/>
-                <a:lumMod val="102000"/>
-              </a:schemeClr>
-            </a:gs>
-            <a:gs pos="50000">
-              <a:schemeClr val="phClr">
-                <a:tint val="98000"/>
-                <a:satMod val="130000"/>
-                <a:shade val="90000"/>
-                <a:lumMod val="103000"/>
-              </a:schemeClr>
-            </a:gs>
-            <a:gs pos="100000">
-              <a:schemeClr val="phClr">
-                <a:shade val="63000"/>
-                <a:satMod val="120000"/>
-              </a:schemeClr>
-            </a:gs>
-          </a:gsLst>
-          <a:lin ang="5400000" scaled="0"/>
-        </a:gradFill>
-      </a:bgFillStyleLst>
-    </a:fmtScheme>
-  </a:themeElements>
-  <a:objectDefaults/>
-  <a:extraClrSchemeLst/>
-  <a:extLst>
-    <a:ext uri="{05A4C25C-085E-4340-85A3-A5531E510DB2}">
-      <thm15:themeFamily xmlns:thm15="http://schemas.microsoft.com/office/thememl/2012/main" name="Office Theme" id="{62F939B6-93AF-4DB8-9C6B-D6C7DFDC589F}" vid="{4A3C46E8-61CC-4603-A589-7422A47A8E4A}"/>
-    </a:ext>
-  </a:extLst>
-</a:theme>
 </file>
--- a/template/Maicao_Template_Visual_v02.pptx
+++ b/template/Maicao_Template_Visual_v02.pptx
@@ -9503,7 +9503,7 @@
       </p:sp>
       <p:sp>
         <p:nvSpPr>
-          <p:cNvPr id="8" name="bar_channel_views_ig"/>
+          <p:cNvPr id="8" name="Shape 6"/>
           <p:cNvSpPr/>
           <p:nvPr/>
         </p:nvSpPr>
@@ -9564,7 +9564,7 @@
       </p:sp>
       <p:sp>
         <p:nvSpPr>
-          <p:cNvPr id="10" name="label_channel_views_ig"/>
+          <p:cNvPr id="10" name="Text 8"/>
           <p:cNvSpPr/>
           <p:nvPr/>
         </p:nvSpPr>
@@ -9602,7 +9602,7 @@
       </p:sp>
       <p:sp>
         <p:nvSpPr>
-          <p:cNvPr id="11" name="bar_channel_views_fb"/>
+          <p:cNvPr id="11" name="Shape 9"/>
           <p:cNvSpPr/>
           <p:nvPr/>
         </p:nvSpPr>
@@ -9663,7 +9663,7 @@
       </p:sp>
       <p:sp>
         <p:nvSpPr>
-          <p:cNvPr id="13" name="label_channel_views_fb"/>
+          <p:cNvPr id="13" name="Text 11"/>
           <p:cNvSpPr/>
           <p:nvPr/>
         </p:nvSpPr>
@@ -9701,7 +9701,7 @@
       </p:sp>
       <p:sp>
         <p:nvSpPr>
-          <p:cNvPr id="14" name="bar_channel_views_tt"/>
+          <p:cNvPr id="14" name="Shape 12"/>
           <p:cNvSpPr/>
           <p:nvPr/>
         </p:nvSpPr>
@@ -9762,7 +9762,7 @@
       </p:sp>
       <p:sp>
         <p:nvSpPr>
-          <p:cNvPr id="16" name="label_channel_views_tt"/>
+          <p:cNvPr id="16" name="Text 14"/>
           <p:cNvSpPr/>
           <p:nvPr/>
         </p:nvSpPr>
@@ -9836,7 +9836,7 @@
       </p:sp>
       <p:sp>
         <p:nvSpPr>
-          <p:cNvPr id="18" name="bar_channel_reach_ig"/>
+          <p:cNvPr id="18" name="Shape 16"/>
           <p:cNvSpPr/>
           <p:nvPr/>
         </p:nvSpPr>
@@ -9897,7 +9897,7 @@
       </p:sp>
       <p:sp>
         <p:nvSpPr>
-          <p:cNvPr id="20" name="label_channel_reach_ig"/>
+          <p:cNvPr id="20" name="Text 18"/>
           <p:cNvSpPr/>
           <p:nvPr/>
         </p:nvSpPr>
@@ -9935,7 +9935,7 @@
       </p:sp>
       <p:sp>
         <p:nvSpPr>
-          <p:cNvPr id="21" name="bar_channel_reach_fb"/>
+          <p:cNvPr id="21" name="Shape 19"/>
           <p:cNvSpPr/>
           <p:nvPr/>
         </p:nvSpPr>
@@ -9996,7 +9996,7 @@
       </p:sp>
       <p:sp>
         <p:nvSpPr>
-          <p:cNvPr id="23" name="label_channel_reach_fb"/>
+          <p:cNvPr id="23" name="Text 21"/>
           <p:cNvSpPr/>
           <p:nvPr/>
         </p:nvSpPr>
@@ -10034,7 +10034,7 @@
       </p:sp>
       <p:sp>
         <p:nvSpPr>
-          <p:cNvPr id="24" name="bar_channel_reach_tt"/>
+          <p:cNvPr id="24" name="Shape 22"/>
           <p:cNvSpPr/>
           <p:nvPr/>
         </p:nvSpPr>
@@ -10095,7 +10095,7 @@
       </p:sp>
       <p:sp>
         <p:nvSpPr>
-          <p:cNvPr id="26" name="label_channel_reach_tt"/>
+          <p:cNvPr id="26" name="Text 24"/>
           <p:cNvSpPr/>
           <p:nvPr/>
         </p:nvSpPr>
@@ -10169,7 +10169,7 @@
       </p:sp>
       <p:sp>
         <p:nvSpPr>
-          <p:cNvPr id="28" name="bar_channel_er_ig"/>
+          <p:cNvPr id="28" name="Shape 26"/>
           <p:cNvSpPr/>
           <p:nvPr/>
         </p:nvSpPr>
@@ -10230,7 +10230,7 @@
       </p:sp>
       <p:sp>
         <p:nvSpPr>
-          <p:cNvPr id="30" name="label_channel_er_ig"/>
+          <p:cNvPr id="30" name="Text 28"/>
           <p:cNvSpPr/>
           <p:nvPr/>
         </p:nvSpPr>
@@ -10268,7 +10268,7 @@
       </p:sp>
       <p:sp>
         <p:nvSpPr>
-          <p:cNvPr id="31" name="bar_channel_er_fb"/>
+          <p:cNvPr id="31" name="Shape 29"/>
           <p:cNvSpPr/>
           <p:nvPr/>
         </p:nvSpPr>
@@ -10329,7 +10329,7 @@
       </p:sp>
       <p:sp>
         <p:nvSpPr>
-          <p:cNvPr id="33" name="label_channel_er_fb"/>
+          <p:cNvPr id="33" name="Text 31"/>
           <p:cNvSpPr/>
           <p:nvPr/>
         </p:nvSpPr>
@@ -10367,7 +10367,7 @@
       </p:sp>
       <p:sp>
         <p:nvSpPr>
-          <p:cNvPr id="34" name="bar_channel_er_tt"/>
+          <p:cNvPr id="34" name="Shape 32"/>
           <p:cNvSpPr/>
           <p:nvPr/>
         </p:nvSpPr>
@@ -10428,7 +10428,7 @@
       </p:sp>
       <p:sp>
         <p:nvSpPr>
-          <p:cNvPr id="36" name="label_channel_er_tt"/>
+          <p:cNvPr id="36" name="Text 34"/>
           <p:cNvSpPr/>
           <p:nvPr/>
         </p:nvSpPr>
@@ -11719,7 +11719,7 @@
       </p:sp>
       <p:sp>
         <p:nvSpPr>
-          <p:cNvPr id="24" name="bar_ig_mix_stories"/>
+          <p:cNvPr id="24" name="Shape 22"/>
           <p:cNvSpPr/>
           <p:nvPr/>
         </p:nvSpPr>
@@ -11780,7 +11780,7 @@
       </p:sp>
       <p:sp>
         <p:nvSpPr>
-          <p:cNvPr id="26" name="label_ig_mix_stories"/>
+          <p:cNvPr id="26" name="Text 24"/>
           <p:cNvSpPr/>
           <p:nvPr/>
         </p:nvSpPr>
@@ -11818,7 +11818,7 @@
       </p:sp>
       <p:sp>
         <p:nvSpPr>
-          <p:cNvPr id="27" name="bar_ig_mix_reels"/>
+          <p:cNvPr id="27" name="Shape 25"/>
           <p:cNvSpPr/>
           <p:nvPr/>
         </p:nvSpPr>
@@ -11879,7 +11879,7 @@
       </p:sp>
       <p:sp>
         <p:nvSpPr>
-          <p:cNvPr id="29" name="label_ig_mix_reels"/>
+          <p:cNvPr id="29" name="Text 27"/>
           <p:cNvSpPr/>
           <p:nvPr/>
         </p:nvSpPr>
@@ -11917,7 +11917,7 @@
       </p:sp>
       <p:sp>
         <p:nvSpPr>
-          <p:cNvPr id="30" name="bar_ig_mix_carousels"/>
+          <p:cNvPr id="30" name="Shape 28"/>
           <p:cNvSpPr/>
           <p:nvPr/>
         </p:nvSpPr>
@@ -11978,7 +11978,7 @@
       </p:sp>
       <p:sp>
         <p:nvSpPr>
-          <p:cNvPr id="32" name="label_ig_mix_carousels"/>
+          <p:cNvPr id="32" name="Text 30"/>
           <p:cNvSpPr/>
           <p:nvPr/>
         </p:nvSpPr>
@@ -12052,7 +12052,7 @@
       </p:sp>
       <p:sp>
         <p:nvSpPr>
-          <p:cNvPr id="34" name="bar_ig_top_1"/>
+          <p:cNvPr id="34" name="Shape 32"/>
           <p:cNvSpPr/>
           <p:nvPr/>
         </p:nvSpPr>
@@ -12113,7 +12113,7 @@
       </p:sp>
       <p:sp>
         <p:nvSpPr>
-          <p:cNvPr id="36" name="label_ig_top_1"/>
+          <p:cNvPr id="36" name="Text 34"/>
           <p:cNvSpPr/>
           <p:nvPr/>
         </p:nvSpPr>
@@ -12151,7 +12151,7 @@
       </p:sp>
       <p:sp>
         <p:nvSpPr>
-          <p:cNvPr id="37" name="bar_ig_top_2"/>
+          <p:cNvPr id="37" name="Shape 35"/>
           <p:cNvSpPr/>
           <p:nvPr/>
         </p:nvSpPr>
@@ -12212,7 +12212,7 @@
       </p:sp>
       <p:sp>
         <p:nvSpPr>
-          <p:cNvPr id="39" name="label_ig_top_2"/>
+          <p:cNvPr id="39" name="Text 37"/>
           <p:cNvSpPr/>
           <p:nvPr/>
         </p:nvSpPr>
@@ -12250,7 +12250,7 @@
       </p:sp>
       <p:sp>
         <p:nvSpPr>
-          <p:cNvPr id="40" name="bar_ig_top_3"/>
+          <p:cNvPr id="40" name="Shape 38"/>
           <p:cNvSpPr/>
           <p:nvPr/>
         </p:nvSpPr>
@@ -12311,7 +12311,7 @@
       </p:sp>
       <p:sp>
         <p:nvSpPr>
-          <p:cNvPr id="42" name="label_ig_top_3"/>
+          <p:cNvPr id="42" name="Text 40"/>
           <p:cNvSpPr/>
           <p:nvPr/>
         </p:nvSpPr>
@@ -13350,7 +13350,7 @@
       </p:sp>
       <p:sp>
         <p:nvSpPr>
-          <p:cNvPr id="24" name="bar_fb_top_1"/>
+          <p:cNvPr id="24" name="Shape 22"/>
           <p:cNvSpPr/>
           <p:nvPr/>
         </p:nvSpPr>
@@ -13411,7 +13411,7 @@
       </p:sp>
       <p:sp>
         <p:nvSpPr>
-          <p:cNvPr id="26" name="label_fb_top_1"/>
+          <p:cNvPr id="26" name="Text 24"/>
           <p:cNvSpPr/>
           <p:nvPr/>
         </p:nvSpPr>
@@ -13449,7 +13449,7 @@
       </p:sp>
       <p:sp>
         <p:nvSpPr>
-          <p:cNvPr id="27" name="bar_fb_top_2"/>
+          <p:cNvPr id="27" name="Shape 25"/>
           <p:cNvSpPr/>
           <p:nvPr/>
         </p:nvSpPr>
@@ -13510,7 +13510,7 @@
       </p:sp>
       <p:sp>
         <p:nvSpPr>
-          <p:cNvPr id="29" name="label_fb_top_2"/>
+          <p:cNvPr id="29" name="Text 27"/>
           <p:cNvSpPr/>
           <p:nvPr/>
         </p:nvSpPr>
@@ -13548,7 +13548,7 @@
       </p:sp>
       <p:sp>
         <p:nvSpPr>
-          <p:cNvPr id="30" name="bar_fb_top_3"/>
+          <p:cNvPr id="30" name="Shape 28"/>
           <p:cNvSpPr/>
           <p:nvPr/>
         </p:nvSpPr>
@@ -13609,7 +13609,7 @@
       </p:sp>
       <p:sp>
         <p:nvSpPr>
-          <p:cNvPr id="32" name="label_fb_top_3"/>
+          <p:cNvPr id="32" name="Text 30"/>
           <p:cNvSpPr/>
           <p:nvPr/>
         </p:nvSpPr>
@@ -13683,7 +13683,7 @@
       </p:sp>
       <p:sp>
         <p:nvSpPr>
-          <p:cNvPr id="34" name="bar_fb_format_stories"/>
+          <p:cNvPr id="34" name="Shape 32"/>
           <p:cNvSpPr/>
           <p:nvPr/>
         </p:nvSpPr>
@@ -13744,7 +13744,7 @@
       </p:sp>
       <p:sp>
         <p:nvSpPr>
-          <p:cNvPr id="36" name="label_fb_format_stories"/>
+          <p:cNvPr id="36" name="Text 34"/>
           <p:cNvSpPr/>
           <p:nvPr/>
         </p:nvSpPr>
@@ -13782,7 +13782,7 @@
       </p:sp>
       <p:sp>
         <p:nvSpPr>
-          <p:cNvPr id="37" name="bar_fb_format_reels"/>
+          <p:cNvPr id="37" name="Shape 35"/>
           <p:cNvSpPr/>
           <p:nvPr/>
         </p:nvSpPr>
@@ -13843,7 +13843,7 @@
       </p:sp>
       <p:sp>
         <p:nvSpPr>
-          <p:cNvPr id="39" name="label_fb_format_reels"/>
+          <p:cNvPr id="39" name="Text 37"/>
           <p:cNvSpPr/>
           <p:nvPr/>
         </p:nvSpPr>
@@ -13881,7 +13881,7 @@
       </p:sp>
       <p:sp>
         <p:nvSpPr>
-          <p:cNvPr id="40" name="bar_fb_format_carousels"/>
+          <p:cNvPr id="40" name="Shape 38"/>
           <p:cNvSpPr/>
           <p:nvPr/>
         </p:nvSpPr>
@@ -13942,7 +13942,7 @@
       </p:sp>
       <p:sp>
         <p:nvSpPr>
-          <p:cNvPr id="42" name="label_fb_format_carousels"/>
+          <p:cNvPr id="42" name="Text 40"/>
           <p:cNvSpPr/>
           <p:nvPr/>
         </p:nvSpPr>
@@ -13980,7 +13980,7 @@
       </p:sp>
       <p:sp>
         <p:nvSpPr>
-          <p:cNvPr id="43" name="bar_fb_format_post"/>
+          <p:cNvPr id="43" name="Shape 41"/>
           <p:cNvSpPr/>
           <p:nvPr/>
         </p:nvSpPr>
@@ -14041,7 +14041,7 @@
       </p:sp>
       <p:sp>
         <p:nvSpPr>
-          <p:cNvPr id="45" name="label_fb_format_post"/>
+          <p:cNvPr id="45" name="Text 43"/>
           <p:cNvSpPr/>
           <p:nvPr/>
         </p:nvSpPr>
@@ -15052,7 +15052,7 @@
       </p:sp>
       <p:sp>
         <p:nvSpPr>
-          <p:cNvPr id="24" name="bar_tt_age_18_24"/>
+          <p:cNvPr id="24" name="Shape 22"/>
           <p:cNvSpPr/>
           <p:nvPr/>
         </p:nvSpPr>
@@ -15113,7 +15113,7 @@
       </p:sp>
       <p:sp>
         <p:nvSpPr>
-          <p:cNvPr id="26" name="label_tt_age_18_24"/>
+          <p:cNvPr id="26" name="Text 24"/>
           <p:cNvSpPr/>
           <p:nvPr/>
         </p:nvSpPr>
@@ -15151,7 +15151,7 @@
       </p:sp>
       <p:sp>
         <p:nvSpPr>
-          <p:cNvPr id="27" name="bar_tt_age_25_34"/>
+          <p:cNvPr id="27" name="Shape 25"/>
           <p:cNvSpPr/>
           <p:nvPr/>
         </p:nvSpPr>
@@ -15212,7 +15212,7 @@
       </p:sp>
       <p:sp>
         <p:nvSpPr>
-          <p:cNvPr id="29" name="label_tt_age_25_34"/>
+          <p:cNvPr id="29" name="Text 27"/>
           <p:cNvSpPr/>
           <p:nvPr/>
         </p:nvSpPr>
@@ -15250,7 +15250,7 @@
       </p:sp>
       <p:sp>
         <p:nvSpPr>
-          <p:cNvPr id="30" name="bar_tt_age_35_44"/>
+          <p:cNvPr id="30" name="Shape 28"/>
           <p:cNvSpPr/>
           <p:nvPr/>
         </p:nvSpPr>
@@ -15311,7 +15311,7 @@
       </p:sp>
       <p:sp>
         <p:nvSpPr>
-          <p:cNvPr id="32" name="label_tt_age_35_44"/>
+          <p:cNvPr id="32" name="Text 30"/>
           <p:cNvSpPr/>
           <p:nvPr/>
         </p:nvSpPr>
@@ -15349,7 +15349,7 @@
       </p:sp>
       <p:sp>
         <p:nvSpPr>
-          <p:cNvPr id="33" name="bar_tt_age_45_54"/>
+          <p:cNvPr id="33" name="Shape 31"/>
           <p:cNvSpPr/>
           <p:nvPr/>
         </p:nvSpPr>
@@ -15410,7 +15410,7 @@
       </p:sp>
       <p:sp>
         <p:nvSpPr>
-          <p:cNvPr id="35" name="label_tt_age_45_54"/>
+          <p:cNvPr id="35" name="Text 33"/>
           <p:cNvSpPr/>
           <p:nvPr/>
         </p:nvSpPr>
@@ -15448,7 +15448,7 @@
       </p:sp>
       <p:sp>
         <p:nvSpPr>
-          <p:cNvPr id="36" name="bar_tt_age_55"/>
+          <p:cNvPr id="36" name="Shape 34"/>
           <p:cNvSpPr/>
           <p:nvPr/>
         </p:nvSpPr>
@@ -15509,7 +15509,7 @@
       </p:sp>
       <p:sp>
         <p:nvSpPr>
-          <p:cNvPr id="38" name="label_tt_age_55"/>
+          <p:cNvPr id="38" name="Text 36"/>
           <p:cNvSpPr/>
           <p:nvPr/>
         </p:nvSpPr>
@@ -15583,7 +15583,7 @@
       </p:sp>
       <p:sp>
         <p:nvSpPr>
-          <p:cNvPr id="40" name="bar_tt_top_1"/>
+          <p:cNvPr id="40" name="Shape 38"/>
           <p:cNvSpPr/>
           <p:nvPr/>
         </p:nvSpPr>
@@ -15644,7 +15644,7 @@
       </p:sp>
       <p:sp>
         <p:nvSpPr>
-          <p:cNvPr id="42" name="label_tt_top_1"/>
+          <p:cNvPr id="42" name="Text 40"/>
           <p:cNvSpPr/>
           <p:nvPr/>
         </p:nvSpPr>
@@ -15682,7 +15682,7 @@
       </p:sp>
       <p:sp>
         <p:nvSpPr>
-          <p:cNvPr id="43" name="bar_tt_top_2"/>
+          <p:cNvPr id="43" name="Shape 41"/>
           <p:cNvSpPr/>
           <p:nvPr/>
         </p:nvSpPr>
@@ -15743,7 +15743,7 @@
       </p:sp>
       <p:sp>
         <p:nvSpPr>
-          <p:cNvPr id="45" name="label_tt_top_2"/>
+          <p:cNvPr id="45" name="Text 43"/>
           <p:cNvSpPr/>
           <p:nvPr/>
         </p:nvSpPr>
@@ -15781,7 +15781,7 @@
       </p:sp>
       <p:sp>
         <p:nvSpPr>
-          <p:cNvPr id="46" name="bar_tt_top_3"/>
+          <p:cNvPr id="46" name="Shape 44"/>
           <p:cNvSpPr/>
           <p:nvPr/>
         </p:nvSpPr>
@@ -15842,7 +15842,7 @@
       </p:sp>
       <p:sp>
         <p:nvSpPr>
-          <p:cNvPr id="48" name="label_tt_top_3"/>
+          <p:cNvPr id="48" name="Text 46"/>
           <p:cNvSpPr/>
           <p:nvPr/>
         </p:nvSpPr>
@@ -18148,7 +18148,7 @@
       </p:sp>
       <p:sp>
         <p:nvSpPr>
-          <p:cNvPr id="24" name="bar_squad_views_skar"/>
+          <p:cNvPr id="24" name="Shape 22"/>
           <p:cNvSpPr/>
           <p:nvPr/>
         </p:nvSpPr>
@@ -18209,7 +18209,7 @@
       </p:sp>
       <p:sp>
         <p:nvSpPr>
-          <p:cNvPr id="26" name="label_squad_views_skar"/>
+          <p:cNvPr id="26" name="Text 24"/>
           <p:cNvSpPr/>
           <p:nvPr/>
         </p:nvSpPr>
@@ -18247,7 +18247,7 @@
       </p:sp>
       <p:sp>
         <p:nvSpPr>
-          <p:cNvPr id="27" name="bar_squad_views_busquilla"/>
+          <p:cNvPr id="27" name="Shape 25"/>
           <p:cNvSpPr/>
           <p:nvPr/>
         </p:nvSpPr>
@@ -18308,7 +18308,7 @@
       </p:sp>
       <p:sp>
         <p:nvSpPr>
-          <p:cNvPr id="29" name="label_squad_views_busquilla"/>
+          <p:cNvPr id="29" name="Text 27"/>
           <p:cNvSpPr/>
           <p:nvPr/>
         </p:nvSpPr>
@@ -18346,7 +18346,7 @@
       </p:sp>
       <p:sp>
         <p:nvSpPr>
-          <p:cNvPr id="30" name="bar_squad_views_cami"/>
+          <p:cNvPr id="30" name="Shape 28"/>
           <p:cNvSpPr/>
           <p:nvPr/>
         </p:nvSpPr>
@@ -18407,7 +18407,7 @@
       </p:sp>
       <p:sp>
         <p:nvSpPr>
-          <p:cNvPr id="32" name="label_squad_views_cami"/>
+          <p:cNvPr id="32" name="Text 30"/>
           <p:cNvSpPr/>
           <p:nvPr/>
         </p:nvSpPr>
@@ -18445,7 +18445,7 @@
       </p:sp>
       <p:sp>
         <p:nvSpPr>
-          <p:cNvPr id="33" name="bar_squad_views_disley"/>
+          <p:cNvPr id="33" name="Shape 31"/>
           <p:cNvSpPr/>
           <p:nvPr/>
         </p:nvSpPr>
@@ -18506,7 +18506,7 @@
       </p:sp>
       <p:sp>
         <p:nvSpPr>
-          <p:cNvPr id="35" name="label_squad_views_disley"/>
+          <p:cNvPr id="35" name="Text 33"/>
           <p:cNvSpPr/>
           <p:nvPr/>
         </p:nvSpPr>
@@ -18580,7 +18580,7 @@
       </p:sp>
       <p:sp>
         <p:nvSpPr>
-          <p:cNvPr id="37" name="bar_squad_er_skar"/>
+          <p:cNvPr id="37" name="Shape 35"/>
           <p:cNvSpPr/>
           <p:nvPr/>
         </p:nvSpPr>
@@ -18641,7 +18641,7 @@
       </p:sp>
       <p:sp>
         <p:nvSpPr>
-          <p:cNvPr id="39" name="label_squad_er_skar"/>
+          <p:cNvPr id="39" name="Text 37"/>
           <p:cNvSpPr/>
           <p:nvPr/>
         </p:nvSpPr>
@@ -18679,7 +18679,7 @@
       </p:sp>
       <p:sp>
         <p:nvSpPr>
-          <p:cNvPr id="40" name="bar_squad_er_busquilla"/>
+          <p:cNvPr id="40" name="Shape 38"/>
           <p:cNvSpPr/>
           <p:nvPr/>
         </p:nvSpPr>
@@ -18740,7 +18740,7 @@
       </p:sp>
       <p:sp>
         <p:nvSpPr>
-          <p:cNvPr id="42" name="label_squad_er_busquilla"/>
+          <p:cNvPr id="42" name="Text 40"/>
           <p:cNvSpPr/>
           <p:nvPr/>
         </p:nvSpPr>
@@ -18778,7 +18778,7 @@
       </p:sp>
       <p:sp>
         <p:nvSpPr>
-          <p:cNvPr id="43" name="bar_squad_er_cami"/>
+          <p:cNvPr id="43" name="Shape 41"/>
           <p:cNvSpPr/>
           <p:nvPr/>
         </p:nvSpPr>
@@ -18839,7 +18839,7 @@
       </p:sp>
       <p:sp>
         <p:nvSpPr>
-          <p:cNvPr id="45" name="label_squad_er_cami"/>
+          <p:cNvPr id="45" name="Text 43"/>
           <p:cNvSpPr/>
           <p:nvPr/>
         </p:nvSpPr>
@@ -18877,7 +18877,7 @@
       </p:sp>
       <p:sp>
         <p:nvSpPr>
-          <p:cNvPr id="46" name="bar_squad_er_disley"/>
+          <p:cNvPr id="46" name="Shape 44"/>
           <p:cNvSpPr/>
           <p:nvPr/>
         </p:nvSpPr>
@@ -18938,7 +18938,7 @@
       </p:sp>
       <p:sp>
         <p:nvSpPr>
-          <p:cNvPr id="48" name="label_squad_er_disley"/>
+          <p:cNvPr id="48" name="Text 46"/>
           <p:cNvSpPr/>
           <p:nvPr/>
         </p:nvSpPr>

--- a/template/Maicao_Template_Visual_v02.pptx
+++ b/template/Maicao_Template_Visual_v02.pptx
@@ -4,6 +4,9 @@
   <p:sldMasterIdLst>
     <p:sldMasterId id="2147483648" r:id="rId1"/>
   </p:sldMasterIdLst>
+  <p:notesMasterIdLst>
+    <p:notesMasterId r:id="rId14"/>
+  </p:notesMasterIdLst>
   <p:sldIdLst>
     <p:sldId id="256" r:id="rId2"/>
     <p:sldId id="257" r:id="rId3"/>
@@ -18,11 +21,8 @@
     <p:sldId id="266" r:id="rId12"/>
     <p:sldId id="267" r:id="rId13"/>
   </p:sldIdLst>
-  <p:notesMasterIdLst>
-    <p:notesMasterId r:id="rId14"/>
-  </p:notesMasterIdLst>
-  <p:sldSz cx="12191695" cy="6858000"/>
-  <p:notesSz cx="6858000" cy="12191695"/>
+  <p:sldSz cx="12192000" cy="6858000"/>
+  <p:notesSz cx="6858000" cy="12192000"/>
   <p:defaultTextStyle>
     <a:lvl1pPr marL="0" algn="l" defTabSz="914400" rtl="0" eaLnBrk="1" latinLnBrk="0" hangingPunct="1">
       <a:defRPr sz="1800" kern="1200">
@@ -115,6 +115,11 @@
       </a:defRPr>
     </a:lvl9pPr>
   </p:defaultTextStyle>
+  <p:extLst>
+    <p:ext uri="{EFAFB233-063F-42B5-8137-9DF3F51BA10A}">
+      <p15:sldGuideLst xmlns:p15="http://schemas.microsoft.com/office/powerpoint/2012/main"/>
+    </p:ext>
+  </p:extLst>
 </p:presentation>
 </file>
 
@@ -140,234 +145,10 @@
           <a:chExt cx="0" cy="0"/>
         </a:xfrm>
       </p:grpSpPr>
-      <p:sp>
-        <p:nvSpPr>
-          <p:cNvPr id="2" name="Header Placeholder 1"/>
-          <p:cNvSpPr>
-            <a:spLocks noGrp="1"/>
-          </p:cNvSpPr>
-          <p:nvPr>
-            <p:ph type="hdr" sz="quarter"/>
-          </p:nvPr>
-        </p:nvSpPr>
-        <p:spPr>
-          <a:xfrm>
-            <a:off x="0" y="0"/>
-            <a:ext cx="2971800" cy="458788"/>
-          </a:xfrm>
-          <a:prstGeom prst="rect">
-            <a:avLst/>
-          </a:prstGeom>
-        </p:spPr>
-        <p:txBody>
-          <a:bodyPr vert="horz" lIns="91440" tIns="45720" rIns="91440" bIns="45720" rtlCol="0"/>
-          <a:lstStyle>
-            <a:lvl1pPr algn="l">
-              <a:defRPr sz="1200"/>
-            </a:lvl1pPr>
-          </a:lstStyle>
-          <a:p>
-            <a:endParaRPr lang="en-US"/>
-          </a:p>
-        </p:txBody>
-      </p:sp>
-      <p:sp>
-        <p:nvSpPr>
-          <p:cNvPr id="3" name="Date Placeholder 2"/>
-          <p:cNvSpPr>
-            <a:spLocks noGrp="1"/>
-          </p:cNvSpPr>
-          <p:nvPr>
-            <p:ph type="dt" idx="1"/>
-          </p:nvPr>
-        </p:nvSpPr>
-        <p:spPr>
-          <a:xfrm>
-            <a:off x="3884613" y="0"/>
-            <a:ext cx="2971800" cy="458788"/>
-          </a:xfrm>
-          <a:prstGeom prst="rect">
-            <a:avLst/>
-          </a:prstGeom>
-        </p:spPr>
-        <p:txBody>
-          <a:bodyPr vert="horz" lIns="91440" tIns="45720" rIns="91440" bIns="45720" rtlCol="0"/>
-          <a:lstStyle>
-            <a:lvl1pPr algn="r">
-              <a:defRPr sz="1200"/>
-            </a:lvl1pPr>
-          </a:lstStyle>
-          <a:p>
-            <a:fld id="{5282F153-3F37-0F45-9E97-73ACFA13230C}" type="datetimeFigureOut">
-              <a:rPr lang="en-US"/>
-              <a:t>7/23/19</a:t>
-            </a:fld>
-            <a:endParaRPr lang="en-US"/>
-          </a:p>
-        </p:txBody>
-      </p:sp>
-      <p:sp>
-        <p:nvSpPr>
-          <p:cNvPr id="4" name="Slide Image Placeholder 3"/>
-          <p:cNvSpPr>
-            <a:spLocks noGrp="1" noRot="1" noChangeAspect="1"/>
-          </p:cNvSpPr>
-          <p:nvPr>
-            <p:ph type="sldImg" idx="2"/>
-          </p:nvPr>
-        </p:nvSpPr>
-        <p:spPr>
-          <a:xfrm>
-            <a:off x="685800" y="1143000"/>
-            <a:ext cx="5486400" cy="3086100"/>
-          </a:xfrm>
-          <a:prstGeom prst="rect">
-            <a:avLst/>
-          </a:prstGeom>
-          <a:noFill/>
-          <a:ln w="12700">
-            <a:solidFill>
-              <a:prstClr val="black"/>
-            </a:solidFill>
-          </a:ln>
-        </p:spPr>
-        <p:txBody>
-          <a:bodyPr vert="horz" lIns="91440" tIns="45720" rIns="91440" bIns="45720" rtlCol="0" anchor="ctr"/>
-          <a:lstStyle/>
-          <a:p>
-            <a:endParaRPr lang="en-US"/>
-          </a:p>
-        </p:txBody>
-      </p:sp>
-      <p:sp>
-        <p:nvSpPr>
-          <p:cNvPr id="5" name="Notes Placeholder 4"/>
-          <p:cNvSpPr>
-            <a:spLocks noGrp="1"/>
-          </p:cNvSpPr>
-          <p:nvPr>
-            <p:ph type="body" sz="quarter" idx="3"/>
-          </p:nvPr>
-        </p:nvSpPr>
-        <p:spPr>
-          <a:xfrm>
-            <a:off x="685800" y="4400550"/>
-            <a:ext cx="5486400" cy="3600450"/>
-          </a:xfrm>
-          <a:prstGeom prst="rect">
-            <a:avLst/>
-          </a:prstGeom>
-        </p:spPr>
-        <p:txBody>
-          <a:bodyPr vert="horz" lIns="91440" tIns="45720" rIns="91440" bIns="45720" rtlCol="0"/>
-          <a:lstStyle/>
-          <a:p>
-            <a:pPr lvl="0"/>
-            <a:r>
-              <a:rPr lang="en-US"/>
-              <a:t>Click to edit Master text styles</a:t>
-            </a:r>
-          </a:p>
-          <a:p>
-            <a:pPr lvl="1"/>
-            <a:r>
-              <a:rPr lang="en-US"/>
-              <a:t>Second level</a:t>
-            </a:r>
-          </a:p>
-          <a:p>
-            <a:pPr lvl="2"/>
-            <a:r>
-              <a:rPr lang="en-US"/>
-              <a:t>Third level</a:t>
-            </a:r>
-          </a:p>
-          <a:p>
-            <a:pPr lvl="3"/>
-            <a:r>
-              <a:rPr lang="en-US"/>
-              <a:t>Fourth level</a:t>
-            </a:r>
-          </a:p>
-          <a:p>
-            <a:pPr lvl="4"/>
-            <a:r>
-              <a:rPr lang="en-US"/>
-              <a:t>Fifth level</a:t>
-            </a:r>
-          </a:p>
-        </p:txBody>
-      </p:sp>
-      <p:sp>
-        <p:nvSpPr>
-          <p:cNvPr id="6" name="Footer Placeholder 5"/>
-          <p:cNvSpPr>
-            <a:spLocks noGrp="1"/>
-          </p:cNvSpPr>
-          <p:nvPr>
-            <p:ph type="ftr" sz="quarter" idx="4"/>
-          </p:nvPr>
-        </p:nvSpPr>
-        <p:spPr>
-          <a:xfrm>
-            <a:off x="0" y="8685213"/>
-            <a:ext cx="2971800" cy="458787"/>
-          </a:xfrm>
-          <a:prstGeom prst="rect">
-            <a:avLst/>
-          </a:prstGeom>
-        </p:spPr>
-        <p:txBody>
-          <a:bodyPr vert="horz" lIns="91440" tIns="45720" rIns="91440" bIns="45720" rtlCol="0" anchor="b"/>
-          <a:lstStyle>
-            <a:lvl1pPr algn="l">
-              <a:defRPr sz="1200"/>
-            </a:lvl1pPr>
-          </a:lstStyle>
-          <a:p>
-            <a:endParaRPr lang="en-US"/>
-          </a:p>
-        </p:txBody>
-      </p:sp>
-      <p:sp>
-        <p:nvSpPr>
-          <p:cNvPr id="7" name="Slide Number Placeholder 6"/>
-          <p:cNvSpPr>
-            <a:spLocks noGrp="1"/>
-          </p:cNvSpPr>
-          <p:nvPr>
-            <p:ph type="sldNum" sz="quarter" idx="5"/>
-          </p:nvPr>
-        </p:nvSpPr>
-        <p:spPr>
-          <a:xfrm>
-            <a:off x="3884613" y="8685213"/>
-            <a:ext cx="2971800" cy="458787"/>
-          </a:xfrm>
-          <a:prstGeom prst="rect">
-            <a:avLst/>
-          </a:prstGeom>
-        </p:spPr>
-        <p:txBody>
-          <a:bodyPr vert="horz" lIns="91440" tIns="45720" rIns="91440" bIns="45720" rtlCol="0" anchor="b"/>
-          <a:lstStyle>
-            <a:lvl1pPr algn="r">
-              <a:defRPr sz="1200"/>
-            </a:lvl1pPr>
-          </a:lstStyle>
-          <a:p>
-            <a:fld id="{CE5E9CC1-C706-0F49-92D6-E571CC5EEA8F}" type="slidenum">
-              <a:rPr lang="en-US"/>
-              <a:t>‹#›</a:t>
-            </a:fld>
-            <a:endParaRPr lang="en-US"/>
-          </a:p>
-        </p:txBody>
-      </p:sp>
     </p:spTree>
     <p:extLst>
       <p:ext uri="{BB962C8B-B14F-4D97-AF65-F5344CB8AC3E}">
-        <p14:creationId xmlns:p14="http://schemas.microsoft.com/office/powerpoint/2010/main" val="1024086991"/>
+        <p14:creationId xmlns:p14="http://schemas.microsoft.com/office/powerpoint/2010/main" val="3964711816"/>
       </p:ext>
     </p:extLst>
   </p:cSld>
@@ -511,10 +292,6 @@
           <a:bodyPr/>
           <a:lstStyle/>
           <a:p>
-            <a:r>
-              <a:rPr lang="en-US" dirty="0"/>
-              <a:t/>
-            </a:r>
             <a:endParaRPr lang="en-US" dirty="0"/>
           </a:p>
         </p:txBody>
@@ -599,10 +376,6 @@
           <a:bodyPr/>
           <a:lstStyle/>
           <a:p>
-            <a:r>
-              <a:rPr lang="en-US" dirty="0"/>
-              <a:t/>
-            </a:r>
             <a:endParaRPr lang="en-US" dirty="0"/>
           </a:p>
         </p:txBody>
@@ -687,10 +460,6 @@
           <a:bodyPr/>
           <a:lstStyle/>
           <a:p>
-            <a:r>
-              <a:rPr lang="en-US" dirty="0"/>
-              <a:t/>
-            </a:r>
             <a:endParaRPr lang="en-US" dirty="0"/>
           </a:p>
         </p:txBody>
@@ -775,10 +544,6 @@
           <a:bodyPr/>
           <a:lstStyle/>
           <a:p>
-            <a:r>
-              <a:rPr lang="en-US" dirty="0"/>
-              <a:t/>
-            </a:r>
             <a:endParaRPr lang="en-US" dirty="0"/>
           </a:p>
         </p:txBody>
@@ -863,10 +628,6 @@
           <a:bodyPr/>
           <a:lstStyle/>
           <a:p>
-            <a:r>
-              <a:rPr lang="en-US" dirty="0"/>
-              <a:t/>
-            </a:r>
             <a:endParaRPr lang="en-US" dirty="0"/>
           </a:p>
         </p:txBody>
@@ -951,10 +712,6 @@
           <a:bodyPr/>
           <a:lstStyle/>
           <a:p>
-            <a:r>
-              <a:rPr lang="en-US" dirty="0"/>
-              <a:t/>
-            </a:r>
             <a:endParaRPr lang="en-US" dirty="0"/>
           </a:p>
         </p:txBody>
@@ -1039,10 +796,6 @@
           <a:bodyPr/>
           <a:lstStyle/>
           <a:p>
-            <a:r>
-              <a:rPr lang="en-US" dirty="0"/>
-              <a:t/>
-            </a:r>
             <a:endParaRPr lang="en-US" dirty="0"/>
           </a:p>
         </p:txBody>
@@ -1127,10 +880,6 @@
           <a:bodyPr/>
           <a:lstStyle/>
           <a:p>
-            <a:r>
-              <a:rPr lang="en-US" dirty="0"/>
-              <a:t/>
-            </a:r>
             <a:endParaRPr lang="en-US" dirty="0"/>
           </a:p>
         </p:txBody>
@@ -1215,10 +964,6 @@
           <a:bodyPr/>
           <a:lstStyle/>
           <a:p>
-            <a:r>
-              <a:rPr lang="en-US" dirty="0"/>
-              <a:t/>
-            </a:r>
             <a:endParaRPr lang="en-US" dirty="0"/>
           </a:p>
         </p:txBody>
@@ -1303,10 +1048,6 @@
           <a:bodyPr/>
           <a:lstStyle/>
           <a:p>
-            <a:r>
-              <a:rPr lang="en-US" dirty="0"/>
-              <a:t/>
-            </a:r>
             <a:endParaRPr lang="en-US" dirty="0"/>
           </a:p>
         </p:txBody>
@@ -1391,10 +1132,6 @@
           <a:bodyPr/>
           <a:lstStyle/>
           <a:p>
-            <a:r>
-              <a:rPr lang="en-US" dirty="0"/>
-              <a:t/>
-            </a:r>
             <a:endParaRPr lang="en-US" dirty="0"/>
           </a:p>
         </p:txBody>
@@ -1479,10 +1216,6 @@
           <a:bodyPr/>
           <a:lstStyle/>
           <a:p>
-            <a:r>
-              <a:rPr lang="en-US" dirty="0"/>
-              <a:t/>
-            </a:r>
             <a:endParaRPr lang="en-US" dirty="0"/>
           </a:p>
         </p:txBody>
@@ -1556,6 +1289,11 @@
 <file path=ppt/slideMasters/slideMaster1.xml><?xml version="1.0" encoding="utf-8"?>
 <p:sldMaster xmlns:a="http://schemas.openxmlformats.org/drawingml/2006/main" xmlns:r="http://schemas.openxmlformats.org/officeDocument/2006/relationships" xmlns:p="http://schemas.openxmlformats.org/presentationml/2006/main">
   <p:cSld>
+    <p:bg>
+      <p:bgRef idx="1001">
+        <a:schemeClr val="bg1"/>
+      </p:bgRef>
+    </p:bg>
     <p:spTree>
       <p:nvGrpSpPr>
         <p:cNvPr id="1" name=""/>
@@ -1838,6 +1576,7 @@
         <a:solidFill>
           <a:srgbClr val="FFFFFF"/>
         </a:solidFill>
+        <a:effectLst/>
       </p:bgPr>
     </p:bg>
     <p:spTree>
@@ -1927,7 +1666,7 @@
           </a:bodyPr>
           <a:lstStyle/>
           <a:p>
-            <a:pPr indent="0" marL="0">
+            <a:pPr marL="0" indent="0">
               <a:buNone/>
             </a:pPr>
             <a:r>
@@ -1944,7 +1683,7 @@
             <a:endParaRPr lang="en-US" sz="4400" dirty="0"/>
           </a:p>
           <a:p>
-            <a:pPr indent="0" marL="0">
+            <a:pPr marL="0" indent="0">
               <a:buNone/>
             </a:pPr>
             <a:r>
@@ -1983,7 +1722,7 @@
           <a:bodyPr wrap="square" lIns="0" tIns="0" rIns="0" bIns="0" rtlCol="0" anchor="ctr"/>
           <a:lstStyle/>
           <a:p>
-            <a:pPr indent="0" marL="0">
+            <a:pPr marL="0" indent="0">
               <a:buNone/>
             </a:pPr>
             <a:r>
@@ -2021,7 +1760,7 @@
           <a:bodyPr wrap="square" lIns="0" tIns="0" rIns="0" bIns="0" rtlCol="0" anchor="ctr"/>
           <a:lstStyle/>
           <a:p>
-            <a:pPr algn="ctr" indent="0" marL="0">
+            <a:pPr marL="0" indent="0" algn="ctr">
               <a:buNone/>
             </a:pPr>
             <a:r>
@@ -2057,7 +1796,7 @@
           <a:bodyPr wrap="square" lIns="0" tIns="0" rIns="0" bIns="0" rtlCol="0" anchor="ctr"/>
           <a:lstStyle/>
           <a:p>
-            <a:pPr indent="0" marL="0">
+            <a:pPr marL="0" indent="0">
               <a:buNone/>
             </a:pPr>
             <a:r>
@@ -2145,7 +1884,7 @@
           </a:bodyPr>
           <a:lstStyle/>
           <a:p>
-            <a:pPr algn="ctr" indent="0" marL="0">
+            <a:pPr marL="0" indent="0" algn="ctr">
               <a:buNone/>
             </a:pPr>
             <a:r>
@@ -2183,7 +1922,7 @@
           </a:bodyPr>
           <a:lstStyle/>
           <a:p>
-            <a:pPr algn="ctr" indent="0" marL="0">
+            <a:pPr marL="0" indent="0" algn="ctr">
               <a:buNone/>
             </a:pPr>
             <a:r>
@@ -2246,7 +1985,7 @@
           </a:bodyPr>
           <a:lstStyle/>
           <a:p>
-            <a:pPr algn="ctr" indent="0" marL="0">
+            <a:pPr marL="0" indent="0" algn="ctr">
               <a:buNone/>
             </a:pPr>
             <a:r>
@@ -2284,7 +2023,7 @@
           </a:bodyPr>
           <a:lstStyle/>
           <a:p>
-            <a:pPr algn="ctr" indent="0" marL="0">
+            <a:pPr marL="0" indent="0" algn="ctr">
               <a:buNone/>
             </a:pPr>
             <a:r>
@@ -2347,7 +2086,7 @@
           </a:bodyPr>
           <a:lstStyle/>
           <a:p>
-            <a:pPr algn="ctr" indent="0" marL="0">
+            <a:pPr marL="0" indent="0" algn="ctr">
               <a:buNone/>
             </a:pPr>
             <a:r>
@@ -2385,7 +2124,7 @@
           </a:bodyPr>
           <a:lstStyle/>
           <a:p>
-            <a:pPr algn="ctr" indent="0" marL="0">
+            <a:pPr marL="0" indent="0" algn="ctr">
               <a:buNone/>
             </a:pPr>
             <a:r>
@@ -2421,7 +2160,7 @@
           <a:bodyPr wrap="square" lIns="0" tIns="0" rIns="0" bIns="0" rtlCol="0" anchor="ctr"/>
           <a:lstStyle/>
           <a:p>
-            <a:pPr algn="r" indent="0" marL="0">
+            <a:pPr marL="0" indent="0" algn="r">
               <a:buNone/>
             </a:pPr>
             <a:r>
@@ -2452,6 +2191,7 @@
         <a:solidFill>
           <a:srgbClr val="FFFFFF"/>
         </a:solidFill>
+        <a:effectLst/>
       </p:bgPr>
     </p:bg>
     <p:spTree>
@@ -2476,7 +2216,7 @@
         </p:nvSpPr>
         <p:spPr>
           <a:xfrm>
-            <a:off x="0" y="0"/>
+            <a:off x="0" y="308142"/>
             <a:ext cx="12191695" cy="6858000"/>
           </a:xfrm>
           <a:prstGeom prst="rect">
@@ -2539,7 +2279,7 @@
           <a:bodyPr wrap="square" lIns="0" tIns="0" rIns="0" bIns="0" rtlCol="0" anchor="ctr"/>
           <a:lstStyle/>
           <a:p>
-            <a:pPr indent="0" marL="0">
+            <a:pPr marL="0" indent="0">
               <a:buNone/>
             </a:pPr>
             <a:r>
@@ -2580,7 +2320,7 @@
           </a:bodyPr>
           <a:lstStyle/>
           <a:p>
-            <a:pPr indent="0" marL="0">
+            <a:pPr marL="0" indent="0">
               <a:buNone/>
             </a:pPr>
             <a:r>
@@ -2619,7 +2359,7 @@
           <a:bodyPr wrap="square" lIns="0" tIns="0" rIns="0" bIns="0" rtlCol="0" anchor="ctr"/>
           <a:lstStyle/>
           <a:p>
-            <a:pPr algn="r" indent="0" marL="0">
+            <a:pPr marL="0" indent="0" algn="r">
               <a:buNone/>
             </a:pPr>
             <a:r>
@@ -2684,7 +2424,7 @@
           </a:bodyPr>
           <a:lstStyle/>
           <a:p>
-            <a:pPr indent="0" marL="0">
+            <a:pPr marL="0" indent="0">
               <a:buNone/>
             </a:pPr>
             <a:r>
@@ -2722,7 +2462,7 @@
           </a:bodyPr>
           <a:lstStyle/>
           <a:p>
-            <a:pPr indent="0" marL="0">
+            <a:pPr marL="0" indent="0">
               <a:buNone/>
             </a:pPr>
             <a:r>
@@ -2745,7 +2485,7 @@
         </p:nvSpPr>
         <p:spPr>
           <a:xfrm>
-            <a:off x="896112" y="1801368"/>
+            <a:off x="896112" y="1938528"/>
             <a:ext cx="1865376" cy="182880"/>
           </a:xfrm>
           <a:prstGeom prst="rect">
@@ -2760,7 +2500,7 @@
           </a:bodyPr>
           <a:lstStyle/>
           <a:p>
-            <a:pPr indent="0" marL="0">
+            <a:pPr marL="0" indent="0">
               <a:buNone/>
             </a:pPr>
             <a:r>
@@ -2825,7 +2565,7 @@
           </a:bodyPr>
           <a:lstStyle/>
           <a:p>
-            <a:pPr indent="0" marL="0">
+            <a:pPr marL="0" indent="0">
               <a:buNone/>
             </a:pPr>
             <a:r>
@@ -2863,7 +2603,7 @@
           </a:bodyPr>
           <a:lstStyle/>
           <a:p>
-            <a:pPr indent="0" marL="0">
+            <a:pPr marL="0" indent="0">
               <a:buNone/>
             </a:pPr>
             <a:r>
@@ -2886,7 +2626,7 @@
         </p:nvSpPr>
         <p:spPr>
           <a:xfrm>
-            <a:off x="3319272" y="1801368"/>
+            <a:off x="3319272" y="1934342"/>
             <a:ext cx="1682496" cy="182880"/>
           </a:xfrm>
           <a:prstGeom prst="rect">
@@ -2901,7 +2641,7 @@
           </a:bodyPr>
           <a:lstStyle/>
           <a:p>
-            <a:pPr indent="0" marL="0">
+            <a:pPr marL="0" indent="0">
               <a:buNone/>
             </a:pPr>
             <a:r>
@@ -2966,7 +2706,7 @@
           </a:bodyPr>
           <a:lstStyle/>
           <a:p>
-            <a:pPr indent="0" marL="0">
+            <a:pPr marL="0" indent="0">
               <a:buNone/>
             </a:pPr>
             <a:r>
@@ -3004,7 +2744,7 @@
           </a:bodyPr>
           <a:lstStyle/>
           <a:p>
-            <a:pPr indent="0" marL="0">
+            <a:pPr marL="0" indent="0">
               <a:buNone/>
             </a:pPr>
             <a:r>
@@ -3027,7 +2767,7 @@
         </p:nvSpPr>
         <p:spPr>
           <a:xfrm>
-            <a:off x="5559552" y="1801368"/>
+            <a:off x="5559552" y="1934342"/>
             <a:ext cx="1499616" cy="182880"/>
           </a:xfrm>
           <a:prstGeom prst="rect">
@@ -3042,7 +2782,7 @@
           </a:bodyPr>
           <a:lstStyle/>
           <a:p>
-            <a:pPr indent="0" marL="0">
+            <a:pPr marL="0" indent="0">
               <a:buNone/>
             </a:pPr>
             <a:r>
@@ -3107,7 +2847,7 @@
           </a:bodyPr>
           <a:lstStyle/>
           <a:p>
-            <a:pPr indent="0" marL="0">
+            <a:pPr marL="0" indent="0">
               <a:buNone/>
             </a:pPr>
             <a:r>
@@ -3145,7 +2885,7 @@
           </a:bodyPr>
           <a:lstStyle/>
           <a:p>
-            <a:pPr indent="0" marL="0">
+            <a:pPr marL="0" indent="0">
               <a:buNone/>
             </a:pPr>
             <a:r>
@@ -3168,7 +2908,7 @@
         </p:nvSpPr>
         <p:spPr>
           <a:xfrm>
-            <a:off x="7616952" y="1801368"/>
+            <a:off x="7616952" y="1934342"/>
             <a:ext cx="1042416" cy="182880"/>
           </a:xfrm>
           <a:prstGeom prst="rect">
@@ -3179,11 +2919,11 @@
         </p:spPr>
         <p:txBody>
           <a:bodyPr wrap="square" lIns="0" tIns="0" rIns="0" bIns="0" rtlCol="0" anchor="ctr">
-            <a:normAutofit/>
-          </a:bodyPr>
-          <a:lstStyle/>
-          <a:p>
-            <a:pPr indent="0" marL="0">
+            <a:normAutofit fontScale="92500"/>
+          </a:bodyPr>
+          <a:lstStyle/>
+          <a:p>
+            <a:pPr marL="0" indent="0">
               <a:buNone/>
             </a:pPr>
             <a:r>
@@ -3206,7 +2946,7 @@
         </p:nvSpPr>
         <p:spPr>
           <a:xfrm>
-            <a:off x="777240" y="2651760"/>
+            <a:off x="777240" y="2484495"/>
             <a:ext cx="3154680" cy="182880"/>
           </a:xfrm>
           <a:prstGeom prst="rect">
@@ -3219,7 +2959,7 @@
           <a:bodyPr wrap="square" lIns="0" tIns="0" rIns="0" bIns="0" rtlCol="0" anchor="ctr"/>
           <a:lstStyle/>
           <a:p>
-            <a:pPr indent="0" marL="0">
+            <a:pPr marL="0" indent="0">
               <a:buNone/>
             </a:pPr>
             <a:r>
@@ -3280,7 +3020,7 @@
           <a:bodyPr wrap="square" lIns="0" tIns="0" rIns="0" bIns="0" rtlCol="0" anchor="ctr"/>
           <a:lstStyle/>
           <a:p>
-            <a:pPr algn="ctr" indent="0" marL="0">
+            <a:pPr marL="0" indent="0" algn="ctr">
               <a:buNone/>
             </a:pPr>
             <a:r>
@@ -3318,7 +3058,7 @@
           </a:bodyPr>
           <a:lstStyle/>
           <a:p>
-            <a:pPr algn="ctr" indent="0" marL="0">
+            <a:pPr marL="0" indent="0" algn="ctr">
               <a:buNone/>
             </a:pPr>
             <a:r>
@@ -3379,7 +3119,7 @@
           <a:bodyPr wrap="square" lIns="0" tIns="0" rIns="0" bIns="0" rtlCol="0" anchor="ctr"/>
           <a:lstStyle/>
           <a:p>
-            <a:pPr algn="ctr" indent="0" marL="0">
+            <a:pPr marL="0" indent="0" algn="ctr">
               <a:buNone/>
             </a:pPr>
             <a:r>
@@ -3417,7 +3157,7 @@
           </a:bodyPr>
           <a:lstStyle/>
           <a:p>
-            <a:pPr algn="ctr" indent="0" marL="0">
+            <a:pPr marL="0" indent="0" algn="ctr">
               <a:buNone/>
             </a:pPr>
             <a:r>
@@ -3478,7 +3218,7 @@
           <a:bodyPr wrap="square" lIns="0" tIns="0" rIns="0" bIns="0" rtlCol="0" anchor="ctr"/>
           <a:lstStyle/>
           <a:p>
-            <a:pPr algn="ctr" indent="0" marL="0">
+            <a:pPr marL="0" indent="0" algn="ctr">
               <a:buNone/>
             </a:pPr>
             <a:r>
@@ -3516,7 +3256,7 @@
           </a:bodyPr>
           <a:lstStyle/>
           <a:p>
-            <a:pPr algn="ctr" indent="0" marL="0">
+            <a:pPr marL="0" indent="0" algn="ctr">
               <a:buNone/>
             </a:pPr>
             <a:r>
@@ -3579,7 +3319,7 @@
           <a:bodyPr wrap="square" lIns="0" tIns="0" rIns="0" bIns="0" rtlCol="0" anchor="ctr"/>
           <a:lstStyle/>
           <a:p>
-            <a:pPr indent="0" marL="0">
+            <a:pPr marL="0" indent="0">
               <a:buNone/>
             </a:pPr>
             <a:r>
@@ -3617,7 +3357,7 @@
           </a:bodyPr>
           <a:lstStyle/>
           <a:p>
-            <a:pPr indent="0" marL="0">
+            <a:pPr marL="0" indent="0">
               <a:buNone/>
             </a:pPr>
             <a:r>
@@ -3682,7 +3422,7 @@
           </a:bodyPr>
           <a:lstStyle/>
           <a:p>
-            <a:pPr algn="ctr" indent="0" marL="0">
+            <a:pPr marL="0" indent="0" algn="ctr">
               <a:buNone/>
             </a:pPr>
             <a:r>
@@ -3747,7 +3487,7 @@
           </a:bodyPr>
           <a:lstStyle/>
           <a:p>
-            <a:pPr algn="ctr" indent="0" marL="0">
+            <a:pPr marL="0" indent="0" algn="ctr">
               <a:buNone/>
             </a:pPr>
             <a:r>
@@ -3812,7 +3552,7 @@
           </a:bodyPr>
           <a:lstStyle/>
           <a:p>
-            <a:pPr algn="ctr" indent="0" marL="0">
+            <a:pPr marL="0" indent="0" algn="ctr">
               <a:buNone/>
             </a:pPr>
             <a:r>
@@ -3850,7 +3590,7 @@
           </a:bodyPr>
           <a:lstStyle/>
           <a:p>
-            <a:pPr algn="ctr" indent="0" marL="0">
+            <a:pPr marL="0" indent="0" algn="ctr">
               <a:buNone/>
             </a:pPr>
             <a:r>
@@ -3881,6 +3621,7 @@
         <a:solidFill>
           <a:srgbClr val="FFFFFF"/>
         </a:solidFill>
+        <a:effectLst/>
       </p:bgPr>
     </p:bg>
     <p:spTree>
@@ -3968,7 +3709,7 @@
           <a:bodyPr wrap="square" lIns="0" tIns="0" rIns="0" bIns="0" rtlCol="0" anchor="ctr"/>
           <a:lstStyle/>
           <a:p>
-            <a:pPr indent="0" marL="0">
+            <a:pPr marL="0" indent="0">
               <a:buNone/>
             </a:pPr>
             <a:r>
@@ -4009,7 +3750,7 @@
           </a:bodyPr>
           <a:lstStyle/>
           <a:p>
-            <a:pPr indent="0" marL="0">
+            <a:pPr marL="0" indent="0">
               <a:buNone/>
             </a:pPr>
             <a:r>
@@ -4048,7 +3789,7 @@
           <a:bodyPr wrap="square" lIns="0" tIns="0" rIns="0" bIns="0" rtlCol="0" anchor="ctr"/>
           <a:lstStyle/>
           <a:p>
-            <a:pPr algn="r" indent="0" marL="0">
+            <a:pPr marL="0" indent="0" algn="r">
               <a:buNone/>
             </a:pPr>
             <a:r>
@@ -4111,7 +3852,7 @@
           <a:bodyPr wrap="square" lIns="0" tIns="0" rIns="0" bIns="0" rtlCol="0" anchor="ctr"/>
           <a:lstStyle/>
           <a:p>
-            <a:pPr indent="0" marL="0">
+            <a:pPr marL="0" indent="0">
               <a:buNone/>
             </a:pPr>
             <a:r>
@@ -4147,7 +3888,7 @@
           <a:bodyPr wrap="square" lIns="0" tIns="0" rIns="0" bIns="0" rtlCol="0" anchor="ctr"/>
           <a:lstStyle/>
           <a:p>
-            <a:pPr indent="0" marL="0">
+            <a:pPr marL="0" indent="0">
               <a:buNone/>
             </a:pPr>
             <a:r>
@@ -4185,7 +3926,7 @@
           </a:bodyPr>
           <a:lstStyle/>
           <a:p>
-            <a:pPr indent="0" marL="0">
+            <a:pPr marL="0" indent="0">
               <a:buNone/>
             </a:pPr>
             <a:r>
@@ -4248,7 +3989,7 @@
           <a:bodyPr wrap="square" lIns="0" tIns="0" rIns="0" bIns="0" rtlCol="0" anchor="ctr"/>
           <a:lstStyle/>
           <a:p>
-            <a:pPr indent="0" marL="0">
+            <a:pPr marL="0" indent="0">
               <a:buNone/>
             </a:pPr>
             <a:r>
@@ -4284,7 +4025,7 @@
           <a:bodyPr wrap="square" lIns="0" tIns="0" rIns="0" bIns="0" rtlCol="0" anchor="ctr"/>
           <a:lstStyle/>
           <a:p>
-            <a:pPr indent="0" marL="0">
+            <a:pPr marL="0" indent="0">
               <a:buNone/>
             </a:pPr>
             <a:r>
@@ -4322,7 +4063,7 @@
           </a:bodyPr>
           <a:lstStyle/>
           <a:p>
-            <a:pPr indent="0" marL="0">
+            <a:pPr marL="0" indent="0">
               <a:buNone/>
             </a:pPr>
             <a:r>
@@ -4385,7 +4126,7 @@
           <a:bodyPr wrap="square" lIns="0" tIns="0" rIns="0" bIns="0" rtlCol="0" anchor="ctr"/>
           <a:lstStyle/>
           <a:p>
-            <a:pPr indent="0" marL="0">
+            <a:pPr marL="0" indent="0">
               <a:buNone/>
             </a:pPr>
             <a:r>
@@ -4421,7 +4162,7 @@
           <a:bodyPr wrap="square" lIns="0" tIns="0" rIns="0" bIns="0" rtlCol="0" anchor="ctr"/>
           <a:lstStyle/>
           <a:p>
-            <a:pPr indent="0" marL="0">
+            <a:pPr marL="0" indent="0">
               <a:buNone/>
             </a:pPr>
             <a:r>
@@ -4459,7 +4200,7 @@
           </a:bodyPr>
           <a:lstStyle/>
           <a:p>
-            <a:pPr indent="0" marL="0">
+            <a:pPr marL="0" indent="0">
               <a:buNone/>
             </a:pPr>
             <a:r>
@@ -4495,7 +4236,7 @@
           <a:bodyPr wrap="square" lIns="0" tIns="0" rIns="0" bIns="0" rtlCol="0" anchor="ctr"/>
           <a:lstStyle/>
           <a:p>
-            <a:pPr indent="0" marL="0">
+            <a:pPr marL="0" indent="0">
               <a:buNone/>
             </a:pPr>
             <a:r>
@@ -4533,7 +4274,7 @@
           </a:bodyPr>
           <a:lstStyle/>
           <a:p>
-            <a:pPr indent="0" marL="0">
+            <a:pPr marL="0" indent="0">
               <a:buNone/>
             </a:pPr>
             <a:r>
@@ -4621,7 +4362,7 @@
           </a:bodyPr>
           <a:lstStyle/>
           <a:p>
-            <a:pPr indent="0" marL="0">
+            <a:pPr marL="0" indent="0">
               <a:buNone/>
             </a:pPr>
             <a:r>
@@ -4659,7 +4400,7 @@
           </a:bodyPr>
           <a:lstStyle/>
           <a:p>
-            <a:pPr indent="0" marL="0">
+            <a:pPr marL="0" indent="0">
               <a:buNone/>
             </a:pPr>
             <a:r>
@@ -4747,7 +4488,7 @@
           </a:bodyPr>
           <a:lstStyle/>
           <a:p>
-            <a:pPr indent="0" marL="0">
+            <a:pPr marL="0" indent="0">
               <a:buNone/>
             </a:pPr>
             <a:r>
@@ -4785,7 +4526,7 @@
           </a:bodyPr>
           <a:lstStyle/>
           <a:p>
-            <a:pPr indent="0" marL="0">
+            <a:pPr marL="0" indent="0">
               <a:buNone/>
             </a:pPr>
             <a:r>
@@ -4873,7 +4614,7 @@
           </a:bodyPr>
           <a:lstStyle/>
           <a:p>
-            <a:pPr indent="0" marL="0">
+            <a:pPr marL="0" indent="0">
               <a:buNone/>
             </a:pPr>
             <a:r>
@@ -4911,7 +4652,7 @@
           </a:bodyPr>
           <a:lstStyle/>
           <a:p>
-            <a:pPr indent="0" marL="0">
+            <a:pPr marL="0" indent="0">
               <a:buNone/>
             </a:pPr>
             <a:r>
@@ -4999,7 +4740,7 @@
           </a:bodyPr>
           <a:lstStyle/>
           <a:p>
-            <a:pPr indent="0" marL="0">
+            <a:pPr marL="0" indent="0">
               <a:buNone/>
             </a:pPr>
             <a:r>
@@ -5040,6 +4781,13 @@
             <a:prstDash val="solid"/>
           </a:ln>
         </p:spPr>
+        <p:txBody>
+          <a:bodyPr/>
+          <a:lstStyle/>
+          <a:p>
+            <a:endParaRPr lang="es-CL" dirty="0"/>
+          </a:p>
+        </p:txBody>
       </p:sp>
       <p:sp>
         <p:nvSpPr>
@@ -5062,7 +4810,7 @@
           <a:bodyPr wrap="square" lIns="0" tIns="0" rIns="0" bIns="0" rtlCol="0" anchor="ctr"/>
           <a:lstStyle/>
           <a:p>
-            <a:pPr indent="0" marL="0">
+            <a:pPr marL="0" indent="0">
               <a:buNone/>
             </a:pPr>
             <a:r>
@@ -5100,18 +4848,17 @@
           </a:bodyPr>
           <a:lstStyle/>
           <a:p>
-            <a:pPr indent="0" marL="0">
+            <a:pPr marL="0" indent="0">
               <a:buNone/>
             </a:pPr>
             <a:r>
               <a:rPr lang="en-US" sz="1050" dirty="0">
                 <a:solidFill>
-                  <a:srgbClr val="121426"/>
+                  <a:schemeClr val="bg1"/>
                 </a:solidFill>
               </a:rPr>
               <a:t>Competidores activan Pinterest-like, creators, eventos y contenido humano. Maicao puede diferenciarse con utilidad + cercanía + retail expertise.</a:t>
             </a:r>
-            <a:endParaRPr lang="en-US" sz="1050" dirty="0"/>
           </a:p>
         </p:txBody>
       </p:sp>
@@ -5131,6 +4878,7 @@
         <a:solidFill>
           <a:srgbClr val="FFFFFF"/>
         </a:solidFill>
+        <a:effectLst/>
       </p:bgPr>
     </p:bg>
     <p:spTree>
@@ -5218,7 +4966,7 @@
           <a:bodyPr wrap="square" lIns="0" tIns="0" rIns="0" bIns="0" rtlCol="0" anchor="ctr"/>
           <a:lstStyle/>
           <a:p>
-            <a:pPr indent="0" marL="0">
+            <a:pPr marL="0" indent="0">
               <a:buNone/>
             </a:pPr>
             <a:r>
@@ -5259,7 +5007,7 @@
           </a:bodyPr>
           <a:lstStyle/>
           <a:p>
-            <a:pPr indent="0" marL="0">
+            <a:pPr marL="0" indent="0">
               <a:buNone/>
             </a:pPr>
             <a:r>
@@ -5298,7 +5046,7 @@
           <a:bodyPr wrap="square" lIns="0" tIns="0" rIns="0" bIns="0" rtlCol="0" anchor="ctr"/>
           <a:lstStyle/>
           <a:p>
-            <a:pPr algn="r" indent="0" marL="0">
+            <a:pPr marL="0" indent="0" algn="r">
               <a:buNone/>
             </a:pPr>
             <a:r>
@@ -5386,7 +5134,7 @@
           <a:bodyPr wrap="square" lIns="0" tIns="0" rIns="0" bIns="0" rtlCol="0" anchor="ctr"/>
           <a:lstStyle/>
           <a:p>
-            <a:pPr algn="ctr" indent="0" marL="0">
+            <a:pPr marL="0" indent="0" algn="ctr">
               <a:buNone/>
             </a:pPr>
             <a:r>
@@ -5422,7 +5170,7 @@
           <a:bodyPr wrap="square" lIns="0" tIns="0" rIns="0" bIns="0" rtlCol="0" anchor="ctr"/>
           <a:lstStyle/>
           <a:p>
-            <a:pPr indent="0" marL="0">
+            <a:pPr marL="0" indent="0">
               <a:buNone/>
             </a:pPr>
             <a:r>
@@ -5460,7 +5208,7 @@
           </a:bodyPr>
           <a:lstStyle/>
           <a:p>
-            <a:pPr indent="0" marL="0">
+            <a:pPr marL="0" indent="0">
               <a:buNone/>
             </a:pPr>
             <a:r>
@@ -5496,7 +5244,7 @@
           <a:bodyPr wrap="square" lIns="0" tIns="0" rIns="0" bIns="0" rtlCol="0" anchor="ctr"/>
           <a:lstStyle/>
           <a:p>
-            <a:pPr indent="0" marL="0">
+            <a:pPr marL="0" indent="0">
               <a:buNone/>
             </a:pPr>
             <a:r>
@@ -5584,7 +5332,7 @@
           <a:bodyPr wrap="square" lIns="0" tIns="0" rIns="0" bIns="0" rtlCol="0" anchor="ctr"/>
           <a:lstStyle/>
           <a:p>
-            <a:pPr algn="ctr" indent="0" marL="0">
+            <a:pPr marL="0" indent="0" algn="ctr">
               <a:buNone/>
             </a:pPr>
             <a:r>
@@ -5620,7 +5368,7 @@
           <a:bodyPr wrap="square" lIns="0" tIns="0" rIns="0" bIns="0" rtlCol="0" anchor="ctr"/>
           <a:lstStyle/>
           <a:p>
-            <a:pPr indent="0" marL="0">
+            <a:pPr marL="0" indent="0">
               <a:buNone/>
             </a:pPr>
             <a:r>
@@ -5658,7 +5406,7 @@
           </a:bodyPr>
           <a:lstStyle/>
           <a:p>
-            <a:pPr indent="0" marL="0">
+            <a:pPr marL="0" indent="0">
               <a:buNone/>
             </a:pPr>
             <a:r>
@@ -5694,7 +5442,7 @@
           <a:bodyPr wrap="square" lIns="0" tIns="0" rIns="0" bIns="0" rtlCol="0" anchor="ctr"/>
           <a:lstStyle/>
           <a:p>
-            <a:pPr indent="0" marL="0">
+            <a:pPr marL="0" indent="0">
               <a:buNone/>
             </a:pPr>
             <a:r>
@@ -5782,7 +5530,7 @@
           <a:bodyPr wrap="square" lIns="0" tIns="0" rIns="0" bIns="0" rtlCol="0" anchor="ctr"/>
           <a:lstStyle/>
           <a:p>
-            <a:pPr algn="ctr" indent="0" marL="0">
+            <a:pPr marL="0" indent="0" algn="ctr">
               <a:buNone/>
             </a:pPr>
             <a:r>
@@ -5818,7 +5566,7 @@
           <a:bodyPr wrap="square" lIns="0" tIns="0" rIns="0" bIns="0" rtlCol="0" anchor="ctr"/>
           <a:lstStyle/>
           <a:p>
-            <a:pPr indent="0" marL="0">
+            <a:pPr marL="0" indent="0">
               <a:buNone/>
             </a:pPr>
             <a:r>
@@ -5856,7 +5604,7 @@
           </a:bodyPr>
           <a:lstStyle/>
           <a:p>
-            <a:pPr indent="0" marL="0">
+            <a:pPr marL="0" indent="0">
               <a:buNone/>
             </a:pPr>
             <a:r>
@@ -5892,7 +5640,7 @@
           <a:bodyPr wrap="square" lIns="0" tIns="0" rIns="0" bIns="0" rtlCol="0" anchor="ctr"/>
           <a:lstStyle/>
           <a:p>
-            <a:pPr indent="0" marL="0">
+            <a:pPr marL="0" indent="0">
               <a:buNone/>
             </a:pPr>
             <a:r>
@@ -5980,7 +5728,7 @@
           <a:bodyPr wrap="square" lIns="0" tIns="0" rIns="0" bIns="0" rtlCol="0" anchor="ctr"/>
           <a:lstStyle/>
           <a:p>
-            <a:pPr algn="ctr" indent="0" marL="0">
+            <a:pPr marL="0" indent="0" algn="ctr">
               <a:buNone/>
             </a:pPr>
             <a:r>
@@ -6016,7 +5764,7 @@
           <a:bodyPr wrap="square" lIns="0" tIns="0" rIns="0" bIns="0" rtlCol="0" anchor="ctr"/>
           <a:lstStyle/>
           <a:p>
-            <a:pPr indent="0" marL="0">
+            <a:pPr marL="0" indent="0">
               <a:buNone/>
             </a:pPr>
             <a:r>
@@ -6054,7 +5802,7 @@
           </a:bodyPr>
           <a:lstStyle/>
           <a:p>
-            <a:pPr indent="0" marL="0">
+            <a:pPr marL="0" indent="0">
               <a:buNone/>
             </a:pPr>
             <a:r>
@@ -6090,7 +5838,7 @@
           <a:bodyPr wrap="square" lIns="0" tIns="0" rIns="0" bIns="0" rtlCol="0" anchor="ctr"/>
           <a:lstStyle/>
           <a:p>
-            <a:pPr indent="0" marL="0">
+            <a:pPr marL="0" indent="0">
               <a:buNone/>
             </a:pPr>
             <a:r>
@@ -6155,7 +5903,7 @@
           </a:bodyPr>
           <a:lstStyle/>
           <a:p>
-            <a:pPr algn="ctr" indent="0" marL="0">
+            <a:pPr marL="0" indent="0" algn="ctr">
               <a:buNone/>
             </a:pPr>
             <a:r>
@@ -6186,6 +5934,7 @@
         <a:solidFill>
           <a:srgbClr val="FFFFFF"/>
         </a:solidFill>
+        <a:effectLst/>
       </p:bgPr>
     </p:bg>
     <p:spTree>
@@ -6210,7 +5959,7 @@
         </p:nvSpPr>
         <p:spPr>
           <a:xfrm>
-            <a:off x="0" y="0"/>
+            <a:off x="0" y="301752"/>
             <a:ext cx="12191695" cy="6858000"/>
           </a:xfrm>
           <a:prstGeom prst="rect">
@@ -6273,7 +6022,7 @@
           <a:bodyPr wrap="square" lIns="0" tIns="0" rIns="0" bIns="0" rtlCol="0" anchor="ctr"/>
           <a:lstStyle/>
           <a:p>
-            <a:pPr indent="0" marL="0">
+            <a:pPr marL="0" indent="0">
               <a:buNone/>
             </a:pPr>
             <a:r>
@@ -6314,7 +6063,7 @@
           </a:bodyPr>
           <a:lstStyle/>
           <a:p>
-            <a:pPr indent="0" marL="0">
+            <a:pPr marL="0" indent="0">
               <a:buNone/>
             </a:pPr>
             <a:r>
@@ -6326,7 +6075,7 @@
                 <a:ea typeface="Aptos Display" pitchFamily="34" charset="-122"/>
                 <a:cs typeface="Aptos Display" pitchFamily="34" charset="-120"/>
               </a:rPr>
-              <a:t>Dashboard ejecutivo: en 10 segundos</a:t>
+              <a:t>Dashboard ejecutivo: </a:t>
             </a:r>
             <a:endParaRPr lang="en-US" sz="2600" dirty="0"/>
           </a:p>
@@ -6353,7 +6102,7 @@
           <a:bodyPr wrap="square" lIns="0" tIns="0" rIns="0" bIns="0" rtlCol="0" anchor="ctr"/>
           <a:lstStyle/>
           <a:p>
-            <a:pPr algn="r" indent="0" marL="0">
+            <a:pPr marL="0" indent="0" algn="r">
               <a:buNone/>
             </a:pPr>
             <a:r>
@@ -6418,7 +6167,7 @@
           </a:bodyPr>
           <a:lstStyle/>
           <a:p>
-            <a:pPr indent="0" marL="0">
+            <a:pPr marL="0" indent="0">
               <a:buNone/>
             </a:pPr>
             <a:r>
@@ -6456,7 +6205,7 @@
           </a:bodyPr>
           <a:lstStyle/>
           <a:p>
-            <a:pPr indent="0" marL="0">
+            <a:pPr marL="0" indent="0">
               <a:buNone/>
             </a:pPr>
             <a:r>
@@ -6479,7 +6228,7 @@
         </p:nvSpPr>
         <p:spPr>
           <a:xfrm>
-            <a:off x="758952" y="1783080"/>
+            <a:off x="758952" y="1920240"/>
             <a:ext cx="1819656" cy="182880"/>
           </a:xfrm>
           <a:prstGeom prst="rect">
@@ -6494,7 +6243,7 @@
           </a:bodyPr>
           <a:lstStyle/>
           <a:p>
-            <a:pPr indent="0" marL="0">
+            <a:pPr marL="0" indent="0">
               <a:buNone/>
             </a:pPr>
             <a:r>
@@ -6559,7 +6308,7 @@
           </a:bodyPr>
           <a:lstStyle/>
           <a:p>
-            <a:pPr indent="0" marL="0">
+            <a:pPr marL="0" indent="0">
               <a:buNone/>
             </a:pPr>
             <a:r>
@@ -6597,7 +6346,7 @@
           </a:bodyPr>
           <a:lstStyle/>
           <a:p>
-            <a:pPr indent="0" marL="0">
+            <a:pPr marL="0" indent="0">
               <a:buNone/>
             </a:pPr>
             <a:r>
@@ -6620,7 +6369,7 @@
         </p:nvSpPr>
         <p:spPr>
           <a:xfrm>
-            <a:off x="3044952" y="1783080"/>
+            <a:off x="3044952" y="1926465"/>
             <a:ext cx="1819656" cy="182880"/>
           </a:xfrm>
           <a:prstGeom prst="rect">
@@ -6635,7 +6384,7 @@
           </a:bodyPr>
           <a:lstStyle/>
           <a:p>
-            <a:pPr indent="0" marL="0">
+            <a:pPr marL="0" indent="0">
               <a:buNone/>
             </a:pPr>
             <a:r>
@@ -6700,7 +6449,7 @@
           </a:bodyPr>
           <a:lstStyle/>
           <a:p>
-            <a:pPr indent="0" marL="0">
+            <a:pPr marL="0" indent="0">
               <a:buNone/>
             </a:pPr>
             <a:r>
@@ -6738,7 +6487,7 @@
           </a:bodyPr>
           <a:lstStyle/>
           <a:p>
-            <a:pPr indent="0" marL="0">
+            <a:pPr marL="0" indent="0">
               <a:buNone/>
             </a:pPr>
             <a:r>
@@ -6761,7 +6510,7 @@
         </p:nvSpPr>
         <p:spPr>
           <a:xfrm>
-            <a:off x="5330952" y="1783080"/>
+            <a:off x="5314819" y="1926465"/>
             <a:ext cx="1499616" cy="182880"/>
           </a:xfrm>
           <a:prstGeom prst="rect">
@@ -6776,7 +6525,7 @@
           </a:bodyPr>
           <a:lstStyle/>
           <a:p>
-            <a:pPr indent="0" marL="0">
+            <a:pPr marL="0" indent="0">
               <a:buNone/>
             </a:pPr>
             <a:r>
@@ -6841,7 +6590,7 @@
           </a:bodyPr>
           <a:lstStyle/>
           <a:p>
-            <a:pPr indent="0" marL="0">
+            <a:pPr marL="0" indent="0">
               <a:buNone/>
             </a:pPr>
             <a:r>
@@ -6879,7 +6628,7 @@
           </a:bodyPr>
           <a:lstStyle/>
           <a:p>
-            <a:pPr indent="0" marL="0">
+            <a:pPr marL="0" indent="0">
               <a:buNone/>
             </a:pPr>
             <a:r>
@@ -6902,7 +6651,7 @@
         </p:nvSpPr>
         <p:spPr>
           <a:xfrm>
-            <a:off x="7296912" y="1783080"/>
+            <a:off x="7296912" y="1926465"/>
             <a:ext cx="1499616" cy="182880"/>
           </a:xfrm>
           <a:prstGeom prst="rect">
@@ -6917,7 +6666,7 @@
           </a:bodyPr>
           <a:lstStyle/>
           <a:p>
-            <a:pPr indent="0" marL="0">
+            <a:pPr marL="0" indent="0">
               <a:buNone/>
             </a:pPr>
             <a:r>
@@ -6982,7 +6731,7 @@
           </a:bodyPr>
           <a:lstStyle/>
           <a:p>
-            <a:pPr indent="0" marL="0">
+            <a:pPr marL="0" indent="0">
               <a:buNone/>
             </a:pPr>
             <a:r>
@@ -7020,7 +6769,7 @@
           </a:bodyPr>
           <a:lstStyle/>
           <a:p>
-            <a:pPr indent="0" marL="0">
+            <a:pPr marL="0" indent="0">
               <a:buNone/>
             </a:pPr>
             <a:r>
@@ -7043,7 +6792,7 @@
         </p:nvSpPr>
         <p:spPr>
           <a:xfrm>
-            <a:off x="9262872" y="1783080"/>
+            <a:off x="9262872" y="1915448"/>
             <a:ext cx="1728216" cy="182880"/>
           </a:xfrm>
           <a:prstGeom prst="rect">
@@ -7058,7 +6807,7 @@
           </a:bodyPr>
           <a:lstStyle/>
           <a:p>
-            <a:pPr indent="0" marL="0">
+            <a:pPr marL="0" indent="0">
               <a:buNone/>
             </a:pPr>
             <a:r>
@@ -7094,7 +6843,7 @@
           <a:bodyPr wrap="square" lIns="0" tIns="0" rIns="0" bIns="0" rtlCol="0" anchor="ctr"/>
           <a:lstStyle/>
           <a:p>
-            <a:pPr indent="0" marL="0">
+            <a:pPr marL="0" indent="0">
               <a:buNone/>
             </a:pPr>
             <a:r>
@@ -7130,7 +6879,7 @@
           <a:bodyPr wrap="square" lIns="0" tIns="0" rIns="0" bIns="0" rtlCol="0" anchor="ctr"/>
           <a:lstStyle/>
           <a:p>
-            <a:pPr indent="0" marL="0">
+            <a:pPr marL="0" indent="0">
               <a:buNone/>
             </a:pPr>
             <a:r>
@@ -7191,7 +6940,7 @@
           <a:bodyPr wrap="square" lIns="0" tIns="0" rIns="0" bIns="0" rtlCol="0" anchor="ctr"/>
           <a:lstStyle/>
           <a:p>
-            <a:pPr algn="ctr" indent="0" marL="0">
+            <a:pPr marL="0" indent="0" algn="ctr">
               <a:buNone/>
             </a:pPr>
             <a:r>
@@ -7229,7 +6978,7 @@
           </a:bodyPr>
           <a:lstStyle/>
           <a:p>
-            <a:pPr algn="ctr" indent="0" marL="0">
+            <a:pPr marL="0" indent="0" algn="ctr">
               <a:buNone/>
             </a:pPr>
             <a:r>
@@ -7290,7 +7039,7 @@
           <a:bodyPr wrap="square" lIns="0" tIns="0" rIns="0" bIns="0" rtlCol="0" anchor="ctr"/>
           <a:lstStyle/>
           <a:p>
-            <a:pPr algn="ctr" indent="0" marL="0">
+            <a:pPr marL="0" indent="0" algn="ctr">
               <a:buNone/>
             </a:pPr>
             <a:r>
@@ -7328,7 +7077,7 @@
           </a:bodyPr>
           <a:lstStyle/>
           <a:p>
-            <a:pPr algn="ctr" indent="0" marL="0">
+            <a:pPr marL="0" indent="0" algn="ctr">
               <a:buNone/>
             </a:pPr>
             <a:r>
@@ -7389,7 +7138,7 @@
           <a:bodyPr wrap="square" lIns="0" tIns="0" rIns="0" bIns="0" rtlCol="0" anchor="ctr"/>
           <a:lstStyle/>
           <a:p>
-            <a:pPr algn="ctr" indent="0" marL="0">
+            <a:pPr marL="0" indent="0" algn="ctr">
               <a:buNone/>
             </a:pPr>
             <a:r>
@@ -7427,7 +7176,7 @@
           </a:bodyPr>
           <a:lstStyle/>
           <a:p>
-            <a:pPr algn="ctr" indent="0" marL="0">
+            <a:pPr marL="0" indent="0" algn="ctr">
               <a:buNone/>
             </a:pPr>
             <a:r>
@@ -7488,7 +7237,7 @@
           <a:bodyPr wrap="square" lIns="0" tIns="0" rIns="0" bIns="0" rtlCol="0" anchor="ctr"/>
           <a:lstStyle/>
           <a:p>
-            <a:pPr algn="ctr" indent="0" marL="0">
+            <a:pPr marL="0" indent="0" algn="ctr">
               <a:buNone/>
             </a:pPr>
             <a:r>
@@ -7526,7 +7275,7 @@
           </a:bodyPr>
           <a:lstStyle/>
           <a:p>
-            <a:pPr algn="ctr" indent="0" marL="0">
+            <a:pPr marL="0" indent="0" algn="ctr">
               <a:buNone/>
             </a:pPr>
             <a:r>
@@ -7591,7 +7340,7 @@
           </a:bodyPr>
           <a:lstStyle/>
           <a:p>
-            <a:pPr indent="0" marL="0">
+            <a:pPr marL="0" indent="0">
               <a:buNone/>
             </a:pPr>
             <a:r>
@@ -7656,7 +7405,7 @@
           </a:bodyPr>
           <a:lstStyle/>
           <a:p>
-            <a:pPr algn="ctr" indent="0" marL="0">
+            <a:pPr marL="0" indent="0" algn="ctr">
               <a:buNone/>
             </a:pPr>
             <a:r>
@@ -7721,7 +7470,7 @@
           </a:bodyPr>
           <a:lstStyle/>
           <a:p>
-            <a:pPr algn="ctr" indent="0" marL="0">
+            <a:pPr marL="0" indent="0" algn="ctr">
               <a:buNone/>
             </a:pPr>
             <a:r>
@@ -7786,7 +7535,7 @@
           </a:bodyPr>
           <a:lstStyle/>
           <a:p>
-            <a:pPr algn="ctr" indent="0" marL="0">
+            <a:pPr marL="0" indent="0" algn="ctr">
               <a:buNone/>
             </a:pPr>
             <a:r>
@@ -7817,6 +7566,7 @@
         <a:solidFill>
           <a:srgbClr val="FFFFFF"/>
         </a:solidFill>
+        <a:effectLst/>
       </p:bgPr>
     </p:bg>
     <p:spTree>
@@ -7904,7 +7654,7 @@
           <a:bodyPr wrap="square" lIns="0" tIns="0" rIns="0" bIns="0" rtlCol="0" anchor="ctr"/>
           <a:lstStyle/>
           <a:p>
-            <a:pPr indent="0" marL="0">
+            <a:pPr marL="0" indent="0">
               <a:buNone/>
             </a:pPr>
             <a:r>
@@ -7945,7 +7695,7 @@
           </a:bodyPr>
           <a:lstStyle/>
           <a:p>
-            <a:pPr indent="0" marL="0">
+            <a:pPr marL="0" indent="0">
               <a:buNone/>
             </a:pPr>
             <a:r>
@@ -7984,7 +7734,7 @@
           <a:bodyPr wrap="square" lIns="0" tIns="0" rIns="0" bIns="0" rtlCol="0" anchor="ctr"/>
           <a:lstStyle/>
           <a:p>
-            <a:pPr algn="r" indent="0" marL="0">
+            <a:pPr marL="0" indent="0" algn="r">
               <a:buNone/>
             </a:pPr>
             <a:r>
@@ -8020,7 +7770,7 @@
           <a:bodyPr wrap="square" lIns="0" tIns="0" rIns="0" bIns="0" rtlCol="0" anchor="ctr"/>
           <a:lstStyle/>
           <a:p>
-            <a:pPr indent="0" marL="0">
+            <a:pPr marL="0" indent="0">
               <a:buNone/>
             </a:pPr>
             <a:r>
@@ -8083,7 +7833,7 @@
           <a:bodyPr wrap="square" lIns="0" tIns="0" rIns="0" bIns="0" rtlCol="0" anchor="ctr"/>
           <a:lstStyle/>
           <a:p>
-            <a:pPr algn="ctr" indent="0" marL="0">
+            <a:pPr marL="0" indent="0" algn="ctr">
               <a:buNone/>
             </a:pPr>
             <a:r>
@@ -8119,7 +7869,7 @@
           <a:bodyPr wrap="square" lIns="0" tIns="0" rIns="0" bIns="0" rtlCol="0" anchor="ctr"/>
           <a:lstStyle/>
           <a:p>
-            <a:pPr indent="0" marL="0">
+            <a:pPr marL="0" indent="0">
               <a:buNone/>
             </a:pPr>
             <a:r>
@@ -8157,7 +7907,7 @@
           </a:bodyPr>
           <a:lstStyle/>
           <a:p>
-            <a:pPr indent="0" marL="0">
+            <a:pPr marL="0" indent="0">
               <a:buNone/>
             </a:pPr>
             <a:r>
@@ -8195,7 +7945,7 @@
           </a:bodyPr>
           <a:lstStyle/>
           <a:p>
-            <a:pPr indent="0" marL="0">
+            <a:pPr marL="0" indent="0">
               <a:buNone/>
             </a:pPr>
             <a:r>
@@ -8268,7 +8018,7 @@
         </p:nvSpPr>
         <p:spPr>
           <a:xfrm>
-            <a:off x="3657600" y="3776472"/>
+            <a:off x="3401122" y="3776472"/>
             <a:ext cx="822960" cy="164592"/>
           </a:xfrm>
           <a:prstGeom prst="rect">
@@ -8283,7 +8033,7 @@
           </a:bodyPr>
           <a:lstStyle/>
           <a:p>
-            <a:pPr indent="0" marL="0">
+            <a:pPr marL="0" indent="0">
               <a:buNone/>
             </a:pPr>
             <a:r>
@@ -8321,7 +8071,7 @@
           </a:bodyPr>
           <a:lstStyle/>
           <a:p>
-            <a:pPr indent="0" marL="0">
+            <a:pPr marL="0" indent="0">
               <a:buNone/>
             </a:pPr>
             <a:r>
@@ -8394,7 +8144,7 @@
         </p:nvSpPr>
         <p:spPr>
           <a:xfrm>
-            <a:off x="3657600" y="4142232"/>
+            <a:off x="3401124" y="4142232"/>
             <a:ext cx="822960" cy="164592"/>
           </a:xfrm>
           <a:prstGeom prst="rect">
@@ -8409,18 +8159,13 @@
           </a:bodyPr>
           <a:lstStyle/>
           <a:p>
-            <a:pPr indent="0" marL="0">
-              <a:buNone/>
-            </a:pPr>
-            <a:r>
-              <a:rPr lang="en-US" sz="800" dirty="0">
-                <a:solidFill>
-                  <a:srgbClr val="6E7280"/>
-                </a:solidFill>
-              </a:rPr>
+            <a:pPr marL="0" indent="0">
+              <a:buNone/>
+            </a:pPr>
+            <a:r>
+              <a:rPr lang="en-US" sz="800" b="1" dirty="0"/>
               <a:t>1.3%</a:t>
             </a:r>
-            <a:endParaRPr lang="en-US" sz="800" dirty="0"/>
           </a:p>
         </p:txBody>
       </p:sp>
@@ -8472,7 +8217,7 @@
           <a:bodyPr wrap="square" lIns="0" tIns="0" rIns="0" bIns="0" rtlCol="0" anchor="ctr"/>
           <a:lstStyle/>
           <a:p>
-            <a:pPr algn="ctr" indent="0" marL="0">
+            <a:pPr marL="0" indent="0" algn="ctr">
               <a:buNone/>
             </a:pPr>
             <a:r>
@@ -8508,7 +8253,7 @@
           <a:bodyPr wrap="square" lIns="0" tIns="0" rIns="0" bIns="0" rtlCol="0" anchor="ctr"/>
           <a:lstStyle/>
           <a:p>
-            <a:pPr indent="0" marL="0">
+            <a:pPr marL="0" indent="0">
               <a:buNone/>
             </a:pPr>
             <a:r>
@@ -8546,7 +8291,7 @@
           </a:bodyPr>
           <a:lstStyle/>
           <a:p>
-            <a:pPr indent="0" marL="0">
+            <a:pPr marL="0" indent="0">
               <a:buNone/>
             </a:pPr>
             <a:r>
@@ -8584,7 +8329,7 @@
           </a:bodyPr>
           <a:lstStyle/>
           <a:p>
-            <a:pPr indent="0" marL="0">
+            <a:pPr marL="0" indent="0">
               <a:buNone/>
             </a:pPr>
             <a:r>
@@ -8657,7 +8402,7 @@
         </p:nvSpPr>
         <p:spPr>
           <a:xfrm>
-            <a:off x="6766560" y="3776472"/>
+            <a:off x="6264760" y="3776472"/>
             <a:ext cx="822960" cy="164592"/>
           </a:xfrm>
           <a:prstGeom prst="rect">
@@ -8672,7 +8417,7 @@
           </a:bodyPr>
           <a:lstStyle/>
           <a:p>
-            <a:pPr indent="0" marL="0">
+            <a:pPr marL="0" indent="0">
               <a:buNone/>
             </a:pPr>
             <a:r>
@@ -8710,7 +8455,7 @@
           </a:bodyPr>
           <a:lstStyle/>
           <a:p>
-            <a:pPr indent="0" marL="0">
+            <a:pPr marL="0" indent="0">
               <a:buNone/>
             </a:pPr>
             <a:r>
@@ -8783,7 +8528,7 @@
         </p:nvSpPr>
         <p:spPr>
           <a:xfrm>
-            <a:off x="6766560" y="4142232"/>
+            <a:off x="6253605" y="4142232"/>
             <a:ext cx="822960" cy="164592"/>
           </a:xfrm>
           <a:prstGeom prst="rect">
@@ -8798,18 +8543,13 @@
           </a:bodyPr>
           <a:lstStyle/>
           <a:p>
-            <a:pPr indent="0" marL="0">
-              <a:buNone/>
-            </a:pPr>
-            <a:r>
-              <a:rPr lang="en-US" sz="800" dirty="0">
-                <a:solidFill>
-                  <a:srgbClr val="6E7280"/>
-                </a:solidFill>
-              </a:rPr>
+            <a:pPr marL="0" indent="0">
+              <a:buNone/>
+            </a:pPr>
+            <a:r>
+              <a:rPr lang="en-US" sz="800" b="1" dirty="0"/>
               <a:t>3.800.400</a:t>
             </a:r>
-            <a:endParaRPr lang="en-US" sz="800" dirty="0"/>
           </a:p>
         </p:txBody>
       </p:sp>
@@ -8861,7 +8601,7 @@
           <a:bodyPr wrap="square" lIns="0" tIns="0" rIns="0" bIns="0" rtlCol="0" anchor="ctr"/>
           <a:lstStyle/>
           <a:p>
-            <a:pPr algn="ctr" indent="0" marL="0">
+            <a:pPr marL="0" indent="0" algn="ctr">
               <a:buNone/>
             </a:pPr>
             <a:r>
@@ -8897,7 +8637,7 @@
           <a:bodyPr wrap="square" lIns="0" tIns="0" rIns="0" bIns="0" rtlCol="0" anchor="ctr"/>
           <a:lstStyle/>
           <a:p>
-            <a:pPr indent="0" marL="0">
+            <a:pPr marL="0" indent="0">
               <a:buNone/>
             </a:pPr>
             <a:r>
@@ -8935,7 +8675,7 @@
           </a:bodyPr>
           <a:lstStyle/>
           <a:p>
-            <a:pPr indent="0" marL="0">
+            <a:pPr marL="0" indent="0">
               <a:buNone/>
             </a:pPr>
             <a:r>
@@ -8973,7 +8713,7 @@
           </a:bodyPr>
           <a:lstStyle/>
           <a:p>
-            <a:pPr indent="0" marL="0">
+            <a:pPr marL="0" indent="0">
               <a:buNone/>
             </a:pPr>
             <a:r>
@@ -9046,7 +8786,7 @@
         </p:nvSpPr>
         <p:spPr>
           <a:xfrm>
-            <a:off x="9875520" y="3776472"/>
+            <a:off x="9574438" y="3776472"/>
             <a:ext cx="822960" cy="164592"/>
           </a:xfrm>
           <a:prstGeom prst="rect">
@@ -9061,7 +8801,7 @@
           </a:bodyPr>
           <a:lstStyle/>
           <a:p>
-            <a:pPr indent="0" marL="0">
+            <a:pPr marL="0" indent="0">
               <a:buNone/>
             </a:pPr>
             <a:r>
@@ -9099,7 +8839,7 @@
           </a:bodyPr>
           <a:lstStyle/>
           <a:p>
-            <a:pPr indent="0" marL="0">
+            <a:pPr marL="0" indent="0">
               <a:buNone/>
             </a:pPr>
             <a:r>
@@ -9172,7 +8912,7 @@
         </p:nvSpPr>
         <p:spPr>
           <a:xfrm>
-            <a:off x="9875520" y="4142232"/>
+            <a:off x="9585591" y="4142232"/>
             <a:ext cx="822960" cy="164592"/>
           </a:xfrm>
           <a:prstGeom prst="rect">
@@ -9187,18 +8927,13 @@
           </a:bodyPr>
           <a:lstStyle/>
           <a:p>
-            <a:pPr indent="0" marL="0">
-              <a:buNone/>
-            </a:pPr>
-            <a:r>
-              <a:rPr lang="en-US" sz="800" dirty="0">
-                <a:solidFill>
-                  <a:srgbClr val="6E7280"/>
-                </a:solidFill>
-              </a:rPr>
+            <a:pPr marL="0" indent="0">
+              <a:buNone/>
+            </a:pPr>
+            <a:r>
+              <a:rPr lang="en-US" sz="800" b="1" dirty="0"/>
               <a:t>156</a:t>
             </a:r>
-            <a:endParaRPr lang="en-US" sz="800" dirty="0"/>
           </a:p>
         </p:txBody>
       </p:sp>
@@ -9252,7 +8987,7 @@
           </a:bodyPr>
           <a:lstStyle/>
           <a:p>
-            <a:pPr indent="0" marL="0">
+            <a:pPr marL="0" indent="0">
               <a:buNone/>
             </a:pPr>
             <a:r>
@@ -9283,6 +9018,7 @@
         <a:solidFill>
           <a:srgbClr val="FFFFFF"/>
         </a:solidFill>
+        <a:effectLst/>
       </p:bgPr>
     </p:bg>
     <p:spTree>
@@ -9370,7 +9106,7 @@
           <a:bodyPr wrap="square" lIns="0" tIns="0" rIns="0" bIns="0" rtlCol="0" anchor="ctr"/>
           <a:lstStyle/>
           <a:p>
-            <a:pPr indent="0" marL="0">
+            <a:pPr marL="0" indent="0">
               <a:buNone/>
             </a:pPr>
             <a:r>
@@ -9411,7 +9147,7 @@
           </a:bodyPr>
           <a:lstStyle/>
           <a:p>
-            <a:pPr indent="0" marL="0">
+            <a:pPr marL="0" indent="0">
               <a:buNone/>
             </a:pPr>
             <a:r>
@@ -9450,7 +9186,7 @@
           <a:bodyPr wrap="square" lIns="0" tIns="0" rIns="0" bIns="0" rtlCol="0" anchor="ctr"/>
           <a:lstStyle/>
           <a:p>
-            <a:pPr algn="r" indent="0" marL="0">
+            <a:pPr marL="0" indent="0" algn="r">
               <a:buNone/>
             </a:pPr>
             <a:r>
@@ -9473,7 +9209,7 @@
         </p:nvSpPr>
         <p:spPr>
           <a:xfrm>
-            <a:off x="640080" y="1188720"/>
+            <a:off x="640080" y="1021455"/>
             <a:ext cx="3840480" cy="182880"/>
           </a:xfrm>
           <a:prstGeom prst="rect">
@@ -9486,7 +9222,7 @@
           <a:bodyPr wrap="square" lIns="0" tIns="0" rIns="0" bIns="0" rtlCol="0" anchor="ctr"/>
           <a:lstStyle/>
           <a:p>
-            <a:pPr indent="0" marL="0">
+            <a:pPr marL="0" indent="0">
               <a:buNone/>
             </a:pPr>
             <a:r>
@@ -9547,7 +9283,7 @@
           <a:bodyPr wrap="square" lIns="0" tIns="0" rIns="0" bIns="0" rtlCol="0" anchor="ctr"/>
           <a:lstStyle/>
           <a:p>
-            <a:pPr algn="ctr" indent="0" marL="0">
+            <a:pPr marL="0" indent="0" algn="ctr">
               <a:buNone/>
             </a:pPr>
             <a:r>
@@ -9585,7 +9321,7 @@
           </a:bodyPr>
           <a:lstStyle/>
           <a:p>
-            <a:pPr algn="ctr" indent="0" marL="0">
+            <a:pPr marL="0" indent="0" algn="ctr">
               <a:buNone/>
             </a:pPr>
             <a:r>
@@ -9646,7 +9382,7 @@
           <a:bodyPr wrap="square" lIns="0" tIns="0" rIns="0" bIns="0" rtlCol="0" anchor="ctr"/>
           <a:lstStyle/>
           <a:p>
-            <a:pPr algn="ctr" indent="0" marL="0">
+            <a:pPr marL="0" indent="0" algn="ctr">
               <a:buNone/>
             </a:pPr>
             <a:r>
@@ -9684,7 +9420,7 @@
           </a:bodyPr>
           <a:lstStyle/>
           <a:p>
-            <a:pPr algn="ctr" indent="0" marL="0">
+            <a:pPr marL="0" indent="0" algn="ctr">
               <a:buNone/>
             </a:pPr>
             <a:r>
@@ -9745,7 +9481,7 @@
           <a:bodyPr wrap="square" lIns="0" tIns="0" rIns="0" bIns="0" rtlCol="0" anchor="ctr"/>
           <a:lstStyle/>
           <a:p>
-            <a:pPr algn="ctr" indent="0" marL="0">
+            <a:pPr marL="0" indent="0" algn="ctr">
               <a:buNone/>
             </a:pPr>
             <a:r>
@@ -9783,7 +9519,7 @@
           </a:bodyPr>
           <a:lstStyle/>
           <a:p>
-            <a:pPr algn="ctr" indent="0" marL="0">
+            <a:pPr marL="0" indent="0" algn="ctr">
               <a:buNone/>
             </a:pPr>
             <a:r>
@@ -9806,7 +9542,7 @@
         </p:nvSpPr>
         <p:spPr>
           <a:xfrm>
-            <a:off x="4572000" y="1188720"/>
+            <a:off x="4572000" y="1021455"/>
             <a:ext cx="3291840" cy="182880"/>
           </a:xfrm>
           <a:prstGeom prst="rect">
@@ -9819,7 +9555,7 @@
           <a:bodyPr wrap="square" lIns="0" tIns="0" rIns="0" bIns="0" rtlCol="0" anchor="ctr"/>
           <a:lstStyle/>
           <a:p>
-            <a:pPr indent="0" marL="0">
+            <a:pPr marL="0" indent="0">
               <a:buNone/>
             </a:pPr>
             <a:r>
@@ -9880,7 +9616,7 @@
           <a:bodyPr wrap="square" lIns="0" tIns="0" rIns="0" bIns="0" rtlCol="0" anchor="ctr"/>
           <a:lstStyle/>
           <a:p>
-            <a:pPr algn="ctr" indent="0" marL="0">
+            <a:pPr marL="0" indent="0" algn="ctr">
               <a:buNone/>
             </a:pPr>
             <a:r>
@@ -9918,7 +9654,7 @@
           </a:bodyPr>
           <a:lstStyle/>
           <a:p>
-            <a:pPr algn="ctr" indent="0" marL="0">
+            <a:pPr marL="0" indent="0" algn="ctr">
               <a:buNone/>
             </a:pPr>
             <a:r>
@@ -9979,7 +9715,7 @@
           <a:bodyPr wrap="square" lIns="0" tIns="0" rIns="0" bIns="0" rtlCol="0" anchor="ctr"/>
           <a:lstStyle/>
           <a:p>
-            <a:pPr algn="ctr" indent="0" marL="0">
+            <a:pPr marL="0" indent="0" algn="ctr">
               <a:buNone/>
             </a:pPr>
             <a:r>
@@ -10017,7 +9753,7 @@
           </a:bodyPr>
           <a:lstStyle/>
           <a:p>
-            <a:pPr algn="ctr" indent="0" marL="0">
+            <a:pPr marL="0" indent="0" algn="ctr">
               <a:buNone/>
             </a:pPr>
             <a:r>
@@ -10078,7 +9814,7 @@
           <a:bodyPr wrap="square" lIns="0" tIns="0" rIns="0" bIns="0" rtlCol="0" anchor="ctr"/>
           <a:lstStyle/>
           <a:p>
-            <a:pPr algn="ctr" indent="0" marL="0">
+            <a:pPr marL="0" indent="0" algn="ctr">
               <a:buNone/>
             </a:pPr>
             <a:r>
@@ -10116,7 +9852,7 @@
           </a:bodyPr>
           <a:lstStyle/>
           <a:p>
-            <a:pPr algn="ctr" indent="0" marL="0">
+            <a:pPr marL="0" indent="0" algn="ctr">
               <a:buNone/>
             </a:pPr>
             <a:r>
@@ -10139,7 +9875,7 @@
         </p:nvSpPr>
         <p:spPr>
           <a:xfrm>
-            <a:off x="8138160" y="1188720"/>
+            <a:off x="8138160" y="1021455"/>
             <a:ext cx="2834640" cy="182880"/>
           </a:xfrm>
           <a:prstGeom prst="rect">
@@ -10152,7 +9888,7 @@
           <a:bodyPr wrap="square" lIns="0" tIns="0" rIns="0" bIns="0" rtlCol="0" anchor="ctr"/>
           <a:lstStyle/>
           <a:p>
-            <a:pPr indent="0" marL="0">
+            <a:pPr marL="0" indent="0">
               <a:buNone/>
             </a:pPr>
             <a:r>
@@ -10213,7 +9949,7 @@
           <a:bodyPr wrap="square" lIns="0" tIns="0" rIns="0" bIns="0" rtlCol="0" anchor="ctr"/>
           <a:lstStyle/>
           <a:p>
-            <a:pPr algn="ctr" indent="0" marL="0">
+            <a:pPr marL="0" indent="0" algn="ctr">
               <a:buNone/>
             </a:pPr>
             <a:r>
@@ -10251,7 +9987,7 @@
           </a:bodyPr>
           <a:lstStyle/>
           <a:p>
-            <a:pPr algn="ctr" indent="0" marL="0">
+            <a:pPr marL="0" indent="0" algn="ctr">
               <a:buNone/>
             </a:pPr>
             <a:r>
@@ -10312,7 +10048,7 @@
           <a:bodyPr wrap="square" lIns="0" tIns="0" rIns="0" bIns="0" rtlCol="0" anchor="ctr"/>
           <a:lstStyle/>
           <a:p>
-            <a:pPr algn="ctr" indent="0" marL="0">
+            <a:pPr marL="0" indent="0" algn="ctr">
               <a:buNone/>
             </a:pPr>
             <a:r>
@@ -10350,7 +10086,7 @@
           </a:bodyPr>
           <a:lstStyle/>
           <a:p>
-            <a:pPr algn="ctr" indent="0" marL="0">
+            <a:pPr marL="0" indent="0" algn="ctr">
               <a:buNone/>
             </a:pPr>
             <a:r>
@@ -10411,7 +10147,7 @@
           <a:bodyPr wrap="square" lIns="0" tIns="0" rIns="0" bIns="0" rtlCol="0" anchor="ctr"/>
           <a:lstStyle/>
           <a:p>
-            <a:pPr algn="ctr" indent="0" marL="0">
+            <a:pPr marL="0" indent="0" algn="ctr">
               <a:buNone/>
             </a:pPr>
             <a:r>
@@ -10449,7 +10185,7 @@
           </a:bodyPr>
           <a:lstStyle/>
           <a:p>
-            <a:pPr algn="ctr" indent="0" marL="0">
+            <a:pPr marL="0" indent="0" algn="ctr">
               <a:buNone/>
             </a:pPr>
             <a:r>
@@ -10512,7 +10248,7 @@
           <a:bodyPr wrap="square" lIns="0" tIns="0" rIns="0" bIns="0" rtlCol="0" anchor="ctr"/>
           <a:lstStyle/>
           <a:p>
-            <a:pPr indent="0" marL="0">
+            <a:pPr marL="0" indent="0">
               <a:buNone/>
             </a:pPr>
             <a:r>
@@ -10550,7 +10286,7 @@
           </a:bodyPr>
           <a:lstStyle/>
           <a:p>
-            <a:pPr indent="0" marL="0">
+            <a:pPr marL="0" indent="0">
               <a:buNone/>
             </a:pPr>
             <a:r>
@@ -10588,7 +10324,7 @@
           </a:bodyPr>
           <a:lstStyle/>
           <a:p>
-            <a:pPr indent="0" marL="0">
+            <a:pPr marL="0" indent="0">
               <a:buNone/>
             </a:pPr>
             <a:r>
@@ -10651,7 +10387,7 @@
           <a:bodyPr wrap="square" lIns="0" tIns="0" rIns="0" bIns="0" rtlCol="0" anchor="ctr"/>
           <a:lstStyle/>
           <a:p>
-            <a:pPr indent="0" marL="0">
+            <a:pPr marL="0" indent="0">
               <a:buNone/>
             </a:pPr>
             <a:r>
@@ -10689,7 +10425,7 @@
           </a:bodyPr>
           <a:lstStyle/>
           <a:p>
-            <a:pPr indent="0" marL="0">
+            <a:pPr marL="0" indent="0">
               <a:buNone/>
             </a:pPr>
             <a:r>
@@ -10727,7 +10463,7 @@
           </a:bodyPr>
           <a:lstStyle/>
           <a:p>
-            <a:pPr indent="0" marL="0">
+            <a:pPr marL="0" indent="0">
               <a:buNone/>
             </a:pPr>
             <a:r>
@@ -10790,7 +10526,7 @@
           <a:bodyPr wrap="square" lIns="0" tIns="0" rIns="0" bIns="0" rtlCol="0" anchor="ctr"/>
           <a:lstStyle/>
           <a:p>
-            <a:pPr indent="0" marL="0">
+            <a:pPr marL="0" indent="0">
               <a:buNone/>
             </a:pPr>
             <a:r>
@@ -10828,7 +10564,7 @@
           </a:bodyPr>
           <a:lstStyle/>
           <a:p>
-            <a:pPr indent="0" marL="0">
+            <a:pPr marL="0" indent="0">
               <a:buNone/>
             </a:pPr>
             <a:r>
@@ -10866,7 +10602,7 @@
           </a:bodyPr>
           <a:lstStyle/>
           <a:p>
-            <a:pPr indent="0" marL="0">
+            <a:pPr marL="0" indent="0">
               <a:buNone/>
             </a:pPr>
             <a:r>
@@ -10904,7 +10640,7 @@
           </a:bodyPr>
           <a:lstStyle/>
           <a:p>
-            <a:pPr algn="ctr" indent="0" marL="0">
+            <a:pPr marL="0" indent="0" algn="ctr">
               <a:buNone/>
             </a:pPr>
             <a:r>
@@ -10935,6 +10671,7 @@
         <a:solidFill>
           <a:srgbClr val="FFFFFF"/>
         </a:solidFill>
+        <a:effectLst/>
       </p:bgPr>
     </p:bg>
     <p:spTree>
@@ -11022,7 +10759,7 @@
           <a:bodyPr wrap="square" lIns="0" tIns="0" rIns="0" bIns="0" rtlCol="0" anchor="ctr"/>
           <a:lstStyle/>
           <a:p>
-            <a:pPr indent="0" marL="0">
+            <a:pPr marL="0" indent="0">
               <a:buNone/>
             </a:pPr>
             <a:r>
@@ -11063,7 +10800,7 @@
           </a:bodyPr>
           <a:lstStyle/>
           <a:p>
-            <a:pPr indent="0" marL="0">
+            <a:pPr marL="0" indent="0">
               <a:buNone/>
             </a:pPr>
             <a:r>
@@ -11102,7 +10839,7 @@
           <a:bodyPr wrap="square" lIns="0" tIns="0" rIns="0" bIns="0" rtlCol="0" anchor="ctr"/>
           <a:lstStyle/>
           <a:p>
-            <a:pPr algn="r" indent="0" marL="0">
+            <a:pPr marL="0" indent="0" algn="r">
               <a:buNone/>
             </a:pPr>
             <a:r>
@@ -11167,7 +10904,7 @@
           </a:bodyPr>
           <a:lstStyle/>
           <a:p>
-            <a:pPr indent="0" marL="0">
+            <a:pPr marL="0" indent="0">
               <a:buNone/>
             </a:pPr>
             <a:r>
@@ -11205,7 +10942,7 @@
           </a:bodyPr>
           <a:lstStyle/>
           <a:p>
-            <a:pPr indent="0" marL="0">
+            <a:pPr marL="0" indent="0">
               <a:buNone/>
             </a:pPr>
             <a:r>
@@ -11228,7 +10965,7 @@
         </p:nvSpPr>
         <p:spPr>
           <a:xfrm>
-            <a:off x="804672" y="1709928"/>
+            <a:off x="804672" y="1844142"/>
             <a:ext cx="1499616" cy="182880"/>
           </a:xfrm>
           <a:prstGeom prst="rect">
@@ -11243,7 +10980,7 @@
           </a:bodyPr>
           <a:lstStyle/>
           <a:p>
-            <a:pPr indent="0" marL="0">
+            <a:pPr marL="0" indent="0">
               <a:buNone/>
             </a:pPr>
             <a:r>
@@ -11308,7 +11045,7 @@
           </a:bodyPr>
           <a:lstStyle/>
           <a:p>
-            <a:pPr indent="0" marL="0">
+            <a:pPr marL="0" indent="0">
               <a:buNone/>
             </a:pPr>
             <a:r>
@@ -11346,7 +11083,7 @@
           </a:bodyPr>
           <a:lstStyle/>
           <a:p>
-            <a:pPr indent="0" marL="0">
+            <a:pPr marL="0" indent="0">
               <a:buNone/>
             </a:pPr>
             <a:r>
@@ -11369,7 +11106,7 @@
         </p:nvSpPr>
         <p:spPr>
           <a:xfrm>
-            <a:off x="2816352" y="1709928"/>
+            <a:off x="2743200" y="1844142"/>
             <a:ext cx="1088136" cy="182880"/>
           </a:xfrm>
           <a:prstGeom prst="rect">
@@ -11384,7 +11121,7 @@
           </a:bodyPr>
           <a:lstStyle/>
           <a:p>
-            <a:pPr indent="0" marL="0">
+            <a:pPr marL="0" indent="0">
               <a:buNone/>
             </a:pPr>
             <a:r>
@@ -11449,7 +11186,7 @@
           </a:bodyPr>
           <a:lstStyle/>
           <a:p>
-            <a:pPr indent="0" marL="0">
+            <a:pPr marL="0" indent="0">
               <a:buNone/>
             </a:pPr>
             <a:r>
@@ -11487,7 +11224,7 @@
           </a:bodyPr>
           <a:lstStyle/>
           <a:p>
-            <a:pPr indent="0" marL="0">
+            <a:pPr marL="0" indent="0">
               <a:buNone/>
             </a:pPr>
             <a:r>
@@ -11510,7 +11247,7 @@
         </p:nvSpPr>
         <p:spPr>
           <a:xfrm>
-            <a:off x="4416552" y="1709928"/>
+            <a:off x="4416552" y="1844142"/>
             <a:ext cx="1088136" cy="182880"/>
           </a:xfrm>
           <a:prstGeom prst="rect">
@@ -11525,7 +11262,7 @@
           </a:bodyPr>
           <a:lstStyle/>
           <a:p>
-            <a:pPr indent="0" marL="0">
+            <a:pPr marL="0" indent="0">
               <a:buNone/>
             </a:pPr>
             <a:r>
@@ -11590,7 +11327,7 @@
           </a:bodyPr>
           <a:lstStyle/>
           <a:p>
-            <a:pPr indent="0" marL="0">
+            <a:pPr marL="0" indent="0">
               <a:buNone/>
             </a:pPr>
             <a:r>
@@ -11628,7 +11365,7 @@
           </a:bodyPr>
           <a:lstStyle/>
           <a:p>
-            <a:pPr indent="0" marL="0">
+            <a:pPr marL="0" indent="0">
               <a:buNone/>
             </a:pPr>
             <a:r>
@@ -11651,7 +11388,7 @@
         </p:nvSpPr>
         <p:spPr>
           <a:xfrm>
-            <a:off x="6016752" y="1709928"/>
+            <a:off x="6016752" y="1844142"/>
             <a:ext cx="1499616" cy="182880"/>
           </a:xfrm>
           <a:prstGeom prst="rect">
@@ -11666,7 +11403,7 @@
           </a:bodyPr>
           <a:lstStyle/>
           <a:p>
-            <a:pPr indent="0" marL="0">
+            <a:pPr marL="0" indent="0">
               <a:buNone/>
             </a:pPr>
             <a:r>
@@ -11689,7 +11426,7 @@
         </p:nvSpPr>
         <p:spPr>
           <a:xfrm>
-            <a:off x="640080" y="2286000"/>
+            <a:off x="640080" y="2118735"/>
             <a:ext cx="2926080" cy="182880"/>
           </a:xfrm>
           <a:prstGeom prst="rect">
@@ -11702,7 +11439,7 @@
           <a:bodyPr wrap="square" lIns="0" tIns="0" rIns="0" bIns="0" rtlCol="0" anchor="ctr"/>
           <a:lstStyle/>
           <a:p>
-            <a:pPr indent="0" marL="0">
+            <a:pPr marL="0" indent="0">
               <a:buNone/>
             </a:pPr>
             <a:r>
@@ -11763,7 +11500,7 @@
           <a:bodyPr wrap="square" lIns="0" tIns="0" rIns="0" bIns="0" rtlCol="0" anchor="ctr"/>
           <a:lstStyle/>
           <a:p>
-            <a:pPr algn="ctr" indent="0" marL="0">
+            <a:pPr marL="0" indent="0" algn="ctr">
               <a:buNone/>
             </a:pPr>
             <a:r>
@@ -11801,7 +11538,7 @@
           </a:bodyPr>
           <a:lstStyle/>
           <a:p>
-            <a:pPr algn="ctr" indent="0" marL="0">
+            <a:pPr marL="0" indent="0" algn="ctr">
               <a:buNone/>
             </a:pPr>
             <a:r>
@@ -11862,7 +11599,7 @@
           <a:bodyPr wrap="square" lIns="0" tIns="0" rIns="0" bIns="0" rtlCol="0" anchor="ctr"/>
           <a:lstStyle/>
           <a:p>
-            <a:pPr algn="ctr" indent="0" marL="0">
+            <a:pPr marL="0" indent="0" algn="ctr">
               <a:buNone/>
             </a:pPr>
             <a:r>
@@ -11900,7 +11637,7 @@
           </a:bodyPr>
           <a:lstStyle/>
           <a:p>
-            <a:pPr algn="ctr" indent="0" marL="0">
+            <a:pPr marL="0" indent="0" algn="ctr">
               <a:buNone/>
             </a:pPr>
             <a:r>
@@ -11961,7 +11698,7 @@
           <a:bodyPr wrap="square" lIns="0" tIns="0" rIns="0" bIns="0" rtlCol="0" anchor="ctr"/>
           <a:lstStyle/>
           <a:p>
-            <a:pPr algn="ctr" indent="0" marL="0">
+            <a:pPr marL="0" indent="0" algn="ctr">
               <a:buNone/>
             </a:pPr>
             <a:r>
@@ -11999,7 +11736,7 @@
           </a:bodyPr>
           <a:lstStyle/>
           <a:p>
-            <a:pPr algn="ctr" indent="0" marL="0">
+            <a:pPr marL="0" indent="0" algn="ctr">
               <a:buNone/>
             </a:pPr>
             <a:r>
@@ -12022,7 +11759,7 @@
         </p:nvSpPr>
         <p:spPr>
           <a:xfrm>
-            <a:off x="3977640" y="2286000"/>
+            <a:off x="3977640" y="2107584"/>
             <a:ext cx="3657600" cy="182880"/>
           </a:xfrm>
           <a:prstGeom prst="rect">
@@ -12035,7 +11772,7 @@
           <a:bodyPr wrap="square" lIns="0" tIns="0" rIns="0" bIns="0" rtlCol="0" anchor="ctr"/>
           <a:lstStyle/>
           <a:p>
-            <a:pPr indent="0" marL="0">
+            <a:pPr marL="0" indent="0">
               <a:buNone/>
             </a:pPr>
             <a:r>
@@ -12096,7 +11833,7 @@
           <a:bodyPr wrap="square" lIns="0" tIns="0" rIns="0" bIns="0" rtlCol="0" anchor="ctr"/>
           <a:lstStyle/>
           <a:p>
-            <a:pPr algn="ctr" indent="0" marL="0">
+            <a:pPr marL="0" indent="0" algn="ctr">
               <a:buNone/>
             </a:pPr>
             <a:r>
@@ -12134,7 +11871,7 @@
           </a:bodyPr>
           <a:lstStyle/>
           <a:p>
-            <a:pPr algn="ctr" indent="0" marL="0">
+            <a:pPr marL="0" indent="0" algn="ctr">
               <a:buNone/>
             </a:pPr>
             <a:r>
@@ -12195,7 +11932,7 @@
           <a:bodyPr wrap="square" lIns="0" tIns="0" rIns="0" bIns="0" rtlCol="0" anchor="ctr"/>
           <a:lstStyle/>
           <a:p>
-            <a:pPr algn="ctr" indent="0" marL="0">
+            <a:pPr marL="0" indent="0" algn="ctr">
               <a:buNone/>
             </a:pPr>
             <a:r>
@@ -12233,7 +11970,7 @@
           </a:bodyPr>
           <a:lstStyle/>
           <a:p>
-            <a:pPr algn="ctr" indent="0" marL="0">
+            <a:pPr marL="0" indent="0" algn="ctr">
               <a:buNone/>
             </a:pPr>
             <a:r>
@@ -12294,7 +12031,7 @@
           <a:bodyPr wrap="square" lIns="0" tIns="0" rIns="0" bIns="0" rtlCol="0" anchor="ctr"/>
           <a:lstStyle/>
           <a:p>
-            <a:pPr algn="ctr" indent="0" marL="0">
+            <a:pPr marL="0" indent="0" algn="ctr">
               <a:buNone/>
             </a:pPr>
             <a:r>
@@ -12332,7 +12069,7 @@
           </a:bodyPr>
           <a:lstStyle/>
           <a:p>
-            <a:pPr algn="ctr" indent="0" marL="0">
+            <a:pPr marL="0" indent="0" algn="ctr">
               <a:buNone/>
             </a:pPr>
             <a:r>
@@ -12395,7 +12132,7 @@
           <a:bodyPr wrap="square" lIns="0" tIns="0" rIns="0" bIns="0" rtlCol="0" anchor="ctr"/>
           <a:lstStyle/>
           <a:p>
-            <a:pPr indent="0" marL="0">
+            <a:pPr marL="0" indent="0">
               <a:buNone/>
             </a:pPr>
             <a:r>
@@ -12433,7 +12170,7 @@
           </a:bodyPr>
           <a:lstStyle/>
           <a:p>
-            <a:pPr indent="0" marL="0">
+            <a:pPr marL="0" indent="0">
               <a:buNone/>
             </a:pPr>
             <a:r>
@@ -12447,7 +12184,7 @@
             <a:endParaRPr lang="en-US" sz="1050" dirty="0"/>
           </a:p>
           <a:p>
-            <a:pPr indent="0" marL="0">
+            <a:pPr marL="0" indent="0">
               <a:buNone/>
             </a:pPr>
             <a:r>
@@ -12461,7 +12198,7 @@
             <a:endParaRPr lang="en-US" sz="1050" dirty="0"/>
           </a:p>
           <a:p>
-            <a:pPr indent="0" marL="0">
+            <a:pPr marL="0" indent="0">
               <a:buNone/>
             </a:pPr>
             <a:r>
@@ -12497,7 +12234,7 @@
           <a:bodyPr wrap="square" lIns="0" tIns="0" rIns="0" bIns="0" rtlCol="0" anchor="ctr"/>
           <a:lstStyle/>
           <a:p>
-            <a:pPr indent="0" marL="0">
+            <a:pPr marL="0" indent="0">
               <a:buNone/>
             </a:pPr>
             <a:r>
@@ -12535,7 +12272,7 @@
           </a:bodyPr>
           <a:lstStyle/>
           <a:p>
-            <a:pPr indent="0" marL="0">
+            <a:pPr marL="0" indent="0">
               <a:buNone/>
             </a:pPr>
             <a:r>
@@ -12566,6 +12303,7 @@
         <a:solidFill>
           <a:srgbClr val="FFFFFF"/>
         </a:solidFill>
+        <a:effectLst/>
       </p:bgPr>
     </p:bg>
     <p:spTree>
@@ -12590,7 +12328,7 @@
         </p:nvSpPr>
         <p:spPr>
           <a:xfrm>
-            <a:off x="0" y="0"/>
+            <a:off x="0" y="305712"/>
             <a:ext cx="12191695" cy="6858000"/>
           </a:xfrm>
           <a:prstGeom prst="rect">
@@ -12653,7 +12391,7 @@
           <a:bodyPr wrap="square" lIns="0" tIns="0" rIns="0" bIns="0" rtlCol="0" anchor="ctr"/>
           <a:lstStyle/>
           <a:p>
-            <a:pPr indent="0" marL="0">
+            <a:pPr marL="0" indent="0">
               <a:buNone/>
             </a:pPr>
             <a:r>
@@ -12694,7 +12432,7 @@
           </a:bodyPr>
           <a:lstStyle/>
           <a:p>
-            <a:pPr indent="0" marL="0">
+            <a:pPr marL="0" indent="0">
               <a:buNone/>
             </a:pPr>
             <a:r>
@@ -12733,7 +12471,7 @@
           <a:bodyPr wrap="square" lIns="0" tIns="0" rIns="0" bIns="0" rtlCol="0" anchor="ctr"/>
           <a:lstStyle/>
           <a:p>
-            <a:pPr algn="r" indent="0" marL="0">
+            <a:pPr marL="0" indent="0" algn="r">
               <a:buNone/>
             </a:pPr>
             <a:r>
@@ -12798,7 +12536,7 @@
           </a:bodyPr>
           <a:lstStyle/>
           <a:p>
-            <a:pPr indent="0" marL="0">
+            <a:pPr marL="0" indent="0">
               <a:buNone/>
             </a:pPr>
             <a:r>
@@ -12836,7 +12574,7 @@
           </a:bodyPr>
           <a:lstStyle/>
           <a:p>
-            <a:pPr indent="0" marL="0">
+            <a:pPr marL="0" indent="0">
               <a:buNone/>
             </a:pPr>
             <a:r>
@@ -12859,7 +12597,7 @@
         </p:nvSpPr>
         <p:spPr>
           <a:xfrm>
-            <a:off x="804672" y="1709928"/>
+            <a:off x="795312" y="1877193"/>
             <a:ext cx="1499616" cy="182880"/>
           </a:xfrm>
           <a:prstGeom prst="rect">
@@ -12874,7 +12612,7 @@
           </a:bodyPr>
           <a:lstStyle/>
           <a:p>
-            <a:pPr indent="0" marL="0">
+            <a:pPr marL="0" indent="0">
               <a:buNone/>
             </a:pPr>
             <a:r>
@@ -12939,7 +12677,7 @@
           </a:bodyPr>
           <a:lstStyle/>
           <a:p>
-            <a:pPr indent="0" marL="0">
+            <a:pPr marL="0" indent="0">
               <a:buNone/>
             </a:pPr>
             <a:r>
@@ -12977,7 +12715,7 @@
           </a:bodyPr>
           <a:lstStyle/>
           <a:p>
-            <a:pPr indent="0" marL="0">
+            <a:pPr marL="0" indent="0">
               <a:buNone/>
             </a:pPr>
             <a:r>
@@ -13000,7 +12738,7 @@
         </p:nvSpPr>
         <p:spPr>
           <a:xfrm>
-            <a:off x="2816352" y="1709928"/>
+            <a:off x="2804350" y="1878045"/>
             <a:ext cx="1499616" cy="182880"/>
           </a:xfrm>
           <a:prstGeom prst="rect">
@@ -13015,7 +12753,7 @@
           </a:bodyPr>
           <a:lstStyle/>
           <a:p>
-            <a:pPr indent="0" marL="0">
+            <a:pPr marL="0" indent="0">
               <a:buNone/>
             </a:pPr>
             <a:r>
@@ -13080,7 +12818,7 @@
           </a:bodyPr>
           <a:lstStyle/>
           <a:p>
-            <a:pPr indent="0" marL="0">
+            <a:pPr marL="0" indent="0">
               <a:buNone/>
             </a:pPr>
             <a:r>
@@ -13118,7 +12856,7 @@
           </a:bodyPr>
           <a:lstStyle/>
           <a:p>
-            <a:pPr indent="0" marL="0">
+            <a:pPr marL="0" indent="0">
               <a:buNone/>
             </a:pPr>
             <a:r>
@@ -13141,7 +12879,7 @@
         </p:nvSpPr>
         <p:spPr>
           <a:xfrm>
-            <a:off x="4828032" y="1709928"/>
+            <a:off x="4850892" y="1875346"/>
             <a:ext cx="1499616" cy="182880"/>
           </a:xfrm>
           <a:prstGeom prst="rect">
@@ -13156,7 +12894,7 @@
           </a:bodyPr>
           <a:lstStyle/>
           <a:p>
-            <a:pPr indent="0" marL="0">
+            <a:pPr marL="0" indent="0">
               <a:buNone/>
             </a:pPr>
             <a:r>
@@ -13221,7 +12959,7 @@
           </a:bodyPr>
           <a:lstStyle/>
           <a:p>
-            <a:pPr indent="0" marL="0">
+            <a:pPr marL="0" indent="0">
               <a:buNone/>
             </a:pPr>
             <a:r>
@@ -13259,7 +12997,7 @@
           </a:bodyPr>
           <a:lstStyle/>
           <a:p>
-            <a:pPr indent="0" marL="0">
+            <a:pPr marL="0" indent="0">
               <a:buNone/>
             </a:pPr>
             <a:r>
@@ -13282,7 +13020,7 @@
         </p:nvSpPr>
         <p:spPr>
           <a:xfrm>
-            <a:off x="6839712" y="1709928"/>
+            <a:off x="6850570" y="1878045"/>
             <a:ext cx="1088136" cy="182880"/>
           </a:xfrm>
           <a:prstGeom prst="rect">
@@ -13297,7 +13035,7 @@
           </a:bodyPr>
           <a:lstStyle/>
           <a:p>
-            <a:pPr indent="0" marL="0">
+            <a:pPr marL="0" indent="0">
               <a:buNone/>
             </a:pPr>
             <a:r>
@@ -13320,7 +13058,7 @@
         </p:nvSpPr>
         <p:spPr>
           <a:xfrm>
-            <a:off x="640080" y="2286000"/>
+            <a:off x="640080" y="2118735"/>
             <a:ext cx="3429000" cy="182880"/>
           </a:xfrm>
           <a:prstGeom prst="rect">
@@ -13333,7 +13071,7 @@
           <a:bodyPr wrap="square" lIns="0" tIns="0" rIns="0" bIns="0" rtlCol="0" anchor="ctr"/>
           <a:lstStyle/>
           <a:p>
-            <a:pPr indent="0" marL="0">
+            <a:pPr marL="0" indent="0">
               <a:buNone/>
             </a:pPr>
             <a:r>
@@ -13394,7 +13132,7 @@
           <a:bodyPr wrap="square" lIns="0" tIns="0" rIns="0" bIns="0" rtlCol="0" anchor="ctr"/>
           <a:lstStyle/>
           <a:p>
-            <a:pPr algn="ctr" indent="0" marL="0">
+            <a:pPr marL="0" indent="0" algn="ctr">
               <a:buNone/>
             </a:pPr>
             <a:r>
@@ -13432,7 +13170,7 @@
           </a:bodyPr>
           <a:lstStyle/>
           <a:p>
-            <a:pPr algn="ctr" indent="0" marL="0">
+            <a:pPr marL="0" indent="0" algn="ctr">
               <a:buNone/>
             </a:pPr>
             <a:r>
@@ -13493,7 +13231,7 @@
           <a:bodyPr wrap="square" lIns="0" tIns="0" rIns="0" bIns="0" rtlCol="0" anchor="ctr"/>
           <a:lstStyle/>
           <a:p>
-            <a:pPr algn="ctr" indent="0" marL="0">
+            <a:pPr marL="0" indent="0" algn="ctr">
               <a:buNone/>
             </a:pPr>
             <a:r>
@@ -13531,7 +13269,7 @@
           </a:bodyPr>
           <a:lstStyle/>
           <a:p>
-            <a:pPr algn="ctr" indent="0" marL="0">
+            <a:pPr marL="0" indent="0" algn="ctr">
               <a:buNone/>
             </a:pPr>
             <a:r>
@@ -13592,7 +13330,7 @@
           <a:bodyPr wrap="square" lIns="0" tIns="0" rIns="0" bIns="0" rtlCol="0" anchor="ctr"/>
           <a:lstStyle/>
           <a:p>
-            <a:pPr algn="ctr" indent="0" marL="0">
+            <a:pPr marL="0" indent="0" algn="ctr">
               <a:buNone/>
             </a:pPr>
             <a:r>
@@ -13630,7 +13368,7 @@
           </a:bodyPr>
           <a:lstStyle/>
           <a:p>
-            <a:pPr algn="ctr" indent="0" marL="0">
+            <a:pPr marL="0" indent="0" algn="ctr">
               <a:buNone/>
             </a:pPr>
             <a:r>
@@ -13653,7 +13391,7 @@
         </p:nvSpPr>
         <p:spPr>
           <a:xfrm>
-            <a:off x="4480560" y="2286000"/>
+            <a:off x="4480560" y="2118735"/>
             <a:ext cx="3200400" cy="182880"/>
           </a:xfrm>
           <a:prstGeom prst="rect">
@@ -13666,7 +13404,7 @@
           <a:bodyPr wrap="square" lIns="0" tIns="0" rIns="0" bIns="0" rtlCol="0" anchor="ctr"/>
           <a:lstStyle/>
           <a:p>
-            <a:pPr indent="0" marL="0">
+            <a:pPr marL="0" indent="0">
               <a:buNone/>
             </a:pPr>
             <a:r>
@@ -13727,7 +13465,7 @@
           <a:bodyPr wrap="square" lIns="0" tIns="0" rIns="0" bIns="0" rtlCol="0" anchor="ctr"/>
           <a:lstStyle/>
           <a:p>
-            <a:pPr algn="ctr" indent="0" marL="0">
+            <a:pPr marL="0" indent="0" algn="ctr">
               <a:buNone/>
             </a:pPr>
             <a:r>
@@ -13765,7 +13503,7 @@
           </a:bodyPr>
           <a:lstStyle/>
           <a:p>
-            <a:pPr algn="ctr" indent="0" marL="0">
+            <a:pPr marL="0" indent="0" algn="ctr">
               <a:buNone/>
             </a:pPr>
             <a:r>
@@ -13826,7 +13564,7 @@
           <a:bodyPr wrap="square" lIns="0" tIns="0" rIns="0" bIns="0" rtlCol="0" anchor="ctr"/>
           <a:lstStyle/>
           <a:p>
-            <a:pPr algn="ctr" indent="0" marL="0">
+            <a:pPr marL="0" indent="0" algn="ctr">
               <a:buNone/>
             </a:pPr>
             <a:r>
@@ -13864,7 +13602,7 @@
           </a:bodyPr>
           <a:lstStyle/>
           <a:p>
-            <a:pPr algn="ctr" indent="0" marL="0">
+            <a:pPr marL="0" indent="0" algn="ctr">
               <a:buNone/>
             </a:pPr>
             <a:r>
@@ -13925,7 +13663,7 @@
           <a:bodyPr wrap="square" lIns="0" tIns="0" rIns="0" bIns="0" rtlCol="0" anchor="ctr"/>
           <a:lstStyle/>
           <a:p>
-            <a:pPr algn="ctr" indent="0" marL="0">
+            <a:pPr marL="0" indent="0" algn="ctr">
               <a:buNone/>
             </a:pPr>
             <a:r>
@@ -13963,7 +13701,7 @@
           </a:bodyPr>
           <a:lstStyle/>
           <a:p>
-            <a:pPr algn="ctr" indent="0" marL="0">
+            <a:pPr marL="0" indent="0" algn="ctr">
               <a:buNone/>
             </a:pPr>
             <a:r>
@@ -14024,7 +13762,7 @@
           <a:bodyPr wrap="square" lIns="0" tIns="0" rIns="0" bIns="0" rtlCol="0" anchor="ctr"/>
           <a:lstStyle/>
           <a:p>
-            <a:pPr algn="ctr" indent="0" marL="0">
+            <a:pPr marL="0" indent="0" algn="ctr">
               <a:buNone/>
             </a:pPr>
             <a:r>
@@ -14062,7 +13800,7 @@
           </a:bodyPr>
           <a:lstStyle/>
           <a:p>
-            <a:pPr algn="ctr" indent="0" marL="0">
+            <a:pPr marL="0" indent="0" algn="ctr">
               <a:buNone/>
             </a:pPr>
             <a:r>
@@ -14125,7 +13863,7 @@
           <a:bodyPr wrap="square" lIns="0" tIns="0" rIns="0" bIns="0" rtlCol="0" anchor="ctr"/>
           <a:lstStyle/>
           <a:p>
-            <a:pPr indent="0" marL="0">
+            <a:pPr marL="0" indent="0">
               <a:buNone/>
             </a:pPr>
             <a:r>
@@ -14163,7 +13901,7 @@
           </a:bodyPr>
           <a:lstStyle/>
           <a:p>
-            <a:pPr indent="0" marL="0">
+            <a:pPr marL="0" indent="0">
               <a:buNone/>
             </a:pPr>
             <a:r>
@@ -14199,7 +13937,7 @@
           <a:bodyPr wrap="square" lIns="0" tIns="0" rIns="0" bIns="0" rtlCol="0" anchor="ctr"/>
           <a:lstStyle/>
           <a:p>
-            <a:pPr indent="0" marL="0">
+            <a:pPr marL="0" indent="0">
               <a:buNone/>
             </a:pPr>
             <a:r>
@@ -14237,7 +13975,7 @@
           </a:bodyPr>
           <a:lstStyle/>
           <a:p>
-            <a:pPr indent="0" marL="0">
+            <a:pPr marL="0" indent="0">
               <a:buNone/>
             </a:pPr>
             <a:r>
@@ -14268,6 +14006,7 @@
         <a:solidFill>
           <a:srgbClr val="FFFFFF"/>
         </a:solidFill>
+        <a:effectLst/>
       </p:bgPr>
     </p:bg>
     <p:spTree>
@@ -14355,7 +14094,7 @@
           <a:bodyPr wrap="square" lIns="0" tIns="0" rIns="0" bIns="0" rtlCol="0" anchor="ctr"/>
           <a:lstStyle/>
           <a:p>
-            <a:pPr indent="0" marL="0">
+            <a:pPr marL="0" indent="0">
               <a:buNone/>
             </a:pPr>
             <a:r>
@@ -14396,7 +14135,7 @@
           </a:bodyPr>
           <a:lstStyle/>
           <a:p>
-            <a:pPr indent="0" marL="0">
+            <a:pPr marL="0" indent="0">
               <a:buNone/>
             </a:pPr>
             <a:r>
@@ -14435,7 +14174,7 @@
           <a:bodyPr wrap="square" lIns="0" tIns="0" rIns="0" bIns="0" rtlCol="0" anchor="ctr"/>
           <a:lstStyle/>
           <a:p>
-            <a:pPr algn="r" indent="0" marL="0">
+            <a:pPr marL="0" indent="0" algn="r">
               <a:buNone/>
             </a:pPr>
             <a:r>
@@ -14500,7 +14239,7 @@
           </a:bodyPr>
           <a:lstStyle/>
           <a:p>
-            <a:pPr indent="0" marL="0">
+            <a:pPr marL="0" indent="0">
               <a:buNone/>
             </a:pPr>
             <a:r>
@@ -14538,7 +14277,7 @@
           </a:bodyPr>
           <a:lstStyle/>
           <a:p>
-            <a:pPr indent="0" marL="0">
+            <a:pPr marL="0" indent="0">
               <a:buNone/>
             </a:pPr>
             <a:r>
@@ -14561,7 +14300,7 @@
         </p:nvSpPr>
         <p:spPr>
           <a:xfrm>
-            <a:off x="804672" y="1709928"/>
+            <a:off x="804672" y="1877193"/>
             <a:ext cx="1499616" cy="182880"/>
           </a:xfrm>
           <a:prstGeom prst="rect">
@@ -14576,7 +14315,7 @@
           </a:bodyPr>
           <a:lstStyle/>
           <a:p>
-            <a:pPr indent="0" marL="0">
+            <a:pPr marL="0" indent="0">
               <a:buNone/>
             </a:pPr>
             <a:r>
@@ -14641,7 +14380,7 @@
           </a:bodyPr>
           <a:lstStyle/>
           <a:p>
-            <a:pPr indent="0" marL="0">
+            <a:pPr marL="0" indent="0">
               <a:buNone/>
             </a:pPr>
             <a:r>
@@ -14679,7 +14418,7 @@
           </a:bodyPr>
           <a:lstStyle/>
           <a:p>
-            <a:pPr indent="0" marL="0">
+            <a:pPr marL="0" indent="0">
               <a:buNone/>
             </a:pPr>
             <a:r>
@@ -14702,7 +14441,7 @@
         </p:nvSpPr>
         <p:spPr>
           <a:xfrm>
-            <a:off x="2816352" y="1709928"/>
+            <a:off x="2816352" y="1874903"/>
             <a:ext cx="1499616" cy="182880"/>
           </a:xfrm>
           <a:prstGeom prst="rect">
@@ -14717,7 +14456,7 @@
           </a:bodyPr>
           <a:lstStyle/>
           <a:p>
-            <a:pPr indent="0" marL="0">
+            <a:pPr marL="0" indent="0">
               <a:buNone/>
             </a:pPr>
             <a:r>
@@ -14782,7 +14521,7 @@
           </a:bodyPr>
           <a:lstStyle/>
           <a:p>
-            <a:pPr indent="0" marL="0">
+            <a:pPr marL="0" indent="0">
               <a:buNone/>
             </a:pPr>
             <a:r>
@@ -14820,7 +14559,7 @@
           </a:bodyPr>
           <a:lstStyle/>
           <a:p>
-            <a:pPr indent="0" marL="0">
+            <a:pPr marL="0" indent="0">
               <a:buNone/>
             </a:pPr>
             <a:r>
@@ -14843,7 +14582,7 @@
         </p:nvSpPr>
         <p:spPr>
           <a:xfrm>
-            <a:off x="4828032" y="1709928"/>
+            <a:off x="4818888" y="1877193"/>
             <a:ext cx="1499616" cy="182880"/>
           </a:xfrm>
           <a:prstGeom prst="rect">
@@ -14858,7 +14597,7 @@
           </a:bodyPr>
           <a:lstStyle/>
           <a:p>
-            <a:pPr indent="0" marL="0">
+            <a:pPr marL="0" indent="0">
               <a:buNone/>
             </a:pPr>
             <a:r>
@@ -14923,7 +14662,7 @@
           </a:bodyPr>
           <a:lstStyle/>
           <a:p>
-            <a:pPr indent="0" marL="0">
+            <a:pPr marL="0" indent="0">
               <a:buNone/>
             </a:pPr>
             <a:r>
@@ -14961,7 +14700,7 @@
           </a:bodyPr>
           <a:lstStyle/>
           <a:p>
-            <a:pPr indent="0" marL="0">
+            <a:pPr marL="0" indent="0">
               <a:buNone/>
             </a:pPr>
             <a:r>
@@ -14984,7 +14723,7 @@
         </p:nvSpPr>
         <p:spPr>
           <a:xfrm>
-            <a:off x="6839712" y="1709928"/>
+            <a:off x="6830407" y="1875729"/>
             <a:ext cx="1088136" cy="182880"/>
           </a:xfrm>
           <a:prstGeom prst="rect">
@@ -14999,7 +14738,7 @@
           </a:bodyPr>
           <a:lstStyle/>
           <a:p>
-            <a:pPr indent="0" marL="0">
+            <a:pPr marL="0" indent="0">
               <a:buNone/>
             </a:pPr>
             <a:r>
@@ -15022,7 +14761,7 @@
         </p:nvSpPr>
         <p:spPr>
           <a:xfrm>
-            <a:off x="640080" y="2286000"/>
+            <a:off x="640080" y="2118735"/>
             <a:ext cx="3657600" cy="182880"/>
           </a:xfrm>
           <a:prstGeom prst="rect">
@@ -15035,7 +14774,7 @@
           <a:bodyPr wrap="square" lIns="0" tIns="0" rIns="0" bIns="0" rtlCol="0" anchor="ctr"/>
           <a:lstStyle/>
           <a:p>
-            <a:pPr indent="0" marL="0">
+            <a:pPr marL="0" indent="0">
               <a:buNone/>
             </a:pPr>
             <a:r>
@@ -15096,7 +14835,7 @@
           <a:bodyPr wrap="square" lIns="0" tIns="0" rIns="0" bIns="0" rtlCol="0" anchor="ctr"/>
           <a:lstStyle/>
           <a:p>
-            <a:pPr algn="ctr" indent="0" marL="0">
+            <a:pPr marL="0" indent="0" algn="ctr">
               <a:buNone/>
             </a:pPr>
             <a:r>
@@ -15134,7 +14873,7 @@
           </a:bodyPr>
           <a:lstStyle/>
           <a:p>
-            <a:pPr algn="ctr" indent="0" marL="0">
+            <a:pPr marL="0" indent="0" algn="ctr">
               <a:buNone/>
             </a:pPr>
             <a:r>
@@ -15195,7 +14934,7 @@
           <a:bodyPr wrap="square" lIns="0" tIns="0" rIns="0" bIns="0" rtlCol="0" anchor="ctr"/>
           <a:lstStyle/>
           <a:p>
-            <a:pPr algn="ctr" indent="0" marL="0">
+            <a:pPr marL="0" indent="0" algn="ctr">
               <a:buNone/>
             </a:pPr>
             <a:r>
@@ -15233,7 +14972,7 @@
           </a:bodyPr>
           <a:lstStyle/>
           <a:p>
-            <a:pPr algn="ctr" indent="0" marL="0">
+            <a:pPr marL="0" indent="0" algn="ctr">
               <a:buNone/>
             </a:pPr>
             <a:r>
@@ -15294,7 +15033,7 @@
           <a:bodyPr wrap="square" lIns="0" tIns="0" rIns="0" bIns="0" rtlCol="0" anchor="ctr"/>
           <a:lstStyle/>
           <a:p>
-            <a:pPr algn="ctr" indent="0" marL="0">
+            <a:pPr marL="0" indent="0" algn="ctr">
               <a:buNone/>
             </a:pPr>
             <a:r>
@@ -15332,7 +15071,7 @@
           </a:bodyPr>
           <a:lstStyle/>
           <a:p>
-            <a:pPr algn="ctr" indent="0" marL="0">
+            <a:pPr marL="0" indent="0" algn="ctr">
               <a:buNone/>
             </a:pPr>
             <a:r>
@@ -15393,7 +15132,7 @@
           <a:bodyPr wrap="square" lIns="0" tIns="0" rIns="0" bIns="0" rtlCol="0" anchor="ctr"/>
           <a:lstStyle/>
           <a:p>
-            <a:pPr algn="ctr" indent="0" marL="0">
+            <a:pPr marL="0" indent="0" algn="ctr">
               <a:buNone/>
             </a:pPr>
             <a:r>
@@ -15431,7 +15170,7 @@
           </a:bodyPr>
           <a:lstStyle/>
           <a:p>
-            <a:pPr algn="ctr" indent="0" marL="0">
+            <a:pPr marL="0" indent="0" algn="ctr">
               <a:buNone/>
             </a:pPr>
             <a:r>
@@ -15492,7 +15231,7 @@
           <a:bodyPr wrap="square" lIns="0" tIns="0" rIns="0" bIns="0" rtlCol="0" anchor="ctr"/>
           <a:lstStyle/>
           <a:p>
-            <a:pPr algn="ctr" indent="0" marL="0">
+            <a:pPr marL="0" indent="0" algn="ctr">
               <a:buNone/>
             </a:pPr>
             <a:r>
@@ -15530,7 +15269,7 @@
           </a:bodyPr>
           <a:lstStyle/>
           <a:p>
-            <a:pPr algn="ctr" indent="0" marL="0">
+            <a:pPr marL="0" indent="0" algn="ctr">
               <a:buNone/>
             </a:pPr>
             <a:r>
@@ -15553,7 +15292,7 @@
         </p:nvSpPr>
         <p:spPr>
           <a:xfrm>
-            <a:off x="4709160" y="2286000"/>
+            <a:off x="4709160" y="2118735"/>
             <a:ext cx="3337560" cy="182880"/>
           </a:xfrm>
           <a:prstGeom prst="rect">
@@ -15566,7 +15305,7 @@
           <a:bodyPr wrap="square" lIns="0" tIns="0" rIns="0" bIns="0" rtlCol="0" anchor="ctr"/>
           <a:lstStyle/>
           <a:p>
-            <a:pPr indent="0" marL="0">
+            <a:pPr marL="0" indent="0">
               <a:buNone/>
             </a:pPr>
             <a:r>
@@ -15627,7 +15366,7 @@
           <a:bodyPr wrap="square" lIns="0" tIns="0" rIns="0" bIns="0" rtlCol="0" anchor="ctr"/>
           <a:lstStyle/>
           <a:p>
-            <a:pPr algn="ctr" indent="0" marL="0">
+            <a:pPr marL="0" indent="0" algn="ctr">
               <a:buNone/>
             </a:pPr>
             <a:r>
@@ -15665,7 +15404,7 @@
           </a:bodyPr>
           <a:lstStyle/>
           <a:p>
-            <a:pPr algn="ctr" indent="0" marL="0">
+            <a:pPr marL="0" indent="0" algn="ctr">
               <a:buNone/>
             </a:pPr>
             <a:r>
@@ -15726,7 +15465,7 @@
           <a:bodyPr wrap="square" lIns="0" tIns="0" rIns="0" bIns="0" rtlCol="0" anchor="ctr"/>
           <a:lstStyle/>
           <a:p>
-            <a:pPr algn="ctr" indent="0" marL="0">
+            <a:pPr marL="0" indent="0" algn="ctr">
               <a:buNone/>
             </a:pPr>
             <a:r>
@@ -15764,7 +15503,7 @@
           </a:bodyPr>
           <a:lstStyle/>
           <a:p>
-            <a:pPr algn="ctr" indent="0" marL="0">
+            <a:pPr marL="0" indent="0" algn="ctr">
               <a:buNone/>
             </a:pPr>
             <a:r>
@@ -15825,7 +15564,7 @@
           <a:bodyPr wrap="square" lIns="0" tIns="0" rIns="0" bIns="0" rtlCol="0" anchor="ctr"/>
           <a:lstStyle/>
           <a:p>
-            <a:pPr algn="ctr" indent="0" marL="0">
+            <a:pPr marL="0" indent="0" algn="ctr">
               <a:buNone/>
             </a:pPr>
             <a:r>
@@ -15863,7 +15602,7 @@
           </a:bodyPr>
           <a:lstStyle/>
           <a:p>
-            <a:pPr algn="ctr" indent="0" marL="0">
+            <a:pPr marL="0" indent="0" algn="ctr">
               <a:buNone/>
             </a:pPr>
             <a:r>
@@ -15926,7 +15665,7 @@
           <a:bodyPr wrap="square" lIns="0" tIns="0" rIns="0" bIns="0" rtlCol="0" anchor="ctr"/>
           <a:lstStyle/>
           <a:p>
-            <a:pPr indent="0" marL="0">
+            <a:pPr marL="0" indent="0">
               <a:buNone/>
             </a:pPr>
             <a:r>
@@ -15964,7 +15703,7 @@
           </a:bodyPr>
           <a:lstStyle/>
           <a:p>
-            <a:pPr indent="0" marL="0">
+            <a:pPr marL="0" indent="0">
               <a:buNone/>
             </a:pPr>
             <a:r>
@@ -16000,7 +15739,7 @@
           <a:bodyPr wrap="square" lIns="0" tIns="0" rIns="0" bIns="0" rtlCol="0" anchor="ctr"/>
           <a:lstStyle/>
           <a:p>
-            <a:pPr indent="0" marL="0">
+            <a:pPr marL="0" indent="0">
               <a:buNone/>
             </a:pPr>
             <a:r>
@@ -16038,7 +15777,7 @@
           </a:bodyPr>
           <a:lstStyle/>
           <a:p>
-            <a:pPr indent="0" marL="0">
+            <a:pPr marL="0" indent="0">
               <a:buNone/>
             </a:pPr>
             <a:r>
@@ -16069,6 +15808,7 @@
         <a:solidFill>
           <a:srgbClr val="FFFFFF"/>
         </a:solidFill>
+        <a:effectLst/>
       </p:bgPr>
     </p:bg>
     <p:spTree>
@@ -16156,7 +15896,7 @@
           <a:bodyPr wrap="square" lIns="0" tIns="0" rIns="0" bIns="0" rtlCol="0" anchor="ctr"/>
           <a:lstStyle/>
           <a:p>
-            <a:pPr indent="0" marL="0">
+            <a:pPr marL="0" indent="0">
               <a:buNone/>
             </a:pPr>
             <a:r>
@@ -16197,7 +15937,7 @@
           </a:bodyPr>
           <a:lstStyle/>
           <a:p>
-            <a:pPr indent="0" marL="0">
+            <a:pPr marL="0" indent="0">
               <a:buNone/>
             </a:pPr>
             <a:r>
@@ -16236,7 +15976,7 @@
           <a:bodyPr wrap="square" lIns="0" tIns="0" rIns="0" bIns="0" rtlCol="0" anchor="ctr"/>
           <a:lstStyle/>
           <a:p>
-            <a:pPr algn="r" indent="0" marL="0">
+            <a:pPr marL="0" indent="0" algn="r">
               <a:buNone/>
             </a:pPr>
             <a:r>
@@ -16272,7 +16012,7 @@
           <a:bodyPr wrap="square" lIns="0" tIns="0" rIns="0" bIns="0" rtlCol="0" anchor="ctr"/>
           <a:lstStyle/>
           <a:p>
-            <a:pPr indent="0" marL="0">
+            <a:pPr marL="0" indent="0">
               <a:buNone/>
             </a:pPr>
             <a:r>
@@ -16308,7 +16048,7 @@
           <a:bodyPr wrap="square" lIns="0" tIns="0" rIns="0" bIns="0" rtlCol="0" anchor="ctr"/>
           <a:lstStyle/>
           <a:p>
-            <a:pPr indent="0" marL="0">
+            <a:pPr marL="0" indent="0">
               <a:buNone/>
             </a:pPr>
             <a:r>
@@ -16371,7 +16111,7 @@
           <a:bodyPr wrap="square" lIns="0" tIns="0" rIns="0" bIns="0" rtlCol="0" anchor="ctr"/>
           <a:lstStyle/>
           <a:p>
-            <a:pPr indent="0" marL="0">
+            <a:pPr marL="0" indent="0">
               <a:buNone/>
             </a:pPr>
             <a:r>
@@ -16409,7 +16149,7 @@
           </a:bodyPr>
           <a:lstStyle/>
           <a:p>
-            <a:pPr algn="ctr" indent="0" marL="0">
+            <a:pPr marL="0" indent="0" algn="ctr">
               <a:buNone/>
             </a:pPr>
             <a:r>
@@ -16447,7 +16187,7 @@
           </a:bodyPr>
           <a:lstStyle/>
           <a:p>
-            <a:pPr algn="ctr" indent="0" marL="0">
+            <a:pPr marL="0" indent="0" algn="ctr">
               <a:buNone/>
             </a:pPr>
             <a:r>
@@ -16485,7 +16225,7 @@
           </a:bodyPr>
           <a:lstStyle/>
           <a:p>
-            <a:pPr algn="ctr" indent="0" marL="0">
+            <a:pPr marL="0" indent="0" algn="ctr">
               <a:buNone/>
             </a:pPr>
             <a:r>
@@ -16523,7 +16263,7 @@
           </a:bodyPr>
           <a:lstStyle/>
           <a:p>
-            <a:pPr algn="ctr" indent="0" marL="0">
+            <a:pPr marL="0" indent="0" algn="ctr">
               <a:buNone/>
             </a:pPr>
             <a:r>
@@ -16561,7 +16301,7 @@
           </a:bodyPr>
           <a:lstStyle/>
           <a:p>
-            <a:pPr algn="ctr" indent="0" marL="0">
+            <a:pPr marL="0" indent="0" algn="ctr">
               <a:buNone/>
             </a:pPr>
             <a:r>
@@ -16599,7 +16339,7 @@
           </a:bodyPr>
           <a:lstStyle/>
           <a:p>
-            <a:pPr algn="ctr" indent="0" marL="0">
+            <a:pPr marL="0" indent="0" algn="ctr">
               <a:buNone/>
             </a:pPr>
             <a:r>
@@ -16637,7 +16377,7 @@
           </a:bodyPr>
           <a:lstStyle/>
           <a:p>
-            <a:pPr indent="0" marL="0">
+            <a:pPr marL="0" indent="0">
               <a:buNone/>
             </a:pPr>
             <a:r>
@@ -16700,7 +16440,7 @@
           <a:bodyPr wrap="square" lIns="0" tIns="0" rIns="0" bIns="0" rtlCol="0" anchor="ctr"/>
           <a:lstStyle/>
           <a:p>
-            <a:pPr indent="0" marL="0">
+            <a:pPr marL="0" indent="0">
               <a:buNone/>
             </a:pPr>
             <a:r>
@@ -16738,7 +16478,7 @@
           </a:bodyPr>
           <a:lstStyle/>
           <a:p>
-            <a:pPr algn="ctr" indent="0" marL="0">
+            <a:pPr marL="0" indent="0" algn="ctr">
               <a:buNone/>
             </a:pPr>
             <a:r>
@@ -16776,7 +16516,7 @@
           </a:bodyPr>
           <a:lstStyle/>
           <a:p>
-            <a:pPr algn="ctr" indent="0" marL="0">
+            <a:pPr marL="0" indent="0" algn="ctr">
               <a:buNone/>
             </a:pPr>
             <a:r>
@@ -16814,7 +16554,7 @@
           </a:bodyPr>
           <a:lstStyle/>
           <a:p>
-            <a:pPr algn="ctr" indent="0" marL="0">
+            <a:pPr marL="0" indent="0" algn="ctr">
               <a:buNone/>
             </a:pPr>
             <a:r>
@@ -16852,7 +16592,7 @@
           </a:bodyPr>
           <a:lstStyle/>
           <a:p>
-            <a:pPr algn="ctr" indent="0" marL="0">
+            <a:pPr marL="0" indent="0" algn="ctr">
               <a:buNone/>
             </a:pPr>
             <a:r>
@@ -16890,7 +16630,7 @@
           </a:bodyPr>
           <a:lstStyle/>
           <a:p>
-            <a:pPr algn="ctr" indent="0" marL="0">
+            <a:pPr marL="0" indent="0" algn="ctr">
               <a:buNone/>
             </a:pPr>
             <a:r>
@@ -16928,7 +16668,7 @@
           </a:bodyPr>
           <a:lstStyle/>
           <a:p>
-            <a:pPr algn="ctr" indent="0" marL="0">
+            <a:pPr marL="0" indent="0" algn="ctr">
               <a:buNone/>
             </a:pPr>
             <a:r>
@@ -16966,7 +16706,7 @@
           </a:bodyPr>
           <a:lstStyle/>
           <a:p>
-            <a:pPr indent="0" marL="0">
+            <a:pPr marL="0" indent="0">
               <a:buNone/>
             </a:pPr>
             <a:r>
@@ -17029,7 +16769,7 @@
           <a:bodyPr wrap="square" lIns="0" tIns="0" rIns="0" bIns="0" rtlCol="0" anchor="ctr"/>
           <a:lstStyle/>
           <a:p>
-            <a:pPr indent="0" marL="0">
+            <a:pPr marL="0" indent="0">
               <a:buNone/>
             </a:pPr>
             <a:r>
@@ -17067,7 +16807,7 @@
           </a:bodyPr>
           <a:lstStyle/>
           <a:p>
-            <a:pPr algn="ctr" indent="0" marL="0">
+            <a:pPr marL="0" indent="0" algn="ctr">
               <a:buNone/>
             </a:pPr>
             <a:r>
@@ -17105,7 +16845,7 @@
           </a:bodyPr>
           <a:lstStyle/>
           <a:p>
-            <a:pPr algn="ctr" indent="0" marL="0">
+            <a:pPr marL="0" indent="0" algn="ctr">
               <a:buNone/>
             </a:pPr>
             <a:r>
@@ -17143,7 +16883,7 @@
           </a:bodyPr>
           <a:lstStyle/>
           <a:p>
-            <a:pPr algn="ctr" indent="0" marL="0">
+            <a:pPr marL="0" indent="0" algn="ctr">
               <a:buNone/>
             </a:pPr>
             <a:r>
@@ -17181,7 +16921,7 @@
           </a:bodyPr>
           <a:lstStyle/>
           <a:p>
-            <a:pPr algn="ctr" indent="0" marL="0">
+            <a:pPr marL="0" indent="0" algn="ctr">
               <a:buNone/>
             </a:pPr>
             <a:r>
@@ -17219,7 +16959,7 @@
           </a:bodyPr>
           <a:lstStyle/>
           <a:p>
-            <a:pPr algn="ctr" indent="0" marL="0">
+            <a:pPr marL="0" indent="0" algn="ctr">
               <a:buNone/>
             </a:pPr>
             <a:r>
@@ -17257,7 +16997,7 @@
           </a:bodyPr>
           <a:lstStyle/>
           <a:p>
-            <a:pPr algn="ctr" indent="0" marL="0">
+            <a:pPr marL="0" indent="0" algn="ctr">
               <a:buNone/>
             </a:pPr>
             <a:r>
@@ -17295,7 +17035,7 @@
           </a:bodyPr>
           <a:lstStyle/>
           <a:p>
-            <a:pPr indent="0" marL="0">
+            <a:pPr marL="0" indent="0">
               <a:buNone/>
             </a:pPr>
             <a:r>
@@ -17333,7 +17073,7 @@
           </a:bodyPr>
           <a:lstStyle/>
           <a:p>
-            <a:pPr algn="ctr" indent="0" marL="0">
+            <a:pPr marL="0" indent="0" algn="ctr">
               <a:buNone/>
             </a:pPr>
             <a:r>
@@ -17364,6 +17104,7 @@
         <a:solidFill>
           <a:srgbClr val="FFFFFF"/>
         </a:solidFill>
+        <a:effectLst/>
       </p:bgPr>
     </p:bg>
     <p:spTree>
@@ -17451,7 +17192,7 @@
           <a:bodyPr wrap="square" lIns="0" tIns="0" rIns="0" bIns="0" rtlCol="0" anchor="ctr"/>
           <a:lstStyle/>
           <a:p>
-            <a:pPr indent="0" marL="0">
+            <a:pPr marL="0" indent="0">
               <a:buNone/>
             </a:pPr>
             <a:r>
@@ -17477,7 +17218,7 @@
         </p:nvSpPr>
         <p:spPr>
           <a:xfrm>
-            <a:off x="502920" y="530352"/>
+            <a:off x="502920" y="541503"/>
             <a:ext cx="7680960" cy="411480"/>
           </a:xfrm>
           <a:prstGeom prst="rect">
@@ -17488,11 +17229,11 @@
         </p:spPr>
         <p:txBody>
           <a:bodyPr wrap="square" lIns="0" tIns="0" rIns="0" bIns="0" rtlCol="0" anchor="ctr">
-            <a:normAutofit/>
-          </a:bodyPr>
-          <a:lstStyle/>
-          <a:p>
-            <a:pPr indent="0" marL="0">
+            <a:normAutofit fontScale="70000" lnSpcReduction="20000"/>
+          </a:bodyPr>
+          <a:lstStyle/>
+          <a:p>
+            <a:pPr marL="0" indent="0">
               <a:buNone/>
             </a:pPr>
             <a:r>
@@ -17531,7 +17272,7 @@
           <a:bodyPr wrap="square" lIns="0" tIns="0" rIns="0" bIns="0" rtlCol="0" anchor="ctr"/>
           <a:lstStyle/>
           <a:p>
-            <a:pPr algn="r" indent="0" marL="0">
+            <a:pPr marL="0" indent="0" algn="r">
               <a:buNone/>
             </a:pPr>
             <a:r>
@@ -17596,7 +17337,7 @@
           </a:bodyPr>
           <a:lstStyle/>
           <a:p>
-            <a:pPr indent="0" marL="0">
+            <a:pPr marL="0" indent="0">
               <a:buNone/>
             </a:pPr>
             <a:r>
@@ -17634,7 +17375,7 @@
           </a:bodyPr>
           <a:lstStyle/>
           <a:p>
-            <a:pPr indent="0" marL="0">
+            <a:pPr marL="0" indent="0">
               <a:buNone/>
             </a:pPr>
             <a:r>
@@ -17657,7 +17398,7 @@
         </p:nvSpPr>
         <p:spPr>
           <a:xfrm>
-            <a:off x="804672" y="1709928"/>
+            <a:off x="804672" y="1855986"/>
             <a:ext cx="1499616" cy="182880"/>
           </a:xfrm>
           <a:prstGeom prst="rect">
@@ -17672,7 +17413,7 @@
           </a:bodyPr>
           <a:lstStyle/>
           <a:p>
-            <a:pPr indent="0" marL="0">
+            <a:pPr marL="0" indent="0">
               <a:buNone/>
             </a:pPr>
             <a:r>
@@ -17737,7 +17478,7 @@
           </a:bodyPr>
           <a:lstStyle/>
           <a:p>
-            <a:pPr indent="0" marL="0">
+            <a:pPr marL="0" indent="0">
               <a:buNone/>
             </a:pPr>
             <a:r>
@@ -17775,7 +17516,7 @@
           </a:bodyPr>
           <a:lstStyle/>
           <a:p>
-            <a:pPr indent="0" marL="0">
+            <a:pPr marL="0" indent="0">
               <a:buNone/>
             </a:pPr>
             <a:r>
@@ -17798,7 +17539,7 @@
         </p:nvSpPr>
         <p:spPr>
           <a:xfrm>
-            <a:off x="2816352" y="1709928"/>
+            <a:off x="2816352" y="1851660"/>
             <a:ext cx="1499616" cy="182880"/>
           </a:xfrm>
           <a:prstGeom prst="rect">
@@ -17813,7 +17554,7 @@
           </a:bodyPr>
           <a:lstStyle/>
           <a:p>
-            <a:pPr indent="0" marL="0">
+            <a:pPr marL="0" indent="0">
               <a:buNone/>
             </a:pPr>
             <a:r>
@@ -17878,7 +17619,7 @@
           </a:bodyPr>
           <a:lstStyle/>
           <a:p>
-            <a:pPr indent="0" marL="0">
+            <a:pPr marL="0" indent="0">
               <a:buNone/>
             </a:pPr>
             <a:r>
@@ -17916,7 +17657,7 @@
           </a:bodyPr>
           <a:lstStyle/>
           <a:p>
-            <a:pPr indent="0" marL="0">
+            <a:pPr marL="0" indent="0">
               <a:buNone/>
             </a:pPr>
             <a:r>
@@ -17939,7 +17680,7 @@
         </p:nvSpPr>
         <p:spPr>
           <a:xfrm>
-            <a:off x="4828032" y="1709928"/>
+            <a:off x="4828032" y="1855986"/>
             <a:ext cx="1499616" cy="182880"/>
           </a:xfrm>
           <a:prstGeom prst="rect">
@@ -17954,7 +17695,7 @@
           </a:bodyPr>
           <a:lstStyle/>
           <a:p>
-            <a:pPr indent="0" marL="0">
+            <a:pPr marL="0" indent="0">
               <a:buNone/>
             </a:pPr>
             <a:r>
@@ -18019,7 +17760,7 @@
           </a:bodyPr>
           <a:lstStyle/>
           <a:p>
-            <a:pPr indent="0" marL="0">
+            <a:pPr marL="0" indent="0">
               <a:buNone/>
             </a:pPr>
             <a:r>
@@ -18057,7 +17798,7 @@
           </a:bodyPr>
           <a:lstStyle/>
           <a:p>
-            <a:pPr indent="0" marL="0">
+            <a:pPr marL="0" indent="0">
               <a:buNone/>
             </a:pPr>
             <a:r>
@@ -18080,7 +17821,7 @@
         </p:nvSpPr>
         <p:spPr>
           <a:xfrm>
-            <a:off x="6839712" y="1709928"/>
+            <a:off x="6839712" y="1822679"/>
             <a:ext cx="1088136" cy="182880"/>
           </a:xfrm>
           <a:prstGeom prst="rect">
@@ -18095,7 +17836,7 @@
           </a:bodyPr>
           <a:lstStyle/>
           <a:p>
-            <a:pPr indent="0" marL="0">
+            <a:pPr marL="0" indent="0">
               <a:buNone/>
             </a:pPr>
             <a:r>
@@ -18118,7 +17859,7 @@
         </p:nvSpPr>
         <p:spPr>
           <a:xfrm>
-            <a:off x="640080" y="2286000"/>
+            <a:off x="640080" y="2121408"/>
             <a:ext cx="3886200" cy="182880"/>
           </a:xfrm>
           <a:prstGeom prst="rect">
@@ -18131,7 +17872,7 @@
           <a:bodyPr wrap="square" lIns="0" tIns="0" rIns="0" bIns="0" rtlCol="0" anchor="ctr"/>
           <a:lstStyle/>
           <a:p>
-            <a:pPr indent="0" marL="0">
+            <a:pPr marL="0" indent="0">
               <a:buNone/>
             </a:pPr>
             <a:r>
@@ -18192,7 +17933,7 @@
           <a:bodyPr wrap="square" lIns="0" tIns="0" rIns="0" bIns="0" rtlCol="0" anchor="ctr"/>
           <a:lstStyle/>
           <a:p>
-            <a:pPr algn="ctr" indent="0" marL="0">
+            <a:pPr marL="0" indent="0" algn="ctr">
               <a:buNone/>
             </a:pPr>
             <a:r>
@@ -18230,7 +17971,7 @@
           </a:bodyPr>
           <a:lstStyle/>
           <a:p>
-            <a:pPr algn="ctr" indent="0" marL="0">
+            <a:pPr marL="0" indent="0" algn="ctr">
               <a:buNone/>
             </a:pPr>
             <a:r>
@@ -18291,7 +18032,7 @@
           <a:bodyPr wrap="square" lIns="0" tIns="0" rIns="0" bIns="0" rtlCol="0" anchor="ctr"/>
           <a:lstStyle/>
           <a:p>
-            <a:pPr algn="ctr" indent="0" marL="0">
+            <a:pPr marL="0" indent="0" algn="ctr">
               <a:buNone/>
             </a:pPr>
             <a:r>
@@ -18329,7 +18070,7 @@
           </a:bodyPr>
           <a:lstStyle/>
           <a:p>
-            <a:pPr algn="ctr" indent="0" marL="0">
+            <a:pPr marL="0" indent="0" algn="ctr">
               <a:buNone/>
             </a:pPr>
             <a:r>
@@ -18390,7 +18131,7 @@
           <a:bodyPr wrap="square" lIns="0" tIns="0" rIns="0" bIns="0" rtlCol="0" anchor="ctr"/>
           <a:lstStyle/>
           <a:p>
-            <a:pPr algn="ctr" indent="0" marL="0">
+            <a:pPr marL="0" indent="0" algn="ctr">
               <a:buNone/>
             </a:pPr>
             <a:r>
@@ -18428,7 +18169,7 @@
           </a:bodyPr>
           <a:lstStyle/>
           <a:p>
-            <a:pPr algn="ctr" indent="0" marL="0">
+            <a:pPr marL="0" indent="0" algn="ctr">
               <a:buNone/>
             </a:pPr>
             <a:r>
@@ -18489,7 +18230,7 @@
           <a:bodyPr wrap="square" lIns="0" tIns="0" rIns="0" bIns="0" rtlCol="0" anchor="ctr"/>
           <a:lstStyle/>
           <a:p>
-            <a:pPr algn="ctr" indent="0" marL="0">
+            <a:pPr marL="0" indent="0" algn="ctr">
               <a:buNone/>
             </a:pPr>
             <a:r>
@@ -18527,7 +18268,7 @@
           </a:bodyPr>
           <a:lstStyle/>
           <a:p>
-            <a:pPr algn="ctr" indent="0" marL="0">
+            <a:pPr marL="0" indent="0" algn="ctr">
               <a:buNone/>
             </a:pPr>
             <a:r>
@@ -18550,7 +18291,7 @@
         </p:nvSpPr>
         <p:spPr>
           <a:xfrm>
-            <a:off x="4892040" y="2286000"/>
+            <a:off x="4884610" y="2121408"/>
             <a:ext cx="3383280" cy="182880"/>
           </a:xfrm>
           <a:prstGeom prst="rect">
@@ -18563,7 +18304,7 @@
           <a:bodyPr wrap="square" lIns="0" tIns="0" rIns="0" bIns="0" rtlCol="0" anchor="ctr"/>
           <a:lstStyle/>
           <a:p>
-            <a:pPr indent="0" marL="0">
+            <a:pPr marL="0" indent="0">
               <a:buNone/>
             </a:pPr>
             <a:r>
@@ -18624,7 +18365,7 @@
           <a:bodyPr wrap="square" lIns="0" tIns="0" rIns="0" bIns="0" rtlCol="0" anchor="ctr"/>
           <a:lstStyle/>
           <a:p>
-            <a:pPr algn="ctr" indent="0" marL="0">
+            <a:pPr marL="0" indent="0" algn="ctr">
               <a:buNone/>
             </a:pPr>
             <a:r>
@@ -18662,7 +18403,7 @@
           </a:bodyPr>
           <a:lstStyle/>
           <a:p>
-            <a:pPr algn="ctr" indent="0" marL="0">
+            <a:pPr marL="0" indent="0" algn="ctr">
               <a:buNone/>
             </a:pPr>
             <a:r>
@@ -18723,7 +18464,7 @@
           <a:bodyPr wrap="square" lIns="0" tIns="0" rIns="0" bIns="0" rtlCol="0" anchor="ctr"/>
           <a:lstStyle/>
           <a:p>
-            <a:pPr algn="ctr" indent="0" marL="0">
+            <a:pPr marL="0" indent="0" algn="ctr">
               <a:buNone/>
             </a:pPr>
             <a:r>
@@ -18761,7 +18502,7 @@
           </a:bodyPr>
           <a:lstStyle/>
           <a:p>
-            <a:pPr algn="ctr" indent="0" marL="0">
+            <a:pPr marL="0" indent="0" algn="ctr">
               <a:buNone/>
             </a:pPr>
             <a:r>
@@ -18822,7 +18563,7 @@
           <a:bodyPr wrap="square" lIns="0" tIns="0" rIns="0" bIns="0" rtlCol="0" anchor="ctr"/>
           <a:lstStyle/>
           <a:p>
-            <a:pPr algn="ctr" indent="0" marL="0">
+            <a:pPr marL="0" indent="0" algn="ctr">
               <a:buNone/>
             </a:pPr>
             <a:r>
@@ -18860,7 +18601,7 @@
           </a:bodyPr>
           <a:lstStyle/>
           <a:p>
-            <a:pPr algn="ctr" indent="0" marL="0">
+            <a:pPr marL="0" indent="0" algn="ctr">
               <a:buNone/>
             </a:pPr>
             <a:r>
@@ -18921,7 +18662,7 @@
           <a:bodyPr wrap="square" lIns="0" tIns="0" rIns="0" bIns="0" rtlCol="0" anchor="ctr"/>
           <a:lstStyle/>
           <a:p>
-            <a:pPr algn="ctr" indent="0" marL="0">
+            <a:pPr marL="0" indent="0" algn="ctr">
               <a:buNone/>
             </a:pPr>
             <a:r>
@@ -18959,7 +18700,7 @@
           </a:bodyPr>
           <a:lstStyle/>
           <a:p>
-            <a:pPr algn="ctr" indent="0" marL="0">
+            <a:pPr marL="0" indent="0" algn="ctr">
               <a:buNone/>
             </a:pPr>
             <a:r>
@@ -19022,7 +18763,7 @@
           <a:bodyPr wrap="square" lIns="0" tIns="0" rIns="0" bIns="0" rtlCol="0" anchor="ctr"/>
           <a:lstStyle/>
           <a:p>
-            <a:pPr indent="0" marL="0">
+            <a:pPr marL="0" indent="0">
               <a:buNone/>
             </a:pPr>
             <a:r>
@@ -19060,18 +18801,17 @@
           </a:bodyPr>
           <a:lstStyle/>
           <a:p>
-            <a:pPr indent="0" marL="0">
+            <a:pPr marL="0" indent="0">
               <a:buNone/>
             </a:pPr>
             <a:r>
               <a:rPr lang="en-US" sz="1050" dirty="0">
                 <a:solidFill>
-                  <a:srgbClr val="121426"/>
+                  <a:schemeClr val="bg1"/>
                 </a:solidFill>
               </a:rPr>
               <a:t>Skar sostiene interacción alta; Disley abre volumen nuevo con tono humorístico y cercano. Para próximos meses, combinar perfiles de alto alcance con micro-nichos de expertise.</a:t>
             </a:r>
-            <a:endParaRPr lang="en-US" sz="1050" dirty="0"/>
           </a:p>
         </p:txBody>
       </p:sp>
@@ -19096,7 +18836,7 @@
           <a:bodyPr wrap="square" lIns="0" tIns="0" rIns="0" bIns="0" rtlCol="0" anchor="ctr"/>
           <a:lstStyle/>
           <a:p>
-            <a:pPr indent="0" marL="0">
+            <a:pPr marL="0" indent="0">
               <a:buNone/>
             </a:pPr>
             <a:r>
@@ -19134,18 +18874,17 @@
           </a:bodyPr>
           <a:lstStyle/>
           <a:p>
-            <a:pPr indent="0" marL="0">
+            <a:pPr marL="0" indent="0">
               <a:buNone/>
             </a:pPr>
             <a:r>
               <a:rPr lang="en-US" sz="1050" dirty="0">
                 <a:solidFill>
-                  <a:srgbClr val="121426"/>
+                  <a:schemeClr val="bg1"/>
                 </a:solidFill>
               </a:rPr>
               <a:t>70% creators de performance, 20% nichos estratégicos, 10% apuestas en tendencia.</a:t>
             </a:r>
-            <a:endParaRPr lang="en-US" sz="1050" dirty="0"/>
           </a:p>
         </p:txBody>
       </p:sp>
@@ -19450,4 +19189,299 @@
     </a:ext>
   </a:extLst>
 </a:theme>
+</file>
+
+<file path=ppt/theme/theme2.xml><?xml version="1.0" encoding="utf-8"?>
+<a:theme xmlns:a="http://schemas.openxmlformats.org/drawingml/2006/main" name="Tema de Office">
+  <a:themeElements>
+    <a:clrScheme name="Office">
+      <a:dk1>
+        <a:sysClr val="windowText" lastClr="000000"/>
+      </a:dk1>
+      <a:lt1>
+        <a:sysClr val="window" lastClr="FFFFFF"/>
+      </a:lt1>
+      <a:dk2>
+        <a:srgbClr val="44546A"/>
+      </a:dk2>
+      <a:lt2>
+        <a:srgbClr val="E7E6E6"/>
+      </a:lt2>
+      <a:accent1>
+        <a:srgbClr val="4472C4"/>
+      </a:accent1>
+      <a:accent2>
+        <a:srgbClr val="ED7D31"/>
+      </a:accent2>
+      <a:accent3>
+        <a:srgbClr val="A5A5A5"/>
+      </a:accent3>
+      <a:accent4>
+        <a:srgbClr val="FFC000"/>
+      </a:accent4>
+      <a:accent5>
+        <a:srgbClr val="5B9BD5"/>
+      </a:accent5>
+      <a:accent6>
+        <a:srgbClr val="70AD47"/>
+      </a:accent6>
+      <a:hlink>
+        <a:srgbClr val="0563C1"/>
+      </a:hlink>
+      <a:folHlink>
+        <a:srgbClr val="954F72"/>
+      </a:folHlink>
+    </a:clrScheme>
+    <a:fontScheme name="Office">
+      <a:majorFont>
+        <a:latin typeface="Calibri Light" panose="020F0302020204030204"/>
+        <a:ea typeface=""/>
+        <a:cs typeface=""/>
+        <a:font script="Jpan" typeface="游ゴシック Light"/>
+        <a:font script="Hang" typeface="맑은 고딕"/>
+        <a:font script="Hans" typeface="等线 Light"/>
+        <a:font script="Hant" typeface="新細明體"/>
+        <a:font script="Arab" typeface="Times New Roman"/>
+        <a:font script="Hebr" typeface="Times New Roman"/>
+        <a:font script="Thai" typeface="Angsana New"/>
+        <a:font script="Ethi" typeface="Nyala"/>
+        <a:font script="Beng" typeface="Vrinda"/>
+        <a:font script="Gujr" typeface="Shruti"/>
+        <a:font script="Khmr" typeface="MoolBoran"/>
+        <a:font script="Knda" typeface="Tunga"/>
+        <a:font script="Guru" typeface="Raavi"/>
+        <a:font script="Cans" typeface="Euphemia"/>
+        <a:font script="Cher" typeface="Plantagenet Cherokee"/>
+        <a:font script="Yiii" typeface="Microsoft Yi Baiti"/>
+        <a:font script="Tibt" typeface="Microsoft Himalaya"/>
+        <a:font script="Thaa" typeface="MV Boli"/>
+        <a:font script="Deva" typeface="Mangal"/>
+        <a:font script="Telu" typeface="Gautami"/>
+        <a:font script="Taml" typeface="Latha"/>
+        <a:font script="Syrc" typeface="Estrangelo Edessa"/>
+        <a:font script="Orya" typeface="Kalinga"/>
+        <a:font script="Mlym" typeface="Kartika"/>
+        <a:font script="Laoo" typeface="DokChampa"/>
+        <a:font script="Sinh" typeface="Iskoola Pota"/>
+        <a:font script="Mong" typeface="Mongolian Baiti"/>
+        <a:font script="Viet" typeface="Times New Roman"/>
+        <a:font script="Uigh" typeface="Microsoft Uighur"/>
+        <a:font script="Geor" typeface="Sylfaen"/>
+        <a:font script="Armn" typeface="Arial"/>
+        <a:font script="Bugi" typeface="Leelawadee UI"/>
+        <a:font script="Bopo" typeface="Microsoft JhengHei"/>
+        <a:font script="Java" typeface="Javanese Text"/>
+        <a:font script="Lisu" typeface="Segoe UI"/>
+        <a:font script="Mymr" typeface="Myanmar Text"/>
+        <a:font script="Nkoo" typeface="Ebrima"/>
+        <a:font script="Olck" typeface="Nirmala UI"/>
+        <a:font script="Osma" typeface="Ebrima"/>
+        <a:font script="Phag" typeface="Phagspa"/>
+        <a:font script="Syrn" typeface="Estrangelo Edessa"/>
+        <a:font script="Syrj" typeface="Estrangelo Edessa"/>
+        <a:font script="Syre" typeface="Estrangelo Edessa"/>
+        <a:font script="Sora" typeface="Nirmala UI"/>
+        <a:font script="Tale" typeface="Microsoft Tai Le"/>
+        <a:font script="Talu" typeface="Microsoft New Tai Lue"/>
+        <a:font script="Tfng" typeface="Ebrima"/>
+      </a:majorFont>
+      <a:minorFont>
+        <a:latin typeface="Calibri" panose="020F0502020204030204"/>
+        <a:ea typeface=""/>
+        <a:cs typeface=""/>
+        <a:font script="Jpan" typeface="游ゴシック"/>
+        <a:font script="Hang" typeface="맑은 고딕"/>
+        <a:font script="Hans" typeface="等线"/>
+        <a:font script="Hant" typeface="新細明體"/>
+        <a:font script="Arab" typeface="Arial"/>
+        <a:font script="Hebr" typeface="Arial"/>
+        <a:font script="Thai" typeface="Cordia New"/>
+        <a:font script="Ethi" typeface="Nyala"/>
+        <a:font script="Beng" typeface="Vrinda"/>
+        <a:font script="Gujr" typeface="Shruti"/>
+        <a:font script="Khmr" typeface="DaunPenh"/>
+        <a:font script="Knda" typeface="Tunga"/>
+        <a:font script="Guru" typeface="Raavi"/>
+        <a:font script="Cans" typeface="Euphemia"/>
+        <a:font script="Cher" typeface="Plantagenet Cherokee"/>
+        <a:font script="Yiii" typeface="Microsoft Yi Baiti"/>
+        <a:font script="Tibt" typeface="Microsoft Himalaya"/>
+        <a:font script="Thaa" typeface="MV Boli"/>
+        <a:font script="Deva" typeface="Mangal"/>
+        <a:font script="Telu" typeface="Gautami"/>
+        <a:font script="Taml" typeface="Latha"/>
+        <a:font script="Syrc" typeface="Estrangelo Edessa"/>
+        <a:font script="Orya" typeface="Kalinga"/>
+        <a:font script="Mlym" typeface="Kartika"/>
+        <a:font script="Laoo" typeface="DokChampa"/>
+        <a:font script="Sinh" typeface="Iskoola Pota"/>
+        <a:font script="Mong" typeface="Mongolian Baiti"/>
+        <a:font script="Viet" typeface="Arial"/>
+        <a:font script="Uigh" typeface="Microsoft Uighur"/>
+        <a:font script="Geor" typeface="Sylfaen"/>
+        <a:font script="Armn" typeface="Arial"/>
+        <a:font script="Bugi" typeface="Leelawadee UI"/>
+        <a:font script="Bopo" typeface="Microsoft JhengHei"/>
+        <a:font script="Java" typeface="Javanese Text"/>
+        <a:font script="Lisu" typeface="Segoe UI"/>
+        <a:font script="Mymr" typeface="Myanmar Text"/>
+        <a:font script="Nkoo" typeface="Ebrima"/>
+        <a:font script="Olck" typeface="Nirmala UI"/>
+        <a:font script="Osma" typeface="Ebrima"/>
+        <a:font script="Phag" typeface="Phagspa"/>
+        <a:font script="Syrn" typeface="Estrangelo Edessa"/>
+        <a:font script="Syrj" typeface="Estrangelo Edessa"/>
+        <a:font script="Syre" typeface="Estrangelo Edessa"/>
+        <a:font script="Sora" typeface="Nirmala UI"/>
+        <a:font script="Tale" typeface="Microsoft Tai Le"/>
+        <a:font script="Talu" typeface="Microsoft New Tai Lue"/>
+        <a:font script="Tfng" typeface="Ebrima"/>
+      </a:minorFont>
+    </a:fontScheme>
+    <a:fmtScheme name="Office">
+      <a:fillStyleLst>
+        <a:solidFill>
+          <a:schemeClr val="phClr"/>
+        </a:solidFill>
+        <a:gradFill rotWithShape="1">
+          <a:gsLst>
+            <a:gs pos="0">
+              <a:schemeClr val="phClr">
+                <a:lumMod val="110000"/>
+                <a:satMod val="105000"/>
+                <a:tint val="67000"/>
+              </a:schemeClr>
+            </a:gs>
+            <a:gs pos="50000">
+              <a:schemeClr val="phClr">
+                <a:lumMod val="105000"/>
+                <a:satMod val="103000"/>
+                <a:tint val="73000"/>
+              </a:schemeClr>
+            </a:gs>
+            <a:gs pos="100000">
+              <a:schemeClr val="phClr">
+                <a:lumMod val="105000"/>
+                <a:satMod val="109000"/>
+                <a:tint val="81000"/>
+              </a:schemeClr>
+            </a:gs>
+          </a:gsLst>
+          <a:lin ang="5400000" scaled="0"/>
+        </a:gradFill>
+        <a:gradFill rotWithShape="1">
+          <a:gsLst>
+            <a:gs pos="0">
+              <a:schemeClr val="phClr">
+                <a:satMod val="103000"/>
+                <a:lumMod val="102000"/>
+                <a:tint val="94000"/>
+              </a:schemeClr>
+            </a:gs>
+            <a:gs pos="50000">
+              <a:schemeClr val="phClr">
+                <a:satMod val="110000"/>
+                <a:lumMod val="100000"/>
+                <a:shade val="100000"/>
+              </a:schemeClr>
+            </a:gs>
+            <a:gs pos="100000">
+              <a:schemeClr val="phClr">
+                <a:lumMod val="99000"/>
+                <a:satMod val="120000"/>
+                <a:shade val="78000"/>
+              </a:schemeClr>
+            </a:gs>
+          </a:gsLst>
+          <a:lin ang="5400000" scaled="0"/>
+        </a:gradFill>
+      </a:fillStyleLst>
+      <a:lnStyleLst>
+        <a:ln w="6350" cap="flat" cmpd="sng" algn="ctr">
+          <a:solidFill>
+            <a:schemeClr val="phClr"/>
+          </a:solidFill>
+          <a:prstDash val="solid"/>
+          <a:miter lim="800000"/>
+        </a:ln>
+        <a:ln w="12700" cap="flat" cmpd="sng" algn="ctr">
+          <a:solidFill>
+            <a:schemeClr val="phClr"/>
+          </a:solidFill>
+          <a:prstDash val="solid"/>
+          <a:miter lim="800000"/>
+        </a:ln>
+        <a:ln w="19050" cap="flat" cmpd="sng" algn="ctr">
+          <a:solidFill>
+            <a:schemeClr val="phClr"/>
+          </a:solidFill>
+          <a:prstDash val="solid"/>
+          <a:miter lim="800000"/>
+        </a:ln>
+      </a:lnStyleLst>
+      <a:effectStyleLst>
+        <a:effectStyle>
+          <a:effectLst/>
+        </a:effectStyle>
+        <a:effectStyle>
+          <a:effectLst/>
+        </a:effectStyle>
+        <a:effectStyle>
+          <a:effectLst>
+            <a:outerShdw blurRad="57150" dist="19050" dir="5400000" algn="ctr" rotWithShape="0">
+              <a:srgbClr val="000000">
+                <a:alpha val="63000"/>
+              </a:srgbClr>
+            </a:outerShdw>
+          </a:effectLst>
+        </a:effectStyle>
+      </a:effectStyleLst>
+      <a:bgFillStyleLst>
+        <a:solidFill>
+          <a:schemeClr val="phClr"/>
+        </a:solidFill>
+        <a:solidFill>
+          <a:schemeClr val="phClr">
+            <a:tint val="95000"/>
+            <a:satMod val="170000"/>
+          </a:schemeClr>
+        </a:solidFill>
+        <a:gradFill rotWithShape="1">
+          <a:gsLst>
+            <a:gs pos="0">
+              <a:schemeClr val="phClr">
+                <a:tint val="93000"/>
+                <a:satMod val="150000"/>
+                <a:shade val="98000"/>
+                <a:lumMod val="102000"/>
+              </a:schemeClr>
+            </a:gs>
+            <a:gs pos="50000">
+              <a:schemeClr val="phClr">
+                <a:tint val="98000"/>
+                <a:satMod val="130000"/>
+                <a:shade val="90000"/>
+                <a:lumMod val="103000"/>
+              </a:schemeClr>
+            </a:gs>
+            <a:gs pos="100000">
+              <a:schemeClr val="phClr">
+                <a:shade val="63000"/>
+                <a:satMod val="120000"/>
+              </a:schemeClr>
+            </a:gs>
+          </a:gsLst>
+          <a:lin ang="5400000" scaled="0"/>
+        </a:gradFill>
+      </a:bgFillStyleLst>
+    </a:fmtScheme>
+  </a:themeElements>
+  <a:objectDefaults/>
+  <a:extraClrSchemeLst/>
+  <a:extLst>
+    <a:ext uri="{05A4C25C-085E-4340-85A3-A5531E510DB2}">
+      <thm15:themeFamily xmlns:thm15="http://schemas.microsoft.com/office/thememl/2012/main" name="Office Theme" id="{62F939B6-93AF-4DB8-9C6B-D6C7DFDC589F}" vid="{4A3C46E8-61CC-4603-A589-7422A47A8E4A}"/>
+    </a:ext>
+  </a:extLst>
+</a:theme>
 </file>
--- a/template/Maicao_Template_Visual_v02.pptx
+++ b/template/Maicao_Template_Visual_v02.pptx
@@ -1617,6 +1617,13 @@
             <a:prstDash val="solid"/>
           </a:ln>
         </p:spPr>
+        <p:txBody>
+          <a:bodyPr/>
+          <a:lstStyle/>
+          <a:p>
+            <a:endParaRPr/>
+          </a:p>
+        </p:txBody>
       </p:sp>
       <p:sp>
         <p:nvSpPr>
@@ -1642,6 +1649,13 @@
             <a:prstDash val="solid"/>
           </a:ln>
         </p:spPr>
+        <p:txBody>
+          <a:bodyPr/>
+          <a:lstStyle/>
+          <a:p>
+            <a:endParaRPr/>
+          </a:p>
+        </p:txBody>
       </p:sp>
       <p:sp>
         <p:nvSpPr>
@@ -1835,6 +1849,13 @@
             <a:prstDash val="solid"/>
           </a:ln>
         </p:spPr>
+        <p:txBody>
+          <a:bodyPr/>
+          <a:lstStyle/>
+          <a:p>
+            <a:endParaRPr/>
+          </a:p>
+        </p:txBody>
       </p:sp>
       <p:sp>
         <p:nvSpPr>
@@ -1860,6 +1881,13 @@
             <a:prstDash val="solid"/>
           </a:ln>
         </p:spPr>
+        <p:txBody>
+          <a:bodyPr/>
+          <a:lstStyle/>
+          <a:p>
+            <a:endParaRPr/>
+          </a:p>
+        </p:txBody>
       </p:sp>
       <p:sp>
         <p:nvSpPr>
@@ -1893,7 +1921,7 @@
                   <a:srgbClr val="FFFFFF"/>
                 </a:solidFill>
               </a:rPr>
-              <a:t>16.5M</a:t>
+              <a:t>16,5M</a:t>
             </a:r>
             <a:endParaRPr lang="en-US" sz="1600" dirty="0"/>
           </a:p>
@@ -1961,6 +1989,13 @@
             <a:prstDash val="solid"/>
           </a:ln>
         </p:spPr>
+        <p:txBody>
+          <a:bodyPr/>
+          <a:lstStyle/>
+          <a:p>
+            <a:endParaRPr/>
+          </a:p>
+        </p:txBody>
       </p:sp>
       <p:sp>
         <p:nvSpPr>
@@ -1994,7 +2029,7 @@
                   <a:srgbClr val="FFFFFF"/>
                 </a:solidFill>
               </a:rPr>
-              <a:t>8.2M</a:t>
+              <a:t>8,2M</a:t>
             </a:r>
             <a:endParaRPr lang="en-US" sz="1600" dirty="0"/>
           </a:p>
@@ -2062,6 +2097,13 @@
             <a:prstDash val="solid"/>
           </a:ln>
         </p:spPr>
+        <p:txBody>
+          <a:bodyPr/>
+          <a:lstStyle/>
+          <a:p>
+            <a:endParaRPr/>
+          </a:p>
+        </p:txBody>
       </p:sp>
       <p:sp>
         <p:nvSpPr>
@@ -2095,7 +2137,7 @@
                   <a:srgbClr val="FFFFFF"/>
                 </a:solidFill>
               </a:rPr>
-              <a:t>110.7K</a:t>
+              <a:t>110,7K</a:t>
             </a:r>
             <a:endParaRPr lang="en-US" sz="1600" dirty="0"/>
           </a:p>
@@ -2232,6 +2274,13 @@
             <a:prstDash val="solid"/>
           </a:ln>
         </p:spPr>
+        <p:txBody>
+          <a:bodyPr/>
+          <a:lstStyle/>
+          <a:p>
+            <a:endParaRPr/>
+          </a:p>
+        </p:txBody>
       </p:sp>
       <p:sp>
         <p:nvSpPr>
@@ -2257,6 +2306,13 @@
             <a:prstDash val="solid"/>
           </a:ln>
         </p:spPr>
+        <p:txBody>
+          <a:bodyPr/>
+          <a:lstStyle/>
+          <a:p>
+            <a:endParaRPr/>
+          </a:p>
+        </p:txBody>
       </p:sp>
       <p:sp>
         <p:nvSpPr>
@@ -2291,7 +2347,7 @@
                 <a:ea typeface="Aptos" pitchFamily="34" charset="-122"/>
                 <a:cs typeface="Aptos" pitchFamily="34" charset="-120"/>
               </a:rPr>
-              <a:t>MARZO 2026</a:t>
+              <a:t>MARZO</a:t>
             </a:r>
             <a:endParaRPr lang="en-US" sz="800" dirty="0"/>
           </a:p>
@@ -2400,6 +2456,13 @@
             <a:prstDash val="solid"/>
           </a:ln>
         </p:spPr>
+        <p:txBody>
+          <a:bodyPr/>
+          <a:lstStyle/>
+          <a:p>
+            <a:endParaRPr/>
+          </a:p>
+        </p:txBody>
       </p:sp>
       <p:sp>
         <p:nvSpPr>
@@ -2504,12 +2567,13 @@
               <a:buNone/>
             </a:pPr>
             <a:r>
-              <a:rPr lang="en-US" sz="800" dirty="0">
-                <a:solidFill>
-                  <a:srgbClr val="6E7280"/>
-                </a:solidFill>
-              </a:rPr>
-              <a:t>campaña SAMY + otras menciones</a:t>
+              <a:rPr sz="950" b="1">
+                <a:solidFill>
+                  <a:srgbClr val="616777"/>
+                </a:solidFill>
+                <a:latin typeface="Arial"/>
+              </a:rPr>
+              <a:t>marcas presentes + menciones</a:t>
             </a:r>
             <a:endParaRPr lang="en-US" sz="800" dirty="0"/>
           </a:p>
@@ -2541,6 +2605,13 @@
             <a:prstDash val="solid"/>
           </a:ln>
         </p:spPr>
+        <p:txBody>
+          <a:bodyPr/>
+          <a:lstStyle/>
+          <a:p>
+            <a:endParaRPr/>
+          </a:p>
+        </p:txBody>
       </p:sp>
       <p:sp>
         <p:nvSpPr>
@@ -2682,6 +2753,13 @@
             <a:prstDash val="solid"/>
           </a:ln>
         </p:spPr>
+        <p:txBody>
+          <a:bodyPr/>
+          <a:lstStyle/>
+          <a:p>
+            <a:endParaRPr/>
+          </a:p>
+        </p:txBody>
       </p:sp>
       <p:sp>
         <p:nvSpPr>
@@ -2823,6 +2901,13 @@
             <a:prstDash val="solid"/>
           </a:ln>
         </p:spPr>
+        <p:txBody>
+          <a:bodyPr/>
+          <a:lstStyle/>
+          <a:p>
+            <a:endParaRPr/>
+          </a:p>
+        </p:txBody>
       </p:sp>
       <p:sp>
         <p:nvSpPr>
@@ -2998,6 +3083,13 @@
             <a:prstDash val="solid"/>
           </a:ln>
         </p:spPr>
+        <p:txBody>
+          <a:bodyPr/>
+          <a:lstStyle/>
+          <a:p>
+            <a:endParaRPr/>
+          </a:p>
+        </p:txBody>
       </p:sp>
       <p:sp>
         <p:nvSpPr>
@@ -3097,6 +3189,13 @@
             <a:prstDash val="solid"/>
           </a:ln>
         </p:spPr>
+        <p:txBody>
+          <a:bodyPr/>
+          <a:lstStyle/>
+          <a:p>
+            <a:endParaRPr/>
+          </a:p>
+        </p:txBody>
       </p:sp>
       <p:sp>
         <p:nvSpPr>
@@ -3196,6 +3295,13 @@
             <a:prstDash val="solid"/>
           </a:ln>
         </p:spPr>
+        <p:txBody>
+          <a:bodyPr/>
+          <a:lstStyle/>
+          <a:p>
+            <a:endParaRPr/>
+          </a:p>
+        </p:txBody>
       </p:sp>
       <p:sp>
         <p:nvSpPr>
@@ -3297,6 +3403,13 @@
             <a:prstDash val="solid"/>
           </a:ln>
         </p:spPr>
+        <p:txBody>
+          <a:bodyPr/>
+          <a:lstStyle/>
+          <a:p>
+            <a:endParaRPr/>
+          </a:p>
+        </p:txBody>
       </p:sp>
       <p:sp>
         <p:nvSpPr>
@@ -3361,12 +3474,13 @@
               <a:buNone/>
             </a:pPr>
             <a:r>
-              <a:rPr lang="en-US" sz="1050" dirty="0">
-                <a:solidFill>
-                  <a:srgbClr val="121426"/>
-                </a:solidFill>
-              </a:rPr>
-              <a:t>El mix permitió ampliar la presencia de productos, con comentarios positivos asociados a calidad y precios. El contenido tiene potencial para crecer si se empaqueta en series de beneficios concretos.</a:t>
+              <a:rPr sz="1200" b="0">
+                <a:solidFill>
+                  <a:srgbClr val="10152B"/>
+                </a:solidFill>
+                <a:latin typeface="Arial"/>
+              </a:rPr>
+              <a:t>El mix permitió ampliar la presencia de marcas propias y menciones asociadas a calidad, precio y valor práctico. Para reforzar la lectura, se recomienda mostrar el ecosistema completo de marcas y no solo la pieza destacada.</a:t>
             </a:r>
             <a:endParaRPr lang="en-US" sz="1050" dirty="0"/>
           </a:p>
@@ -3398,6 +3512,13 @@
             <a:prstDash val="solid"/>
           </a:ln>
         </p:spPr>
+        <p:txBody>
+          <a:bodyPr/>
+          <a:lstStyle/>
+          <a:p>
+            <a:endParaRPr/>
+          </a:p>
+        </p:txBody>
       </p:sp>
       <p:sp>
         <p:nvSpPr>
@@ -3425,14 +3546,6 @@
             <a:pPr marL="0" indent="0" algn="ctr">
               <a:buNone/>
             </a:pPr>
-            <a:r>
-              <a:rPr lang="en-US" sz="1000" b="1" dirty="0">
-                <a:solidFill>
-                  <a:srgbClr val="FFFFFF"/>
-                </a:solidFill>
-              </a:rPr>
-              <a:t>Calidad</a:t>
-            </a:r>
             <a:endParaRPr lang="en-US" sz="1000" dirty="0"/>
           </a:p>
         </p:txBody>
@@ -3463,6 +3576,13 @@
             <a:prstDash val="solid"/>
           </a:ln>
         </p:spPr>
+        <p:txBody>
+          <a:bodyPr/>
+          <a:lstStyle/>
+          <a:p>
+            <a:endParaRPr/>
+          </a:p>
+        </p:txBody>
       </p:sp>
       <p:sp>
         <p:nvSpPr>
@@ -3490,14 +3610,6 @@
             <a:pPr marL="0" indent="0" algn="ctr">
               <a:buNone/>
             </a:pPr>
-            <a:r>
-              <a:rPr lang="en-US" sz="1000" b="1" dirty="0">
-                <a:solidFill>
-                  <a:srgbClr val="FFFFFF"/>
-                </a:solidFill>
-              </a:rPr>
-              <a:t>Precio</a:t>
-            </a:r>
             <a:endParaRPr lang="en-US" sz="1000" dirty="0"/>
           </a:p>
         </p:txBody>
@@ -3528,6 +3640,13 @@
             <a:prstDash val="solid"/>
           </a:ln>
         </p:spPr>
+        <p:txBody>
+          <a:bodyPr/>
+          <a:lstStyle/>
+          <a:p>
+            <a:endParaRPr/>
+          </a:p>
+        </p:txBody>
       </p:sp>
       <p:sp>
         <p:nvSpPr>
@@ -3555,14 +3674,6 @@
             <a:pPr marL="0" indent="0" algn="ctr">
               <a:buNone/>
             </a:pPr>
-            <a:r>
-              <a:rPr lang="en-US" sz="1000" b="1" dirty="0">
-                <a:solidFill>
-                  <a:srgbClr val="FFFFFF"/>
-                </a:solidFill>
-              </a:rPr>
-              <a:t>Valor práctico</a:t>
-            </a:r>
             <a:endParaRPr lang="en-US" sz="1000" dirty="0"/>
           </a:p>
         </p:txBody>
@@ -3602,6 +3713,344 @@
               <a:t>Próximo paso: convertir menciones de marca propia en “pruebas visuales” comparativas: antes/después, precio vs resultado, rutina completa.</a:t>
             </a:r>
             <a:endParaRPr lang="en-US" sz="1300" dirty="0"/>
+          </a:p>
+        </p:txBody>
+      </p:sp>
+      <p:sp>
+        <p:nvSpPr>
+          <p:cNvPr id="43" name="Rectangle 42"/>
+          <p:cNvSpPr/>
+          <p:nvPr/>
+        </p:nvSpPr>
+        <p:spPr>
+          <a:xfrm>
+            <a:off x="4480560" y="4261104"/>
+            <a:ext cx="5806440" cy="685800"/>
+          </a:xfrm>
+          <a:prstGeom prst="rect">
+            <a:avLst/>
+          </a:prstGeom>
+          <a:solidFill>
+            <a:srgbClr val="FFFFFF"/>
+          </a:solidFill>
+          <a:ln>
+            <a:noFill/>
+          </a:ln>
+        </p:spPr>
+        <p:style>
+          <a:lnRef idx="1">
+            <a:schemeClr val="accent1"/>
+          </a:lnRef>
+          <a:fillRef idx="3">
+            <a:schemeClr val="accent1"/>
+          </a:fillRef>
+          <a:effectRef idx="2">
+            <a:schemeClr val="accent1"/>
+          </a:effectRef>
+          <a:fontRef idx="minor">
+            <a:schemeClr val="lt1"/>
+          </a:fontRef>
+        </p:style>
+        <p:txBody>
+          <a:bodyPr rtlCol="0" anchor="ctr"/>
+          <a:lstStyle/>
+          <a:p>
+            <a:pPr algn="ctr"/>
+            <a:endParaRPr/>
+          </a:p>
+        </p:txBody>
+      </p:sp>
+      <p:sp>
+        <p:nvSpPr>
+          <p:cNvPr id="44" name="TextBox 43"/>
+          <p:cNvSpPr txBox="1"/>
+          <p:nvPr/>
+        </p:nvSpPr>
+        <p:spPr>
+          <a:xfrm>
+            <a:off x="4617720" y="4261104"/>
+            <a:ext cx="1828800" cy="201168"/>
+          </a:xfrm>
+          <a:prstGeom prst="rect">
+            <a:avLst/>
+          </a:prstGeom>
+          <a:noFill/>
+        </p:spPr>
+        <p:txBody>
+          <a:bodyPr wrap="square">
+            <a:spAutoFit/>
+          </a:bodyPr>
+          <a:lstStyle/>
+          <a:p>
+            <a:r>
+              <a:rPr sz="1100" b="1">
+                <a:solidFill>
+                  <a:srgbClr val="E6007E"/>
+                </a:solidFill>
+                <a:latin typeface="Arial"/>
+              </a:rPr>
+              <a:t>Marcas presentes</a:t>
+            </a:r>
+          </a:p>
+        </p:txBody>
+      </p:sp>
+      <p:sp>
+        <p:nvSpPr>
+          <p:cNvPr id="45" name="Rounded Rectangle 44"/>
+          <p:cNvSpPr/>
+          <p:nvPr/>
+        </p:nvSpPr>
+        <p:spPr>
+          <a:xfrm>
+            <a:off x="4617720" y="4535424"/>
+            <a:ext cx="822960" cy="256032"/>
+          </a:xfrm>
+          <a:prstGeom prst="roundRect">
+            <a:avLst/>
+          </a:prstGeom>
+          <a:solidFill>
+            <a:srgbClr val="E6007E"/>
+          </a:solidFill>
+          <a:ln>
+            <a:noFill/>
+          </a:ln>
+        </p:spPr>
+        <p:style>
+          <a:lnRef idx="1">
+            <a:schemeClr val="accent1"/>
+          </a:lnRef>
+          <a:fillRef idx="3">
+            <a:schemeClr val="accent1"/>
+          </a:fillRef>
+          <a:effectRef idx="2">
+            <a:schemeClr val="accent1"/>
+          </a:effectRef>
+          <a:fontRef idx="minor">
+            <a:schemeClr val="lt1"/>
+          </a:fontRef>
+        </p:style>
+        <p:txBody>
+          <a:bodyPr wrap="square" rtlCol="0" anchor="ctr"/>
+          <a:lstStyle/>
+          <a:p>
+            <a:pPr algn="ctr"/>
+            <a:r>
+              <a:rPr sz="1000" b="1">
+                <a:solidFill>
+                  <a:srgbClr val="FFFFFF"/>
+                </a:solidFill>
+                <a:latin typeface="Arial"/>
+              </a:rPr>
+              <a:t>SAMY</a:t>
+            </a:r>
+          </a:p>
+        </p:txBody>
+      </p:sp>
+      <p:sp>
+        <p:nvSpPr>
+          <p:cNvPr id="46" name="Rounded Rectangle 45"/>
+          <p:cNvSpPr/>
+          <p:nvPr/>
+        </p:nvSpPr>
+        <p:spPr>
+          <a:xfrm>
+            <a:off x="5532120" y="4535424"/>
+            <a:ext cx="1325880" cy="256032"/>
+          </a:xfrm>
+          <a:prstGeom prst="roundRect">
+            <a:avLst/>
+          </a:prstGeom>
+          <a:solidFill>
+            <a:srgbClr val="10152B"/>
+          </a:solidFill>
+          <a:ln>
+            <a:noFill/>
+          </a:ln>
+        </p:spPr>
+        <p:style>
+          <a:lnRef idx="1">
+            <a:schemeClr val="accent1"/>
+          </a:lnRef>
+          <a:fillRef idx="3">
+            <a:schemeClr val="accent1"/>
+          </a:fillRef>
+          <a:effectRef idx="2">
+            <a:schemeClr val="accent1"/>
+          </a:effectRef>
+          <a:fontRef idx="minor">
+            <a:schemeClr val="lt1"/>
+          </a:fontRef>
+        </p:style>
+        <p:txBody>
+          <a:bodyPr wrap="square" rtlCol="0" anchor="ctr"/>
+          <a:lstStyle/>
+          <a:p>
+            <a:pPr algn="ctr"/>
+            <a:r>
+              <a:rPr sz="869" b="1">
+                <a:solidFill>
+                  <a:srgbClr val="FFFFFF"/>
+                </a:solidFill>
+                <a:latin typeface="Arial"/>
+              </a:rPr>
+              <a:t>The Pure Solutions</a:t>
+            </a:r>
+          </a:p>
+        </p:txBody>
+      </p:sp>
+      <p:sp>
+        <p:nvSpPr>
+          <p:cNvPr id="47" name="Rounded Rectangle 46"/>
+          <p:cNvSpPr/>
+          <p:nvPr/>
+        </p:nvSpPr>
+        <p:spPr>
+          <a:xfrm>
+            <a:off x="6949440" y="4535424"/>
+            <a:ext cx="914400" cy="256032"/>
+          </a:xfrm>
+          <a:prstGeom prst="roundRect">
+            <a:avLst/>
+          </a:prstGeom>
+          <a:solidFill>
+            <a:srgbClr val="6B57E6"/>
+          </a:solidFill>
+          <a:ln>
+            <a:noFill/>
+          </a:ln>
+        </p:spPr>
+        <p:style>
+          <a:lnRef idx="1">
+            <a:schemeClr val="accent1"/>
+          </a:lnRef>
+          <a:fillRef idx="3">
+            <a:schemeClr val="accent1"/>
+          </a:fillRef>
+          <a:effectRef idx="2">
+            <a:schemeClr val="accent1"/>
+          </a:effectRef>
+          <a:fontRef idx="minor">
+            <a:schemeClr val="lt1"/>
+          </a:fontRef>
+        </p:style>
+        <p:txBody>
+          <a:bodyPr wrap="square" rtlCol="0" anchor="ctr"/>
+          <a:lstStyle/>
+          <a:p>
+            <a:pPr algn="ctr"/>
+            <a:r>
+              <a:rPr sz="900" b="1">
+                <a:solidFill>
+                  <a:srgbClr val="FFFFFF"/>
+                </a:solidFill>
+                <a:latin typeface="Arial"/>
+              </a:rPr>
+              <a:t>Face Facts</a:t>
+            </a:r>
+          </a:p>
+        </p:txBody>
+      </p:sp>
+      <p:sp>
+        <p:nvSpPr>
+          <p:cNvPr id="48" name="Rounded Rectangle 47"/>
+          <p:cNvSpPr/>
+          <p:nvPr/>
+        </p:nvSpPr>
+        <p:spPr>
+          <a:xfrm>
+            <a:off x="7973568" y="4535424"/>
+            <a:ext cx="658368" cy="256032"/>
+          </a:xfrm>
+          <a:prstGeom prst="roundRect">
+            <a:avLst/>
+          </a:prstGeom>
+          <a:solidFill>
+            <a:srgbClr val="ECAA00"/>
+          </a:solidFill>
+          <a:ln>
+            <a:noFill/>
+          </a:ln>
+        </p:spPr>
+        <p:style>
+          <a:lnRef idx="1">
+            <a:schemeClr val="accent1"/>
+          </a:lnRef>
+          <a:fillRef idx="3">
+            <a:schemeClr val="accent1"/>
+          </a:fillRef>
+          <a:effectRef idx="2">
+            <a:schemeClr val="accent1"/>
+          </a:effectRef>
+          <a:fontRef idx="minor">
+            <a:schemeClr val="lt1"/>
+          </a:fontRef>
+        </p:style>
+        <p:txBody>
+          <a:bodyPr wrap="square" rtlCol="0" anchor="ctr"/>
+          <a:lstStyle/>
+          <a:p>
+            <a:pPr algn="ctr"/>
+            <a:r>
+              <a:rPr sz="900" b="1">
+                <a:solidFill>
+                  <a:srgbClr val="10152B"/>
+                </a:solidFill>
+                <a:latin typeface="Arial"/>
+              </a:rPr>
+              <a:t>Wave</a:t>
+            </a:r>
+          </a:p>
+        </p:txBody>
+      </p:sp>
+      <p:sp>
+        <p:nvSpPr>
+          <p:cNvPr id="49" name="Rounded Rectangle 48"/>
+          <p:cNvSpPr/>
+          <p:nvPr/>
+        </p:nvSpPr>
+        <p:spPr>
+          <a:xfrm>
+            <a:off x="8732520" y="4535424"/>
+            <a:ext cx="960120" cy="256032"/>
+          </a:xfrm>
+          <a:prstGeom prst="roundRect">
+            <a:avLst/>
+          </a:prstGeom>
+          <a:solidFill>
+            <a:srgbClr val="E6E6EC"/>
+          </a:solidFill>
+          <a:ln>
+            <a:noFill/>
+          </a:ln>
+        </p:spPr>
+        <p:style>
+          <a:lnRef idx="1">
+            <a:schemeClr val="accent1"/>
+          </a:lnRef>
+          <a:fillRef idx="3">
+            <a:schemeClr val="accent1"/>
+          </a:fillRef>
+          <a:effectRef idx="2">
+            <a:schemeClr val="accent1"/>
+          </a:effectRef>
+          <a:fontRef idx="minor">
+            <a:schemeClr val="lt1"/>
+          </a:fontRef>
+        </p:style>
+        <p:txBody>
+          <a:bodyPr wrap="square" rtlCol="0" anchor="ctr"/>
+          <a:lstStyle/>
+          <a:p>
+            <a:pPr algn="ctr"/>
+            <a:r>
+              <a:rPr sz="900" b="1">
+                <a:solidFill>
+                  <a:srgbClr val="10152B"/>
+                </a:solidFill>
+                <a:latin typeface="Arial"/>
+              </a:rPr>
+              <a:t>Beauty 100</a:t>
+            </a:r>
           </a:p>
         </p:txBody>
       </p:sp>
@@ -3662,6 +4111,13 @@
             <a:prstDash val="solid"/>
           </a:ln>
         </p:spPr>
+        <p:txBody>
+          <a:bodyPr/>
+          <a:lstStyle/>
+          <a:p>
+            <a:endParaRPr/>
+          </a:p>
+        </p:txBody>
       </p:sp>
       <p:sp>
         <p:nvSpPr>
@@ -3687,6 +4143,13 @@
             <a:prstDash val="solid"/>
           </a:ln>
         </p:spPr>
+        <p:txBody>
+          <a:bodyPr/>
+          <a:lstStyle/>
+          <a:p>
+            <a:endParaRPr/>
+          </a:p>
+        </p:txBody>
       </p:sp>
       <p:sp>
         <p:nvSpPr>
@@ -3721,7 +4184,7 @@
                 <a:ea typeface="Aptos" pitchFamily="34" charset="-122"/>
                 <a:cs typeface="Aptos" pitchFamily="34" charset="-120"/>
               </a:rPr>
-              <a:t>MARZO 2026</a:t>
+              <a:t>MARZO</a:t>
             </a:r>
             <a:endParaRPr lang="en-US" sz="800" dirty="0"/>
           </a:p>
@@ -3754,15 +4217,13 @@
               <a:buNone/>
             </a:pPr>
             <a:r>
-              <a:rPr lang="en-US" sz="2600" b="1" dirty="0">
-                <a:solidFill>
-                  <a:srgbClr val="121426"/>
-                </a:solidFill>
-                <a:latin typeface="Aptos Display" pitchFamily="34" charset="0"/>
-                <a:ea typeface="Aptos Display" pitchFamily="34" charset="-122"/>
-                <a:cs typeface="Aptos Display" pitchFamily="34" charset="-120"/>
-              </a:rPr>
-              <a:t>Competencia: dónde ganamos y dónde hay espacio</a:t>
+              <a:rPr sz="2700" b="1">
+                <a:solidFill>
+                  <a:srgbClr val="10152B"/>
+                </a:solidFill>
+                <a:latin typeface="Arial"/>
+              </a:rPr>
+              <a:t>Competencia: lectura cualitativa y oportunidad</a:t>
             </a:r>
             <a:endParaRPr lang="en-US" sz="2600" dirty="0"/>
           </a:p>
@@ -3830,6 +4291,13 @@
             <a:prstDash val="solid"/>
           </a:ln>
         </p:spPr>
+        <p:txBody>
+          <a:bodyPr/>
+          <a:lstStyle/>
+          <a:p>
+            <a:endParaRPr/>
+          </a:p>
+        </p:txBody>
       </p:sp>
       <p:sp>
         <p:nvSpPr>
@@ -3967,6 +4435,13 @@
             <a:prstDash val="solid"/>
           </a:ln>
         </p:spPr>
+        <p:txBody>
+          <a:bodyPr/>
+          <a:lstStyle/>
+          <a:p>
+            <a:endParaRPr/>
+          </a:p>
+        </p:txBody>
       </p:sp>
       <p:sp>
         <p:nvSpPr>
@@ -4104,6 +4579,13 @@
             <a:prstDash val="solid"/>
           </a:ln>
         </p:spPr>
+        <p:txBody>
+          <a:bodyPr/>
+          <a:lstStyle/>
+          <a:p>
+            <a:endParaRPr/>
+          </a:p>
+        </p:txBody>
       </p:sp>
       <p:sp>
         <p:nvSpPr>
@@ -4313,6 +4795,13 @@
             <a:prstDash val="solid"/>
           </a:ln>
         </p:spPr>
+        <p:txBody>
+          <a:bodyPr/>
+          <a:lstStyle/>
+          <a:p>
+            <a:endParaRPr/>
+          </a:p>
+        </p:txBody>
       </p:sp>
       <p:sp>
         <p:nvSpPr>
@@ -4338,6 +4827,13 @@
             <a:prstDash val="solid"/>
           </a:ln>
         </p:spPr>
+        <p:txBody>
+          <a:bodyPr/>
+          <a:lstStyle/>
+          <a:p>
+            <a:endParaRPr/>
+          </a:p>
+        </p:txBody>
       </p:sp>
       <p:sp>
         <p:nvSpPr>
@@ -4439,6 +4935,13 @@
             <a:prstDash val="solid"/>
           </a:ln>
         </p:spPr>
+        <p:txBody>
+          <a:bodyPr/>
+          <a:lstStyle/>
+          <a:p>
+            <a:endParaRPr/>
+          </a:p>
+        </p:txBody>
       </p:sp>
       <p:sp>
         <p:nvSpPr>
@@ -4464,6 +4967,13 @@
             <a:prstDash val="solid"/>
           </a:ln>
         </p:spPr>
+        <p:txBody>
+          <a:bodyPr/>
+          <a:lstStyle/>
+          <a:p>
+            <a:endParaRPr/>
+          </a:p>
+        </p:txBody>
       </p:sp>
       <p:sp>
         <p:nvSpPr>
@@ -4565,6 +5075,13 @@
             <a:prstDash val="solid"/>
           </a:ln>
         </p:spPr>
+        <p:txBody>
+          <a:bodyPr/>
+          <a:lstStyle/>
+          <a:p>
+            <a:endParaRPr/>
+          </a:p>
+        </p:txBody>
       </p:sp>
       <p:sp>
         <p:nvSpPr>
@@ -4590,6 +5107,13 @@
             <a:prstDash val="solid"/>
           </a:ln>
         </p:spPr>
+        <p:txBody>
+          <a:bodyPr/>
+          <a:lstStyle/>
+          <a:p>
+            <a:endParaRPr/>
+          </a:p>
+        </p:txBody>
       </p:sp>
       <p:sp>
         <p:nvSpPr>
@@ -4691,6 +5215,13 @@
             <a:prstDash val="solid"/>
           </a:ln>
         </p:spPr>
+        <p:txBody>
+          <a:bodyPr/>
+          <a:lstStyle/>
+          <a:p>
+            <a:endParaRPr/>
+          </a:p>
+        </p:txBody>
       </p:sp>
       <p:sp>
         <p:nvSpPr>
@@ -4716,6 +5247,13 @@
             <a:prstDash val="solid"/>
           </a:ln>
         </p:spPr>
+        <p:txBody>
+          <a:bodyPr/>
+          <a:lstStyle/>
+          <a:p>
+            <a:endParaRPr/>
+          </a:p>
+        </p:txBody>
       </p:sp>
       <p:sp>
         <p:nvSpPr>
@@ -4858,6 +5396,279 @@
                 </a:solidFill>
               </a:rPr>
               <a:t>Competidores activan Pinterest-like, creators, eventos y contenido humano. Maicao puede diferenciarse con utilidad + cercanía + retail expertise.</a:t>
+            </a:r>
+          </a:p>
+        </p:txBody>
+      </p:sp>
+      <p:sp>
+        <p:nvSpPr>
+          <p:cNvPr id="39" name="Rectangle 38"/>
+          <p:cNvSpPr/>
+          <p:nvPr/>
+        </p:nvSpPr>
+        <p:spPr>
+          <a:xfrm>
+            <a:off x="594360" y="3520440"/>
+            <a:ext cx="10378440" cy="2148840"/>
+          </a:xfrm>
+          <a:prstGeom prst="rect">
+            <a:avLst/>
+          </a:prstGeom>
+          <a:solidFill>
+            <a:srgbClr val="FFFFFF"/>
+          </a:solidFill>
+          <a:ln>
+            <a:noFill/>
+          </a:ln>
+        </p:spPr>
+        <p:style>
+          <a:lnRef idx="1">
+            <a:schemeClr val="accent1"/>
+          </a:lnRef>
+          <a:fillRef idx="3">
+            <a:schemeClr val="accent1"/>
+          </a:fillRef>
+          <a:effectRef idx="2">
+            <a:schemeClr val="accent1"/>
+          </a:effectRef>
+          <a:fontRef idx="minor">
+            <a:schemeClr val="lt1"/>
+          </a:fontRef>
+        </p:style>
+        <p:txBody>
+          <a:bodyPr rtlCol="0" anchor="ctr"/>
+          <a:lstStyle/>
+          <a:p>
+            <a:pPr algn="ctr"/>
+            <a:endParaRPr/>
+          </a:p>
+        </p:txBody>
+      </p:sp>
+      <p:sp>
+        <p:nvSpPr>
+          <p:cNvPr id="40" name="Rounded Rectangle 39"/>
+          <p:cNvSpPr/>
+          <p:nvPr/>
+        </p:nvSpPr>
+        <p:spPr>
+          <a:xfrm>
+            <a:off x="713232" y="3675887"/>
+            <a:ext cx="4709160" cy="1719072"/>
+          </a:xfrm>
+          <a:prstGeom prst="roundRect">
+            <a:avLst/>
+          </a:prstGeom>
+          <a:solidFill>
+            <a:srgbClr val="F7F7FB"/>
+          </a:solidFill>
+          <a:ln>
+            <a:noFill/>
+          </a:ln>
+        </p:spPr>
+        <p:style>
+          <a:lnRef idx="1">
+            <a:schemeClr val="accent1"/>
+          </a:lnRef>
+          <a:fillRef idx="3">
+            <a:schemeClr val="accent1"/>
+          </a:fillRef>
+          <a:effectRef idx="2">
+            <a:schemeClr val="accent1"/>
+          </a:effectRef>
+          <a:fontRef idx="minor">
+            <a:schemeClr val="lt1"/>
+          </a:fontRef>
+        </p:style>
+        <p:txBody>
+          <a:bodyPr rtlCol="0" anchor="ctr"/>
+          <a:lstStyle/>
+          <a:p>
+            <a:pPr algn="ctr"/>
+            <a:endParaRPr/>
+          </a:p>
+        </p:txBody>
+      </p:sp>
+      <p:sp>
+        <p:nvSpPr>
+          <p:cNvPr id="41" name="TextBox 40"/>
+          <p:cNvSpPr txBox="1"/>
+          <p:nvPr/>
+        </p:nvSpPr>
+        <p:spPr>
+          <a:xfrm>
+            <a:off x="914400" y="3822191"/>
+            <a:ext cx="4114800" cy="201168"/>
+          </a:xfrm>
+          <a:prstGeom prst="rect">
+            <a:avLst/>
+          </a:prstGeom>
+          <a:noFill/>
+        </p:spPr>
+        <p:txBody>
+          <a:bodyPr wrap="square">
+            <a:spAutoFit/>
+          </a:bodyPr>
+          <a:lstStyle/>
+          <a:p>
+            <a:r>
+              <a:rPr sz="1250" b="1">
+                <a:solidFill>
+                  <a:srgbClr val="E6007E"/>
+                </a:solidFill>
+                <a:latin typeface="Arial"/>
+              </a:rPr>
+              <a:t>Qué está haciendo la competencia</a:t>
+            </a:r>
+          </a:p>
+        </p:txBody>
+      </p:sp>
+      <p:sp>
+        <p:nvSpPr>
+          <p:cNvPr id="42" name="TextBox 41"/>
+          <p:cNvSpPr txBox="1"/>
+          <p:nvPr/>
+        </p:nvSpPr>
+        <p:spPr>
+          <a:xfrm>
+            <a:off x="914400" y="4133087"/>
+            <a:ext cx="4206240" cy="1097280"/>
+          </a:xfrm>
+          <a:prstGeom prst="rect">
+            <a:avLst/>
+          </a:prstGeom>
+          <a:noFill/>
+        </p:spPr>
+        <p:txBody>
+          <a:bodyPr wrap="square">
+            <a:spAutoFit/>
+          </a:bodyPr>
+          <a:lstStyle/>
+          <a:p>
+            <a:r>
+              <a:rPr sz="1040" b="0">
+                <a:solidFill>
+                  <a:srgbClr val="10152B"/>
+                </a:solidFill>
+                <a:latin typeface="Arial"/>
+              </a:rPr>
+              <a:t>Preunic: campañas tácticas + creators + activaciones.
+DBS: estética aspiracional + eventos + contenido tipo Pinterest.
+Blush-Bar: experiencias, alianzas y contenido lifestyle.
+Beauty Plus: nichos y colaboraciones puntuales.
+Dr. Simi: contenido humano/social con alta conexión emocional.</a:t>
+            </a:r>
+          </a:p>
+        </p:txBody>
+      </p:sp>
+      <p:sp>
+        <p:nvSpPr>
+          <p:cNvPr id="43" name="Rounded Rectangle 42"/>
+          <p:cNvSpPr/>
+          <p:nvPr/>
+        </p:nvSpPr>
+        <p:spPr>
+          <a:xfrm>
+            <a:off x="5687568" y="3675887"/>
+            <a:ext cx="4892040" cy="1719072"/>
+          </a:xfrm>
+          <a:prstGeom prst="roundRect">
+            <a:avLst/>
+          </a:prstGeom>
+          <a:solidFill>
+            <a:srgbClr val="F7F7FB"/>
+          </a:solidFill>
+          <a:ln>
+            <a:noFill/>
+          </a:ln>
+        </p:spPr>
+        <p:style>
+          <a:lnRef idx="1">
+            <a:schemeClr val="accent1"/>
+          </a:lnRef>
+          <a:fillRef idx="3">
+            <a:schemeClr val="accent1"/>
+          </a:fillRef>
+          <a:effectRef idx="2">
+            <a:schemeClr val="accent1"/>
+          </a:effectRef>
+          <a:fontRef idx="minor">
+            <a:schemeClr val="lt1"/>
+          </a:fontRef>
+        </p:style>
+        <p:txBody>
+          <a:bodyPr rtlCol="0" anchor="ctr"/>
+          <a:lstStyle/>
+          <a:p>
+            <a:pPr algn="ctr"/>
+            <a:endParaRPr/>
+          </a:p>
+        </p:txBody>
+      </p:sp>
+      <p:sp>
+        <p:nvSpPr>
+          <p:cNvPr id="44" name="TextBox 43"/>
+          <p:cNvSpPr txBox="1"/>
+          <p:nvPr/>
+        </p:nvSpPr>
+        <p:spPr>
+          <a:xfrm>
+            <a:off x="5925312" y="3822191"/>
+            <a:ext cx="4114800" cy="201168"/>
+          </a:xfrm>
+          <a:prstGeom prst="rect">
+            <a:avLst/>
+          </a:prstGeom>
+          <a:noFill/>
+        </p:spPr>
+        <p:txBody>
+          <a:bodyPr wrap="square">
+            <a:spAutoFit/>
+          </a:bodyPr>
+          <a:lstStyle/>
+          <a:p>
+            <a:r>
+              <a:rPr sz="1250" b="1">
+                <a:solidFill>
+                  <a:srgbClr val="E6007E"/>
+                </a:solidFill>
+                <a:latin typeface="Arial"/>
+              </a:rPr>
+              <a:t>Lectura cualitativa / oportunidad</a:t>
+            </a:r>
+          </a:p>
+        </p:txBody>
+      </p:sp>
+      <p:sp>
+        <p:nvSpPr>
+          <p:cNvPr id="45" name="TextBox 44"/>
+          <p:cNvSpPr txBox="1"/>
+          <p:nvPr/>
+        </p:nvSpPr>
+        <p:spPr>
+          <a:xfrm>
+            <a:off x="5925312" y="4133087"/>
+            <a:ext cx="4251960" cy="1097280"/>
+          </a:xfrm>
+          <a:prstGeom prst="rect">
+            <a:avLst/>
+          </a:prstGeom>
+          <a:noFill/>
+        </p:spPr>
+        <p:txBody>
+          <a:bodyPr wrap="square">
+            <a:spAutoFit/>
+          </a:bodyPr>
+          <a:lstStyle/>
+          <a:p>
+            <a:r>
+              <a:rPr sz="1100" b="0">
+                <a:solidFill>
+                  <a:srgbClr val="10152B"/>
+                </a:solidFill>
+                <a:latin typeface="Arial"/>
+              </a:rPr>
+              <a:t>La competencia está activando desde tres frentes: oferta, estética y vínculo humano.
+Oportunidad Maicao: diferenciarse combinando utilidad, cercanía y expertise retail, especialmente en TT con contenido nativo y guardable.</a:t>
             </a:r>
           </a:p>
         </p:txBody>
@@ -4919,6 +5730,13 @@
             <a:prstDash val="solid"/>
           </a:ln>
         </p:spPr>
+        <p:txBody>
+          <a:bodyPr/>
+          <a:lstStyle/>
+          <a:p>
+            <a:endParaRPr/>
+          </a:p>
+        </p:txBody>
       </p:sp>
       <p:sp>
         <p:nvSpPr>
@@ -4944,6 +5762,13 @@
             <a:prstDash val="solid"/>
           </a:ln>
         </p:spPr>
+        <p:txBody>
+          <a:bodyPr/>
+          <a:lstStyle/>
+          <a:p>
+            <a:endParaRPr/>
+          </a:p>
+        </p:txBody>
       </p:sp>
       <p:sp>
         <p:nvSpPr>
@@ -4978,7 +5803,7 @@
                 <a:ea typeface="Aptos" pitchFamily="34" charset="-122"/>
                 <a:cs typeface="Aptos" pitchFamily="34" charset="-120"/>
               </a:rPr>
-              <a:t>MARZO 2026</a:t>
+              <a:t>MARZO</a:t>
             </a:r>
             <a:endParaRPr lang="en-US" sz="800" dirty="0"/>
           </a:p>
@@ -5011,15 +5836,31 @@
               <a:buNone/>
             </a:pPr>
             <a:r>
-              <a:rPr lang="en-US" sz="2600" b="1" dirty="0">
-                <a:solidFill>
-                  <a:srgbClr val="121426"/>
-                </a:solidFill>
-                <a:latin typeface="Aptos Display" pitchFamily="34" charset="0"/>
-                <a:ea typeface="Aptos Display" pitchFamily="34" charset="-122"/>
-                <a:cs typeface="Aptos Display" pitchFamily="34" charset="-120"/>
-              </a:rPr>
-              <a:t>Plan visual de próximos 30 días</a:t>
+              <a:rPr sz="2700" b="1" dirty="0">
+                <a:solidFill>
+                  <a:srgbClr val="10152B"/>
+                </a:solidFill>
+                <a:latin typeface="Arial"/>
+              </a:rPr>
+              <a:t>Plan visual de </a:t>
+            </a:r>
+            <a:r>
+              <a:rPr sz="2700" b="1" dirty="0" err="1">
+                <a:solidFill>
+                  <a:srgbClr val="10152B"/>
+                </a:solidFill>
+                <a:latin typeface="Arial"/>
+              </a:rPr>
+              <a:t>próximos</a:t>
+            </a:r>
+            <a:r>
+              <a:rPr sz="2700" b="1" dirty="0">
+                <a:solidFill>
+                  <a:srgbClr val="10152B"/>
+                </a:solidFill>
+                <a:latin typeface="Arial"/>
+              </a:rPr>
+              <a:t> 30 días</a:t>
             </a:r>
             <a:endParaRPr lang="en-US" sz="2600" dirty="0"/>
           </a:p>
@@ -5087,6 +5928,13 @@
             <a:prstDash val="solid"/>
           </a:ln>
         </p:spPr>
+        <p:txBody>
+          <a:bodyPr/>
+          <a:lstStyle/>
+          <a:p>
+            <a:endParaRPr/>
+          </a:p>
+        </p:txBody>
       </p:sp>
       <p:sp>
         <p:nvSpPr>
@@ -5112,6 +5960,13 @@
             <a:prstDash val="solid"/>
           </a:ln>
         </p:spPr>
+        <p:txBody>
+          <a:bodyPr/>
+          <a:lstStyle/>
+          <a:p>
+            <a:endParaRPr/>
+          </a:p>
+        </p:txBody>
       </p:sp>
       <p:sp>
         <p:nvSpPr>
@@ -5174,10 +6029,11 @@
               <a:buNone/>
             </a:pPr>
             <a:r>
-              <a:rPr lang="en-US" sz="1500" b="1" dirty="0">
-                <a:solidFill>
-                  <a:srgbClr val="121426"/>
-                </a:solidFill>
+              <a:rPr sz="1600" b="1" dirty="0" err="1">
+                <a:solidFill>
+                  <a:srgbClr val="10152B"/>
+                </a:solidFill>
+                <a:latin typeface="Arial"/>
               </a:rPr>
               <a:t>Retención</a:t>
             </a:r>
@@ -5212,12 +6068,13 @@
               <a:buNone/>
             </a:pPr>
             <a:r>
-              <a:rPr lang="en-US" sz="1050" dirty="0">
-                <a:solidFill>
-                  <a:srgbClr val="121426"/>
-                </a:solidFill>
-              </a:rPr>
-              <a:t>Hooks de 3 segundos, captions con promesa clara y edición nativa para cada plataforma.</a:t>
+              <a:rPr sz="1100" b="0">
+                <a:solidFill>
+                  <a:srgbClr val="10152B"/>
+                </a:solidFill>
+                <a:latin typeface="Arial"/>
+              </a:rPr>
+              <a:t>Hooks de 3 segundos, captions con promesa clara y edición nativa para TikTok.</a:t>
             </a:r>
             <a:endParaRPr lang="en-US" sz="1050" dirty="0"/>
           </a:p>
@@ -5285,6 +6142,13 @@
             <a:prstDash val="solid"/>
           </a:ln>
         </p:spPr>
+        <p:txBody>
+          <a:bodyPr/>
+          <a:lstStyle/>
+          <a:p>
+            <a:endParaRPr/>
+          </a:p>
+        </p:txBody>
       </p:sp>
       <p:sp>
         <p:nvSpPr>
@@ -5310,6 +6174,13 @@
             <a:prstDash val="solid"/>
           </a:ln>
         </p:spPr>
+        <p:txBody>
+          <a:bodyPr/>
+          <a:lstStyle/>
+          <a:p>
+            <a:endParaRPr/>
+          </a:p>
+        </p:txBody>
       </p:sp>
       <p:sp>
         <p:nvSpPr>
@@ -5372,12 +6243,31 @@
               <a:buNone/>
             </a:pPr>
             <a:r>
-              <a:rPr lang="en-US" sz="1500" b="1" dirty="0">
-                <a:solidFill>
-                  <a:srgbClr val="121426"/>
-                </a:solidFill>
-              </a:rPr>
-              <a:t>Contenido útil</a:t>
+              <a:rPr sz="1600" b="1" dirty="0" err="1">
+                <a:solidFill>
+                  <a:srgbClr val="10152B"/>
+                </a:solidFill>
+                <a:latin typeface="Arial"/>
+              </a:rPr>
+              <a:t>Contenido</a:t>
+            </a:r>
+            <a:r>
+              <a:rPr sz="1600" b="1" dirty="0">
+                <a:solidFill>
+                  <a:srgbClr val="10152B"/>
+                </a:solidFill>
+                <a:latin typeface="Arial"/>
+              </a:rPr>
+              <a:t> </a:t>
+            </a:r>
+            <a:r>
+              <a:rPr sz="1600" b="1" dirty="0" err="1">
+                <a:solidFill>
+                  <a:srgbClr val="10152B"/>
+                </a:solidFill>
+                <a:latin typeface="Arial"/>
+              </a:rPr>
+              <a:t>útil</a:t>
             </a:r>
             <a:endParaRPr lang="en-US" sz="1500" dirty="0"/>
           </a:p>
@@ -5410,12 +6300,13 @@
               <a:buNone/>
             </a:pPr>
             <a:r>
-              <a:rPr lang="en-US" sz="1050" dirty="0">
-                <a:solidFill>
-                  <a:srgbClr val="121426"/>
-                </a:solidFill>
-              </a:rPr>
-              <a:t>Series guardables: tutoriales, hacks, “precio vs resultado”, rutinas y comparativas.</a:t>
+              <a:rPr sz="1100" b="0">
+                <a:solidFill>
+                  <a:srgbClr val="10152B"/>
+                </a:solidFill>
+                <a:latin typeface="Arial"/>
+              </a:rPr>
+              <a:t>Series guardables en TT: tutoriales, hacks, precio vs resultado y rutinas rápidas.</a:t>
             </a:r>
             <a:endParaRPr lang="en-US" sz="1050" dirty="0"/>
           </a:p>
@@ -5483,6 +6374,13 @@
             <a:prstDash val="solid"/>
           </a:ln>
         </p:spPr>
+        <p:txBody>
+          <a:bodyPr/>
+          <a:lstStyle/>
+          <a:p>
+            <a:endParaRPr/>
+          </a:p>
+        </p:txBody>
       </p:sp>
       <p:sp>
         <p:nvSpPr>
@@ -5508,6 +6406,13 @@
             <a:prstDash val="solid"/>
           </a:ln>
         </p:spPr>
+        <p:txBody>
+          <a:bodyPr/>
+          <a:lstStyle/>
+          <a:p>
+            <a:endParaRPr/>
+          </a:p>
+        </p:txBody>
       </p:sp>
       <p:sp>
         <p:nvSpPr>
@@ -5570,10 +6475,11 @@
               <a:buNone/>
             </a:pPr>
             <a:r>
-              <a:rPr lang="en-US" sz="1500" b="1" dirty="0">
-                <a:solidFill>
-                  <a:srgbClr val="121426"/>
-                </a:solidFill>
+              <a:rPr sz="1600" b="1" dirty="0" err="1">
+                <a:solidFill>
+                  <a:srgbClr val="10152B"/>
+                </a:solidFill>
+                <a:latin typeface="Arial"/>
               </a:rPr>
               <a:t>Conversación</a:t>
             </a:r>
@@ -5608,12 +6514,13 @@
               <a:buNone/>
             </a:pPr>
             <a:r>
-              <a:rPr lang="en-US" sz="1050" dirty="0">
-                <a:solidFill>
-                  <a:srgbClr val="121426"/>
-                </a:solidFill>
-              </a:rPr>
-              <a:t>CTA de comentario y votación. Preguntas directas por edad, necesidad y ocasión de uso.</a:t>
+              <a:rPr sz="1100" b="0">
+                <a:solidFill>
+                  <a:srgbClr val="10152B"/>
+                </a:solidFill>
+                <a:latin typeface="Arial"/>
+              </a:rPr>
+              <a:t>CTA de comentario, votación y preguntas simples para activar participación real en TT.</a:t>
             </a:r>
             <a:endParaRPr lang="en-US" sz="1050" dirty="0"/>
           </a:p>
@@ -5681,6 +6588,13 @@
             <a:prstDash val="solid"/>
           </a:ln>
         </p:spPr>
+        <p:txBody>
+          <a:bodyPr/>
+          <a:lstStyle/>
+          <a:p>
+            <a:endParaRPr/>
+          </a:p>
+        </p:txBody>
       </p:sp>
       <p:sp>
         <p:nvSpPr>
@@ -5706,6 +6620,13 @@
             <a:prstDash val="solid"/>
           </a:ln>
         </p:spPr>
+        <p:txBody>
+          <a:bodyPr/>
+          <a:lstStyle/>
+          <a:p>
+            <a:endParaRPr/>
+          </a:p>
+        </p:txBody>
       </p:sp>
       <p:sp>
         <p:nvSpPr>
@@ -5768,10 +6689,11 @@
               <a:buNone/>
             </a:pPr>
             <a:r>
-              <a:rPr lang="en-US" sz="1500" b="1" dirty="0">
-                <a:solidFill>
-                  <a:srgbClr val="121426"/>
-                </a:solidFill>
+              <a:rPr sz="1600" b="1" dirty="0" err="1">
+                <a:solidFill>
+                  <a:srgbClr val="10152B"/>
+                </a:solidFill>
+                <a:latin typeface="Arial"/>
               </a:rPr>
               <a:t>Nichos</a:t>
             </a:r>
@@ -5806,12 +6728,13 @@
               <a:buNone/>
             </a:pPr>
             <a:r>
-              <a:rPr lang="en-US" sz="1050" dirty="0">
-                <a:solidFill>
-                  <a:srgbClr val="121426"/>
-                </a:solidFill>
-              </a:rPr>
-              <a:t>Talentos de skincare, maquillaje pro y Gen Z. Activaciones ocasionales con perfiles en tendencia.</a:t>
+              <a:rPr sz="1100" b="0">
+                <a:solidFill>
+                  <a:srgbClr val="10152B"/>
+                </a:solidFill>
+                <a:latin typeface="Arial"/>
+              </a:rPr>
+              <a:t>Talentos de skincare, maquillaje pro y Gen Z para micro-comunidades con alto potencial.</a:t>
             </a:r>
             <a:endParaRPr lang="en-US" sz="1050" dirty="0"/>
           </a:p>
@@ -5879,6 +6802,13 @@
             <a:prstDash val="solid"/>
           </a:ln>
         </p:spPr>
+        <p:txBody>
+          <a:bodyPr/>
+          <a:lstStyle/>
+          <a:p>
+            <a:endParaRPr/>
+          </a:p>
+        </p:txBody>
       </p:sp>
       <p:sp>
         <p:nvSpPr>
@@ -5899,7 +6829,7 @@
         </p:spPr>
         <p:txBody>
           <a:bodyPr wrap="square" lIns="0" tIns="0" rIns="0" bIns="0" rtlCol="0" anchor="ctr">
-            <a:normAutofit/>
+            <a:normAutofit lnSpcReduction="10000"/>
           </a:bodyPr>
           <a:lstStyle/>
           <a:p>
@@ -5907,14 +6837,118 @@
               <a:buNone/>
             </a:pPr>
             <a:r>
-              <a:rPr lang="en-US" sz="1050" b="1" dirty="0">
-                <a:solidFill>
-                  <a:srgbClr val="FFFFFF"/>
-                </a:solidFill>
-              </a:rPr>
-              <a:t>KPIs de control: ER por formato · guardados por contenido · retención de video · crecimiento de seguidores · ratio paid/orgánico</a:t>
-            </a:r>
-            <a:endParaRPr lang="en-US" sz="1050" dirty="0"/>
+              <a:rPr sz="1100" b="1" dirty="0">
+                <a:solidFill>
+                  <a:schemeClr val="bg1"/>
+                </a:solidFill>
+                <a:latin typeface="Arial"/>
+              </a:rPr>
+              <a:t>KPIs de control TT: </a:t>
+            </a:r>
+            <a:r>
+              <a:rPr sz="1100" b="1" dirty="0" err="1">
+                <a:solidFill>
+                  <a:schemeClr val="bg1"/>
+                </a:solidFill>
+                <a:latin typeface="Arial"/>
+              </a:rPr>
+              <a:t>retención</a:t>
+            </a:r>
+            <a:r>
+              <a:rPr sz="1100" b="1" dirty="0">
+                <a:solidFill>
+                  <a:schemeClr val="bg1"/>
+                </a:solidFill>
+                <a:latin typeface="Arial"/>
+              </a:rPr>
+              <a:t> de video · </a:t>
+            </a:r>
+            <a:r>
+              <a:rPr sz="1100" b="1" dirty="0" err="1">
+                <a:solidFill>
+                  <a:schemeClr val="bg1"/>
+                </a:solidFill>
+                <a:latin typeface="Arial"/>
+              </a:rPr>
+              <a:t>guardados</a:t>
+            </a:r>
+            <a:r>
+              <a:rPr sz="1100" b="1" dirty="0">
+                <a:solidFill>
+                  <a:schemeClr val="bg1"/>
+                </a:solidFill>
+                <a:latin typeface="Arial"/>
+              </a:rPr>
+              <a:t> · </a:t>
+            </a:r>
+            <a:r>
+              <a:rPr sz="1100" b="1" dirty="0" err="1">
+                <a:solidFill>
+                  <a:schemeClr val="bg1"/>
+                </a:solidFill>
+                <a:latin typeface="Arial"/>
+              </a:rPr>
+              <a:t>comentarios</a:t>
+            </a:r>
+            <a:r>
+              <a:rPr sz="1100" b="1" dirty="0">
+                <a:solidFill>
+                  <a:schemeClr val="bg1"/>
+                </a:solidFill>
+                <a:latin typeface="Arial"/>
+              </a:rPr>
+              <a:t> · </a:t>
+            </a:r>
+            <a:r>
+              <a:rPr sz="1100" b="1" dirty="0" err="1">
+                <a:solidFill>
+                  <a:schemeClr val="bg1"/>
+                </a:solidFill>
+                <a:latin typeface="Arial"/>
+              </a:rPr>
+              <a:t>crecimiento</a:t>
+            </a:r>
+            <a:r>
+              <a:rPr sz="1100" b="1" dirty="0">
+                <a:solidFill>
+                  <a:schemeClr val="bg1"/>
+                </a:solidFill>
+                <a:latin typeface="Arial"/>
+              </a:rPr>
+              <a:t> </a:t>
+            </a:r>
+            <a:r>
+              <a:rPr sz="1100" b="1" dirty="0" err="1">
+                <a:solidFill>
+                  <a:schemeClr val="bg1"/>
+                </a:solidFill>
+                <a:latin typeface="Arial"/>
+              </a:rPr>
+              <a:t>seguidores</a:t>
+            </a:r>
+            <a:r>
+              <a:rPr sz="1100" b="1" dirty="0">
+                <a:solidFill>
+                  <a:schemeClr val="bg1"/>
+                </a:solidFill>
+                <a:latin typeface="Arial"/>
+              </a:rPr>
+              <a:t> · ratio paid/</a:t>
+            </a:r>
+            <a:r>
+              <a:rPr sz="1100" b="1" dirty="0" err="1">
+                <a:solidFill>
+                  <a:schemeClr val="bg1"/>
+                </a:solidFill>
+                <a:latin typeface="Arial"/>
+              </a:rPr>
+              <a:t>orgánico</a:t>
+            </a:r>
+            <a:endParaRPr lang="en-US" sz="1050" dirty="0">
+              <a:solidFill>
+                <a:schemeClr val="bg1"/>
+              </a:solidFill>
+            </a:endParaRPr>
           </a:p>
         </p:txBody>
       </p:sp>
@@ -5975,6 +7009,13 @@
             <a:prstDash val="solid"/>
           </a:ln>
         </p:spPr>
+        <p:txBody>
+          <a:bodyPr/>
+          <a:lstStyle/>
+          <a:p>
+            <a:endParaRPr/>
+          </a:p>
+        </p:txBody>
       </p:sp>
       <p:sp>
         <p:nvSpPr>
@@ -6000,6 +7041,13 @@
             <a:prstDash val="solid"/>
           </a:ln>
         </p:spPr>
+        <p:txBody>
+          <a:bodyPr/>
+          <a:lstStyle/>
+          <a:p>
+            <a:endParaRPr/>
+          </a:p>
+        </p:txBody>
       </p:sp>
       <p:sp>
         <p:nvSpPr>
@@ -6034,7 +7082,7 @@
                 <a:ea typeface="Aptos" pitchFamily="34" charset="-122"/>
                 <a:cs typeface="Aptos" pitchFamily="34" charset="-120"/>
               </a:rPr>
-              <a:t>MARZO 2026</a:t>
+              <a:t>MARZO</a:t>
             </a:r>
             <a:endParaRPr lang="en-US" sz="800" dirty="0"/>
           </a:p>
@@ -6143,6 +7191,13 @@
             <a:prstDash val="solid"/>
           </a:ln>
         </p:spPr>
+        <p:txBody>
+          <a:bodyPr/>
+          <a:lstStyle/>
+          <a:p>
+            <a:endParaRPr/>
+          </a:p>
+        </p:txBody>
       </p:sp>
       <p:sp>
         <p:nvSpPr>
@@ -6252,7 +7307,7 @@
                   <a:srgbClr val="1FA37A"/>
                 </a:solidFill>
               </a:rPr>
-              <a:t>+24,5% vs febrero</a:t>
+              <a:t>24,5% vs febrero</a:t>
             </a:r>
             <a:endParaRPr lang="en-US" sz="800" dirty="0"/>
           </a:p>
@@ -6284,6 +7339,13 @@
             <a:prstDash val="solid"/>
           </a:ln>
         </p:spPr>
+        <p:txBody>
+          <a:bodyPr/>
+          <a:lstStyle/>
+          <a:p>
+            <a:endParaRPr/>
+          </a:p>
+        </p:txBody>
       </p:sp>
       <p:sp>
         <p:nvSpPr>
@@ -6393,7 +7455,7 @@
                   <a:srgbClr val="1FA37A"/>
                 </a:solidFill>
               </a:rPr>
-              <a:t>+0,2% vs febrero</a:t>
+              <a:t>0,2% vs febrero</a:t>
             </a:r>
             <a:endParaRPr lang="en-US" sz="800" dirty="0"/>
           </a:p>
@@ -6425,6 +7487,13 @@
             <a:prstDash val="solid"/>
           </a:ln>
         </p:spPr>
+        <p:txBody>
+          <a:bodyPr/>
+          <a:lstStyle/>
+          <a:p>
+            <a:endParaRPr/>
+          </a:p>
+        </p:txBody>
       </p:sp>
       <p:sp>
         <p:nvSpPr>
@@ -6534,7 +7603,7 @@
                   <a:srgbClr val="C74363"/>
                 </a:solidFill>
               </a:rPr>
-              <a:t>-55,2% vs febrero</a:t>
+              <a:t>−53,5% vs febrero</a:t>
             </a:r>
             <a:endParaRPr lang="en-US" sz="800" dirty="0"/>
           </a:p>
@@ -6566,6 +7635,13 @@
             <a:prstDash val="solid"/>
           </a:ln>
         </p:spPr>
+        <p:txBody>
+          <a:bodyPr/>
+          <a:lstStyle/>
+          <a:p>
+            <a:endParaRPr/>
+          </a:p>
+        </p:txBody>
       </p:sp>
       <p:sp>
         <p:nvSpPr>
@@ -6675,7 +7751,7 @@
                   <a:srgbClr val="C74363"/>
                 </a:solidFill>
               </a:rPr>
-              <a:t>-56,3% vs febrero</a:t>
+              <a:t>−53,0% vs febrero</a:t>
             </a:r>
             <a:endParaRPr lang="en-US" sz="800" dirty="0"/>
           </a:p>
@@ -6707,6 +7783,13 @@
             <a:prstDash val="solid"/>
           </a:ln>
         </p:spPr>
+        <p:txBody>
+          <a:bodyPr/>
+          <a:lstStyle/>
+          <a:p>
+            <a:endParaRPr/>
+          </a:p>
+        </p:txBody>
       </p:sp>
       <p:sp>
         <p:nvSpPr>
@@ -6816,7 +7899,7 @@
                   <a:srgbClr val="1FA37A"/>
                 </a:solidFill>
               </a:rPr>
-              <a:t>+78,4% vs febrero</a:t>
+              <a:t>78,4% vs febrero</a:t>
             </a:r>
             <a:endParaRPr lang="en-US" sz="800" dirty="0"/>
           </a:p>
@@ -6888,7 +7971,7 @@
                   <a:srgbClr val="121426"/>
                 </a:solidFill>
               </a:rPr>
-              <a:t>Febrero vs Marzo</a:t>
+              <a:t>Febrero 2026</a:t>
             </a:r>
             <a:endParaRPr lang="en-US" sz="950" dirty="0"/>
           </a:p>
@@ -6918,6 +8001,13 @@
             <a:prstDash val="solid"/>
           </a:ln>
         </p:spPr>
+        <p:txBody>
+          <a:bodyPr/>
+          <a:lstStyle/>
+          <a:p>
+            <a:endParaRPr/>
+          </a:p>
+        </p:txBody>
       </p:sp>
       <p:sp>
         <p:nvSpPr>
@@ -7017,6 +8107,13 @@
             <a:prstDash val="solid"/>
           </a:ln>
         </p:spPr>
+        <p:txBody>
+          <a:bodyPr/>
+          <a:lstStyle/>
+          <a:p>
+            <a:endParaRPr/>
+          </a:p>
+        </p:txBody>
       </p:sp>
       <p:sp>
         <p:nvSpPr>
@@ -7116,6 +8213,13 @@
             <a:prstDash val="solid"/>
           </a:ln>
         </p:spPr>
+        <p:txBody>
+          <a:bodyPr/>
+          <a:lstStyle/>
+          <a:p>
+            <a:endParaRPr/>
+          </a:p>
+        </p:txBody>
       </p:sp>
       <p:sp>
         <p:nvSpPr>
@@ -7215,6 +8319,13 @@
             <a:prstDash val="solid"/>
           </a:ln>
         </p:spPr>
+        <p:txBody>
+          <a:bodyPr/>
+          <a:lstStyle/>
+          <a:p>
+            <a:endParaRPr/>
+          </a:p>
+        </p:txBody>
       </p:sp>
       <p:sp>
         <p:nvSpPr>
@@ -7316,6 +8427,13 @@
             <a:prstDash val="solid"/>
           </a:ln>
         </p:spPr>
+        <p:txBody>
+          <a:bodyPr/>
+          <a:lstStyle/>
+          <a:p>
+            <a:endParaRPr/>
+          </a:p>
+        </p:txBody>
       </p:sp>
       <p:sp>
         <p:nvSpPr>
@@ -7381,6 +8499,13 @@
             <a:prstDash val="solid"/>
           </a:ln>
         </p:spPr>
+        <p:txBody>
+          <a:bodyPr/>
+          <a:lstStyle/>
+          <a:p>
+            <a:endParaRPr/>
+          </a:p>
+        </p:txBody>
       </p:sp>
       <p:sp>
         <p:nvSpPr>
@@ -7446,6 +8571,13 @@
             <a:prstDash val="solid"/>
           </a:ln>
         </p:spPr>
+        <p:txBody>
+          <a:bodyPr/>
+          <a:lstStyle/>
+          <a:p>
+            <a:endParaRPr/>
+          </a:p>
+        </p:txBody>
       </p:sp>
       <p:sp>
         <p:nvSpPr>
@@ -7511,6 +8643,13 @@
             <a:prstDash val="solid"/>
           </a:ln>
         </p:spPr>
+        <p:txBody>
+          <a:bodyPr/>
+          <a:lstStyle/>
+          <a:p>
+            <a:endParaRPr/>
+          </a:p>
+        </p:txBody>
       </p:sp>
       <p:sp>
         <p:nvSpPr>
@@ -7607,6 +8746,13 @@
             <a:prstDash val="solid"/>
           </a:ln>
         </p:spPr>
+        <p:txBody>
+          <a:bodyPr/>
+          <a:lstStyle/>
+          <a:p>
+            <a:endParaRPr/>
+          </a:p>
+        </p:txBody>
       </p:sp>
       <p:sp>
         <p:nvSpPr>
@@ -7632,6 +8778,13 @@
             <a:prstDash val="solid"/>
           </a:ln>
         </p:spPr>
+        <p:txBody>
+          <a:bodyPr/>
+          <a:lstStyle/>
+          <a:p>
+            <a:endParaRPr/>
+          </a:p>
+        </p:txBody>
       </p:sp>
       <p:sp>
         <p:nvSpPr>
@@ -7666,7 +8819,7 @@
                 <a:ea typeface="Aptos" pitchFamily="34" charset="-122"/>
                 <a:cs typeface="Aptos" pitchFamily="34" charset="-120"/>
               </a:rPr>
-              <a:t>MARZO 2026</a:t>
+              <a:t>MARZO</a:t>
             </a:r>
             <a:endParaRPr lang="en-US" sz="800" dirty="0"/>
           </a:p>
@@ -7811,6 +8964,13 @@
             <a:prstDash val="solid"/>
           </a:ln>
         </p:spPr>
+        <p:txBody>
+          <a:bodyPr/>
+          <a:lstStyle/>
+          <a:p>
+            <a:endParaRPr/>
+          </a:p>
+        </p:txBody>
       </p:sp>
       <p:sp>
         <p:nvSpPr>
@@ -7984,6 +9144,13 @@
             <a:prstDash val="solid"/>
           </a:ln>
         </p:spPr>
+        <p:txBody>
+          <a:bodyPr/>
+          <a:lstStyle/>
+          <a:p>
+            <a:endParaRPr/>
+          </a:p>
+        </p:txBody>
       </p:sp>
       <p:sp>
         <p:nvSpPr>
@@ -8009,6 +9176,13 @@
             <a:prstDash val="solid"/>
           </a:ln>
         </p:spPr>
+        <p:txBody>
+          <a:bodyPr/>
+          <a:lstStyle/>
+          <a:p>
+            <a:endParaRPr/>
+          </a:p>
+        </p:txBody>
       </p:sp>
       <p:sp>
         <p:nvSpPr>
@@ -8110,6 +9284,13 @@
             <a:prstDash val="solid"/>
           </a:ln>
         </p:spPr>
+        <p:txBody>
+          <a:bodyPr/>
+          <a:lstStyle/>
+          <a:p>
+            <a:endParaRPr/>
+          </a:p>
+        </p:txBody>
       </p:sp>
       <p:sp>
         <p:nvSpPr>
@@ -8135,6 +9316,13 @@
             <a:prstDash val="solid"/>
           </a:ln>
         </p:spPr>
+        <p:txBody>
+          <a:bodyPr/>
+          <a:lstStyle/>
+          <a:p>
+            <a:endParaRPr/>
+          </a:p>
+        </p:txBody>
       </p:sp>
       <p:sp>
         <p:nvSpPr>
@@ -8195,6 +9383,13 @@
             <a:prstDash val="solid"/>
           </a:ln>
         </p:spPr>
+        <p:txBody>
+          <a:bodyPr/>
+          <a:lstStyle/>
+          <a:p>
+            <a:endParaRPr/>
+          </a:p>
+        </p:txBody>
       </p:sp>
       <p:sp>
         <p:nvSpPr>
@@ -8368,6 +9563,13 @@
             <a:prstDash val="solid"/>
           </a:ln>
         </p:spPr>
+        <p:txBody>
+          <a:bodyPr/>
+          <a:lstStyle/>
+          <a:p>
+            <a:endParaRPr/>
+          </a:p>
+        </p:txBody>
       </p:sp>
       <p:sp>
         <p:nvSpPr>
@@ -8393,6 +9595,13 @@
             <a:prstDash val="solid"/>
           </a:ln>
         </p:spPr>
+        <p:txBody>
+          <a:bodyPr/>
+          <a:lstStyle/>
+          <a:p>
+            <a:endParaRPr/>
+          </a:p>
+        </p:txBody>
       </p:sp>
       <p:sp>
         <p:nvSpPr>
@@ -8494,6 +9703,13 @@
             <a:prstDash val="solid"/>
           </a:ln>
         </p:spPr>
+        <p:txBody>
+          <a:bodyPr/>
+          <a:lstStyle/>
+          <a:p>
+            <a:endParaRPr/>
+          </a:p>
+        </p:txBody>
       </p:sp>
       <p:sp>
         <p:nvSpPr>
@@ -8519,6 +9735,13 @@
             <a:prstDash val="solid"/>
           </a:ln>
         </p:spPr>
+        <p:txBody>
+          <a:bodyPr/>
+          <a:lstStyle/>
+          <a:p>
+            <a:endParaRPr/>
+          </a:p>
+        </p:txBody>
       </p:sp>
       <p:sp>
         <p:nvSpPr>
@@ -8579,6 +9802,13 @@
             <a:prstDash val="solid"/>
           </a:ln>
         </p:spPr>
+        <p:txBody>
+          <a:bodyPr/>
+          <a:lstStyle/>
+          <a:p>
+            <a:endParaRPr/>
+          </a:p>
+        </p:txBody>
       </p:sp>
       <p:sp>
         <p:nvSpPr>
@@ -8752,6 +9982,13 @@
             <a:prstDash val="solid"/>
           </a:ln>
         </p:spPr>
+        <p:txBody>
+          <a:bodyPr/>
+          <a:lstStyle/>
+          <a:p>
+            <a:endParaRPr/>
+          </a:p>
+        </p:txBody>
       </p:sp>
       <p:sp>
         <p:nvSpPr>
@@ -8777,6 +10014,13 @@
             <a:prstDash val="solid"/>
           </a:ln>
         </p:spPr>
+        <p:txBody>
+          <a:bodyPr/>
+          <a:lstStyle/>
+          <a:p>
+            <a:endParaRPr/>
+          </a:p>
+        </p:txBody>
       </p:sp>
       <p:sp>
         <p:nvSpPr>
@@ -8878,6 +10122,13 @@
             <a:prstDash val="solid"/>
           </a:ln>
         </p:spPr>
+        <p:txBody>
+          <a:bodyPr/>
+          <a:lstStyle/>
+          <a:p>
+            <a:endParaRPr/>
+          </a:p>
+        </p:txBody>
       </p:sp>
       <p:sp>
         <p:nvSpPr>
@@ -8903,6 +10154,13 @@
             <a:prstDash val="solid"/>
           </a:ln>
         </p:spPr>
+        <p:txBody>
+          <a:bodyPr/>
+          <a:lstStyle/>
+          <a:p>
+            <a:endParaRPr/>
+          </a:p>
+        </p:txBody>
       </p:sp>
       <p:sp>
         <p:nvSpPr>
@@ -8963,6 +10221,13 @@
             <a:prstDash val="solid"/>
           </a:ln>
         </p:spPr>
+        <p:txBody>
+          <a:bodyPr/>
+          <a:lstStyle/>
+          <a:p>
+            <a:endParaRPr/>
+          </a:p>
+        </p:txBody>
       </p:sp>
       <p:sp>
         <p:nvSpPr>
@@ -9059,6 +10324,13 @@
             <a:prstDash val="solid"/>
           </a:ln>
         </p:spPr>
+        <p:txBody>
+          <a:bodyPr/>
+          <a:lstStyle/>
+          <a:p>
+            <a:endParaRPr/>
+          </a:p>
+        </p:txBody>
       </p:sp>
       <p:sp>
         <p:nvSpPr>
@@ -9084,6 +10356,13 @@
             <a:prstDash val="solid"/>
           </a:ln>
         </p:spPr>
+        <p:txBody>
+          <a:bodyPr/>
+          <a:lstStyle/>
+          <a:p>
+            <a:endParaRPr/>
+          </a:p>
+        </p:txBody>
       </p:sp>
       <p:sp>
         <p:nvSpPr>
@@ -9118,7 +10397,7 @@
                 <a:ea typeface="Aptos" pitchFamily="34" charset="-122"/>
                 <a:cs typeface="Aptos" pitchFamily="34" charset="-120"/>
               </a:rPr>
-              <a:t>MARZO 2026</a:t>
+              <a:t>MARZO</a:t>
             </a:r>
             <a:endParaRPr lang="en-US" sz="800" dirty="0"/>
           </a:p>
@@ -9239,7 +10518,7 @@
       </p:sp>
       <p:sp>
         <p:nvSpPr>
-          <p:cNvPr id="8" name="Shape 6"/>
+          <p:cNvPr id="8" name="bar_channel_views_ig"/>
           <p:cNvSpPr/>
           <p:nvPr/>
         </p:nvSpPr>
@@ -9261,6 +10540,13 @@
             <a:prstDash val="solid"/>
           </a:ln>
         </p:spPr>
+        <p:txBody>
+          <a:bodyPr/>
+          <a:lstStyle/>
+          <a:p>
+            <a:endParaRPr/>
+          </a:p>
+        </p:txBody>
       </p:sp>
       <p:sp>
         <p:nvSpPr>
@@ -9300,13 +10586,13 @@
       </p:sp>
       <p:sp>
         <p:nvSpPr>
-          <p:cNvPr id="10" name="Text 8"/>
-          <p:cNvSpPr/>
-          <p:nvPr/>
-        </p:nvSpPr>
-        <p:spPr>
-          <a:xfrm>
-            <a:off x="745236" y="1188720"/>
+          <p:cNvPr id="10" name="label_channel_views_ig"/>
+          <p:cNvSpPr/>
+          <p:nvPr/>
+        </p:nvSpPr>
+        <p:spPr>
+          <a:xfrm>
+            <a:off x="745236" y="1199440"/>
             <a:ext cx="1069848" cy="182880"/>
           </a:xfrm>
           <a:prstGeom prst="rect">
@@ -9338,7 +10624,7 @@
       </p:sp>
       <p:sp>
         <p:nvSpPr>
-          <p:cNvPr id="11" name="Shape 9"/>
+          <p:cNvPr id="11" name="bar_channel_views_fb"/>
           <p:cNvSpPr/>
           <p:nvPr/>
         </p:nvSpPr>
@@ -9360,6 +10646,13 @@
             <a:prstDash val="solid"/>
           </a:ln>
         </p:spPr>
+        <p:txBody>
+          <a:bodyPr/>
+          <a:lstStyle/>
+          <a:p>
+            <a:endParaRPr/>
+          </a:p>
+        </p:txBody>
       </p:sp>
       <p:sp>
         <p:nvSpPr>
@@ -9399,13 +10692,13 @@
       </p:sp>
       <p:sp>
         <p:nvSpPr>
-          <p:cNvPr id="13" name="Text 11"/>
-          <p:cNvSpPr/>
-          <p:nvPr/>
-        </p:nvSpPr>
-        <p:spPr>
-          <a:xfrm>
-            <a:off x="2025396" y="2356995"/>
+          <p:cNvPr id="13" name="label_channel_views_fb"/>
+          <p:cNvSpPr/>
+          <p:nvPr/>
+        </p:nvSpPr>
+        <p:spPr>
+          <a:xfrm>
+            <a:off x="2025396" y="2367715"/>
             <a:ext cx="1069848" cy="182880"/>
           </a:xfrm>
           <a:prstGeom prst="rect">
@@ -9437,7 +10730,7 @@
       </p:sp>
       <p:sp>
         <p:nvSpPr>
-          <p:cNvPr id="14" name="Shape 12"/>
+          <p:cNvPr id="14" name="bar_channel_views_tt"/>
           <p:cNvSpPr/>
           <p:nvPr/>
         </p:nvSpPr>
@@ -9459,6 +10752,13 @@
             <a:prstDash val="solid"/>
           </a:ln>
         </p:spPr>
+        <p:txBody>
+          <a:bodyPr/>
+          <a:lstStyle/>
+          <a:p>
+            <a:endParaRPr/>
+          </a:p>
+        </p:txBody>
       </p:sp>
       <p:sp>
         <p:nvSpPr>
@@ -9498,13 +10798,13 @@
       </p:sp>
       <p:sp>
         <p:nvSpPr>
-          <p:cNvPr id="16" name="Text 14"/>
-          <p:cNvSpPr/>
-          <p:nvPr/>
-        </p:nvSpPr>
-        <p:spPr>
-          <a:xfrm>
-            <a:off x="3305556" y="2053908"/>
+          <p:cNvPr id="16" name="label_channel_views_tt"/>
+          <p:cNvSpPr/>
+          <p:nvPr/>
+        </p:nvSpPr>
+        <p:spPr>
+          <a:xfrm>
+            <a:off x="3305556" y="2064628"/>
             <a:ext cx="1069848" cy="182880"/>
           </a:xfrm>
           <a:prstGeom prst="rect">
@@ -9572,7 +10872,7 @@
       </p:sp>
       <p:sp>
         <p:nvSpPr>
-          <p:cNvPr id="18" name="Shape 16"/>
+          <p:cNvPr id="18" name="bar_channel_reach_ig"/>
           <p:cNvSpPr/>
           <p:nvPr/>
         </p:nvSpPr>
@@ -9594,6 +10894,13 @@
             <a:prstDash val="solid"/>
           </a:ln>
         </p:spPr>
+        <p:txBody>
+          <a:bodyPr/>
+          <a:lstStyle/>
+          <a:p>
+            <a:endParaRPr/>
+          </a:p>
+        </p:txBody>
       </p:sp>
       <p:sp>
         <p:nvSpPr>
@@ -9633,13 +10940,13 @@
       </p:sp>
       <p:sp>
         <p:nvSpPr>
-          <p:cNvPr id="20" name="Text 18"/>
-          <p:cNvSpPr/>
-          <p:nvPr/>
-        </p:nvSpPr>
-        <p:spPr>
-          <a:xfrm>
-            <a:off x="4636008" y="1188720"/>
+          <p:cNvPr id="20" name="label_channel_reach_ig"/>
+          <p:cNvSpPr/>
+          <p:nvPr/>
+        </p:nvSpPr>
+        <p:spPr>
+          <a:xfrm>
+            <a:off x="4636008" y="1199440"/>
             <a:ext cx="969264" cy="182880"/>
           </a:xfrm>
           <a:prstGeom prst="rect">
@@ -9671,14 +10978,14 @@
       </p:sp>
       <p:sp>
         <p:nvSpPr>
-          <p:cNvPr id="21" name="Shape 19"/>
-          <p:cNvSpPr/>
-          <p:nvPr/>
-        </p:nvSpPr>
-        <p:spPr>
-          <a:xfrm>
-            <a:off x="5916168" y="2414186"/>
-            <a:ext cx="603504" cy="923374"/>
+          <p:cNvPr id="21" name="bar_channel_reach_fb"/>
+          <p:cNvSpPr/>
+          <p:nvPr/>
+        </p:nvSpPr>
+        <p:spPr>
+          <a:xfrm>
+            <a:off x="5916168" y="2414187"/>
+            <a:ext cx="603504" cy="923373"/>
           </a:xfrm>
           <a:prstGeom prst="rect">
             <a:avLst/>
@@ -9693,6 +11000,13 @@
             <a:prstDash val="solid"/>
           </a:ln>
         </p:spPr>
+        <p:txBody>
+          <a:bodyPr/>
+          <a:lstStyle/>
+          <a:p>
+            <a:endParaRPr/>
+          </a:p>
+        </p:txBody>
       </p:sp>
       <p:sp>
         <p:nvSpPr>
@@ -9732,13 +11046,13 @@
       </p:sp>
       <p:sp>
         <p:nvSpPr>
-          <p:cNvPr id="23" name="Text 21"/>
-          <p:cNvSpPr/>
-          <p:nvPr/>
-        </p:nvSpPr>
-        <p:spPr>
-          <a:xfrm>
-            <a:off x="5733288" y="2185586"/>
+          <p:cNvPr id="23" name="label_channel_reach_fb"/>
+          <p:cNvSpPr/>
+          <p:nvPr/>
+        </p:nvSpPr>
+        <p:spPr>
+          <a:xfrm>
+            <a:off x="5733288" y="2196307"/>
             <a:ext cx="969264" cy="182880"/>
           </a:xfrm>
           <a:prstGeom prst="rect">
@@ -9770,7 +11084,7 @@
       </p:sp>
       <p:sp>
         <p:nvSpPr>
-          <p:cNvPr id="24" name="Shape 22"/>
+          <p:cNvPr id="24" name="bar_channel_reach_tt"/>
           <p:cNvSpPr/>
           <p:nvPr/>
         </p:nvSpPr>
@@ -9792,6 +11106,13 @@
             <a:prstDash val="solid"/>
           </a:ln>
         </p:spPr>
+        <p:txBody>
+          <a:bodyPr/>
+          <a:lstStyle/>
+          <a:p>
+            <a:endParaRPr/>
+          </a:p>
+        </p:txBody>
       </p:sp>
       <p:sp>
         <p:nvSpPr>
@@ -9831,13 +11152,13 @@
       </p:sp>
       <p:sp>
         <p:nvSpPr>
-          <p:cNvPr id="26" name="Text 24"/>
-          <p:cNvSpPr/>
-          <p:nvPr/>
-        </p:nvSpPr>
-        <p:spPr>
-          <a:xfrm>
-            <a:off x="6830568" y="2185900"/>
+          <p:cNvPr id="26" name="label_channel_reach_tt"/>
+          <p:cNvSpPr/>
+          <p:nvPr/>
+        </p:nvSpPr>
+        <p:spPr>
+          <a:xfrm>
+            <a:off x="6830568" y="2196620"/>
             <a:ext cx="969264" cy="182880"/>
           </a:xfrm>
           <a:prstGeom prst="rect">
@@ -9905,7 +11226,7 @@
       </p:sp>
       <p:sp>
         <p:nvSpPr>
-          <p:cNvPr id="28" name="Shape 26"/>
+          <p:cNvPr id="28" name="bar_channel_er_ig"/>
           <p:cNvSpPr/>
           <p:nvPr/>
         </p:nvSpPr>
@@ -9927,6 +11248,13 @@
             <a:prstDash val="solid"/>
           </a:ln>
         </p:spPr>
+        <p:txBody>
+          <a:bodyPr/>
+          <a:lstStyle/>
+          <a:p>
+            <a:endParaRPr/>
+          </a:p>
+        </p:txBody>
       </p:sp>
       <p:sp>
         <p:nvSpPr>
@@ -9966,13 +11294,13 @@
       </p:sp>
       <p:sp>
         <p:nvSpPr>
-          <p:cNvPr id="30" name="Text 28"/>
-          <p:cNvSpPr/>
-          <p:nvPr/>
-        </p:nvSpPr>
-        <p:spPr>
-          <a:xfrm>
-            <a:off x="8167878" y="1188720"/>
+          <p:cNvPr id="30" name="label_channel_er_ig"/>
+          <p:cNvSpPr/>
+          <p:nvPr/>
+        </p:nvSpPr>
+        <p:spPr>
+          <a:xfrm>
+            <a:off x="8167878" y="1199440"/>
             <a:ext cx="885444" cy="182880"/>
           </a:xfrm>
           <a:prstGeom prst="rect">
@@ -10004,7 +11332,7 @@
       </p:sp>
       <p:sp>
         <p:nvSpPr>
-          <p:cNvPr id="31" name="Shape 29"/>
+          <p:cNvPr id="31" name="bar_channel_er_fb"/>
           <p:cNvSpPr/>
           <p:nvPr/>
         </p:nvSpPr>
@@ -10026,6 +11354,13 @@
             <a:prstDash val="solid"/>
           </a:ln>
         </p:spPr>
+        <p:txBody>
+          <a:bodyPr/>
+          <a:lstStyle/>
+          <a:p>
+            <a:endParaRPr/>
+          </a:p>
+        </p:txBody>
       </p:sp>
       <p:sp>
         <p:nvSpPr>
@@ -10065,13 +11400,13 @@
       </p:sp>
       <p:sp>
         <p:nvSpPr>
-          <p:cNvPr id="33" name="Text 31"/>
-          <p:cNvSpPr/>
-          <p:nvPr/>
-        </p:nvSpPr>
-        <p:spPr>
-          <a:xfrm>
-            <a:off x="9112758" y="2834640"/>
+          <p:cNvPr id="33" name="label_channel_er_fb"/>
+          <p:cNvSpPr/>
+          <p:nvPr/>
+        </p:nvSpPr>
+        <p:spPr>
+          <a:xfrm>
+            <a:off x="9112758" y="2845360"/>
             <a:ext cx="885444" cy="182880"/>
           </a:xfrm>
           <a:prstGeom prst="rect">
@@ -10103,7 +11438,7 @@
       </p:sp>
       <p:sp>
         <p:nvSpPr>
-          <p:cNvPr id="34" name="Shape 32"/>
+          <p:cNvPr id="34" name="bar_channel_er_tt"/>
           <p:cNvSpPr/>
           <p:nvPr/>
         </p:nvSpPr>
@@ -10125,6 +11460,13 @@
             <a:prstDash val="solid"/>
           </a:ln>
         </p:spPr>
+        <p:txBody>
+          <a:bodyPr/>
+          <a:lstStyle/>
+          <a:p>
+            <a:endParaRPr/>
+          </a:p>
+        </p:txBody>
       </p:sp>
       <p:sp>
         <p:nvSpPr>
@@ -10164,13 +11506,13 @@
       </p:sp>
       <p:sp>
         <p:nvSpPr>
-          <p:cNvPr id="36" name="Text 34"/>
-          <p:cNvSpPr/>
-          <p:nvPr/>
-        </p:nvSpPr>
-        <p:spPr>
-          <a:xfrm>
-            <a:off x="10057638" y="1874520"/>
+          <p:cNvPr id="36" name="label_channel_er_tt"/>
+          <p:cNvSpPr/>
+          <p:nvPr/>
+        </p:nvSpPr>
+        <p:spPr>
+          <a:xfrm>
+            <a:off x="10057638" y="1885240"/>
             <a:ext cx="885444" cy="182880"/>
           </a:xfrm>
           <a:prstGeom prst="rect">
@@ -10226,6 +11568,13 @@
             <a:prstDash val="solid"/>
           </a:ln>
         </p:spPr>
+        <p:txBody>
+          <a:bodyPr/>
+          <a:lstStyle/>
+          <a:p>
+            <a:endParaRPr/>
+          </a:p>
+        </p:txBody>
       </p:sp>
       <p:sp>
         <p:nvSpPr>
@@ -10365,6 +11714,13 @@
             <a:prstDash val="solid"/>
           </a:ln>
         </p:spPr>
+        <p:txBody>
+          <a:bodyPr/>
+          <a:lstStyle/>
+          <a:p>
+            <a:endParaRPr/>
+          </a:p>
+        </p:txBody>
       </p:sp>
       <p:sp>
         <p:nvSpPr>
@@ -10504,6 +11860,13 @@
             <a:prstDash val="solid"/>
           </a:ln>
         </p:spPr>
+        <p:txBody>
+          <a:bodyPr/>
+          <a:lstStyle/>
+          <a:p>
+            <a:endParaRPr/>
+          </a:p>
+        </p:txBody>
       </p:sp>
       <p:sp>
         <p:nvSpPr>
@@ -10712,6 +12075,13 @@
             <a:prstDash val="solid"/>
           </a:ln>
         </p:spPr>
+        <p:txBody>
+          <a:bodyPr/>
+          <a:lstStyle/>
+          <a:p>
+            <a:endParaRPr/>
+          </a:p>
+        </p:txBody>
       </p:sp>
       <p:sp>
         <p:nvSpPr>
@@ -10737,6 +12107,13 @@
             <a:prstDash val="solid"/>
           </a:ln>
         </p:spPr>
+        <p:txBody>
+          <a:bodyPr/>
+          <a:lstStyle/>
+          <a:p>
+            <a:endParaRPr/>
+          </a:p>
+        </p:txBody>
       </p:sp>
       <p:sp>
         <p:nvSpPr>
@@ -10771,7 +12148,7 @@
                 <a:ea typeface="Aptos" pitchFamily="34" charset="-122"/>
                 <a:cs typeface="Aptos" pitchFamily="34" charset="-120"/>
               </a:rPr>
-              <a:t>MARZO 2026</a:t>
+              <a:t>MARZO</a:t>
             </a:r>
             <a:endParaRPr lang="en-US" sz="800" dirty="0"/>
           </a:p>
@@ -10880,6 +12257,13 @@
             <a:prstDash val="solid"/>
           </a:ln>
         </p:spPr>
+        <p:txBody>
+          <a:bodyPr/>
+          <a:lstStyle/>
+          <a:p>
+            <a:endParaRPr/>
+          </a:p>
+        </p:txBody>
       </p:sp>
       <p:sp>
         <p:nvSpPr>
@@ -10965,7 +12349,7 @@
         </p:nvSpPr>
         <p:spPr>
           <a:xfrm>
-            <a:off x="804672" y="1844142"/>
+            <a:off x="804672" y="1851660"/>
             <a:ext cx="1499616" cy="182880"/>
           </a:xfrm>
           <a:prstGeom prst="rect">
@@ -10984,7 +12368,7 @@
               <a:buNone/>
             </a:pPr>
             <a:r>
-              <a:rPr lang="en-US" sz="800" dirty="0">
+              <a:rPr lang="en-US" sz="850" dirty="0">
                 <a:solidFill>
                   <a:srgbClr val="1FA37A"/>
                 </a:solidFill>
@@ -11021,6 +12405,13 @@
             <a:prstDash val="solid"/>
           </a:ln>
         </p:spPr>
+        <p:txBody>
+          <a:bodyPr/>
+          <a:lstStyle/>
+          <a:p>
+            <a:endParaRPr/>
+          </a:p>
+        </p:txBody>
       </p:sp>
       <p:sp>
         <p:nvSpPr>
@@ -11106,7 +12497,7 @@
         </p:nvSpPr>
         <p:spPr>
           <a:xfrm>
-            <a:off x="2743200" y="1844142"/>
+            <a:off x="2743200" y="1854718"/>
             <a:ext cx="1088136" cy="182880"/>
           </a:xfrm>
           <a:prstGeom prst="rect">
@@ -11162,6 +12553,13 @@
             <a:prstDash val="solid"/>
           </a:ln>
         </p:spPr>
+        <p:txBody>
+          <a:bodyPr/>
+          <a:lstStyle/>
+          <a:p>
+            <a:endParaRPr/>
+          </a:p>
+        </p:txBody>
       </p:sp>
       <p:sp>
         <p:nvSpPr>
@@ -11247,7 +12645,7 @@
         </p:nvSpPr>
         <p:spPr>
           <a:xfrm>
-            <a:off x="4416552" y="1844142"/>
+            <a:off x="4404158" y="1851552"/>
             <a:ext cx="1088136" cy="182880"/>
           </a:xfrm>
           <a:prstGeom prst="rect">
@@ -11266,7 +12664,7 @@
               <a:buNone/>
             </a:pPr>
             <a:r>
-              <a:rPr lang="en-US" sz="800" dirty="0">
+              <a:rPr lang="en-US" sz="850" dirty="0">
                 <a:solidFill>
                   <a:srgbClr val="C74363"/>
                 </a:solidFill>
@@ -11303,6 +12701,13 @@
             <a:prstDash val="solid"/>
           </a:ln>
         </p:spPr>
+        <p:txBody>
+          <a:bodyPr/>
+          <a:lstStyle/>
+          <a:p>
+            <a:endParaRPr/>
+          </a:p>
+        </p:txBody>
       </p:sp>
       <p:sp>
         <p:nvSpPr>
@@ -11388,7 +12793,7 @@
         </p:nvSpPr>
         <p:spPr>
           <a:xfrm>
-            <a:off x="6016752" y="1844142"/>
+            <a:off x="6016752" y="1851552"/>
             <a:ext cx="1499616" cy="182880"/>
           </a:xfrm>
           <a:prstGeom prst="rect">
@@ -11407,7 +12812,7 @@
               <a:buNone/>
             </a:pPr>
             <a:r>
-              <a:rPr lang="en-US" sz="800" dirty="0">
+              <a:rPr lang="en-US" sz="850" dirty="0">
                 <a:solidFill>
                   <a:srgbClr val="1FA37A"/>
                 </a:solidFill>
@@ -11456,7 +12861,7 @@
       </p:sp>
       <p:sp>
         <p:nvSpPr>
-          <p:cNvPr id="24" name="Shape 22"/>
+          <p:cNvPr id="24" name="bar_ig_mix_stories"/>
           <p:cNvSpPr/>
           <p:nvPr/>
         </p:nvSpPr>
@@ -11478,6 +12883,13 @@
             <a:prstDash val="solid"/>
           </a:ln>
         </p:spPr>
+        <p:txBody>
+          <a:bodyPr/>
+          <a:lstStyle/>
+          <a:p>
+            <a:endParaRPr/>
+          </a:p>
+        </p:txBody>
       </p:sp>
       <p:sp>
         <p:nvSpPr>
@@ -11517,13 +12929,13 @@
       </p:sp>
       <p:sp>
         <p:nvSpPr>
-          <p:cNvPr id="26" name="Text 24"/>
-          <p:cNvSpPr/>
-          <p:nvPr/>
-        </p:nvSpPr>
-        <p:spPr>
-          <a:xfrm>
-            <a:off x="676656" y="2286000"/>
+          <p:cNvPr id="26" name="label_ig_mix_stories"/>
+          <p:cNvSpPr/>
+          <p:nvPr/>
+        </p:nvSpPr>
+        <p:spPr>
+          <a:xfrm>
+            <a:off x="676656" y="2296720"/>
             <a:ext cx="902208" cy="182880"/>
           </a:xfrm>
           <a:prstGeom prst="rect">
@@ -11555,7 +12967,7 @@
       </p:sp>
       <p:sp>
         <p:nvSpPr>
-          <p:cNvPr id="27" name="Shape 25"/>
+          <p:cNvPr id="27" name="bar_ig_mix_reels"/>
           <p:cNvSpPr/>
           <p:nvPr/>
         </p:nvSpPr>
@@ -11577,6 +12989,13 @@
             <a:prstDash val="solid"/>
           </a:ln>
         </p:spPr>
+        <p:txBody>
+          <a:bodyPr/>
+          <a:lstStyle/>
+          <a:p>
+            <a:endParaRPr/>
+          </a:p>
+        </p:txBody>
       </p:sp>
       <p:sp>
         <p:nvSpPr>
@@ -11616,13 +13035,13 @@
       </p:sp>
       <p:sp>
         <p:nvSpPr>
-          <p:cNvPr id="29" name="Text 27"/>
-          <p:cNvSpPr/>
-          <p:nvPr/>
-        </p:nvSpPr>
-        <p:spPr>
-          <a:xfrm>
-            <a:off x="1652016" y="3543300"/>
+          <p:cNvPr id="29" name="label_ig_mix_reels"/>
+          <p:cNvSpPr/>
+          <p:nvPr/>
+        </p:nvSpPr>
+        <p:spPr>
+          <a:xfrm>
+            <a:off x="1652016" y="3554020"/>
             <a:ext cx="902208" cy="182880"/>
           </a:xfrm>
           <a:prstGeom prst="rect">
@@ -11654,7 +13073,7 @@
       </p:sp>
       <p:sp>
         <p:nvSpPr>
-          <p:cNvPr id="30" name="Shape 28"/>
+          <p:cNvPr id="30" name="bar_ig_mix_carousels"/>
           <p:cNvSpPr/>
           <p:nvPr/>
         </p:nvSpPr>
@@ -11676,6 +13095,13 @@
             <a:prstDash val="solid"/>
           </a:ln>
         </p:spPr>
+        <p:txBody>
+          <a:bodyPr/>
+          <a:lstStyle/>
+          <a:p>
+            <a:endParaRPr/>
+          </a:p>
+        </p:txBody>
       </p:sp>
       <p:sp>
         <p:nvSpPr>
@@ -11715,13 +13141,13 @@
       </p:sp>
       <p:sp>
         <p:nvSpPr>
-          <p:cNvPr id="32" name="Text 30"/>
-          <p:cNvSpPr/>
-          <p:nvPr/>
-        </p:nvSpPr>
-        <p:spPr>
-          <a:xfrm>
-            <a:off x="2627376" y="3611880"/>
+          <p:cNvPr id="32" name="label_ig_mix_carousels"/>
+          <p:cNvSpPr/>
+          <p:nvPr/>
+        </p:nvSpPr>
+        <p:spPr>
+          <a:xfrm>
+            <a:off x="2627376" y="3622600"/>
             <a:ext cx="902208" cy="182880"/>
           </a:xfrm>
           <a:prstGeom prst="rect">
@@ -11789,14 +13215,14 @@
       </p:sp>
       <p:sp>
         <p:nvSpPr>
-          <p:cNvPr id="34" name="Shape 32"/>
-          <p:cNvSpPr/>
-          <p:nvPr/>
-        </p:nvSpPr>
-        <p:spPr>
-          <a:xfrm>
-            <a:off x="4251960" y="2676492"/>
-            <a:ext cx="670560" cy="1392588"/>
+          <p:cNvPr id="34" name="bar_ig_top_1"/>
+          <p:cNvSpPr/>
+          <p:nvPr/>
+        </p:nvSpPr>
+        <p:spPr>
+          <a:xfrm>
+            <a:off x="4251960" y="2680166"/>
+            <a:ext cx="670560" cy="1388914"/>
           </a:xfrm>
           <a:prstGeom prst="rect">
             <a:avLst/>
@@ -11811,6 +13237,13 @@
             <a:prstDash val="solid"/>
           </a:ln>
         </p:spPr>
+        <p:txBody>
+          <a:bodyPr/>
+          <a:lstStyle/>
+          <a:p>
+            <a:endParaRPr/>
+          </a:p>
+        </p:txBody>
       </p:sp>
       <p:sp>
         <p:nvSpPr>
@@ -11850,13 +13283,13 @@
       </p:sp>
       <p:sp>
         <p:nvSpPr>
-          <p:cNvPr id="36" name="Text 34"/>
-          <p:cNvSpPr/>
-          <p:nvPr/>
-        </p:nvSpPr>
-        <p:spPr>
-          <a:xfrm>
-            <a:off x="4069080" y="2447892"/>
+          <p:cNvPr id="36" name="label_ig_top_1"/>
+          <p:cNvSpPr/>
+          <p:nvPr/>
+        </p:nvSpPr>
+        <p:spPr>
+          <a:xfrm>
+            <a:off x="4069080" y="2462286"/>
             <a:ext cx="1036320" cy="182880"/>
           </a:xfrm>
           <a:prstGeom prst="rect">
@@ -11888,14 +13321,14 @@
       </p:sp>
       <p:sp>
         <p:nvSpPr>
-          <p:cNvPr id="37" name="Shape 35"/>
-          <p:cNvSpPr/>
-          <p:nvPr/>
-        </p:nvSpPr>
-        <p:spPr>
-          <a:xfrm>
-            <a:off x="5471160" y="3365201"/>
-            <a:ext cx="670560" cy="703879"/>
+          <p:cNvPr id="37" name="bar_ig_top_2"/>
+          <p:cNvSpPr/>
+          <p:nvPr/>
+        </p:nvSpPr>
+        <p:spPr>
+          <a:xfrm>
+            <a:off x="5471160" y="3367265"/>
+            <a:ext cx="670560" cy="701815"/>
           </a:xfrm>
           <a:prstGeom prst="rect">
             <a:avLst/>
@@ -11910,6 +13343,13 @@
             <a:prstDash val="solid"/>
           </a:ln>
         </p:spPr>
+        <p:txBody>
+          <a:bodyPr/>
+          <a:lstStyle/>
+          <a:p>
+            <a:endParaRPr/>
+          </a:p>
+        </p:txBody>
       </p:sp>
       <p:sp>
         <p:nvSpPr>
@@ -11949,13 +13389,13 @@
       </p:sp>
       <p:sp>
         <p:nvSpPr>
-          <p:cNvPr id="39" name="Text 37"/>
-          <p:cNvSpPr/>
-          <p:nvPr/>
-        </p:nvSpPr>
-        <p:spPr>
-          <a:xfrm>
-            <a:off x="5288280" y="3136601"/>
+          <p:cNvPr id="39" name="label_ig_top_2"/>
+          <p:cNvSpPr/>
+          <p:nvPr/>
+        </p:nvSpPr>
+        <p:spPr>
+          <a:xfrm>
+            <a:off x="5288280" y="3149385"/>
             <a:ext cx="1036320" cy="182880"/>
           </a:xfrm>
           <a:prstGeom prst="rect">
@@ -11987,7 +13427,7 @@
       </p:sp>
       <p:sp>
         <p:nvSpPr>
-          <p:cNvPr id="40" name="Shape 38"/>
+          <p:cNvPr id="40" name="bar_ig_top_3"/>
           <p:cNvSpPr/>
           <p:nvPr/>
         </p:nvSpPr>
@@ -12009,6 +13449,13 @@
             <a:prstDash val="solid"/>
           </a:ln>
         </p:spPr>
+        <p:txBody>
+          <a:bodyPr/>
+          <a:lstStyle/>
+          <a:p>
+            <a:endParaRPr/>
+          </a:p>
+        </p:txBody>
       </p:sp>
       <p:sp>
         <p:nvSpPr>
@@ -12048,13 +13495,13 @@
       </p:sp>
       <p:sp>
         <p:nvSpPr>
-          <p:cNvPr id="42" name="Text 40"/>
-          <p:cNvSpPr/>
-          <p:nvPr/>
-        </p:nvSpPr>
-        <p:spPr>
-          <a:xfrm>
-            <a:off x="6507480" y="2286000"/>
+          <p:cNvPr id="42" name="label_ig_top_3"/>
+          <p:cNvSpPr/>
+          <p:nvPr/>
+        </p:nvSpPr>
+        <p:spPr>
+          <a:xfrm>
+            <a:off x="6507480" y="2296720"/>
             <a:ext cx="1036320" cy="182880"/>
           </a:xfrm>
           <a:prstGeom prst="rect">
@@ -12110,6 +13557,13 @@
             <a:prstDash val="solid"/>
           </a:ln>
         </p:spPr>
+        <p:txBody>
+          <a:bodyPr/>
+          <a:lstStyle/>
+          <a:p>
+            <a:endParaRPr/>
+          </a:p>
+        </p:txBody>
       </p:sp>
       <p:sp>
         <p:nvSpPr>
@@ -12344,6 +13798,13 @@
             <a:prstDash val="solid"/>
           </a:ln>
         </p:spPr>
+        <p:txBody>
+          <a:bodyPr/>
+          <a:lstStyle/>
+          <a:p>
+            <a:endParaRPr/>
+          </a:p>
+        </p:txBody>
       </p:sp>
       <p:sp>
         <p:nvSpPr>
@@ -12369,6 +13830,13 @@
             <a:prstDash val="solid"/>
           </a:ln>
         </p:spPr>
+        <p:txBody>
+          <a:bodyPr/>
+          <a:lstStyle/>
+          <a:p>
+            <a:endParaRPr/>
+          </a:p>
+        </p:txBody>
       </p:sp>
       <p:sp>
         <p:nvSpPr>
@@ -12403,7 +13871,7 @@
                 <a:ea typeface="Aptos" pitchFamily="34" charset="-122"/>
                 <a:cs typeface="Aptos" pitchFamily="34" charset="-120"/>
               </a:rPr>
-              <a:t>MARZO 2026</a:t>
+              <a:t>MARZO</a:t>
             </a:r>
             <a:endParaRPr lang="en-US" sz="800" dirty="0"/>
           </a:p>
@@ -12512,6 +13980,13 @@
             <a:prstDash val="solid"/>
           </a:ln>
         </p:spPr>
+        <p:txBody>
+          <a:bodyPr/>
+          <a:lstStyle/>
+          <a:p>
+            <a:endParaRPr/>
+          </a:p>
+        </p:txBody>
       </p:sp>
       <p:sp>
         <p:nvSpPr>
@@ -12597,7 +14072,7 @@
         </p:nvSpPr>
         <p:spPr>
           <a:xfrm>
-            <a:off x="795312" y="1877193"/>
+            <a:off x="771833" y="1851808"/>
             <a:ext cx="1499616" cy="182880"/>
           </a:xfrm>
           <a:prstGeom prst="rect">
@@ -12616,7 +14091,7 @@
               <a:buNone/>
             </a:pPr>
             <a:r>
-              <a:rPr lang="en-US" sz="800" dirty="0">
+              <a:rPr lang="en-US" sz="850" dirty="0">
                 <a:solidFill>
                   <a:srgbClr val="1FA37A"/>
                 </a:solidFill>
@@ -12653,6 +14128,13 @@
             <a:prstDash val="solid"/>
           </a:ln>
         </p:spPr>
+        <p:txBody>
+          <a:bodyPr/>
+          <a:lstStyle/>
+          <a:p>
+            <a:endParaRPr/>
+          </a:p>
+        </p:txBody>
       </p:sp>
       <p:sp>
         <p:nvSpPr>
@@ -12738,7 +14220,7 @@
         </p:nvSpPr>
         <p:spPr>
           <a:xfrm>
-            <a:off x="2804350" y="1878045"/>
+            <a:off x="2825965" y="1855223"/>
             <a:ext cx="1499616" cy="182880"/>
           </a:xfrm>
           <a:prstGeom prst="rect">
@@ -12762,7 +14244,7 @@
                   <a:srgbClr val="1FA37A"/>
                 </a:solidFill>
               </a:rPr>
-              <a:t>+69% aprox vs febrero</a:t>
+              <a:t>69,2% aprox vs febrero</a:t>
             </a:r>
             <a:endParaRPr lang="en-US" sz="800" dirty="0"/>
           </a:p>
@@ -12794,6 +14276,13 @@
             <a:prstDash val="solid"/>
           </a:ln>
         </p:spPr>
+        <p:txBody>
+          <a:bodyPr/>
+          <a:lstStyle/>
+          <a:p>
+            <a:endParaRPr/>
+          </a:p>
+        </p:txBody>
       </p:sp>
       <p:sp>
         <p:nvSpPr>
@@ -12879,7 +14368,7 @@
         </p:nvSpPr>
         <p:spPr>
           <a:xfrm>
-            <a:off x="4850892" y="1875346"/>
+            <a:off x="4838890" y="1853617"/>
             <a:ext cx="1499616" cy="182880"/>
           </a:xfrm>
           <a:prstGeom prst="rect">
@@ -12903,7 +14392,7 @@
                   <a:srgbClr val="1FA37A"/>
                 </a:solidFill>
               </a:rPr>
-              <a:t>+63% aprox vs febrero</a:t>
+              <a:t>70,1% aprox vs febrero</a:t>
             </a:r>
             <a:endParaRPr lang="en-US" sz="800" dirty="0"/>
           </a:p>
@@ -12935,6 +14424,13 @@
             <a:prstDash val="solid"/>
           </a:ln>
         </p:spPr>
+        <p:txBody>
+          <a:bodyPr/>
+          <a:lstStyle/>
+          <a:p>
+            <a:endParaRPr/>
+          </a:p>
+        </p:txBody>
       </p:sp>
       <p:sp>
         <p:nvSpPr>
@@ -13020,7 +14516,7 @@
         </p:nvSpPr>
         <p:spPr>
           <a:xfrm>
-            <a:off x="6850570" y="1878045"/>
+            <a:off x="6839547" y="1851009"/>
             <a:ext cx="1088136" cy="182880"/>
           </a:xfrm>
           <a:prstGeom prst="rect">
@@ -13039,7 +14535,7 @@
               <a:buNone/>
             </a:pPr>
             <a:r>
-              <a:rPr lang="en-US" sz="800" dirty="0">
+              <a:rPr lang="en-US" sz="850" dirty="0">
                 <a:solidFill>
                   <a:srgbClr val="C74363"/>
                 </a:solidFill>
@@ -13088,14 +14584,14 @@
       </p:sp>
       <p:sp>
         <p:nvSpPr>
-          <p:cNvPr id="24" name="Shape 22"/>
-          <p:cNvSpPr/>
-          <p:nvPr/>
-        </p:nvSpPr>
-        <p:spPr>
-          <a:xfrm>
-            <a:off x="897255" y="2530709"/>
-            <a:ext cx="628650" cy="1629811"/>
+          <p:cNvPr id="24" name="bar_fb_top_1"/>
+          <p:cNvSpPr/>
+          <p:nvPr/>
+        </p:nvSpPr>
+        <p:spPr>
+          <a:xfrm>
+            <a:off x="897255" y="2530099"/>
+            <a:ext cx="628650" cy="1630421"/>
           </a:xfrm>
           <a:prstGeom prst="rect">
             <a:avLst/>
@@ -13110,6 +14606,13 @@
             <a:prstDash val="solid"/>
           </a:ln>
         </p:spPr>
+        <p:txBody>
+          <a:bodyPr/>
+          <a:lstStyle/>
+          <a:p>
+            <a:endParaRPr/>
+          </a:p>
+        </p:txBody>
       </p:sp>
       <p:sp>
         <p:nvSpPr>
@@ -13149,13 +14652,13 @@
       </p:sp>
       <p:sp>
         <p:nvSpPr>
-          <p:cNvPr id="26" name="Text 24"/>
-          <p:cNvSpPr/>
-          <p:nvPr/>
-        </p:nvSpPr>
-        <p:spPr>
-          <a:xfrm>
-            <a:off x="714375" y="2302109"/>
+          <p:cNvPr id="26" name="label_fb_top_1"/>
+          <p:cNvSpPr/>
+          <p:nvPr/>
+        </p:nvSpPr>
+        <p:spPr>
+          <a:xfrm>
+            <a:off x="714375" y="2312219"/>
             <a:ext cx="994410" cy="182880"/>
           </a:xfrm>
           <a:prstGeom prst="rect">
@@ -13187,14 +14690,14 @@
       </p:sp>
       <p:sp>
         <p:nvSpPr>
-          <p:cNvPr id="27" name="Shape 25"/>
-          <p:cNvSpPr/>
-          <p:nvPr/>
-        </p:nvSpPr>
-        <p:spPr>
-          <a:xfrm>
-            <a:off x="2040255" y="2587401"/>
-            <a:ext cx="628650" cy="1573119"/>
+          <p:cNvPr id="27" name="bar_fb_top_2"/>
+          <p:cNvSpPr/>
+          <p:nvPr/>
+        </p:nvSpPr>
+        <p:spPr>
+          <a:xfrm>
+            <a:off x="2040255" y="2585893"/>
+            <a:ext cx="628650" cy="1574627"/>
           </a:xfrm>
           <a:prstGeom prst="rect">
             <a:avLst/>
@@ -13209,6 +14712,13 @@
             <a:prstDash val="solid"/>
           </a:ln>
         </p:spPr>
+        <p:txBody>
+          <a:bodyPr/>
+          <a:lstStyle/>
+          <a:p>
+            <a:endParaRPr/>
+          </a:p>
+        </p:txBody>
       </p:sp>
       <p:sp>
         <p:nvSpPr>
@@ -13248,13 +14758,13 @@
       </p:sp>
       <p:sp>
         <p:nvSpPr>
-          <p:cNvPr id="29" name="Text 27"/>
-          <p:cNvSpPr/>
-          <p:nvPr/>
-        </p:nvSpPr>
-        <p:spPr>
-          <a:xfrm>
-            <a:off x="1857375" y="2358801"/>
+          <p:cNvPr id="29" name="label_fb_top_2"/>
+          <p:cNvSpPr/>
+          <p:nvPr/>
+        </p:nvSpPr>
+        <p:spPr>
+          <a:xfrm>
+            <a:off x="1857375" y="2368013"/>
             <a:ext cx="994410" cy="182880"/>
           </a:xfrm>
           <a:prstGeom prst="rect">
@@ -13286,7 +14796,7 @@
       </p:sp>
       <p:sp>
         <p:nvSpPr>
-          <p:cNvPr id="30" name="Shape 28"/>
+          <p:cNvPr id="30" name="bar_fb_top_3"/>
           <p:cNvSpPr/>
           <p:nvPr/>
         </p:nvSpPr>
@@ -13308,6 +14818,13 @@
             <a:prstDash val="solid"/>
           </a:ln>
         </p:spPr>
+        <p:txBody>
+          <a:bodyPr/>
+          <a:lstStyle/>
+          <a:p>
+            <a:endParaRPr/>
+          </a:p>
+        </p:txBody>
       </p:sp>
       <p:sp>
         <p:nvSpPr>
@@ -13347,13 +14864,13 @@
       </p:sp>
       <p:sp>
         <p:nvSpPr>
-          <p:cNvPr id="32" name="Text 30"/>
-          <p:cNvSpPr/>
-          <p:nvPr/>
-        </p:nvSpPr>
-        <p:spPr>
-          <a:xfrm>
-            <a:off x="3000375" y="2286000"/>
+          <p:cNvPr id="32" name="label_fb_top_3"/>
+          <p:cNvSpPr/>
+          <p:nvPr/>
+        </p:nvSpPr>
+        <p:spPr>
+          <a:xfrm>
+            <a:off x="3000375" y="2296720"/>
             <a:ext cx="994410" cy="182880"/>
           </a:xfrm>
           <a:prstGeom prst="rect">
@@ -13421,7 +14938,7 @@
       </p:sp>
       <p:sp>
         <p:nvSpPr>
-          <p:cNvPr id="34" name="Shape 32"/>
+          <p:cNvPr id="34" name="bar_fb_format_stories"/>
           <p:cNvSpPr/>
           <p:nvPr/>
         </p:nvSpPr>
@@ -13443,6 +14960,13 @@
             <a:prstDash val="solid"/>
           </a:ln>
         </p:spPr>
+        <p:txBody>
+          <a:bodyPr/>
+          <a:lstStyle/>
+          <a:p>
+            <a:endParaRPr/>
+          </a:p>
+        </p:txBody>
       </p:sp>
       <p:sp>
         <p:nvSpPr>
@@ -13482,13 +15006,13 @@
       </p:sp>
       <p:sp>
         <p:nvSpPr>
-          <p:cNvPr id="36" name="Text 34"/>
-          <p:cNvSpPr/>
-          <p:nvPr/>
-        </p:nvSpPr>
-        <p:spPr>
-          <a:xfrm>
-            <a:off x="4477703" y="2286000"/>
+          <p:cNvPr id="36" name="label_fb_format_stories"/>
+          <p:cNvSpPr/>
+          <p:nvPr/>
+        </p:nvSpPr>
+        <p:spPr>
+          <a:xfrm>
+            <a:off x="4477703" y="2296720"/>
             <a:ext cx="805815" cy="182880"/>
           </a:xfrm>
           <a:prstGeom prst="rect">
@@ -13520,7 +15044,7 @@
       </p:sp>
       <p:sp>
         <p:nvSpPr>
-          <p:cNvPr id="37" name="Shape 35"/>
+          <p:cNvPr id="37" name="bar_fb_format_reels"/>
           <p:cNvSpPr/>
           <p:nvPr/>
         </p:nvSpPr>
@@ -13542,6 +15066,13 @@
             <a:prstDash val="solid"/>
           </a:ln>
         </p:spPr>
+        <p:txBody>
+          <a:bodyPr/>
+          <a:lstStyle/>
+          <a:p>
+            <a:endParaRPr/>
+          </a:p>
+        </p:txBody>
       </p:sp>
       <p:sp>
         <p:nvSpPr>
@@ -13581,13 +15112,13 @@
       </p:sp>
       <p:sp>
         <p:nvSpPr>
-          <p:cNvPr id="39" name="Text 37"/>
-          <p:cNvSpPr/>
-          <p:nvPr/>
-        </p:nvSpPr>
-        <p:spPr>
-          <a:xfrm>
-            <a:off x="5277803" y="3152274"/>
+          <p:cNvPr id="39" name="label_fb_format_reels"/>
+          <p:cNvSpPr/>
+          <p:nvPr/>
+        </p:nvSpPr>
+        <p:spPr>
+          <a:xfrm>
+            <a:off x="5277803" y="3162994"/>
             <a:ext cx="805815" cy="182880"/>
           </a:xfrm>
           <a:prstGeom prst="rect">
@@ -13619,14 +15150,14 @@
       </p:sp>
       <p:sp>
         <p:nvSpPr>
-          <p:cNvPr id="40" name="Shape 38"/>
-          <p:cNvSpPr/>
-          <p:nvPr/>
-        </p:nvSpPr>
-        <p:spPr>
-          <a:xfrm>
-            <a:off x="6260783" y="3987265"/>
-            <a:ext cx="440055" cy="173255"/>
+          <p:cNvPr id="40" name="bar_fb_format_carousels"/>
+          <p:cNvSpPr/>
+          <p:nvPr/>
+        </p:nvSpPr>
+        <p:spPr>
+          <a:xfrm>
+            <a:off x="6260783" y="3987266"/>
+            <a:ext cx="440055" cy="173254"/>
           </a:xfrm>
           <a:prstGeom prst="rect">
             <a:avLst/>
@@ -13641,6 +15172,13 @@
             <a:prstDash val="solid"/>
           </a:ln>
         </p:spPr>
+        <p:txBody>
+          <a:bodyPr/>
+          <a:lstStyle/>
+          <a:p>
+            <a:endParaRPr/>
+          </a:p>
+        </p:txBody>
       </p:sp>
       <p:sp>
         <p:nvSpPr>
@@ -13680,13 +15218,13 @@
       </p:sp>
       <p:sp>
         <p:nvSpPr>
-          <p:cNvPr id="42" name="Text 40"/>
-          <p:cNvSpPr/>
-          <p:nvPr/>
-        </p:nvSpPr>
-        <p:spPr>
-          <a:xfrm>
-            <a:off x="6077903" y="3758665"/>
+          <p:cNvPr id="42" name="label_fb_format_carousels"/>
+          <p:cNvSpPr/>
+          <p:nvPr/>
+        </p:nvSpPr>
+        <p:spPr>
+          <a:xfrm>
+            <a:off x="6077903" y="3769386"/>
             <a:ext cx="805815" cy="182880"/>
           </a:xfrm>
           <a:prstGeom prst="rect">
@@ -13718,7 +15256,7 @@
       </p:sp>
       <p:sp>
         <p:nvSpPr>
-          <p:cNvPr id="43" name="Shape 41"/>
+          <p:cNvPr id="43" name="bar_fb_format_post"/>
           <p:cNvSpPr/>
           <p:nvPr/>
         </p:nvSpPr>
@@ -13740,6 +15278,13 @@
             <a:prstDash val="solid"/>
           </a:ln>
         </p:spPr>
+        <p:txBody>
+          <a:bodyPr/>
+          <a:lstStyle/>
+          <a:p>
+            <a:endParaRPr/>
+          </a:p>
+        </p:txBody>
       </p:sp>
       <p:sp>
         <p:nvSpPr>
@@ -13779,13 +15324,13 @@
       </p:sp>
       <p:sp>
         <p:nvSpPr>
-          <p:cNvPr id="45" name="Text 43"/>
-          <p:cNvSpPr/>
-          <p:nvPr/>
-        </p:nvSpPr>
-        <p:spPr>
-          <a:xfrm>
-            <a:off x="6878003" y="3845293"/>
+          <p:cNvPr id="45" name="label_fb_format_post"/>
+          <p:cNvSpPr/>
+          <p:nvPr/>
+        </p:nvSpPr>
+        <p:spPr>
+          <a:xfrm>
+            <a:off x="6878003" y="3856013"/>
             <a:ext cx="805815" cy="182880"/>
           </a:xfrm>
           <a:prstGeom prst="rect">
@@ -13841,6 +15386,13 @@
             <a:prstDash val="solid"/>
           </a:ln>
         </p:spPr>
+        <p:txBody>
+          <a:bodyPr/>
+          <a:lstStyle/>
+          <a:p>
+            <a:endParaRPr/>
+          </a:p>
+        </p:txBody>
       </p:sp>
       <p:sp>
         <p:nvSpPr>
@@ -14047,6 +15599,13 @@
             <a:prstDash val="solid"/>
           </a:ln>
         </p:spPr>
+        <p:txBody>
+          <a:bodyPr/>
+          <a:lstStyle/>
+          <a:p>
+            <a:endParaRPr/>
+          </a:p>
+        </p:txBody>
       </p:sp>
       <p:sp>
         <p:nvSpPr>
@@ -14072,6 +15631,13 @@
             <a:prstDash val="solid"/>
           </a:ln>
         </p:spPr>
+        <p:txBody>
+          <a:bodyPr/>
+          <a:lstStyle/>
+          <a:p>
+            <a:endParaRPr/>
+          </a:p>
+        </p:txBody>
       </p:sp>
       <p:sp>
         <p:nvSpPr>
@@ -14106,7 +15672,7 @@
                 <a:ea typeface="Aptos" pitchFamily="34" charset="-122"/>
                 <a:cs typeface="Aptos" pitchFamily="34" charset="-120"/>
               </a:rPr>
-              <a:t>MARZO 2026</a:t>
+              <a:t>MARZO</a:t>
             </a:r>
             <a:endParaRPr lang="en-US" sz="800" dirty="0"/>
           </a:p>
@@ -14215,6 +15781,13 @@
             <a:prstDash val="solid"/>
           </a:ln>
         </p:spPr>
+        <p:txBody>
+          <a:bodyPr/>
+          <a:lstStyle/>
+          <a:p>
+            <a:endParaRPr/>
+          </a:p>
+        </p:txBody>
       </p:sp>
       <p:sp>
         <p:nvSpPr>
@@ -14300,7 +15873,7 @@
         </p:nvSpPr>
         <p:spPr>
           <a:xfrm>
-            <a:off x="804672" y="1877193"/>
+            <a:off x="795528" y="1851688"/>
             <a:ext cx="1499616" cy="182880"/>
           </a:xfrm>
           <a:prstGeom prst="rect">
@@ -14319,7 +15892,7 @@
               <a:buNone/>
             </a:pPr>
             <a:r>
-              <a:rPr lang="en-US" sz="800" dirty="0">
+              <a:rPr lang="en-US" sz="850" dirty="0">
                 <a:solidFill>
                   <a:srgbClr val="1FA37A"/>
                 </a:solidFill>
@@ -14356,6 +15929,13 @@
             <a:prstDash val="solid"/>
           </a:ln>
         </p:spPr>
+        <p:txBody>
+          <a:bodyPr/>
+          <a:lstStyle/>
+          <a:p>
+            <a:endParaRPr/>
+          </a:p>
+        </p:txBody>
       </p:sp>
       <p:sp>
         <p:nvSpPr>
@@ -14441,7 +16021,7 @@
         </p:nvSpPr>
         <p:spPr>
           <a:xfrm>
-            <a:off x="2816352" y="1874903"/>
+            <a:off x="2816352" y="1851688"/>
             <a:ext cx="1499616" cy="182880"/>
           </a:xfrm>
           <a:prstGeom prst="rect">
@@ -14465,7 +16045,7 @@
                   <a:srgbClr val="1FA37A"/>
                 </a:solidFill>
               </a:rPr>
-              <a:t>+15,7% vs febrero</a:t>
+              <a:t>15,7% vs febrero</a:t>
             </a:r>
             <a:endParaRPr lang="en-US" sz="800" dirty="0"/>
           </a:p>
@@ -14497,6 +16077,13 @@
             <a:prstDash val="solid"/>
           </a:ln>
         </p:spPr>
+        <p:txBody>
+          <a:bodyPr/>
+          <a:lstStyle/>
+          <a:p>
+            <a:endParaRPr/>
+          </a:p>
+        </p:txBody>
       </p:sp>
       <p:sp>
         <p:nvSpPr>
@@ -14582,7 +16169,7 @@
         </p:nvSpPr>
         <p:spPr>
           <a:xfrm>
-            <a:off x="4818888" y="1877193"/>
+            <a:off x="4818888" y="1855914"/>
             <a:ext cx="1499616" cy="182880"/>
           </a:xfrm>
           <a:prstGeom prst="rect">
@@ -14606,7 +16193,7 @@
                   <a:srgbClr val="1FA37A"/>
                 </a:solidFill>
               </a:rPr>
-              <a:t>+7,8% vs febrero</a:t>
+              <a:t>7,8% vs febrero</a:t>
             </a:r>
             <a:endParaRPr lang="en-US" sz="800" dirty="0"/>
           </a:p>
@@ -14638,6 +16225,13 @@
             <a:prstDash val="solid"/>
           </a:ln>
         </p:spPr>
+        <p:txBody>
+          <a:bodyPr/>
+          <a:lstStyle/>
+          <a:p>
+            <a:endParaRPr/>
+          </a:p>
+        </p:txBody>
       </p:sp>
       <p:sp>
         <p:nvSpPr>
@@ -14723,7 +16317,7 @@
         </p:nvSpPr>
         <p:spPr>
           <a:xfrm>
-            <a:off x="6830407" y="1875729"/>
+            <a:off x="6821043" y="1849310"/>
             <a:ext cx="1088136" cy="182880"/>
           </a:xfrm>
           <a:prstGeom prst="rect">
@@ -14742,7 +16336,7 @@
               <a:buNone/>
             </a:pPr>
             <a:r>
-              <a:rPr lang="en-US" sz="800" dirty="0">
+              <a:rPr lang="en-US" sz="850" dirty="0">
                 <a:solidFill>
                   <a:srgbClr val="1FA37A"/>
                 </a:solidFill>
@@ -14791,7 +16385,7 @@
       </p:sp>
       <p:sp>
         <p:nvSpPr>
-          <p:cNvPr id="24" name="Shape 22"/>
+          <p:cNvPr id="24" name="bar_tt_age_18_24"/>
           <p:cNvSpPr/>
           <p:nvPr/>
         </p:nvSpPr>
@@ -14813,6 +16407,13 @@
             <a:prstDash val="solid"/>
           </a:ln>
         </p:spPr>
+        <p:txBody>
+          <a:bodyPr/>
+          <a:lstStyle/>
+          <a:p>
+            <a:endParaRPr/>
+          </a:p>
+        </p:txBody>
       </p:sp>
       <p:sp>
         <p:nvSpPr>
@@ -14852,13 +16453,13 @@
       </p:sp>
       <p:sp>
         <p:nvSpPr>
-          <p:cNvPr id="26" name="Text 24"/>
-          <p:cNvSpPr/>
-          <p:nvPr/>
-        </p:nvSpPr>
-        <p:spPr>
-          <a:xfrm>
-            <a:off x="621792" y="2286000"/>
+          <p:cNvPr id="26" name="label_tt_age_18_24"/>
+          <p:cNvSpPr/>
+          <p:nvPr/>
+        </p:nvSpPr>
+        <p:spPr>
+          <a:xfrm>
+            <a:off x="621792" y="2296720"/>
             <a:ext cx="768096" cy="182880"/>
           </a:xfrm>
           <a:prstGeom prst="rect">
@@ -14890,7 +16491,7 @@
       </p:sp>
       <p:sp>
         <p:nvSpPr>
-          <p:cNvPr id="27" name="Shape 25"/>
+          <p:cNvPr id="27" name="bar_tt_age_25_34"/>
           <p:cNvSpPr/>
           <p:nvPr/>
         </p:nvSpPr>
@@ -14912,6 +16513,13 @@
             <a:prstDash val="solid"/>
           </a:ln>
         </p:spPr>
+        <p:txBody>
+          <a:bodyPr/>
+          <a:lstStyle/>
+          <a:p>
+            <a:endParaRPr/>
+          </a:p>
+        </p:txBody>
       </p:sp>
       <p:sp>
         <p:nvSpPr>
@@ -14951,13 +16559,13 @@
       </p:sp>
       <p:sp>
         <p:nvSpPr>
-          <p:cNvPr id="29" name="Text 27"/>
-          <p:cNvSpPr/>
-          <p:nvPr/>
-        </p:nvSpPr>
-        <p:spPr>
-          <a:xfrm>
-            <a:off x="1353312" y="2463800"/>
+          <p:cNvPr id="29" name="label_tt_age_25_34"/>
+          <p:cNvSpPr/>
+          <p:nvPr/>
+        </p:nvSpPr>
+        <p:spPr>
+          <a:xfrm>
+            <a:off x="1353312" y="2474520"/>
             <a:ext cx="768096" cy="182880"/>
           </a:xfrm>
           <a:prstGeom prst="rect">
@@ -14989,7 +16597,7 @@
       </p:sp>
       <p:sp>
         <p:nvSpPr>
-          <p:cNvPr id="30" name="Shape 28"/>
+          <p:cNvPr id="30" name="bar_tt_age_35_44"/>
           <p:cNvSpPr/>
           <p:nvPr/>
         </p:nvSpPr>
@@ -15011,6 +16619,13 @@
             <a:prstDash val="solid"/>
           </a:ln>
         </p:spPr>
+        <p:txBody>
+          <a:bodyPr/>
+          <a:lstStyle/>
+          <a:p>
+            <a:endParaRPr/>
+          </a:p>
+        </p:txBody>
       </p:sp>
       <p:sp>
         <p:nvSpPr>
@@ -15050,13 +16665,13 @@
       </p:sp>
       <p:sp>
         <p:nvSpPr>
-          <p:cNvPr id="32" name="Text 30"/>
-          <p:cNvSpPr/>
-          <p:nvPr/>
-        </p:nvSpPr>
-        <p:spPr>
-          <a:xfrm>
-            <a:off x="2084832" y="3308350"/>
+          <p:cNvPr id="32" name="label_tt_age_35_44"/>
+          <p:cNvSpPr/>
+          <p:nvPr/>
+        </p:nvSpPr>
+        <p:spPr>
+          <a:xfrm>
+            <a:off x="2084832" y="3319070"/>
             <a:ext cx="768096" cy="182880"/>
           </a:xfrm>
           <a:prstGeom prst="rect">
@@ -15088,7 +16703,7 @@
       </p:sp>
       <p:sp>
         <p:nvSpPr>
-          <p:cNvPr id="33" name="Shape 31"/>
+          <p:cNvPr id="33" name="bar_tt_age_45_54"/>
           <p:cNvSpPr/>
           <p:nvPr/>
         </p:nvSpPr>
@@ -15110,6 +16725,13 @@
             <a:prstDash val="solid"/>
           </a:ln>
         </p:spPr>
+        <p:txBody>
+          <a:bodyPr/>
+          <a:lstStyle/>
+          <a:p>
+            <a:endParaRPr/>
+          </a:p>
+        </p:txBody>
       </p:sp>
       <p:sp>
         <p:nvSpPr>
@@ -15149,13 +16771,13 @@
       </p:sp>
       <p:sp>
         <p:nvSpPr>
-          <p:cNvPr id="35" name="Text 33"/>
-          <p:cNvSpPr/>
-          <p:nvPr/>
-        </p:nvSpPr>
-        <p:spPr>
-          <a:xfrm>
-            <a:off x="2816352" y="3530600"/>
+          <p:cNvPr id="35" name="label_tt_age_45_54"/>
+          <p:cNvSpPr/>
+          <p:nvPr/>
+        </p:nvSpPr>
+        <p:spPr>
+          <a:xfrm>
+            <a:off x="2816352" y="3541320"/>
             <a:ext cx="768096" cy="182880"/>
           </a:xfrm>
           <a:prstGeom prst="rect">
@@ -15187,7 +16809,7 @@
       </p:sp>
       <p:sp>
         <p:nvSpPr>
-          <p:cNvPr id="36" name="Shape 34"/>
+          <p:cNvPr id="36" name="bar_tt_age_55"/>
           <p:cNvSpPr/>
           <p:nvPr/>
         </p:nvSpPr>
@@ -15209,6 +16831,13 @@
             <a:prstDash val="solid"/>
           </a:ln>
         </p:spPr>
+        <p:txBody>
+          <a:bodyPr/>
+          <a:lstStyle/>
+          <a:p>
+            <a:endParaRPr/>
+          </a:p>
+        </p:txBody>
       </p:sp>
       <p:sp>
         <p:nvSpPr>
@@ -15248,13 +16877,13 @@
       </p:sp>
       <p:sp>
         <p:nvSpPr>
-          <p:cNvPr id="38" name="Text 36"/>
-          <p:cNvSpPr/>
-          <p:nvPr/>
-        </p:nvSpPr>
-        <p:spPr>
-          <a:xfrm>
-            <a:off x="3547872" y="3441700"/>
+          <p:cNvPr id="38" name="label_tt_age_55"/>
+          <p:cNvSpPr/>
+          <p:nvPr/>
+        </p:nvSpPr>
+        <p:spPr>
+          <a:xfrm>
+            <a:off x="3547872" y="3452420"/>
             <a:ext cx="768096" cy="182880"/>
           </a:xfrm>
           <a:prstGeom prst="rect">
@@ -15322,7 +16951,7 @@
       </p:sp>
       <p:sp>
         <p:nvSpPr>
-          <p:cNvPr id="40" name="Shape 38"/>
+          <p:cNvPr id="40" name="bar_tt_top_1"/>
           <p:cNvSpPr/>
           <p:nvPr/>
         </p:nvSpPr>
@@ -15344,6 +16973,13 @@
             <a:prstDash val="solid"/>
           </a:ln>
         </p:spPr>
+        <p:txBody>
+          <a:bodyPr/>
+          <a:lstStyle/>
+          <a:p>
+            <a:endParaRPr/>
+          </a:p>
+        </p:txBody>
       </p:sp>
       <p:sp>
         <p:nvSpPr>
@@ -15383,13 +17019,13 @@
       </p:sp>
       <p:sp>
         <p:nvSpPr>
-          <p:cNvPr id="42" name="Text 40"/>
-          <p:cNvSpPr/>
-          <p:nvPr/>
-        </p:nvSpPr>
-        <p:spPr>
-          <a:xfrm>
-            <a:off x="4776597" y="2286000"/>
+          <p:cNvPr id="42" name="label_tt_top_1"/>
+          <p:cNvSpPr/>
+          <p:nvPr/>
+        </p:nvSpPr>
+        <p:spPr>
+          <a:xfrm>
+            <a:off x="4776597" y="2296720"/>
             <a:ext cx="977646" cy="182880"/>
           </a:xfrm>
           <a:prstGeom prst="rect">
@@ -15421,14 +17057,14 @@
       </p:sp>
       <p:sp>
         <p:nvSpPr>
-          <p:cNvPr id="43" name="Shape 41"/>
-          <p:cNvSpPr/>
-          <p:nvPr/>
-        </p:nvSpPr>
-        <p:spPr>
-          <a:xfrm>
-            <a:off x="6071997" y="3764756"/>
-            <a:ext cx="611886" cy="350044"/>
+          <p:cNvPr id="43" name="bar_tt_top_2"/>
+          <p:cNvSpPr/>
+          <p:nvPr/>
+        </p:nvSpPr>
+        <p:spPr>
+          <a:xfrm>
+            <a:off x="6071997" y="3764757"/>
+            <a:ext cx="611886" cy="350043"/>
           </a:xfrm>
           <a:prstGeom prst="rect">
             <a:avLst/>
@@ -15443,6 +17079,13 @@
             <a:prstDash val="solid"/>
           </a:ln>
         </p:spPr>
+        <p:txBody>
+          <a:bodyPr/>
+          <a:lstStyle/>
+          <a:p>
+            <a:endParaRPr/>
+          </a:p>
+        </p:txBody>
       </p:sp>
       <p:sp>
         <p:nvSpPr>
@@ -15482,13 +17125,13 @@
       </p:sp>
       <p:sp>
         <p:nvSpPr>
-          <p:cNvPr id="45" name="Text 43"/>
-          <p:cNvSpPr/>
-          <p:nvPr/>
-        </p:nvSpPr>
-        <p:spPr>
-          <a:xfrm>
-            <a:off x="5889117" y="3536156"/>
+          <p:cNvPr id="45" name="label_tt_top_2"/>
+          <p:cNvSpPr/>
+          <p:nvPr/>
+        </p:nvSpPr>
+        <p:spPr>
+          <a:xfrm>
+            <a:off x="5889117" y="3546877"/>
             <a:ext cx="977646" cy="182880"/>
           </a:xfrm>
           <a:prstGeom prst="rect">
@@ -15520,14 +17163,14 @@
       </p:sp>
       <p:sp>
         <p:nvSpPr>
-          <p:cNvPr id="46" name="Shape 44"/>
-          <p:cNvSpPr/>
-          <p:nvPr/>
-        </p:nvSpPr>
-        <p:spPr>
-          <a:xfrm>
-            <a:off x="7184517" y="3344148"/>
-            <a:ext cx="611886" cy="770652"/>
+          <p:cNvPr id="46" name="bar_tt_top_3"/>
+          <p:cNvSpPr/>
+          <p:nvPr/>
+        </p:nvSpPr>
+        <p:spPr>
+          <a:xfrm>
+            <a:off x="7184517" y="3344149"/>
+            <a:ext cx="611886" cy="770651"/>
           </a:xfrm>
           <a:prstGeom prst="rect">
             <a:avLst/>
@@ -15542,6 +17185,13 @@
             <a:prstDash val="solid"/>
           </a:ln>
         </p:spPr>
+        <p:txBody>
+          <a:bodyPr/>
+          <a:lstStyle/>
+          <a:p>
+            <a:endParaRPr/>
+          </a:p>
+        </p:txBody>
       </p:sp>
       <p:sp>
         <p:nvSpPr>
@@ -15581,13 +17231,13 @@
       </p:sp>
       <p:sp>
         <p:nvSpPr>
-          <p:cNvPr id="48" name="Text 46"/>
-          <p:cNvSpPr/>
-          <p:nvPr/>
-        </p:nvSpPr>
-        <p:spPr>
-          <a:xfrm>
-            <a:off x="7001637" y="3115548"/>
+          <p:cNvPr id="48" name="label_tt_top_3"/>
+          <p:cNvSpPr/>
+          <p:nvPr/>
+        </p:nvSpPr>
+        <p:spPr>
+          <a:xfrm>
+            <a:off x="7001637" y="3126269"/>
             <a:ext cx="977646" cy="182880"/>
           </a:xfrm>
           <a:prstGeom prst="rect">
@@ -15643,6 +17293,13 @@
             <a:prstDash val="solid"/>
           </a:ln>
         </p:spPr>
+        <p:txBody>
+          <a:bodyPr/>
+          <a:lstStyle/>
+          <a:p>
+            <a:endParaRPr/>
+          </a:p>
+        </p:txBody>
       </p:sp>
       <p:sp>
         <p:nvSpPr>
@@ -15849,6 +17506,13 @@
             <a:prstDash val="solid"/>
           </a:ln>
         </p:spPr>
+        <p:txBody>
+          <a:bodyPr/>
+          <a:lstStyle/>
+          <a:p>
+            <a:endParaRPr/>
+          </a:p>
+        </p:txBody>
       </p:sp>
       <p:sp>
         <p:nvSpPr>
@@ -15874,6 +17538,13 @@
             <a:prstDash val="solid"/>
           </a:ln>
         </p:spPr>
+        <p:txBody>
+          <a:bodyPr/>
+          <a:lstStyle/>
+          <a:p>
+            <a:endParaRPr/>
+          </a:p>
+        </p:txBody>
       </p:sp>
       <p:sp>
         <p:nvSpPr>
@@ -15908,7 +17579,7 @@
                 <a:ea typeface="Aptos" pitchFamily="34" charset="-122"/>
                 <a:cs typeface="Aptos" pitchFamily="34" charset="-120"/>
               </a:rPr>
-              <a:t>MARZO 2026</a:t>
+              <a:t>MARZO</a:t>
             </a:r>
             <a:endParaRPr lang="en-US" sz="800" dirty="0"/>
           </a:p>
@@ -16089,6 +17760,13 @@
             <a:prstDash val="solid"/>
           </a:ln>
         </p:spPr>
+        <p:txBody>
+          <a:bodyPr/>
+          <a:lstStyle/>
+          <a:p>
+            <a:endParaRPr/>
+          </a:p>
+        </p:txBody>
       </p:sp>
       <p:sp>
         <p:nvSpPr>
@@ -16418,6 +18096,13 @@
             <a:prstDash val="solid"/>
           </a:ln>
         </p:spPr>
+        <p:txBody>
+          <a:bodyPr/>
+          <a:lstStyle/>
+          <a:p>
+            <a:endParaRPr/>
+          </a:p>
+        </p:txBody>
       </p:sp>
       <p:sp>
         <p:nvSpPr>
@@ -16747,6 +18432,13 @@
             <a:prstDash val="solid"/>
           </a:ln>
         </p:spPr>
+        <p:txBody>
+          <a:bodyPr/>
+          <a:lstStyle/>
+          <a:p>
+            <a:endParaRPr/>
+          </a:p>
+        </p:txBody>
       </p:sp>
       <p:sp>
         <p:nvSpPr>
@@ -17145,6 +18837,13 @@
             <a:prstDash val="solid"/>
           </a:ln>
         </p:spPr>
+        <p:txBody>
+          <a:bodyPr/>
+          <a:lstStyle/>
+          <a:p>
+            <a:endParaRPr/>
+          </a:p>
+        </p:txBody>
       </p:sp>
       <p:sp>
         <p:nvSpPr>
@@ -17170,6 +18869,13 @@
             <a:prstDash val="solid"/>
           </a:ln>
         </p:spPr>
+        <p:txBody>
+          <a:bodyPr/>
+          <a:lstStyle/>
+          <a:p>
+            <a:endParaRPr/>
+          </a:p>
+        </p:txBody>
       </p:sp>
       <p:sp>
         <p:nvSpPr>
@@ -17204,7 +18910,7 @@
                 <a:ea typeface="Aptos" pitchFamily="34" charset="-122"/>
                 <a:cs typeface="Aptos" pitchFamily="34" charset="-120"/>
               </a:rPr>
-              <a:t>MARZO 2026</a:t>
+              <a:t>MARZO</a:t>
             </a:r>
             <a:endParaRPr lang="en-US" sz="800" dirty="0"/>
           </a:p>
@@ -17313,6 +19019,13 @@
             <a:prstDash val="solid"/>
           </a:ln>
         </p:spPr>
+        <p:txBody>
+          <a:bodyPr/>
+          <a:lstStyle/>
+          <a:p>
+            <a:endParaRPr/>
+          </a:p>
+        </p:txBody>
       </p:sp>
       <p:sp>
         <p:nvSpPr>
@@ -17454,6 +19167,13 @@
             <a:prstDash val="solid"/>
           </a:ln>
         </p:spPr>
+        <p:txBody>
+          <a:bodyPr/>
+          <a:lstStyle/>
+          <a:p>
+            <a:endParaRPr/>
+          </a:p>
+        </p:txBody>
       </p:sp>
       <p:sp>
         <p:nvSpPr>
@@ -17595,6 +19315,13 @@
             <a:prstDash val="solid"/>
           </a:ln>
         </p:spPr>
+        <p:txBody>
+          <a:bodyPr/>
+          <a:lstStyle/>
+          <a:p>
+            <a:endParaRPr/>
+          </a:p>
+        </p:txBody>
       </p:sp>
       <p:sp>
         <p:nvSpPr>
@@ -17736,6 +19463,13 @@
             <a:prstDash val="solid"/>
           </a:ln>
         </p:spPr>
+        <p:txBody>
+          <a:bodyPr/>
+          <a:lstStyle/>
+          <a:p>
+            <a:endParaRPr/>
+          </a:p>
+        </p:txBody>
       </p:sp>
       <p:sp>
         <p:nvSpPr>
@@ -17889,7 +19623,7 @@
       </p:sp>
       <p:sp>
         <p:nvSpPr>
-          <p:cNvPr id="24" name="Shape 22"/>
+          <p:cNvPr id="24" name="bar_squad_views_skar"/>
           <p:cNvSpPr/>
           <p:nvPr/>
         </p:nvSpPr>
@@ -17911,6 +19645,13 @@
             <a:prstDash val="solid"/>
           </a:ln>
         </p:spPr>
+        <p:txBody>
+          <a:bodyPr/>
+          <a:lstStyle/>
+          <a:p>
+            <a:endParaRPr/>
+          </a:p>
+        </p:txBody>
       </p:sp>
       <p:sp>
         <p:nvSpPr>
@@ -17950,13 +19691,13 @@
       </p:sp>
       <p:sp>
         <p:nvSpPr>
-          <p:cNvPr id="26" name="Text 24"/>
-          <p:cNvSpPr/>
-          <p:nvPr/>
-        </p:nvSpPr>
-        <p:spPr>
-          <a:xfrm>
-            <a:off x="675799" y="2286000"/>
+          <p:cNvPr id="26" name="label_squad_views_skar"/>
+          <p:cNvSpPr/>
+          <p:nvPr/>
+        </p:nvSpPr>
+        <p:spPr>
+          <a:xfrm>
+            <a:off x="675799" y="2296720"/>
             <a:ext cx="900113" cy="182880"/>
           </a:xfrm>
           <a:prstGeom prst="rect">
@@ -17980,7 +19721,7 @@
                   <a:srgbClr val="121426"/>
                 </a:solidFill>
               </a:rPr>
-              <a:t>2,05M</a:t>
+              <a:t>2,1M</a:t>
             </a:r>
             <a:endParaRPr lang="en-US" sz="750" dirty="0"/>
           </a:p>
@@ -17988,7 +19729,7 @@
       </p:sp>
       <p:sp>
         <p:nvSpPr>
-          <p:cNvPr id="27" name="Shape 25"/>
+          <p:cNvPr id="27" name="bar_squad_views_busquilla"/>
           <p:cNvSpPr/>
           <p:nvPr/>
         </p:nvSpPr>
@@ -18010,6 +19751,13 @@
             <a:prstDash val="solid"/>
           </a:ln>
         </p:spPr>
+        <p:txBody>
+          <a:bodyPr/>
+          <a:lstStyle/>
+          <a:p>
+            <a:endParaRPr/>
+          </a:p>
+        </p:txBody>
       </p:sp>
       <p:sp>
         <p:nvSpPr>
@@ -18049,13 +19797,13 @@
       </p:sp>
       <p:sp>
         <p:nvSpPr>
-          <p:cNvPr id="29" name="Text 27"/>
-          <p:cNvSpPr/>
-          <p:nvPr/>
-        </p:nvSpPr>
-        <p:spPr>
-          <a:xfrm>
-            <a:off x="1647349" y="3948966"/>
+          <p:cNvPr id="29" name="label_squad_views_busquilla"/>
+          <p:cNvSpPr/>
+          <p:nvPr/>
+        </p:nvSpPr>
+        <p:spPr>
+          <a:xfrm>
+            <a:off x="1647349" y="3959686"/>
             <a:ext cx="900113" cy="182880"/>
           </a:xfrm>
           <a:prstGeom prst="rect">
@@ -18087,7 +19835,7 @@
       </p:sp>
       <p:sp>
         <p:nvSpPr>
-          <p:cNvPr id="30" name="Shape 28"/>
+          <p:cNvPr id="30" name="bar_squad_views_cami"/>
           <p:cNvSpPr/>
           <p:nvPr/>
         </p:nvSpPr>
@@ -18109,6 +19857,13 @@
             <a:prstDash val="solid"/>
           </a:ln>
         </p:spPr>
+        <p:txBody>
+          <a:bodyPr/>
+          <a:lstStyle/>
+          <a:p>
+            <a:endParaRPr/>
+          </a:p>
+        </p:txBody>
       </p:sp>
       <p:sp>
         <p:nvSpPr>
@@ -18148,13 +19903,13 @@
       </p:sp>
       <p:sp>
         <p:nvSpPr>
-          <p:cNvPr id="32" name="Text 30"/>
-          <p:cNvSpPr/>
-          <p:nvPr/>
-        </p:nvSpPr>
-        <p:spPr>
-          <a:xfrm>
-            <a:off x="2618899" y="3336478"/>
+          <p:cNvPr id="32" name="label_squad_views_cami"/>
+          <p:cNvSpPr/>
+          <p:nvPr/>
+        </p:nvSpPr>
+        <p:spPr>
+          <a:xfrm>
+            <a:off x="2618899" y="3347198"/>
             <a:ext cx="900113" cy="182880"/>
           </a:xfrm>
           <a:prstGeom prst="rect">
@@ -18186,7 +19941,7 @@
       </p:sp>
       <p:sp>
         <p:nvSpPr>
-          <p:cNvPr id="33" name="Shape 31"/>
+          <p:cNvPr id="33" name="bar_squad_views_disley"/>
           <p:cNvSpPr/>
           <p:nvPr/>
         </p:nvSpPr>
@@ -18208,6 +19963,13 @@
             <a:prstDash val="solid"/>
           </a:ln>
         </p:spPr>
+        <p:txBody>
+          <a:bodyPr/>
+          <a:lstStyle/>
+          <a:p>
+            <a:endParaRPr/>
+          </a:p>
+        </p:txBody>
       </p:sp>
       <p:sp>
         <p:nvSpPr>
@@ -18247,13 +20009,13 @@
       </p:sp>
       <p:sp>
         <p:nvSpPr>
-          <p:cNvPr id="35" name="Text 33"/>
-          <p:cNvSpPr/>
-          <p:nvPr/>
-        </p:nvSpPr>
-        <p:spPr>
-          <a:xfrm>
-            <a:off x="3590449" y="2596296"/>
+          <p:cNvPr id="35" name="label_squad_views_disley"/>
+          <p:cNvSpPr/>
+          <p:nvPr/>
+        </p:nvSpPr>
+        <p:spPr>
+          <a:xfrm>
+            <a:off x="3590449" y="2607016"/>
             <a:ext cx="900113" cy="182880"/>
           </a:xfrm>
           <a:prstGeom prst="rect">
@@ -18277,7 +20039,7 @@
                   <a:srgbClr val="121426"/>
                 </a:solidFill>
               </a:rPr>
-              <a:t>1,69M</a:t>
+              <a:t>1,7M</a:t>
             </a:r>
             <a:endParaRPr lang="en-US" sz="750" dirty="0"/>
           </a:p>
@@ -18321,7 +20083,7 @@
       </p:sp>
       <p:sp>
         <p:nvSpPr>
-          <p:cNvPr id="37" name="Shape 35"/>
+          <p:cNvPr id="37" name="bar_squad_er_skar"/>
           <p:cNvSpPr/>
           <p:nvPr/>
         </p:nvSpPr>
@@ -18343,6 +20105,13 @@
             <a:prstDash val="solid"/>
           </a:ln>
         </p:spPr>
+        <p:txBody>
+          <a:bodyPr/>
+          <a:lstStyle/>
+          <a:p>
+            <a:endParaRPr/>
+          </a:p>
+        </p:txBody>
       </p:sp>
       <p:sp>
         <p:nvSpPr>
@@ -18382,13 +20151,13 @@
       </p:sp>
       <p:sp>
         <p:nvSpPr>
-          <p:cNvPr id="39" name="Text 37"/>
-          <p:cNvSpPr/>
-          <p:nvPr/>
-        </p:nvSpPr>
-        <p:spPr>
-          <a:xfrm>
-            <a:off x="4899469" y="2286000"/>
+          <p:cNvPr id="39" name="label_squad_er_skar"/>
+          <p:cNvSpPr/>
+          <p:nvPr/>
+        </p:nvSpPr>
+        <p:spPr>
+          <a:xfrm>
+            <a:off x="4899469" y="2296720"/>
             <a:ext cx="830961" cy="182880"/>
           </a:xfrm>
           <a:prstGeom prst="rect">
@@ -18420,7 +20189,7 @@
       </p:sp>
       <p:sp>
         <p:nvSpPr>
-          <p:cNvPr id="40" name="Shape 38"/>
+          <p:cNvPr id="40" name="bar_squad_er_busquilla"/>
           <p:cNvSpPr/>
           <p:nvPr/>
         </p:nvSpPr>
@@ -18442,6 +20211,13 @@
             <a:prstDash val="solid"/>
           </a:ln>
         </p:spPr>
+        <p:txBody>
+          <a:bodyPr/>
+          <a:lstStyle/>
+          <a:p>
+            <a:endParaRPr/>
+          </a:p>
+        </p:txBody>
       </p:sp>
       <p:sp>
         <p:nvSpPr>
@@ -18481,13 +20257,13 @@
       </p:sp>
       <p:sp>
         <p:nvSpPr>
-          <p:cNvPr id="42" name="Text 40"/>
-          <p:cNvSpPr/>
-          <p:nvPr/>
-        </p:nvSpPr>
-        <p:spPr>
-          <a:xfrm>
-            <a:off x="5745289" y="3598672"/>
+          <p:cNvPr id="42" name="label_squad_er_busquilla"/>
+          <p:cNvSpPr/>
+          <p:nvPr/>
+        </p:nvSpPr>
+        <p:spPr>
+          <a:xfrm>
+            <a:off x="5745289" y="3609392"/>
             <a:ext cx="830961" cy="182880"/>
           </a:xfrm>
           <a:prstGeom prst="rect">
@@ -18519,7 +20295,7 @@
       </p:sp>
       <p:sp>
         <p:nvSpPr>
-          <p:cNvPr id="43" name="Shape 41"/>
+          <p:cNvPr id="43" name="bar_squad_er_cami"/>
           <p:cNvSpPr/>
           <p:nvPr/>
         </p:nvSpPr>
@@ -18541,6 +20317,13 @@
             <a:prstDash val="solid"/>
           </a:ln>
         </p:spPr>
+        <p:txBody>
+          <a:bodyPr/>
+          <a:lstStyle/>
+          <a:p>
+            <a:endParaRPr/>
+          </a:p>
+        </p:txBody>
       </p:sp>
       <p:sp>
         <p:nvSpPr>
@@ -18580,13 +20363,13 @@
       </p:sp>
       <p:sp>
         <p:nvSpPr>
-          <p:cNvPr id="45" name="Text 43"/>
-          <p:cNvSpPr/>
-          <p:nvPr/>
-        </p:nvSpPr>
-        <p:spPr>
-          <a:xfrm>
-            <a:off x="6591109" y="3714496"/>
+          <p:cNvPr id="45" name="label_squad_er_cami"/>
+          <p:cNvSpPr/>
+          <p:nvPr/>
+        </p:nvSpPr>
+        <p:spPr>
+          <a:xfrm>
+            <a:off x="6591109" y="3725216"/>
             <a:ext cx="830961" cy="182880"/>
           </a:xfrm>
           <a:prstGeom prst="rect">
@@ -18618,7 +20401,7 @@
       </p:sp>
       <p:sp>
         <p:nvSpPr>
-          <p:cNvPr id="46" name="Shape 44"/>
+          <p:cNvPr id="46" name="bar_squad_er_disley"/>
           <p:cNvSpPr/>
           <p:nvPr/>
         </p:nvSpPr>
@@ -18640,6 +20423,13 @@
             <a:prstDash val="solid"/>
           </a:ln>
         </p:spPr>
+        <p:txBody>
+          <a:bodyPr/>
+          <a:lstStyle/>
+          <a:p>
+            <a:endParaRPr/>
+          </a:p>
+        </p:txBody>
       </p:sp>
       <p:sp>
         <p:nvSpPr>
@@ -18679,13 +20469,13 @@
       </p:sp>
       <p:sp>
         <p:nvSpPr>
-          <p:cNvPr id="48" name="Text 46"/>
-          <p:cNvSpPr/>
-          <p:nvPr/>
-        </p:nvSpPr>
-        <p:spPr>
-          <a:xfrm>
-            <a:off x="7436930" y="3173984"/>
+          <p:cNvPr id="48" name="label_squad_er_disley"/>
+          <p:cNvSpPr/>
+          <p:nvPr/>
+        </p:nvSpPr>
+        <p:spPr>
+          <a:xfrm>
+            <a:off x="7436930" y="3184704"/>
             <a:ext cx="830961" cy="182880"/>
           </a:xfrm>
           <a:prstGeom prst="rect">
@@ -18741,6 +20531,13 @@
             <a:prstDash val="solid"/>
           </a:ln>
         </p:spPr>
+        <p:txBody>
+          <a:bodyPr/>
+          <a:lstStyle/>
+          <a:p>
+            <a:endParaRPr/>
+          </a:p>
+        </p:txBody>
       </p:sp>
       <p:sp>
         <p:nvSpPr>
@@ -18805,10 +20602,11 @@
               <a:buNone/>
             </a:pPr>
             <a:r>
-              <a:rPr lang="en-US" sz="1050" dirty="0">
-                <a:solidFill>
-                  <a:schemeClr val="bg1"/>
-                </a:solidFill>
+              <a:rPr sz="1250" b="0">
+                <a:solidFill>
+                  <a:srgbClr val="FFFFFF"/>
+                </a:solidFill>
+                <a:latin typeface="Arial"/>
               </a:rPr>
               <a:t>Skar sostiene interacción alta; Disley abre volumen nuevo con tono humorístico y cercano. Para próximos meses, combinar perfiles de alto alcance con micro-nichos de expertise.</a:t>
             </a:r>
@@ -18839,14 +20637,6 @@
             <a:pPr marL="0" indent="0">
               <a:buNone/>
             </a:pPr>
-            <a:r>
-              <a:rPr lang="en-US" sz="1400" b="1" dirty="0">
-                <a:solidFill>
-                  <a:srgbClr val="FFFFFF"/>
-                </a:solidFill>
-              </a:rPr>
-              <a:t>Regla 70/20/10</a:t>
-            </a:r>
             <a:endParaRPr lang="en-US" sz="1400" dirty="0"/>
           </a:p>
         </p:txBody>
@@ -18877,13 +20667,143 @@
             <a:pPr marL="0" indent="0">
               <a:buNone/>
             </a:pPr>
-            <a:r>
-              <a:rPr lang="en-US" sz="1050" dirty="0">
-                <a:solidFill>
-                  <a:schemeClr val="bg1"/>
-                </a:solidFill>
-              </a:rPr>
-              <a:t>70% creators de performance, 20% nichos estratégicos, 10% apuestas en tendencia.</a:t>
+            <a:endParaRPr/>
+          </a:p>
+        </p:txBody>
+      </p:sp>
+      <p:sp>
+        <p:nvSpPr>
+          <p:cNvPr id="55" name="TextBox 54"/>
+          <p:cNvSpPr txBox="1"/>
+          <p:nvPr/>
+        </p:nvSpPr>
+        <p:spPr>
+          <a:xfrm>
+            <a:off x="8887968" y="4160520"/>
+            <a:ext cx="1901952" cy="256032"/>
+          </a:xfrm>
+          <a:prstGeom prst="rect">
+            <a:avLst/>
+          </a:prstGeom>
+          <a:noFill/>
+        </p:spPr>
+        <p:txBody>
+          <a:bodyPr wrap="none">
+            <a:spAutoFit/>
+          </a:bodyPr>
+          <a:lstStyle/>
+          <a:p>
+            <a:r>
+              <a:rPr sz="1500" b="1">
+                <a:solidFill>
+                  <a:srgbClr val="FFFFFF"/>
+                </a:solidFill>
+                <a:latin typeface="Arial"/>
+              </a:rPr>
+              <a:t>Presupuesto Squad</a:t>
+            </a:r>
+          </a:p>
+        </p:txBody>
+      </p:sp>
+      <p:sp>
+        <p:nvSpPr>
+          <p:cNvPr id="56" name="TextBox 55"/>
+          <p:cNvSpPr txBox="1"/>
+          <p:nvPr/>
+        </p:nvSpPr>
+        <p:spPr>
+          <a:xfrm>
+            <a:off x="8887968" y="4480560"/>
+            <a:ext cx="1901952" cy="256032"/>
+          </a:xfrm>
+          <a:prstGeom prst="rect">
+            <a:avLst/>
+          </a:prstGeom>
+          <a:noFill/>
+        </p:spPr>
+        <p:txBody>
+          <a:bodyPr wrap="none">
+            <a:spAutoFit/>
+          </a:bodyPr>
+          <a:lstStyle/>
+          <a:p>
+            <a:r>
+              <a:rPr sz="1250" b="1">
+                <a:solidFill>
+                  <a:srgbClr val="FFFFFF"/>
+                </a:solidFill>
+                <a:latin typeface="Arial"/>
+              </a:rPr>
+              <a:t>$400K · antes $700K</a:t>
+            </a:r>
+          </a:p>
+        </p:txBody>
+      </p:sp>
+      <p:sp>
+        <p:nvSpPr>
+          <p:cNvPr id="57" name="TextBox 56"/>
+          <p:cNvSpPr txBox="1"/>
+          <p:nvPr/>
+        </p:nvSpPr>
+        <p:spPr>
+          <a:xfrm>
+            <a:off x="8887968" y="4800600"/>
+            <a:ext cx="1901952" cy="256032"/>
+          </a:xfrm>
+          <a:prstGeom prst="rect">
+            <a:avLst/>
+          </a:prstGeom>
+          <a:noFill/>
+        </p:spPr>
+        <p:txBody>
+          <a:bodyPr wrap="none">
+            <a:spAutoFit/>
+          </a:bodyPr>
+          <a:lstStyle/>
+          <a:p>
+            <a:r>
+              <a:rPr sz="1200" b="1">
+                <a:solidFill>
+                  <a:srgbClr val="FFFFFF"/>
+                </a:solidFill>
+                <a:latin typeface="Arial"/>
+              </a:rPr>
+              <a:t>Entregables por rostro</a:t>
+            </a:r>
+          </a:p>
+        </p:txBody>
+      </p:sp>
+      <p:sp>
+        <p:nvSpPr>
+          <p:cNvPr id="58" name="TextBox 57"/>
+          <p:cNvSpPr txBox="1"/>
+          <p:nvPr/>
+        </p:nvSpPr>
+        <p:spPr>
+          <a:xfrm>
+            <a:off x="8887968" y="5056632"/>
+            <a:ext cx="1901952" cy="566928"/>
+          </a:xfrm>
+          <a:prstGeom prst="rect">
+            <a:avLst/>
+          </a:prstGeom>
+          <a:noFill/>
+        </p:spPr>
+        <p:txBody>
+          <a:bodyPr wrap="square">
+            <a:spAutoFit/>
+          </a:bodyPr>
+          <a:lstStyle/>
+          <a:p>
+            <a:r>
+              <a:rPr sz="1150">
+                <a:solidFill>
+                  <a:srgbClr val="FFFFFF"/>
+                </a:solidFill>
+                <a:latin typeface="Arial"/>
+              </a:rPr>
+              <a:t>Skar: 3 · Busquilla: 4
+Cami: 3 · Disley: 3</a:t>
             </a:r>
           </a:p>
         </p:txBody>

--- a/template/Maicao_Template_Visual_v02.pptx
+++ b/template/Maicao_Template_Visual_v02.pptx
@@ -5836,31 +5836,13 @@
               <a:buNone/>
             </a:pPr>
             <a:r>
-              <a:rPr sz="2700" b="1" dirty="0">
+              <a:rPr sz="2700" b="1">
                 <a:solidFill>
                   <a:srgbClr val="10152B"/>
                 </a:solidFill>
                 <a:latin typeface="Arial"/>
               </a:rPr>
-              <a:t>Plan visual de </a:t>
-            </a:r>
-            <a:r>
-              <a:rPr sz="2700" b="1" dirty="0" err="1">
-                <a:solidFill>
-                  <a:srgbClr val="10152B"/>
-                </a:solidFill>
-                <a:latin typeface="Arial"/>
-              </a:rPr>
-              <a:t>próximos</a:t>
-            </a:r>
-            <a:r>
-              <a:rPr sz="2700" b="1" dirty="0">
-                <a:solidFill>
-                  <a:srgbClr val="10152B"/>
-                </a:solidFill>
-                <a:latin typeface="Arial"/>
-              </a:rPr>
-              <a:t> 30 días</a:t>
+              <a:t>Plan visual de próximos 30 días · foco TT</a:t>
             </a:r>
             <a:endParaRPr lang="en-US" sz="2600" dirty="0"/>
           </a:p>
@@ -6029,13 +6011,13 @@
               <a:buNone/>
             </a:pPr>
             <a:r>
-              <a:rPr sz="1600" b="1" dirty="0" err="1">
+              <a:rPr sz="1600" b="1">
                 <a:solidFill>
                   <a:srgbClr val="10152B"/>
                 </a:solidFill>
                 <a:latin typeface="Arial"/>
               </a:rPr>
-              <a:t>Retención</a:t>
+              <a:t>TT: Retención</a:t>
             </a:r>
             <a:endParaRPr lang="en-US" sz="1500" dirty="0"/>
           </a:p>
@@ -6243,31 +6225,13 @@
               <a:buNone/>
             </a:pPr>
             <a:r>
-              <a:rPr sz="1600" b="1" dirty="0" err="1">
+              <a:rPr sz="1600" b="1">
                 <a:solidFill>
                   <a:srgbClr val="10152B"/>
                 </a:solidFill>
                 <a:latin typeface="Arial"/>
               </a:rPr>
-              <a:t>Contenido</a:t>
-            </a:r>
-            <a:r>
-              <a:rPr sz="1600" b="1" dirty="0">
-                <a:solidFill>
-                  <a:srgbClr val="10152B"/>
-                </a:solidFill>
-                <a:latin typeface="Arial"/>
-              </a:rPr>
-              <a:t> </a:t>
-            </a:r>
-            <a:r>
-              <a:rPr sz="1600" b="1" dirty="0" err="1">
-                <a:solidFill>
-                  <a:srgbClr val="10152B"/>
-                </a:solidFill>
-                <a:latin typeface="Arial"/>
-              </a:rPr>
-              <a:t>útil</a:t>
+              <a:t>TT: Contenido útil</a:t>
             </a:r>
             <a:endParaRPr lang="en-US" sz="1500" dirty="0"/>
           </a:p>
@@ -6475,13 +6439,13 @@
               <a:buNone/>
             </a:pPr>
             <a:r>
-              <a:rPr sz="1600" b="1" dirty="0" err="1">
+              <a:rPr sz="1600" b="1">
                 <a:solidFill>
                   <a:srgbClr val="10152B"/>
                 </a:solidFill>
                 <a:latin typeface="Arial"/>
               </a:rPr>
-              <a:t>Conversación</a:t>
+              <a:t>TT: Conversación</a:t>
             </a:r>
             <a:endParaRPr lang="en-US" sz="1500" dirty="0"/>
           </a:p>
@@ -6689,13 +6653,13 @@
               <a:buNone/>
             </a:pPr>
             <a:r>
-              <a:rPr sz="1600" b="1" dirty="0" err="1">
+              <a:rPr sz="1600" b="1">
                 <a:solidFill>
                   <a:srgbClr val="10152B"/>
                 </a:solidFill>
                 <a:latin typeface="Arial"/>
               </a:rPr>
-              <a:t>Nichos</a:t>
+              <a:t>TT: Nichos</a:t>
             </a:r>
             <a:endParaRPr lang="en-US" sz="1500" dirty="0"/>
           </a:p>
@@ -6829,7 +6793,7 @@
         </p:spPr>
         <p:txBody>
           <a:bodyPr wrap="square" lIns="0" tIns="0" rIns="0" bIns="0" rtlCol="0" anchor="ctr">
-            <a:normAutofit lnSpcReduction="10000"/>
+            <a:normAutofit/>
           </a:bodyPr>
           <a:lstStyle/>
           <a:p>
@@ -6837,118 +6801,15 @@
               <a:buNone/>
             </a:pPr>
             <a:r>
-              <a:rPr sz="1100" b="1" dirty="0">
-                <a:solidFill>
-                  <a:schemeClr val="bg1"/>
+              <a:rPr sz="1100" b="1">
+                <a:solidFill>
+                  <a:srgbClr val="10152B"/>
                 </a:solidFill>
                 <a:latin typeface="Arial"/>
               </a:rPr>
-              <a:t>KPIs de control TT: </a:t>
-            </a:r>
-            <a:r>
-              <a:rPr sz="1100" b="1" dirty="0" err="1">
-                <a:solidFill>
-                  <a:schemeClr val="bg1"/>
-                </a:solidFill>
-                <a:latin typeface="Arial"/>
-              </a:rPr>
-              <a:t>retención</a:t>
-            </a:r>
-            <a:r>
-              <a:rPr sz="1100" b="1" dirty="0">
-                <a:solidFill>
-                  <a:schemeClr val="bg1"/>
-                </a:solidFill>
-                <a:latin typeface="Arial"/>
-              </a:rPr>
-              <a:t> de video · </a:t>
-            </a:r>
-            <a:r>
-              <a:rPr sz="1100" b="1" dirty="0" err="1">
-                <a:solidFill>
-                  <a:schemeClr val="bg1"/>
-                </a:solidFill>
-                <a:latin typeface="Arial"/>
-              </a:rPr>
-              <a:t>guardados</a:t>
-            </a:r>
-            <a:r>
-              <a:rPr sz="1100" b="1" dirty="0">
-                <a:solidFill>
-                  <a:schemeClr val="bg1"/>
-                </a:solidFill>
-                <a:latin typeface="Arial"/>
-              </a:rPr>
-              <a:t> · </a:t>
-            </a:r>
-            <a:r>
-              <a:rPr sz="1100" b="1" dirty="0" err="1">
-                <a:solidFill>
-                  <a:schemeClr val="bg1"/>
-                </a:solidFill>
-                <a:latin typeface="Arial"/>
-              </a:rPr>
-              <a:t>comentarios</a:t>
-            </a:r>
-            <a:r>
-              <a:rPr sz="1100" b="1" dirty="0">
-                <a:solidFill>
-                  <a:schemeClr val="bg1"/>
-                </a:solidFill>
-                <a:latin typeface="Arial"/>
-              </a:rPr>
-              <a:t> · </a:t>
-            </a:r>
-            <a:r>
-              <a:rPr sz="1100" b="1" dirty="0" err="1">
-                <a:solidFill>
-                  <a:schemeClr val="bg1"/>
-                </a:solidFill>
-                <a:latin typeface="Arial"/>
-              </a:rPr>
-              <a:t>crecimiento</a:t>
-            </a:r>
-            <a:r>
-              <a:rPr sz="1100" b="1" dirty="0">
-                <a:solidFill>
-                  <a:schemeClr val="bg1"/>
-                </a:solidFill>
-                <a:latin typeface="Arial"/>
-              </a:rPr>
-              <a:t> </a:t>
-            </a:r>
-            <a:r>
-              <a:rPr sz="1100" b="1" dirty="0" err="1">
-                <a:solidFill>
-                  <a:schemeClr val="bg1"/>
-                </a:solidFill>
-                <a:latin typeface="Arial"/>
-              </a:rPr>
-              <a:t>seguidores</a:t>
-            </a:r>
-            <a:r>
-              <a:rPr sz="1100" b="1" dirty="0">
-                <a:solidFill>
-                  <a:schemeClr val="bg1"/>
-                </a:solidFill>
-                <a:latin typeface="Arial"/>
-              </a:rPr>
-              <a:t> · ratio paid/</a:t>
-            </a:r>
-            <a:r>
-              <a:rPr sz="1100" b="1" dirty="0" err="1">
-                <a:solidFill>
-                  <a:schemeClr val="bg1"/>
-                </a:solidFill>
-                <a:latin typeface="Arial"/>
-              </a:rPr>
-              <a:t>orgánico</a:t>
-            </a:r>
-            <a:endParaRPr lang="en-US" sz="1050" dirty="0">
-              <a:solidFill>
-                <a:schemeClr val="bg1"/>
-              </a:solidFill>
-            </a:endParaRPr>
+              <a:t>KPIs de control TT: retención de video · guardados · comentarios · crecimiento seguidores · ratio paid/orgánico</a:t>
+            </a:r>
+            <a:endParaRPr lang="en-US" sz="1050" dirty="0"/>
           </a:p>
         </p:txBody>
       </p:sp>
@@ -12349,7 +12210,7 @@
         </p:nvSpPr>
         <p:spPr>
           <a:xfrm>
-            <a:off x="804672" y="1851660"/>
+            <a:off x="804672" y="1917294"/>
             <a:ext cx="1499616" cy="182880"/>
           </a:xfrm>
           <a:prstGeom prst="rect">
@@ -12497,7 +12358,7 @@
         </p:nvSpPr>
         <p:spPr>
           <a:xfrm>
-            <a:off x="2743200" y="1854718"/>
+            <a:off x="2743200" y="1844142"/>
             <a:ext cx="1088136" cy="182880"/>
           </a:xfrm>
           <a:prstGeom prst="rect">
@@ -12645,7 +12506,7 @@
         </p:nvSpPr>
         <p:spPr>
           <a:xfrm>
-            <a:off x="4404158" y="1851552"/>
+            <a:off x="4416552" y="1917294"/>
             <a:ext cx="1088136" cy="182880"/>
           </a:xfrm>
           <a:prstGeom prst="rect">
@@ -12793,7 +12654,7 @@
         </p:nvSpPr>
         <p:spPr>
           <a:xfrm>
-            <a:off x="6016752" y="1851552"/>
+            <a:off x="6016752" y="1917294"/>
             <a:ext cx="1499616" cy="182880"/>
           </a:xfrm>
           <a:prstGeom prst="rect">
@@ -14072,7 +13933,7 @@
         </p:nvSpPr>
         <p:spPr>
           <a:xfrm>
-            <a:off x="771833" y="1851808"/>
+            <a:off x="795312" y="1950345"/>
             <a:ext cx="1499616" cy="182880"/>
           </a:xfrm>
           <a:prstGeom prst="rect">
@@ -14220,7 +14081,7 @@
         </p:nvSpPr>
         <p:spPr>
           <a:xfrm>
-            <a:off x="2825965" y="1855223"/>
+            <a:off x="2804350" y="1878045"/>
             <a:ext cx="1499616" cy="182880"/>
           </a:xfrm>
           <a:prstGeom prst="rect">
@@ -14368,7 +14229,7 @@
         </p:nvSpPr>
         <p:spPr>
           <a:xfrm>
-            <a:off x="4838890" y="1853617"/>
+            <a:off x="4850892" y="1875346"/>
             <a:ext cx="1499616" cy="182880"/>
           </a:xfrm>
           <a:prstGeom prst="rect">
@@ -14516,7 +14377,7 @@
         </p:nvSpPr>
         <p:spPr>
           <a:xfrm>
-            <a:off x="6839547" y="1851009"/>
+            <a:off x="6850570" y="1951197"/>
             <a:ext cx="1088136" cy="182880"/>
           </a:xfrm>
           <a:prstGeom prst="rect">
@@ -15873,7 +15734,7 @@
         </p:nvSpPr>
         <p:spPr>
           <a:xfrm>
-            <a:off x="795528" y="1851688"/>
+            <a:off x="804672" y="1950345"/>
             <a:ext cx="1499616" cy="182880"/>
           </a:xfrm>
           <a:prstGeom prst="rect">
@@ -16021,7 +15882,7 @@
         </p:nvSpPr>
         <p:spPr>
           <a:xfrm>
-            <a:off x="2816352" y="1851688"/>
+            <a:off x="2816352" y="1874903"/>
             <a:ext cx="1499616" cy="182880"/>
           </a:xfrm>
           <a:prstGeom prst="rect">
@@ -16169,7 +16030,7 @@
         </p:nvSpPr>
         <p:spPr>
           <a:xfrm>
-            <a:off x="4818888" y="1855914"/>
+            <a:off x="4818888" y="1877193"/>
             <a:ext cx="1499616" cy="182880"/>
           </a:xfrm>
           <a:prstGeom prst="rect">
@@ -16317,7 +16178,7 @@
         </p:nvSpPr>
         <p:spPr>
           <a:xfrm>
-            <a:off x="6821043" y="1849310"/>
+            <a:off x="6830407" y="1948881"/>
             <a:ext cx="1088136" cy="182880"/>
           </a:xfrm>
           <a:prstGeom prst="rect">
